--- a/presentacion.pptx
+++ b/presentacion.pptx
@@ -12,9 +12,10 @@
     <p:sldId id="260" r:id="rId6"/>
     <p:sldId id="261" r:id="rId7"/>
     <p:sldId id="262" r:id="rId8"/>
+    <p:sldId id="263" r:id="rId9"/>
   </p:sldIdLst>
   <p:notesMasterIdLst>
-    <p:notesMasterId r:id="rId9"/>
+    <p:notesMasterId r:id="rId10"/>
   </p:notesMasterIdLst>
   <p:sldSz cx="9144000" cy="5143500"/>
   <p:notesSz cx="5143500" cy="9144000"/>
@@ -118,42 +119,11 @@
   <c:date1904 val="0"/>
   <c:roundedCorners val="1"/>
   <c:chart>
-    <c:title>
-      <c:tx>
-        <c:rich>
-          <a:bodyPr/>
-          <a:lstStyle/>
-          <a:p>
-            <a:pPr>
-              <a:defRPr sz="1300" b="0" i="0" u="none" strike="noStrike">
-                <a:solidFill>
-                  <a:srgbClr val="5B6B72"/>
-                </a:solidFill>
-                <a:latin typeface="Calibri"/>
-              </a:defRPr>
-            </a:pPr>
-            <a:r>
-              <a:rPr sz="1300" b="0" i="0" u="none" strike="noStrike">
-                <a:solidFill>
-                  <a:srgbClr val="5B6B72"/>
-                </a:solidFill>
-                <a:latin typeface="Calibri"/>
-              </a:rPr>
-              <a:t>Ventas por trimestre (datos de ejemplo)</a:t>
-            </a:r>
-          </a:p>
-        </c:rich>
-      </c:tx>
-      <c:layout/>
-      <c:overlay val="0"/>
-    </c:title>
-    <c:autoTitleDeleted val="0"/>
+    <c:autoTitleDeleted val="1"/>
     <c:plotArea>
       <c:layout/>
-      <c:barChart>
-        <c:barDir val="col"/>
-        <c:grouping val="clustered"/>
-        <c:varyColors val="0"/>
+      <c:doughnutChart>
+        <c:varyColors val="1"/>
         <c:ser>
           <c:idx val="0"/>
           <c:order val="0"/>
@@ -163,28 +133,160 @@
               <c:strCache>
                 <c:ptCount val="1"/>
                 <c:pt idx="0">
-                  <c:v>Ventas</c:v>
+                  <c:v>Horas</c:v>
                 </c:pt>
               </c:strCache>
             </c:strRef>
           </c:tx>
           <c:spPr>
             <a:solidFill>
-              <a:srgbClr val="1C7C7D"/>
+              <a:schemeClr val="accent1"/>
             </a:solidFill>
+            <a:ln w="9525" cap="flat">
+              <a:solidFill>
+                <a:srgbClr val="F9F9F9"/>
+              </a:solidFill>
+              <a:prstDash val="solid"/>
+              <a:round/>
+            </a:ln>
             <a:effectLst/>
           </c:spPr>
-          <c:invertIfNegative val="0"/>
+          <c:dPt>
+            <c:idx val="0"/>
+            <c:bubble3D val="0"/>
+            <c:spPr>
+              <a:solidFill>
+                <a:srgbClr val="5C5A57"/>
+              </a:solidFill>
+              <a:ln w="25400" cap="flat">
+                <a:solidFill>
+                  <a:srgbClr val="12100E"/>
+                </a:solidFill>
+                <a:prstDash val="solid"/>
+                <a:round/>
+              </a:ln>
+              <a:effectLst/>
+            </c:spPr>
+          </c:dPt>
+          <c:dPt>
+            <c:idx val="1"/>
+            <c:bubble3D val="0"/>
+            <c:spPr>
+              <a:solidFill>
+                <a:srgbClr val="5B9BFF"/>
+              </a:solidFill>
+              <a:ln w="25400" cap="flat">
+                <a:solidFill>
+                  <a:srgbClr val="12100E"/>
+                </a:solidFill>
+                <a:prstDash val="solid"/>
+                <a:round/>
+              </a:ln>
+              <a:effectLst/>
+            </c:spPr>
+          </c:dPt>
+          <c:dPt>
+            <c:idx val="2"/>
+            <c:bubble3D val="0"/>
+            <c:spPr>
+              <a:solidFill>
+                <a:srgbClr val="4CAF50"/>
+              </a:solidFill>
+              <a:ln w="25400" cap="flat">
+                <a:solidFill>
+                  <a:srgbClr val="12100E"/>
+                </a:solidFill>
+                <a:prstDash val="solid"/>
+                <a:round/>
+              </a:ln>
+              <a:effectLst/>
+            </c:spPr>
+          </c:dPt>
           <c:dLbls>
-            <c:numFmt formatCode="#,##0" sourceLinked="0"/>
+            <c:dLbl>
+              <c:idx val="0"/>
+              <c:numFmt formatCode="0&quot; h&quot;" sourceLinked="0"/>
+              <c:spPr/>
+              <c:txPr>
+                <a:bodyPr/>
+                <a:lstStyle/>
+                <a:p>
+                  <a:pPr>
+                    <a:defRPr sz="1400" b="1" i="0" u="none" strike="noStrike">
+                      <a:solidFill>
+                        <a:srgbClr val="FFFFFF"/>
+                      </a:solidFill>
+                      <a:latin typeface="Arial"/>
+                    </a:defRPr>
+                  </a:pPr>
+                </a:p>
+              </c:txPr>
+              <c:showLegendKey val="0"/>
+              <c:showVal val="1"/>
+              <c:showCatName val="0"/>
+              <c:showSerName val="0"/>
+              <c:showPercent val="0"/>
+              <c:showBubbleSize val="0"/>
+            </c:dLbl>
+            <c:dLbl>
+              <c:idx val="1"/>
+              <c:numFmt formatCode="0&quot; h&quot;" sourceLinked="0"/>
+              <c:spPr/>
+              <c:txPr>
+                <a:bodyPr/>
+                <a:lstStyle/>
+                <a:p>
+                  <a:pPr>
+                    <a:defRPr sz="1400" b="1" i="0" u="none" strike="noStrike">
+                      <a:solidFill>
+                        <a:srgbClr val="FFFFFF"/>
+                      </a:solidFill>
+                      <a:latin typeface="Arial"/>
+                    </a:defRPr>
+                  </a:pPr>
+                </a:p>
+              </c:txPr>
+              <c:showLegendKey val="0"/>
+              <c:showVal val="1"/>
+              <c:showCatName val="0"/>
+              <c:showSerName val="0"/>
+              <c:showPercent val="0"/>
+              <c:showBubbleSize val="0"/>
+            </c:dLbl>
+            <c:dLbl>
+              <c:idx val="2"/>
+              <c:numFmt formatCode="0&quot; h&quot;" sourceLinked="0"/>
+              <c:spPr/>
+              <c:txPr>
+                <a:bodyPr/>
+                <a:lstStyle/>
+                <a:p>
+                  <a:pPr>
+                    <a:defRPr sz="1400" b="1" i="0" u="none" strike="noStrike">
+                      <a:solidFill>
+                        <a:srgbClr val="FFFFFF"/>
+                      </a:solidFill>
+                      <a:latin typeface="Arial"/>
+                    </a:defRPr>
+                  </a:pPr>
+                </a:p>
+              </c:txPr>
+              <c:showLegendKey val="0"/>
+              <c:showVal val="1"/>
+              <c:showCatName val="0"/>
+              <c:showSerName val="0"/>
+              <c:showPercent val="0"/>
+              <c:showBubbleSize val="0"/>
+            </c:dLbl>
+            <c:numFmt formatCode="0&quot; h&quot;" sourceLinked="0"/>
             <c:txPr>
               <a:bodyPr/>
               <a:lstStyle/>
               <a:p>
                 <a:pPr>
-                  <a:defRPr b="0" i="0" strike="noStrike" sz="1200" u="none">
+                  <a:defRPr sz="1800" b="1" i="0" u="none" strike="noStrike">
                     <a:solidFill>
-                      <a:srgbClr val="1F2D33"/>
+                      <a:srgbClr val="000000"/>
                     </a:solidFill>
                     <a:latin typeface="Arial"/>
                   </a:defRPr>
@@ -192,178 +294,51 @@
               </a:p>
             </c:txPr>
             <c:showLegendKey val="0"/>
-            <c:showVal val="1"/>
-            <c:showCatName val="0"/>
+            <c:showVal val="0"/>
+            <c:showCatName val="1"/>
             <c:showSerName val="0"/>
-            <c:showPercent val="0"/>
+            <c:showPercent val="1"/>
             <c:showBubbleSize val="0"/>
             <c:showLeaderLines val="0"/>
           </c:dLbls>
           <c:cat>
-            <c:multiLvlStrRef>
-              <c:f>Sheet1!$A$2:$A$5</c:f>
-              <c:multiLvlStrCache>
-                <c:ptCount val="4"/>
-                <c:lvl>
-                  <c:pt idx="0">
-                    <c:v>T1</c:v>
-                  </c:pt>
-                  <c:pt idx="1">
-                    <c:v>T2</c:v>
-                  </c:pt>
-                  <c:pt idx="2">
-                    <c:v>T3</c:v>
-                  </c:pt>
-                  <c:pt idx="3">
-                    <c:v>T4</c:v>
-                  </c:pt>
-                </c:lvl>
-              </c:multiLvlStrCache>
-            </c:multiLvlStrRef>
+            <c:strRef>
+              <c:f>Sheet1!$A$2:$A$4</c:f>
+              <c:strCache>
+                <c:ptCount val="3"/>
+                <c:pt idx="0">
+                  <c:v>Noches y ausencias</c:v>
+                </c:pt>
+                <c:pt idx="1">
+                  <c:v>Trabajo activo</c:v>
+                </c:pt>
+                <c:pt idx="2">
+                  <c:v>Renders</c:v>
+                </c:pt>
+              </c:strCache>
+            </c:strRef>
           </c:cat>
           <c:val>
             <c:numRef>
-              <c:f>Sheet1!$B$2:$B$5</c:f>
+              <c:f>Sheet1!$B$2:$B$4</c:f>
               <c:numCache>
-                <c:formatCode>General</c:formatCode>
-                <c:ptCount val="4"/>
+                <c:ptCount val="3"/>
                 <c:pt idx="0">
-                  <c:v>120</c:v>
+                  <c:v>26</c:v>
                 </c:pt>
                 <c:pt idx="1">
-                  <c:v>150</c:v>
+                  <c:v>9</c:v>
                 </c:pt>
                 <c:pt idx="2">
-                  <c:v>185</c:v>
-                </c:pt>
-                <c:pt idx="3">
-                  <c:v>240</c:v>
+                  <c:v>15</c:v>
                 </c:pt>
               </c:numCache>
             </c:numRef>
           </c:val>
         </c:ser>
-        <c:dLbls>
-          <c:numFmt formatCode="#,##0" sourceLinked="0"/>
-          <c:txPr>
-            <a:bodyPr/>
-            <a:lstStyle/>
-            <a:p>
-              <a:pPr>
-                <a:defRPr b="0" i="0" strike="noStrike" sz="1200" u="none">
-                  <a:solidFill>
-                    <a:srgbClr val="1F2D33"/>
-                  </a:solidFill>
-                  <a:latin typeface="Arial"/>
-                </a:defRPr>
-              </a:pPr>
-            </a:p>
-          </c:txPr>
-          <c:showLegendKey val="0"/>
-          <c:showVal val="1"/>
-          <c:showCatName val="0"/>
-          <c:showSerName val="0"/>
-          <c:showPercent val="0"/>
-          <c:showBubbleSize val="0"/>
-          <c:showLeaderLines val="0"/>
-        </c:dLbls>
-        <c:gapWidth val="60"/>
-        <c:overlap val="0"/>
-        <c:axId val="2094734554"/>
-        <c:axId val="2094734552"/>
-        <c:axId val="2094734556"/>
-      </c:barChart>
-      <c:catAx>
-        <c:axId val="2094734554"/>
-        <c:scaling>
-          <c:orientation val="minMax"/>
-        </c:scaling>
-        <c:delete val="0"/>
-        <c:axPos val="b"/>
-        <c:numFmt formatCode="General" sourceLinked="1"/>
-        <c:majorTickMark val="out"/>
-        <c:minorTickMark val="none"/>
-        <c:tickLblPos val="low"/>
-        <c:spPr>
-          <a:ln w="12700" cap="flat">
-            <a:solidFill>
-              <a:srgbClr val="888888"/>
-            </a:solidFill>
-            <a:prstDash val="solid"/>
-            <a:round/>
-          </a:ln>
-        </c:spPr>
-        <c:txPr>
-          <a:bodyPr/>
-          <a:lstStyle/>
-          <a:p>
-            <a:pPr>
-              <a:defRPr sz="1200" b="0" i="0" u="none" strike="noStrike">
-                <a:solidFill>
-                  <a:srgbClr val="5B6B72"/>
-                </a:solidFill>
-                <a:latin typeface="Calibri"/>
-              </a:defRPr>
-            </a:pPr>
-            <a:endParaRPr lang="en-US"/>
-          </a:p>
-        </c:txPr>
-        <c:crossAx val="2094734552"/>
-        <c:crosses val="autoZero"/>
-        <c:auto val="1"/>
-        <c:lblAlgn val="ctr"/>
-        <c:noMultiLvlLbl val="1"/>
-      </c:catAx>
-      <c:valAx>
-        <c:axId val="2094734552"/>
-        <c:scaling>
-          <c:orientation val="minMax"/>
-        </c:scaling>
-        <c:delete val="0"/>
-        <c:axPos val="l"/>
-        <c:majorGridlines>
-          <c:spPr>
-            <a:ln w="6350" cap="flat">
-              <a:solidFill>
-                <a:srgbClr val="E2E8EA"/>
-              </a:solidFill>
-              <a:prstDash val="solid"/>
-              <a:round/>
-            </a:ln>
-          </c:spPr>
-        </c:majorGridlines>
-        <c:numFmt formatCode="General" sourceLinked="0"/>
-        <c:majorTickMark val="out"/>
-        <c:minorTickMark val="none"/>
-        <c:tickLblPos val="nextTo"/>
-        <c:spPr>
-          <a:ln w="12700" cap="flat">
-            <a:solidFill>
-              <a:srgbClr val="888888"/>
-            </a:solidFill>
-            <a:prstDash val="solid"/>
-            <a:round/>
-          </a:ln>
-        </c:spPr>
-        <c:txPr>
-          <a:bodyPr/>
-          <a:lstStyle/>
-          <a:p>
-            <a:pPr>
-              <a:defRPr sz="1200" b="0" i="0" u="none" strike="noStrike">
-                <a:solidFill>
-                  <a:srgbClr val="5B6B72"/>
-                </a:solidFill>
-                <a:latin typeface="Calibri"/>
-              </a:defRPr>
-            </a:pPr>
-            <a:endParaRPr lang="en-US"/>
-          </a:p>
-        </c:txPr>
-        <c:crossAx val="2094734554"/>
-        <c:crosses val="autoZero"/>
-        <c:crossBetween val="between"/>
-      </c:valAx>
+        <c:firstSliceAng val="0"/>
+        <c:holeSize val="55"/>
+      </c:doughnutChart>
       <c:spPr>
         <a:noFill/>
         <a:ln>
@@ -372,6 +347,26 @@
         <a:effectLst/>
       </c:spPr>
     </c:plotArea>
+    <c:legend>
+      <c:legendPos val="b"/>
+      <c:overlay val="0"/>
+      <c:txPr>
+        <a:bodyPr/>
+        <a:lstStyle/>
+        <a:p>
+          <a:pPr>
+            <a:defRPr sz="1200">
+              <a:solidFill>
+                <a:srgbClr val="D9D4CC"/>
+              </a:solidFill>
+              <a:latin typeface="Calibri"/>
+              <a:cs typeface="Calibri"/>
+            </a:defRPr>
+          </a:pPr>
+          <a:endParaRPr lang="en-US"/>
+        </a:p>
+      </c:txPr>
+    </c:legend>
     <c:plotVisOnly val="1"/>
     <c:dispBlanksAs val="span"/>
   </c:chart>
@@ -783,7 +778,7 @@
           <a:p>
             <a:r>
               <a:rPr lang="en-US" dirty="0"/>
-              <a:t>Portada. Reemplaza el nombre de la empresa y el subtítulo.</a:t>
+              <a:t>Proyecto: un estudio de televisión deportiva modelado, iluminado y renderizado en Blender, controlado desde Claude mediante el MCP de Blender.</a:t>
             </a:r>
             <a:endParaRPr lang="en-US" dirty="0"/>
           </a:p>
@@ -871,7 +866,7 @@
           <a:p>
             <a:r>
               <a:rPr lang="en-US" dirty="0"/>
-              <a:t>Presenta a la empresa. Las cifras son de ejemplo: cámbialas por las reales.</a:t>
+              <a:t>El corazón del set: mesa de presentadores, muro LED con gráficas de fútbol, iluminación y cámaras.</a:t>
             </a:r>
             <a:endParaRPr lang="en-US" dirty="0"/>
           </a:p>
@@ -959,7 +954,7 @@
           <a:p>
             <a:r>
               <a:rPr lang="en-US" dirty="0"/>
-              <a:t>Contrasta el problema con la oportunidad que ve la empresa.</a:t>
+              <a:t>Sala de control con muro de pantallas y redacción abierta con puestos de trabajo.</a:t>
             </a:r>
             <a:endParaRPr lang="en-US" dirty="0"/>
           </a:p>
@@ -1047,7 +1042,7 @@
           <a:p>
             <a:r>
               <a:rPr lang="en-US" dirty="0"/>
-              <a:t>Tres líneas de producto o servicio. Cambia títulos y descripciones.</a:t>
+              <a:t>Plató, mesa, truss de luces, cicloramas, sala de control, zona de descanso, redacción, sala de servidores, cartel ON AIR, pantalla táctica y otra sala de descanso.</a:t>
             </a:r>
             <a:endParaRPr lang="en-US" dirty="0"/>
           </a:p>
@@ -1135,7 +1130,7 @@
           <a:p>
             <a:r>
               <a:rPr lang="en-US" dirty="0"/>
-              <a:t>Los datos del gráfico y el porcentaje son ejemplos. Edita el gráfico con clic derecho &gt; Editar datos.</a:t>
+              <a:t>26 h de noches y ausencias + 9 h de trabajo activo + 14–15 h de renders = 50 h de reloj.</a:t>
             </a:r>
             <a:endParaRPr lang="en-US" dirty="0"/>
           </a:p>
@@ -1223,7 +1218,7 @@
           <a:p>
             <a:r>
               <a:rPr lang="en-US" dirty="0"/>
-              <a:t>Cuatro hitos. Ajusta fechas y descripciones.</a:t>
+              <a:t>Valores tal como se reportaron. El importe de uso extra es de la cuenta y no se puede atribuir a este proyecto.</a:t>
             </a:r>
             <a:endParaRPr lang="en-US" dirty="0"/>
           </a:p>
@@ -1311,7 +1306,7 @@
           <a:p>
             <a:r>
               <a:rPr lang="en-US" dirty="0"/>
-              <a:t>Cierre. Coloca tus datos de contacto reales.</a:t>
+              <a:t>335 M de 339 M contados (1,3 + 2,7 + 335) son lecturas de caché, ≈ 99 %.</a:t>
             </a:r>
             <a:endParaRPr lang="en-US" dirty="0"/>
           </a:p>
@@ -1335,6 +1330,94 @@
             <a:fld id="{F7021451-1387-4CA6-816F-3879F97B5CBC}" type="slidenum">
               <a:rPr lang="en-US"/>
               <a:t>7</a:t>
+            </a:fld>
+            <a:endParaRPr lang="en-US"/>
+          </a:p>
+        </p:txBody>
+      </p:sp>
+    </p:spTree>
+    <p:extLst>
+      <p:ext uri="{BB962C8B-B14F-4D97-AF65-F5344CB8AC3E}">
+        <p14:creationId xmlns:p14="http://schemas.microsoft.com/office/powerpoint/2010/main" val="1024086991"/>
+      </p:ext>
+    </p:extLst>
+  </p:cSld>
+  <p:clrMapOvr>
+    <a:masterClrMapping/>
+  </p:clrMapOvr>
+</p:notes>
+</file>
+
+<file path=ppt/notesSlides/notesSlide8.xml><?xml version="1.0" encoding="utf-8"?>
+<p:notes xmlns:a="http://schemas.openxmlformats.org/drawingml/2006/main" xmlns:r="http://schemas.openxmlformats.org/officeDocument/2006/relationships" xmlns:p="http://schemas.openxmlformats.org/presentationml/2006/main">
+  <p:cSld>
+    <p:spTree>
+      <p:nvGrpSpPr>
+        <p:cNvPr id="1" name=""/>
+        <p:cNvGrpSpPr/>
+        <p:nvPr/>
+      </p:nvGrpSpPr>
+      <p:grpSpPr>
+        <a:xfrm>
+          <a:off x="0" y="0"/>
+          <a:ext cx="0" cy="0"/>
+          <a:chOff x="0" y="0"/>
+          <a:chExt cx="0" cy="0"/>
+        </a:xfrm>
+      </p:grpSpPr>
+      <p:sp>
+        <p:nvSpPr>
+          <p:cNvPr id="2" name="Slide Image Placeholder 1"/>
+          <p:cNvSpPr>
+            <a:spLocks noGrp="1" noRot="1" noChangeAspect="1"/>
+          </p:cNvSpPr>
+          <p:nvPr>
+            <p:ph type="sldImg"/>
+          </p:nvPr>
+        </p:nvSpPr>
+        <p:spPr/>
+      </p:sp>
+      <p:sp>
+        <p:nvSpPr>
+          <p:cNvPr id="3" name="Notes Placeholder 2"/>
+          <p:cNvSpPr>
+            <a:spLocks noGrp="1"/>
+          </p:cNvSpPr>
+          <p:nvPr>
+            <p:ph type="body" idx="1"/>
+          </p:nvPr>
+        </p:nvSpPr>
+        <p:spPr/>
+        <p:txBody>
+          <a:bodyPr/>
+          <a:lstStyle/>
+          <a:p>
+            <a:r>
+              <a:rPr lang="en-US" dirty="0"/>
+              <a:t>Cierre con las tres conclusiones del proyecto.</a:t>
+            </a:r>
+            <a:endParaRPr lang="en-US" dirty="0"/>
+          </a:p>
+        </p:txBody>
+      </p:sp>
+      <p:sp>
+        <p:nvSpPr>
+          <p:cNvPr id="4" name="Slide Number Placeholder 3"/>
+          <p:cNvSpPr>
+            <a:spLocks noGrp="1"/>
+          </p:cNvSpPr>
+          <p:nvPr>
+            <p:ph type="sldNum" sz="quarter" idx="10"/>
+          </p:nvPr>
+        </p:nvSpPr>
+        <p:spPr/>
+        <p:txBody>
+          <a:bodyPr/>
+          <a:lstStyle/>
+          <a:p>
+            <a:fld id="{F7021451-1387-4CA6-816F-3879F97B5CBC}" type="slidenum">
+              <a:rPr lang="en-US"/>
+              <a:t>8</a:t>
             </a:fld>
             <a:endParaRPr lang="en-US"/>
           </a:p>
@@ -1666,7 +1749,7 @@
     <p:bg>
       <p:bgPr>
         <a:solidFill>
-          <a:srgbClr val="0F2F3A"/>
+          <a:srgbClr val="12100E"/>
         </a:solidFill>
       </p:bgPr>
     </p:bg>
@@ -1684,59 +1767,9 @@
           <a:chExt cx="0" cy="0"/>
         </a:xfrm>
       </p:grpSpPr>
-      <p:sp>
-        <p:nvSpPr>
-          <p:cNvPr id="2" name="Shape 0"/>
-          <p:cNvSpPr/>
-          <p:nvPr/>
-        </p:nvSpPr>
-        <p:spPr>
-          <a:xfrm>
-            <a:off x="5852160" y="548640"/>
-            <a:ext cx="3108960" cy="3108960"/>
-          </a:xfrm>
-          <a:prstGeom prst="ellipse">
-            <a:avLst/>
-          </a:prstGeom>
-          <a:solidFill>
-            <a:srgbClr val="1C7C7D"/>
-          </a:solidFill>
-          <a:ln w="12700">
-            <a:solidFill>
-              <a:srgbClr val="1C7C7D"/>
-            </a:solidFill>
-            <a:prstDash val="solid"/>
-          </a:ln>
-        </p:spPr>
-      </p:sp>
-      <p:sp>
-        <p:nvSpPr>
-          <p:cNvPr id="3" name="Shape 1"/>
-          <p:cNvSpPr/>
-          <p:nvPr/>
-        </p:nvSpPr>
-        <p:spPr>
-          <a:xfrm>
-            <a:off x="5212080" y="3017520"/>
-            <a:ext cx="1371600" cy="1371600"/>
-          </a:xfrm>
-          <a:prstGeom prst="ellipse">
-            <a:avLst/>
-          </a:prstGeom>
-          <a:solidFill>
-            <a:srgbClr val="F28F3B"/>
-          </a:solidFill>
-          <a:ln w="12700">
-            <a:solidFill>
-              <a:srgbClr val="F28F3B"/>
-            </a:solidFill>
-            <a:prstDash val="solid"/>
-          </a:ln>
-        </p:spPr>
-      </p:sp>
       <p:pic>
         <p:nvPicPr>
-          <p:cNvPr id="4" name="Image 0" descr="preencoded.png">    </p:cNvPr>
+          <p:cNvPr id="2" name="Image 0" descr="/tmp/claude-0/-home-user-other/d8041478-dfcc-5ca6-9236-09cb61fbd919/scratchpad/img/bg4.jpg">    </p:cNvPr>
           <p:cNvPicPr>
             <a:picLocks noChangeAspect="1"/>
           </p:cNvPicPr>
@@ -1750,8 +1783,8 @@
         </p:blipFill>
         <p:spPr>
           <a:xfrm>
-            <a:off x="6858000" y="1554480"/>
-            <a:ext cx="1097280" cy="1097280"/>
+            <a:off x="0" y="0"/>
+            <a:ext cx="9144000" cy="5143500"/>
           </a:xfrm>
           <a:prstGeom prst="rect">
             <a:avLst/>
@@ -1760,14 +1793,41 @@
       </p:pic>
       <p:sp>
         <p:nvSpPr>
-          <p:cNvPr id="5" name="Text 2"/>
+          <p:cNvPr id="3" name="Shape 0"/>
+          <p:cNvSpPr/>
+          <p:nvPr/>
+        </p:nvSpPr>
+        <p:spPr>
+          <a:xfrm>
+            <a:off x="548640" y="960120"/>
+            <a:ext cx="1188720" cy="329184"/>
+          </a:xfrm>
+          <a:prstGeom prst="roundRect">
+            <a:avLst>
+              <a:gd name="adj" fmla="val 22222"/>
+            </a:avLst>
+          </a:prstGeom>
+          <a:solidFill>
+            <a:srgbClr val="E5484D"/>
+          </a:solidFill>
+          <a:ln w="12700">
+            <a:solidFill>
+              <a:srgbClr val="E5484D"/>
+            </a:solidFill>
+            <a:prstDash val="solid"/>
+          </a:ln>
+        </p:spPr>
+      </p:sp>
+      <p:sp>
+        <p:nvSpPr>
+          <p:cNvPr id="4" name="Text 1"/>
           <p:cNvSpPr txBox="1"/>
           <p:nvPr/>
         </p:nvSpPr>
         <p:spPr>
           <a:xfrm>
-            <a:off x="548640" y="1234440"/>
-            <a:ext cx="4572000" cy="365760"/>
+            <a:off x="548640" y="960120"/>
+            <a:ext cx="1188720" cy="329184"/>
           </a:xfrm>
           <a:prstGeom prst="rect">
             <a:avLst/>
@@ -1779,34 +1839,34 @@
           <a:bodyPr wrap="square" lIns="0" tIns="0" rIns="0" bIns="0" rtlCol="0" anchor="ctr"/>
           <a:lstStyle/>
           <a:p>
-            <a:pPr indent="0" marL="0">
-              <a:buNone/>
-            </a:pPr>
-            <a:r>
-              <a:rPr lang="en-US" sz="1400" b="1" spc="400" kern="0" dirty="0">
-                <a:solidFill>
-                  <a:srgbClr val="F28F3B"/>
+            <a:pPr algn="ctr" indent="0" marL="0">
+              <a:buNone/>
+            </a:pPr>
+            <a:r>
+              <a:rPr lang="en-US" sz="1300" b="1" spc="300" kern="0" dirty="0">
+                <a:solidFill>
+                  <a:srgbClr val="FFFFFF"/>
                 </a:solidFill>
                 <a:latin typeface="Calibri" pitchFamily="34" charset="0"/>
                 <a:ea typeface="Calibri" pitchFamily="34" charset="-122"/>
                 <a:cs typeface="Calibri" pitchFamily="34" charset="-120"/>
               </a:rPr>
-              <a:t>PRESENTACIÓN CORPORATIVA</a:t>
-            </a:r>
-            <a:endParaRPr lang="en-US" sz="1400" dirty="0"/>
-          </a:p>
-        </p:txBody>
-      </p:sp>
-      <p:sp>
-        <p:nvSpPr>
-          <p:cNvPr id="6" name="Text 3"/>
+              <a:t>ON AIR</a:t>
+            </a:r>
+            <a:endParaRPr lang="en-US" sz="1300" dirty="0"/>
+          </a:p>
+        </p:txBody>
+      </p:sp>
+      <p:sp>
+        <p:nvSpPr>
+          <p:cNvPr id="5" name="Text 2"/>
           <p:cNvSpPr txBox="1"/>
           <p:nvPr/>
         </p:nvSpPr>
         <p:spPr>
           <a:xfrm>
-            <a:off x="548640" y="1645920"/>
-            <a:ext cx="4846320" cy="1280160"/>
+            <a:off x="548640" y="1463040"/>
+            <a:ext cx="4754880" cy="1554480"/>
           </a:xfrm>
           <a:prstGeom prst="rect">
             <a:avLst/>
@@ -1824,13 +1884,13 @@
             <a:r>
               <a:rPr lang="en-US" sz="4000" b="1" dirty="0">
                 <a:solidFill>
-                  <a:srgbClr val="FFFFFF"/>
+                  <a:srgbClr val="F2EEE8"/>
                 </a:solidFill>
                 <a:latin typeface="Cambria" pitchFamily="34" charset="0"/>
                 <a:ea typeface="Cambria" pitchFamily="34" charset="-122"/>
                 <a:cs typeface="Cambria" pitchFamily="34" charset="-120"/>
               </a:rPr>
-              <a:t>[Nombre de la empresa]</a:t>
+              <a:t>Estudio de TV deportiva en 3D</a:t>
             </a:r>
             <a:endParaRPr lang="en-US" sz="4000" dirty="0"/>
           </a:p>
@@ -1838,14 +1898,14 @@
       </p:sp>
       <p:sp>
         <p:nvSpPr>
-          <p:cNvPr id="7" name="Text 4"/>
+          <p:cNvPr id="6" name="Text 3"/>
           <p:cNvSpPr txBox="1"/>
           <p:nvPr/>
         </p:nvSpPr>
         <p:spPr>
           <a:xfrm>
-            <a:off x="548640" y="3017520"/>
-            <a:ext cx="4389120" cy="731520"/>
+            <a:off x="548640" y="3154680"/>
+            <a:ext cx="4206240" cy="822960"/>
           </a:xfrm>
           <a:prstGeom prst="rect">
             <a:avLst/>
@@ -1863,13 +1923,13 @@
             <a:r>
               <a:rPr lang="en-US" sz="1800" dirty="0">
                 <a:solidFill>
-                  <a:srgbClr val="CADCE0"/>
+                  <a:srgbClr val="D9D4CC"/>
                 </a:solidFill>
                 <a:latin typeface="Calibri" pitchFamily="34" charset="0"/>
                 <a:ea typeface="Calibri" pitchFamily="34" charset="-122"/>
                 <a:cs typeface="Calibri" pitchFamily="34" charset="-120"/>
               </a:rPr>
-              <a:t>Quiénes somos, qué hacemos y hacia dónde vamos</a:t>
+              <a:t>Un set de televisión completo, construido con Claude a través del MCP de Blender</a:t>
             </a:r>
             <a:endParaRPr lang="en-US" sz="1800" dirty="0"/>
           </a:p>
@@ -1877,14 +1937,14 @@
       </p:sp>
       <p:sp>
         <p:nvSpPr>
-          <p:cNvPr id="8" name="Text 5"/>
+          <p:cNvPr id="7" name="Text 4"/>
           <p:cNvSpPr txBox="1"/>
           <p:nvPr/>
         </p:nvSpPr>
         <p:spPr>
           <a:xfrm>
             <a:off x="548640" y="4297680"/>
-            <a:ext cx="2743200" cy="365760"/>
+            <a:ext cx="3657600" cy="365760"/>
           </a:xfrm>
           <a:prstGeom prst="rect">
             <a:avLst/>
@@ -1902,13 +1962,13 @@
             <a:r>
               <a:rPr lang="en-US" sz="1400" dirty="0">
                 <a:solidFill>
-                  <a:srgbClr val="8FB3BA"/>
+                  <a:srgbClr val="A39B90"/>
                 </a:solidFill>
                 <a:latin typeface="Calibri" pitchFamily="34" charset="0"/>
                 <a:ea typeface="Calibri" pitchFamily="34" charset="-122"/>
                 <a:cs typeface="Calibri" pitchFamily="34" charset="-120"/>
               </a:rPr>
-              <a:t>2026</a:t>
+              <a:t>28 – 30 de septiembre de 2026</a:t>
             </a:r>
             <a:endParaRPr lang="en-US" sz="1400" dirty="0"/>
           </a:p>
@@ -1928,7 +1988,7 @@
     <p:bg>
       <p:bgPr>
         <a:solidFill>
-          <a:srgbClr val="FFFFFF"/>
+          <a:srgbClr val="12100E"/>
         </a:solidFill>
       </p:bgPr>
     </p:bg>
@@ -1946,16 +2006,40 @@
           <a:chExt cx="0" cy="0"/>
         </a:xfrm>
       </p:grpSpPr>
-      <p:sp>
-        <p:nvSpPr>
-          <p:cNvPr id="2" name="Text 0"/>
+      <p:pic>
+        <p:nvPicPr>
+          <p:cNvPr id="2" name="Image 0" descr="/tmp/claude-0/-home-user-other/d8041478-dfcc-5ca6-9236-09cb61fbd919/scratchpad/img/crop5.jpg">    </p:cNvPr>
+          <p:cNvPicPr>
+            <a:picLocks noChangeAspect="1"/>
+          </p:cNvPicPr>
+          <p:nvPr/>
+        </p:nvPicPr>
+        <p:blipFill>
+          <a:blip r:embed="rId1"/>
+          <a:stretch>
+            <a:fillRect/>
+          </a:stretch>
+        </p:blipFill>
+        <p:spPr>
+          <a:xfrm>
+            <a:off x="4023360" y="0"/>
+            <a:ext cx="5120640" cy="5143500"/>
+          </a:xfrm>
+          <a:prstGeom prst="rect">
+            <a:avLst/>
+          </a:prstGeom>
+        </p:spPr>
+      </p:pic>
+      <p:sp>
+        <p:nvSpPr>
+          <p:cNvPr id="3" name="Text 0"/>
           <p:cNvSpPr txBox="1"/>
           <p:nvPr/>
         </p:nvSpPr>
         <p:spPr>
           <a:xfrm>
             <a:off x="457200" y="320040"/>
-            <a:ext cx="8229600" cy="731520"/>
+            <a:ext cx="8229600" cy="640080"/>
           </a:xfrm>
           <a:prstGeom prst="rect">
             <a:avLst/>
@@ -1973,13 +2057,13 @@
             <a:r>
               <a:rPr lang="en-US" sz="3400" b="1" dirty="0">
                 <a:solidFill>
-                  <a:srgbClr val="0F2F3A"/>
+                  <a:srgbClr val="F2EEE8"/>
                 </a:solidFill>
                 <a:latin typeface="Cambria" pitchFamily="34" charset="0"/>
                 <a:ea typeface="Cambria" pitchFamily="34" charset="-122"/>
                 <a:cs typeface="Cambria" pitchFamily="34" charset="-120"/>
               </a:rPr>
-              <a:t>Quiénes somos</a:t>
+              <a:t>El plató</a:t>
             </a:r>
             <a:endParaRPr lang="en-US" sz="3400" dirty="0"/>
           </a:p>
@@ -1987,14 +2071,63 @@
       </p:sp>
       <p:sp>
         <p:nvSpPr>
-          <p:cNvPr id="3" name="Text 1"/>
+          <p:cNvPr id="4" name="Shape 1"/>
+          <p:cNvSpPr/>
+          <p:nvPr/>
+        </p:nvSpPr>
+        <p:spPr>
+          <a:xfrm>
+            <a:off x="457200" y="1234440"/>
+            <a:ext cx="548640" cy="548640"/>
+          </a:xfrm>
+          <a:prstGeom prst="ellipse">
+            <a:avLst/>
+          </a:prstGeom>
+          <a:solidFill>
+            <a:srgbClr val="5B9BFF"/>
+          </a:solidFill>
+          <a:ln w="12700">
+            <a:solidFill>
+              <a:srgbClr val="5B9BFF"/>
+            </a:solidFill>
+            <a:prstDash val="solid"/>
+          </a:ln>
+        </p:spPr>
+      </p:sp>
+      <p:pic>
+        <p:nvPicPr>
+          <p:cNvPr id="5" name="Image 1" descr="preencoded.png">    </p:cNvPr>
+          <p:cNvPicPr>
+            <a:picLocks noChangeAspect="1"/>
+          </p:cNvPicPr>
+          <p:nvPr/>
+        </p:nvPicPr>
+        <p:blipFill>
+          <a:blip r:embed="rId2"/>
+          <a:stretch>
+            <a:fillRect/>
+          </a:stretch>
+        </p:blipFill>
+        <p:spPr>
+          <a:xfrm>
+            <a:off x="605333" y="1382573"/>
+            <a:ext cx="252374" cy="252374"/>
+          </a:xfrm>
+          <a:prstGeom prst="rect">
+            <a:avLst/>
+          </a:prstGeom>
+        </p:spPr>
+      </p:pic>
+      <p:sp>
+        <p:nvSpPr>
+          <p:cNvPr id="6" name="Text 2"/>
           <p:cNvSpPr txBox="1"/>
           <p:nvPr/>
         </p:nvSpPr>
         <p:spPr>
           <a:xfrm>
-            <a:off x="457200" y="1371600"/>
-            <a:ext cx="4480560" cy="3108960"/>
+            <a:off x="1188720" y="1216152"/>
+            <a:ext cx="2743200" cy="292608"/>
           </a:xfrm>
           <a:prstGeom prst="rect">
             <a:avLst/>
@@ -2007,121 +2140,248 @@
           <a:lstStyle/>
           <a:p>
             <a:pPr indent="0" marL="0">
-              <a:spcAft>
-                <a:spcPts val="1400"/>
-              </a:spcAft>
-              <a:buNone/>
-            </a:pPr>
-            <a:r>
-              <a:rPr lang="en-US" sz="1800" dirty="0">
-                <a:solidFill>
-                  <a:srgbClr val="1F2D33"/>
+              <a:buNone/>
+            </a:pPr>
+            <a:r>
+              <a:rPr lang="en-US" sz="1500" b="1" dirty="0">
+                <a:solidFill>
+                  <a:srgbClr val="F2EEE8"/>
                 </a:solidFill>
                 <a:latin typeface="Calibri" pitchFamily="34" charset="0"/>
                 <a:ea typeface="Calibri" pitchFamily="34" charset="-122"/>
                 <a:cs typeface="Calibri" pitchFamily="34" charset="-120"/>
               </a:rPr>
-              <a:t>Somos una empresa dedicada a [describe tu actividad principal].</a:t>
-            </a:r>
-            <a:endParaRPr lang="en-US" sz="1800" dirty="0"/>
-          </a:p>
-          <a:p>
-            <a:pPr marL="342900" indent="-342900">
-              <a:spcAft>
-                <a:spcPts val="1000"/>
-              </a:spcAft>
-              <a:buSzPct val="100000"/>
-              <a:buChar char="•"/>
-            </a:pPr>
-            <a:r>
-              <a:rPr lang="en-US" sz="1800" dirty="0">
-                <a:solidFill>
-                  <a:srgbClr val="1F2D33"/>
+              <a:t>Mesa curva</a:t>
+            </a:r>
+            <a:endParaRPr lang="en-US" sz="1500" dirty="0"/>
+          </a:p>
+        </p:txBody>
+      </p:sp>
+      <p:sp>
+        <p:nvSpPr>
+          <p:cNvPr id="7" name="Text 3"/>
+          <p:cNvSpPr txBox="1"/>
+          <p:nvPr/>
+        </p:nvSpPr>
+        <p:spPr>
+          <a:xfrm>
+            <a:off x="1188720" y="1527048"/>
+            <a:ext cx="2743200" cy="457200"/>
+          </a:xfrm>
+          <a:prstGeom prst="rect">
+            <a:avLst/>
+          </a:prstGeom>
+          <a:noFill/>
+          <a:ln/>
+        </p:spPr>
+        <p:txBody>
+          <a:bodyPr wrap="square" lIns="0" tIns="0" rIns="0" bIns="0" rtlCol="0" anchor="t"/>
+          <a:lstStyle/>
+          <a:p>
+            <a:pPr indent="0" marL="0">
+              <a:buNone/>
+            </a:pPr>
+            <a:r>
+              <a:rPr lang="en-US" sz="1300" dirty="0">
+                <a:solidFill>
+                  <a:srgbClr val="A39B90"/>
                 </a:solidFill>
                 <a:latin typeface="Calibri" pitchFamily="34" charset="0"/>
                 <a:ea typeface="Calibri" pitchFamily="34" charset="-122"/>
                 <a:cs typeface="Calibri" pitchFamily="34" charset="-120"/>
               </a:rPr>
-              <a:t>Misión: [qué hacemos y para quién].</a:t>
-            </a:r>
-            <a:endParaRPr lang="en-US" sz="1800" dirty="0"/>
-          </a:p>
-          <a:p>
-            <a:pPr marL="342900" indent="-342900">
-              <a:spcAft>
-                <a:spcPts val="1000"/>
-              </a:spcAft>
-              <a:buSzPct val="100000"/>
-              <a:buChar char="•"/>
-            </a:pPr>
-            <a:r>
-              <a:rPr lang="en-US" sz="1800" dirty="0">
-                <a:solidFill>
-                  <a:srgbClr val="1F2D33"/>
+              <a:t>Tres puestos de presentador, con botellas, vasos y papeles.</a:t>
+            </a:r>
+            <a:endParaRPr lang="en-US" sz="1300" dirty="0"/>
+          </a:p>
+        </p:txBody>
+      </p:sp>
+      <p:sp>
+        <p:nvSpPr>
+          <p:cNvPr id="8" name="Shape 4"/>
+          <p:cNvSpPr/>
+          <p:nvPr/>
+        </p:nvSpPr>
+        <p:spPr>
+          <a:xfrm>
+            <a:off x="457200" y="2121408"/>
+            <a:ext cx="548640" cy="548640"/>
+          </a:xfrm>
+          <a:prstGeom prst="ellipse">
+            <a:avLst/>
+          </a:prstGeom>
+          <a:solidFill>
+            <a:srgbClr val="4CAF50"/>
+          </a:solidFill>
+          <a:ln w="12700">
+            <a:solidFill>
+              <a:srgbClr val="4CAF50"/>
+            </a:solidFill>
+            <a:prstDash val="solid"/>
+          </a:ln>
+        </p:spPr>
+      </p:sp>
+      <p:pic>
+        <p:nvPicPr>
+          <p:cNvPr id="9" name="Image 2" descr="preencoded.png">    </p:cNvPr>
+          <p:cNvPicPr>
+            <a:picLocks noChangeAspect="1"/>
+          </p:cNvPicPr>
+          <p:nvPr/>
+        </p:nvPicPr>
+        <p:blipFill>
+          <a:blip r:embed="rId3"/>
+          <a:stretch>
+            <a:fillRect/>
+          </a:stretch>
+        </p:blipFill>
+        <p:spPr>
+          <a:xfrm>
+            <a:off x="605333" y="2269541"/>
+            <a:ext cx="252374" cy="252374"/>
+          </a:xfrm>
+          <a:prstGeom prst="rect">
+            <a:avLst/>
+          </a:prstGeom>
+        </p:spPr>
+      </p:pic>
+      <p:sp>
+        <p:nvSpPr>
+          <p:cNvPr id="10" name="Text 5"/>
+          <p:cNvSpPr txBox="1"/>
+          <p:nvPr/>
+        </p:nvSpPr>
+        <p:spPr>
+          <a:xfrm>
+            <a:off x="1188720" y="2103120"/>
+            <a:ext cx="2743200" cy="292608"/>
+          </a:xfrm>
+          <a:prstGeom prst="rect">
+            <a:avLst/>
+          </a:prstGeom>
+          <a:noFill/>
+          <a:ln/>
+        </p:spPr>
+        <p:txBody>
+          <a:bodyPr wrap="square" lIns="0" tIns="0" rIns="0" bIns="0" rtlCol="0" anchor="t"/>
+          <a:lstStyle/>
+          <a:p>
+            <a:pPr indent="0" marL="0">
+              <a:buNone/>
+            </a:pPr>
+            <a:r>
+              <a:rPr lang="en-US" sz="1500" b="1" dirty="0">
+                <a:solidFill>
+                  <a:srgbClr val="F2EEE8"/>
                 </a:solidFill>
                 <a:latin typeface="Calibri" pitchFamily="34" charset="0"/>
                 <a:ea typeface="Calibri" pitchFamily="34" charset="-122"/>
                 <a:cs typeface="Calibri" pitchFamily="34" charset="-120"/>
               </a:rPr>
-              <a:t>Visión: [dónde queremos estar en 5 años].</a:t>
-            </a:r>
-            <a:endParaRPr lang="en-US" sz="1800" dirty="0"/>
-          </a:p>
-          <a:p>
-            <a:pPr marL="342900" indent="-342900">
-              <a:buSzPct val="100000"/>
-              <a:buChar char="•"/>
-            </a:pPr>
-            <a:r>
-              <a:rPr lang="en-US" sz="1800" dirty="0">
-                <a:solidFill>
-                  <a:srgbClr val="1F2D33"/>
+              <a:t>Muro LED</a:t>
+            </a:r>
+            <a:endParaRPr lang="en-US" sz="1500" dirty="0"/>
+          </a:p>
+        </p:txBody>
+      </p:sp>
+      <p:sp>
+        <p:nvSpPr>
+          <p:cNvPr id="11" name="Text 6"/>
+          <p:cNvSpPr txBox="1"/>
+          <p:nvPr/>
+        </p:nvSpPr>
+        <p:spPr>
+          <a:xfrm>
+            <a:off x="1188720" y="2414016"/>
+            <a:ext cx="2743200" cy="457200"/>
+          </a:xfrm>
+          <a:prstGeom prst="rect">
+            <a:avLst/>
+          </a:prstGeom>
+          <a:noFill/>
+          <a:ln/>
+        </p:spPr>
+        <p:txBody>
+          <a:bodyPr wrap="square" lIns="0" tIns="0" rIns="0" bIns="0" rtlCol="0" anchor="t"/>
+          <a:lstStyle/>
+          <a:p>
+            <a:pPr indent="0" marL="0">
+              <a:buNone/>
+            </a:pPr>
+            <a:r>
+              <a:rPr lang="en-US" sz="1300" dirty="0">
+                <a:solidFill>
+                  <a:srgbClr val="A39B90"/>
                 </a:solidFill>
                 <a:latin typeface="Calibri" pitchFamily="34" charset="0"/>
                 <a:ea typeface="Calibri" pitchFamily="34" charset="-122"/>
                 <a:cs typeface="Calibri" pitchFamily="34" charset="-120"/>
               </a:rPr>
-              <a:t>Valores: [tres o cuatro valores clave].</a:t>
-            </a:r>
-            <a:endParaRPr lang="en-US" sz="1800" dirty="0"/>
-          </a:p>
-        </p:txBody>
-      </p:sp>
-      <p:sp>
-        <p:nvSpPr>
-          <p:cNvPr id="4" name="Shape 2"/>
+              <a:t>Gráficas de campo de fútbol, también integradas en la mesa.</a:t>
+            </a:r>
+            <a:endParaRPr lang="en-US" sz="1300" dirty="0"/>
+          </a:p>
+        </p:txBody>
+      </p:sp>
+      <p:sp>
+        <p:nvSpPr>
+          <p:cNvPr id="12" name="Shape 7"/>
           <p:cNvSpPr/>
           <p:nvPr/>
         </p:nvSpPr>
         <p:spPr>
           <a:xfrm>
-            <a:off x="5303520" y="1371600"/>
-            <a:ext cx="3383280" cy="868680"/>
-          </a:xfrm>
-          <a:prstGeom prst="rect">
+            <a:off x="457200" y="3008376"/>
+            <a:ext cx="548640" cy="548640"/>
+          </a:xfrm>
+          <a:prstGeom prst="ellipse">
             <a:avLst/>
           </a:prstGeom>
           <a:solidFill>
-            <a:srgbClr val="E8F1F2"/>
+            <a:srgbClr val="E0A84A"/>
           </a:solidFill>
           <a:ln w="12700">
             <a:solidFill>
-              <a:srgbClr val="E8F1F2"/>
+              <a:srgbClr val="E0A84A"/>
             </a:solidFill>
             <a:prstDash val="solid"/>
           </a:ln>
         </p:spPr>
       </p:sp>
-      <p:sp>
-        <p:nvSpPr>
-          <p:cNvPr id="5" name="Text 3"/>
+      <p:pic>
+        <p:nvPicPr>
+          <p:cNvPr id="13" name="Image 3" descr="preencoded.png">    </p:cNvPr>
+          <p:cNvPicPr>
+            <a:picLocks noChangeAspect="1"/>
+          </p:cNvPicPr>
+          <p:nvPr/>
+        </p:nvPicPr>
+        <p:blipFill>
+          <a:blip r:embed="rId4"/>
+          <a:stretch>
+            <a:fillRect/>
+          </a:stretch>
+        </p:blipFill>
+        <p:spPr>
+          <a:xfrm>
+            <a:off x="605333" y="3156509"/>
+            <a:ext cx="252374" cy="252374"/>
+          </a:xfrm>
+          <a:prstGeom prst="rect">
+            <a:avLst/>
+          </a:prstGeom>
+        </p:spPr>
+      </p:pic>
+      <p:sp>
+        <p:nvSpPr>
+          <p:cNvPr id="14" name="Text 8"/>
           <p:cNvSpPr txBox="1"/>
           <p:nvPr/>
         </p:nvSpPr>
         <p:spPr>
           <a:xfrm>
-            <a:off x="5486400" y="1371600"/>
-            <a:ext cx="1280160" cy="868680"/>
+            <a:off x="1188720" y="2990088"/>
+            <a:ext cx="2743200" cy="292608"/>
           </a:xfrm>
           <a:prstGeom prst="rect">
             <a:avLst/>
@@ -2130,101 +2390,125 @@
           <a:ln/>
         </p:spPr>
         <p:txBody>
-          <a:bodyPr wrap="square" lIns="0" tIns="0" rIns="0" bIns="0" rtlCol="0" anchor="ctr"/>
-          <a:lstStyle/>
-          <a:p>
-            <a:pPr indent="0" marL="0">
-              <a:buNone/>
-            </a:pPr>
-            <a:r>
-              <a:rPr lang="en-US" sz="3600" b="1" dirty="0">
-                <a:solidFill>
-                  <a:srgbClr val="1C7C7D"/>
-                </a:solidFill>
-                <a:latin typeface="Cambria" pitchFamily="34" charset="0"/>
-                <a:ea typeface="Cambria" pitchFamily="34" charset="-122"/>
-                <a:cs typeface="Cambria" pitchFamily="34" charset="-120"/>
-              </a:rPr>
-              <a:t>+10</a:t>
-            </a:r>
-            <a:endParaRPr lang="en-US" sz="3600" dirty="0"/>
-          </a:p>
-        </p:txBody>
-      </p:sp>
-      <p:sp>
-        <p:nvSpPr>
-          <p:cNvPr id="6" name="Text 4"/>
-          <p:cNvSpPr txBox="1"/>
-          <p:nvPr/>
-        </p:nvSpPr>
-        <p:spPr>
-          <a:xfrm>
-            <a:off x="6766560" y="1371600"/>
-            <a:ext cx="1828800" cy="868680"/>
-          </a:xfrm>
-          <a:prstGeom prst="rect">
-            <a:avLst/>
-          </a:prstGeom>
-          <a:noFill/>
-          <a:ln/>
-        </p:spPr>
-        <p:txBody>
-          <a:bodyPr wrap="square" lIns="0" tIns="0" rIns="0" bIns="0" rtlCol="0" anchor="ctr"/>
-          <a:lstStyle/>
-          <a:p>
-            <a:pPr indent="0" marL="0">
-              <a:buNone/>
-            </a:pPr>
-            <a:r>
-              <a:rPr lang="en-US" sz="1400" dirty="0">
-                <a:solidFill>
-                  <a:srgbClr val="1F2D33"/>
+          <a:bodyPr wrap="square" lIns="0" tIns="0" rIns="0" bIns="0" rtlCol="0" anchor="t"/>
+          <a:lstStyle/>
+          <a:p>
+            <a:pPr indent="0" marL="0">
+              <a:buNone/>
+            </a:pPr>
+            <a:r>
+              <a:rPr lang="en-US" sz="1500" b="1" dirty="0">
+                <a:solidFill>
+                  <a:srgbClr val="F2EEE8"/>
                 </a:solidFill>
                 <a:latin typeface="Calibri" pitchFamily="34" charset="0"/>
                 <a:ea typeface="Calibri" pitchFamily="34" charset="-122"/>
                 <a:cs typeface="Calibri" pitchFamily="34" charset="-120"/>
               </a:rPr>
-              <a:t>años de experiencia</a:t>
-            </a:r>
-            <a:endParaRPr lang="en-US" sz="1400" dirty="0"/>
-          </a:p>
-        </p:txBody>
-      </p:sp>
-      <p:sp>
-        <p:nvSpPr>
-          <p:cNvPr id="7" name="Shape 5"/>
+              <a:t>Iluminación</a:t>
+            </a:r>
+            <a:endParaRPr lang="en-US" sz="1500" dirty="0"/>
+          </a:p>
+        </p:txBody>
+      </p:sp>
+      <p:sp>
+        <p:nvSpPr>
+          <p:cNvPr id="15" name="Text 9"/>
+          <p:cNvSpPr txBox="1"/>
+          <p:nvPr/>
+        </p:nvSpPr>
+        <p:spPr>
+          <a:xfrm>
+            <a:off x="1188720" y="3300984"/>
+            <a:ext cx="2743200" cy="457200"/>
+          </a:xfrm>
+          <a:prstGeom prst="rect">
+            <a:avLst/>
+          </a:prstGeom>
+          <a:noFill/>
+          <a:ln/>
+        </p:spPr>
+        <p:txBody>
+          <a:bodyPr wrap="square" lIns="0" tIns="0" rIns="0" bIns="0" rtlCol="0" anchor="t"/>
+          <a:lstStyle/>
+          <a:p>
+            <a:pPr indent="0" marL="0">
+              <a:buNone/>
+            </a:pPr>
+            <a:r>
+              <a:rPr lang="en-US" sz="1300" dirty="0">
+                <a:solidFill>
+                  <a:srgbClr val="A39B90"/>
+                </a:solidFill>
+                <a:latin typeface="Calibri" pitchFamily="34" charset="0"/>
+                <a:ea typeface="Calibri" pitchFamily="34" charset="-122"/>
+                <a:cs typeface="Calibri" pitchFamily="34" charset="-120"/>
+              </a:rPr>
+              <a:t>Anillo de luz LED sobre truss y paneles de luz.</a:t>
+            </a:r>
+            <a:endParaRPr lang="en-US" sz="1300" dirty="0"/>
+          </a:p>
+        </p:txBody>
+      </p:sp>
+      <p:sp>
+        <p:nvSpPr>
+          <p:cNvPr id="16" name="Shape 10"/>
           <p:cNvSpPr/>
           <p:nvPr/>
         </p:nvSpPr>
         <p:spPr>
           <a:xfrm>
-            <a:off x="5303520" y="2423160"/>
-            <a:ext cx="3383280" cy="868680"/>
-          </a:xfrm>
-          <a:prstGeom prst="rect">
+            <a:off x="457200" y="3895344"/>
+            <a:ext cx="548640" cy="548640"/>
+          </a:xfrm>
+          <a:prstGeom prst="ellipse">
             <a:avLst/>
           </a:prstGeom>
           <a:solidFill>
-            <a:srgbClr val="E8F1F2"/>
+            <a:srgbClr val="E5484D"/>
           </a:solidFill>
           <a:ln w="12700">
             <a:solidFill>
-              <a:srgbClr val="E8F1F2"/>
+              <a:srgbClr val="E5484D"/>
             </a:solidFill>
             <a:prstDash val="solid"/>
           </a:ln>
         </p:spPr>
       </p:sp>
-      <p:sp>
-        <p:nvSpPr>
-          <p:cNvPr id="8" name="Text 6"/>
+      <p:pic>
+        <p:nvPicPr>
+          <p:cNvPr id="17" name="Image 4" descr="preencoded.png">    </p:cNvPr>
+          <p:cNvPicPr>
+            <a:picLocks noChangeAspect="1"/>
+          </p:cNvPicPr>
+          <p:nvPr/>
+        </p:nvPicPr>
+        <p:blipFill>
+          <a:blip r:embed="rId5"/>
+          <a:stretch>
+            <a:fillRect/>
+          </a:stretch>
+        </p:blipFill>
+        <p:spPr>
+          <a:xfrm>
+            <a:off x="605333" y="4043477"/>
+            <a:ext cx="252374" cy="252374"/>
+          </a:xfrm>
+          <a:prstGeom prst="rect">
+            <a:avLst/>
+          </a:prstGeom>
+        </p:spPr>
+      </p:pic>
+      <p:sp>
+        <p:nvSpPr>
+          <p:cNvPr id="18" name="Text 11"/>
           <p:cNvSpPr txBox="1"/>
           <p:nvPr/>
         </p:nvSpPr>
         <p:spPr>
           <a:xfrm>
-            <a:off x="5486400" y="2423160"/>
-            <a:ext cx="1280160" cy="868680"/>
+            <a:off x="1188720" y="3877056"/>
+            <a:ext cx="2743200" cy="292608"/>
           </a:xfrm>
           <a:prstGeom prst="rect">
             <a:avLst/>
@@ -2233,101 +2517,37 @@
           <a:ln/>
         </p:spPr>
         <p:txBody>
-          <a:bodyPr wrap="square" lIns="0" tIns="0" rIns="0" bIns="0" rtlCol="0" anchor="ctr"/>
-          <a:lstStyle/>
-          <a:p>
-            <a:pPr indent="0" marL="0">
-              <a:buNone/>
-            </a:pPr>
-            <a:r>
-              <a:rPr lang="en-US" sz="3600" b="1" dirty="0">
-                <a:solidFill>
-                  <a:srgbClr val="1C7C7D"/>
-                </a:solidFill>
-                <a:latin typeface="Cambria" pitchFamily="34" charset="0"/>
-                <a:ea typeface="Cambria" pitchFamily="34" charset="-122"/>
-                <a:cs typeface="Cambria" pitchFamily="34" charset="-120"/>
-              </a:rPr>
-              <a:t>+50</a:t>
-            </a:r>
-            <a:endParaRPr lang="en-US" sz="3600" dirty="0"/>
-          </a:p>
-        </p:txBody>
-      </p:sp>
-      <p:sp>
-        <p:nvSpPr>
-          <p:cNvPr id="9" name="Text 7"/>
-          <p:cNvSpPr txBox="1"/>
-          <p:nvPr/>
-        </p:nvSpPr>
-        <p:spPr>
-          <a:xfrm>
-            <a:off x="6766560" y="2423160"/>
-            <a:ext cx="1828800" cy="868680"/>
-          </a:xfrm>
-          <a:prstGeom prst="rect">
-            <a:avLst/>
-          </a:prstGeom>
-          <a:noFill/>
-          <a:ln/>
-        </p:spPr>
-        <p:txBody>
-          <a:bodyPr wrap="square" lIns="0" tIns="0" rIns="0" bIns="0" rtlCol="0" anchor="ctr"/>
-          <a:lstStyle/>
-          <a:p>
-            <a:pPr indent="0" marL="0">
-              <a:buNone/>
-            </a:pPr>
-            <a:r>
-              <a:rPr lang="en-US" sz="1400" dirty="0">
-                <a:solidFill>
-                  <a:srgbClr val="1F2D33"/>
+          <a:bodyPr wrap="square" lIns="0" tIns="0" rIns="0" bIns="0" rtlCol="0" anchor="t"/>
+          <a:lstStyle/>
+          <a:p>
+            <a:pPr indent="0" marL="0">
+              <a:buNone/>
+            </a:pPr>
+            <a:r>
+              <a:rPr lang="en-US" sz="1500" b="1" dirty="0">
+                <a:solidFill>
+                  <a:srgbClr val="F2EEE8"/>
                 </a:solidFill>
                 <a:latin typeface="Calibri" pitchFamily="34" charset="0"/>
                 <a:ea typeface="Calibri" pitchFamily="34" charset="-122"/>
                 <a:cs typeface="Calibri" pitchFamily="34" charset="-120"/>
               </a:rPr>
-              <a:t>clientes atendidos</a:t>
-            </a:r>
-            <a:endParaRPr lang="en-US" sz="1400" dirty="0"/>
-          </a:p>
-        </p:txBody>
-      </p:sp>
-      <p:sp>
-        <p:nvSpPr>
-          <p:cNvPr id="10" name="Shape 8"/>
-          <p:cNvSpPr/>
-          <p:nvPr/>
-        </p:nvSpPr>
-        <p:spPr>
-          <a:xfrm>
-            <a:off x="5303520" y="3474720"/>
-            <a:ext cx="3383280" cy="868680"/>
-          </a:xfrm>
-          <a:prstGeom prst="rect">
-            <a:avLst/>
-          </a:prstGeom>
-          <a:solidFill>
-            <a:srgbClr val="E8F1F2"/>
-          </a:solidFill>
-          <a:ln w="12700">
-            <a:solidFill>
-              <a:srgbClr val="E8F1F2"/>
-            </a:solidFill>
-            <a:prstDash val="solid"/>
-          </a:ln>
-        </p:spPr>
-      </p:sp>
-      <p:sp>
-        <p:nvSpPr>
-          <p:cNvPr id="11" name="Text 9"/>
+              <a:t>Cámaras y fondo</a:t>
+            </a:r>
+            <a:endParaRPr lang="en-US" sz="1500" dirty="0"/>
+          </a:p>
+        </p:txBody>
+      </p:sp>
+      <p:sp>
+        <p:nvSpPr>
+          <p:cNvPr id="19" name="Text 12"/>
           <p:cNvSpPr txBox="1"/>
           <p:nvPr/>
         </p:nvSpPr>
         <p:spPr>
           <a:xfrm>
-            <a:off x="5486400" y="3474720"/>
-            <a:ext cx="1280160" cy="868680"/>
+            <a:off x="1188720" y="4187952"/>
+            <a:ext cx="2743200" cy="457200"/>
           </a:xfrm>
           <a:prstGeom prst="rect">
             <a:avLst/>
@@ -2336,63 +2556,24 @@
           <a:ln/>
         </p:spPr>
         <p:txBody>
-          <a:bodyPr wrap="square" lIns="0" tIns="0" rIns="0" bIns="0" rtlCol="0" anchor="ctr"/>
-          <a:lstStyle/>
-          <a:p>
-            <a:pPr indent="0" marL="0">
-              <a:buNone/>
-            </a:pPr>
-            <a:r>
-              <a:rPr lang="en-US" sz="3600" b="1" dirty="0">
-                <a:solidFill>
-                  <a:srgbClr val="1C7C7D"/>
-                </a:solidFill>
-                <a:latin typeface="Cambria" pitchFamily="34" charset="0"/>
-                <a:ea typeface="Cambria" pitchFamily="34" charset="-122"/>
-                <a:cs typeface="Cambria" pitchFamily="34" charset="-120"/>
-              </a:rPr>
-              <a:t>25</a:t>
-            </a:r>
-            <a:endParaRPr lang="en-US" sz="3600" dirty="0"/>
-          </a:p>
-        </p:txBody>
-      </p:sp>
-      <p:sp>
-        <p:nvSpPr>
-          <p:cNvPr id="12" name="Text 10"/>
-          <p:cNvSpPr txBox="1"/>
-          <p:nvPr/>
-        </p:nvSpPr>
-        <p:spPr>
-          <a:xfrm>
-            <a:off x="6766560" y="3474720"/>
-            <a:ext cx="1828800" cy="868680"/>
-          </a:xfrm>
-          <a:prstGeom prst="rect">
-            <a:avLst/>
-          </a:prstGeom>
-          <a:noFill/>
-          <a:ln/>
-        </p:spPr>
-        <p:txBody>
-          <a:bodyPr wrap="square" lIns="0" tIns="0" rIns="0" bIns="0" rtlCol="0" anchor="ctr"/>
-          <a:lstStyle/>
-          <a:p>
-            <a:pPr indent="0" marL="0">
-              <a:buNone/>
-            </a:pPr>
-            <a:r>
-              <a:rPr lang="en-US" sz="1400" dirty="0">
-                <a:solidFill>
-                  <a:srgbClr val="1F2D33"/>
+          <a:bodyPr wrap="square" lIns="0" tIns="0" rIns="0" bIns="0" rtlCol="0" anchor="t"/>
+          <a:lstStyle/>
+          <a:p>
+            <a:pPr indent="0" marL="0">
+              <a:buNone/>
+            </a:pPr>
+            <a:r>
+              <a:rPr lang="en-US" sz="1300" dirty="0">
+                <a:solidFill>
+                  <a:srgbClr val="A39B90"/>
                 </a:solidFill>
                 <a:latin typeface="Calibri" pitchFamily="34" charset="0"/>
                 <a:ea typeface="Calibri" pitchFamily="34" charset="-122"/>
                 <a:cs typeface="Calibri" pitchFamily="34" charset="-120"/>
               </a:rPr>
-              <a:t>personas en el equipo</a:t>
-            </a:r>
-            <a:endParaRPr lang="en-US" sz="1400" dirty="0"/>
+              <a:t>Cámaras de estudio frente a un fondo blanco curvo.</a:t>
+            </a:r>
+            <a:endParaRPr lang="en-US" sz="1300" dirty="0"/>
           </a:p>
         </p:txBody>
       </p:sp>
@@ -2410,7 +2591,7 @@
     <p:bg>
       <p:bgPr>
         <a:solidFill>
-          <a:srgbClr val="FFFFFF"/>
+          <a:srgbClr val="12100E"/>
         </a:solidFill>
       </p:bgPr>
     </p:bg>
@@ -2437,7 +2618,7 @@
         <p:spPr>
           <a:xfrm>
             <a:off x="457200" y="320040"/>
-            <a:ext cx="8229600" cy="731520"/>
+            <a:ext cx="8229600" cy="640080"/>
           </a:xfrm>
           <a:prstGeom prst="rect">
             <a:avLst/>
@@ -2455,13 +2636,13 @@
             <a:r>
               <a:rPr lang="en-US" sz="3400" b="1" dirty="0">
                 <a:solidFill>
-                  <a:srgbClr val="0F2F3A"/>
+                  <a:srgbClr val="F2EEE8"/>
                 </a:solidFill>
                 <a:latin typeface="Cambria" pitchFamily="34" charset="0"/>
                 <a:ea typeface="Cambria" pitchFamily="34" charset="-122"/>
                 <a:cs typeface="Cambria" pitchFamily="34" charset="-120"/>
               </a:rPr>
-              <a:t>El problema y la oportunidad</a:t>
+              <a:t>Detrás de cámaras</a:t>
             </a:r>
             <a:endParaRPr lang="en-US" sz="3400" dirty="0"/>
           </a:p>
@@ -2469,46 +2650,14 @@
       </p:sp>
       <p:sp>
         <p:nvSpPr>
-          <p:cNvPr id="3" name="Shape 1"/>
-          <p:cNvSpPr/>
-          <p:nvPr/>
-        </p:nvSpPr>
-        <p:spPr>
-          <a:xfrm>
-            <a:off x="457200" y="1371600"/>
-            <a:ext cx="3657600" cy="3108960"/>
-          </a:xfrm>
-          <a:prstGeom prst="rect">
-            <a:avLst/>
-          </a:prstGeom>
-          <a:solidFill>
-            <a:srgbClr val="E8F1F2"/>
-          </a:solidFill>
-          <a:ln w="12700">
-            <a:solidFill>
-              <a:srgbClr val="E8F1F2"/>
-            </a:solidFill>
-            <a:prstDash val="solid"/>
-          </a:ln>
-          <a:effectLst>
-            <a:outerShdw sx="100000" sy="100000" kx="0" ky="0" algn="bl" rotWithShape="0" blurRad="101600" dist="25400" dir="5400000">
-              <a:srgbClr val="000000">
-                <a:alpha val="15000"/>
-              </a:srgbClr>
-            </a:outerShdw>
-          </a:effectLst>
-        </p:spPr>
-      </p:sp>
-      <p:sp>
-        <p:nvSpPr>
-          <p:cNvPr id="4" name="Text 2"/>
+          <p:cNvPr id="3" name="Text 1"/>
           <p:cNvSpPr txBox="1"/>
           <p:nvPr/>
         </p:nvSpPr>
         <p:spPr>
           <a:xfrm>
-            <a:off x="731520" y="1554480"/>
-            <a:ext cx="3108960" cy="457200"/>
+            <a:off x="457200" y="960120"/>
+            <a:ext cx="8229600" cy="365760"/>
           </a:xfrm>
           <a:prstGeom prst="rect">
             <a:avLst/>
@@ -2524,283 +2673,23 @@
               <a:buNone/>
             </a:pPr>
             <a:r>
-              <a:rPr lang="en-US" sz="2000" b="1" dirty="0">
-                <a:solidFill>
-                  <a:srgbClr val="0F2F3A"/>
-                </a:solidFill>
-                <a:latin typeface="Cambria" pitchFamily="34" charset="0"/>
-                <a:ea typeface="Cambria" pitchFamily="34" charset="-122"/>
-                <a:cs typeface="Cambria" pitchFamily="34" charset="-120"/>
-              </a:rPr>
-              <a:t>Situación actual</a:t>
-            </a:r>
-            <a:endParaRPr lang="en-US" sz="2000" dirty="0"/>
-          </a:p>
-        </p:txBody>
-      </p:sp>
-      <p:sp>
-        <p:nvSpPr>
-          <p:cNvPr id="5" name="Text 3"/>
-          <p:cNvSpPr txBox="1"/>
-          <p:nvPr/>
-        </p:nvSpPr>
-        <p:spPr>
-          <a:xfrm>
-            <a:off x="731520" y="2148840"/>
-            <a:ext cx="3108960" cy="2103120"/>
-          </a:xfrm>
-          <a:prstGeom prst="rect">
-            <a:avLst/>
-          </a:prstGeom>
-          <a:noFill/>
-          <a:ln/>
-        </p:spPr>
-        <p:txBody>
-          <a:bodyPr wrap="square" lIns="0" tIns="0" rIns="0" bIns="0" rtlCol="0" anchor="t"/>
-          <a:lstStyle/>
-          <a:p>
-            <a:pPr marL="342900" indent="-342900">
-              <a:spcAft>
-                <a:spcPts val="1000"/>
-              </a:spcAft>
-              <a:buSzPct val="100000"/>
-              <a:buChar char="•"/>
-            </a:pPr>
-            <a:r>
-              <a:rPr lang="en-US" sz="1500" dirty="0">
-                <a:solidFill>
-                  <a:srgbClr val="1F2D33"/>
+              <a:rPr lang="en-US" sz="1600" dirty="0">
+                <a:solidFill>
+                  <a:srgbClr val="A39B90"/>
                 </a:solidFill>
                 <a:latin typeface="Calibri" pitchFamily="34" charset="0"/>
                 <a:ea typeface="Calibri" pitchFamily="34" charset="-122"/>
                 <a:cs typeface="Calibri" pitchFamily="34" charset="-120"/>
               </a:rPr>
-              <a:t>[Dolor o problema del mercado]</a:t>
-            </a:r>
-            <a:endParaRPr lang="en-US" sz="1500" dirty="0"/>
-          </a:p>
-          <a:p>
-            <a:pPr marL="342900" indent="-342900">
-              <a:spcAft>
-                <a:spcPts val="1000"/>
-              </a:spcAft>
-              <a:buSzPct val="100000"/>
-              <a:buChar char="•"/>
-            </a:pPr>
-            <a:r>
-              <a:rPr lang="en-US" sz="1500" dirty="0">
-                <a:solidFill>
-                  <a:srgbClr val="1F2D33"/>
-                </a:solidFill>
-                <a:latin typeface="Calibri" pitchFamily="34" charset="0"/>
-                <a:ea typeface="Calibri" pitchFamily="34" charset="-122"/>
-                <a:cs typeface="Calibri" pitchFamily="34" charset="-120"/>
-              </a:rPr>
-              <a:t>[Por qué las soluciones actuales no bastan]</a:t>
-            </a:r>
-            <a:endParaRPr lang="en-US" sz="1500" dirty="0"/>
-          </a:p>
-          <a:p>
-            <a:pPr marL="342900" indent="-342900">
-              <a:buSzPct val="100000"/>
-              <a:buChar char="•"/>
-            </a:pPr>
-            <a:r>
-              <a:rPr lang="en-US" sz="1500" dirty="0">
-                <a:solidFill>
-                  <a:srgbClr val="1F2D33"/>
-                </a:solidFill>
-                <a:latin typeface="Calibri" pitchFamily="34" charset="0"/>
-                <a:ea typeface="Calibri" pitchFamily="34" charset="-122"/>
-                <a:cs typeface="Calibri" pitchFamily="34" charset="-120"/>
-              </a:rPr>
-              <a:t>[Costo de no resolverlo]</a:t>
-            </a:r>
-            <a:endParaRPr lang="en-US" sz="1500" dirty="0"/>
-          </a:p>
-        </p:txBody>
-      </p:sp>
-      <p:sp>
-        <p:nvSpPr>
-          <p:cNvPr id="6" name="Shape 4"/>
-          <p:cNvSpPr/>
-          <p:nvPr/>
-        </p:nvSpPr>
-        <p:spPr>
-          <a:xfrm>
-            <a:off x="5029200" y="1371600"/>
-            <a:ext cx="3657600" cy="3108960"/>
-          </a:xfrm>
-          <a:prstGeom prst="rect">
-            <a:avLst/>
-          </a:prstGeom>
-          <a:solidFill>
-            <a:srgbClr val="1C7C7D"/>
-          </a:solidFill>
-          <a:ln w="12700">
-            <a:solidFill>
-              <a:srgbClr val="1C7C7D"/>
-            </a:solidFill>
-            <a:prstDash val="solid"/>
-          </a:ln>
-          <a:effectLst>
-            <a:outerShdw sx="100000" sy="100000" kx="0" ky="0" algn="bl" rotWithShape="0" blurRad="101600" dist="25400" dir="5400000">
-              <a:srgbClr val="000000">
-                <a:alpha val="15000"/>
-              </a:srgbClr>
-            </a:outerShdw>
-          </a:effectLst>
-        </p:spPr>
-      </p:sp>
-      <p:sp>
-        <p:nvSpPr>
-          <p:cNvPr id="7" name="Text 5"/>
-          <p:cNvSpPr txBox="1"/>
-          <p:nvPr/>
-        </p:nvSpPr>
-        <p:spPr>
-          <a:xfrm>
-            <a:off x="5303520" y="1554480"/>
-            <a:ext cx="3108960" cy="457200"/>
-          </a:xfrm>
-          <a:prstGeom prst="rect">
-            <a:avLst/>
-          </a:prstGeom>
-          <a:noFill/>
-          <a:ln/>
-        </p:spPr>
-        <p:txBody>
-          <a:bodyPr wrap="square" lIns="0" tIns="0" rIns="0" bIns="0" rtlCol="0" anchor="ctr"/>
-          <a:lstStyle/>
-          <a:p>
-            <a:pPr indent="0" marL="0">
-              <a:buNone/>
-            </a:pPr>
-            <a:r>
-              <a:rPr lang="en-US" sz="2000" b="1" dirty="0">
-                <a:solidFill>
-                  <a:srgbClr val="FFFFFF"/>
-                </a:solidFill>
-                <a:latin typeface="Cambria" pitchFamily="34" charset="0"/>
-                <a:ea typeface="Cambria" pitchFamily="34" charset="-122"/>
-                <a:cs typeface="Cambria" pitchFamily="34" charset="-120"/>
-              </a:rPr>
-              <a:t>Nuestra oportunidad</a:t>
-            </a:r>
-            <a:endParaRPr lang="en-US" sz="2000" dirty="0"/>
-          </a:p>
-        </p:txBody>
-      </p:sp>
-      <p:sp>
-        <p:nvSpPr>
-          <p:cNvPr id="8" name="Text 6"/>
-          <p:cNvSpPr txBox="1"/>
-          <p:nvPr/>
-        </p:nvSpPr>
-        <p:spPr>
-          <a:xfrm>
-            <a:off x="5303520" y="2148840"/>
-            <a:ext cx="3108960" cy="2103120"/>
-          </a:xfrm>
-          <a:prstGeom prst="rect">
-            <a:avLst/>
-          </a:prstGeom>
-          <a:noFill/>
-          <a:ln/>
-        </p:spPr>
-        <p:txBody>
-          <a:bodyPr wrap="square" lIns="0" tIns="0" rIns="0" bIns="0" rtlCol="0" anchor="t"/>
-          <a:lstStyle/>
-          <a:p>
-            <a:pPr marL="342900" indent="-342900">
-              <a:spcAft>
-                <a:spcPts val="1000"/>
-              </a:spcAft>
-              <a:buSzPct val="100000"/>
-              <a:buChar char="•"/>
-            </a:pPr>
-            <a:r>
-              <a:rPr lang="en-US" sz="1500" dirty="0">
-                <a:solidFill>
-                  <a:srgbClr val="FFFFFF"/>
-                </a:solidFill>
-                <a:latin typeface="Calibri" pitchFamily="34" charset="0"/>
-                <a:ea typeface="Calibri" pitchFamily="34" charset="-122"/>
-                <a:cs typeface="Calibri" pitchFamily="34" charset="-120"/>
-              </a:rPr>
-              <a:t>[Cómo lo resolvemos de forma distinta]</a:t>
-            </a:r>
-            <a:endParaRPr lang="en-US" sz="1500" dirty="0"/>
-          </a:p>
-          <a:p>
-            <a:pPr marL="342900" indent="-342900">
-              <a:spcAft>
-                <a:spcPts val="1000"/>
-              </a:spcAft>
-              <a:buSzPct val="100000"/>
-              <a:buChar char="•"/>
-            </a:pPr>
-            <a:r>
-              <a:rPr lang="en-US" sz="1500" dirty="0">
-                <a:solidFill>
-                  <a:srgbClr val="FFFFFF"/>
-                </a:solidFill>
-                <a:latin typeface="Calibri" pitchFamily="34" charset="0"/>
-                <a:ea typeface="Calibri" pitchFamily="34" charset="-122"/>
-                <a:cs typeface="Calibri" pitchFamily="34" charset="-120"/>
-              </a:rPr>
-              <a:t>[Tamaño o potencial del mercado]</a:t>
-            </a:r>
-            <a:endParaRPr lang="en-US" sz="1500" dirty="0"/>
-          </a:p>
-          <a:p>
-            <a:pPr marL="342900" indent="-342900">
-              <a:buSzPct val="100000"/>
-              <a:buChar char="•"/>
-            </a:pPr>
-            <a:r>
-              <a:rPr lang="en-US" sz="1500" dirty="0">
-                <a:solidFill>
-                  <a:srgbClr val="FFFFFF"/>
-                </a:solidFill>
-                <a:latin typeface="Calibri" pitchFamily="34" charset="0"/>
-                <a:ea typeface="Calibri" pitchFamily="34" charset="-122"/>
-                <a:cs typeface="Calibri" pitchFamily="34" charset="-120"/>
-              </a:rPr>
-              <a:t>[Ventaja frente a la competencia]</a:t>
-            </a:r>
-            <a:endParaRPr lang="en-US" sz="1500" dirty="0"/>
-          </a:p>
-        </p:txBody>
-      </p:sp>
-      <p:sp>
-        <p:nvSpPr>
-          <p:cNvPr id="9" name="Shape 7"/>
-          <p:cNvSpPr/>
-          <p:nvPr/>
-        </p:nvSpPr>
-        <p:spPr>
-          <a:xfrm>
-            <a:off x="3931920" y="2468880"/>
-            <a:ext cx="822960" cy="822960"/>
-          </a:xfrm>
-          <a:prstGeom prst="ellipse">
-            <a:avLst/>
-          </a:prstGeom>
-          <a:solidFill>
-            <a:srgbClr val="F28F3B"/>
-          </a:solidFill>
-          <a:ln w="12700">
-            <a:solidFill>
-              <a:srgbClr val="F28F3B"/>
-            </a:solidFill>
-            <a:prstDash val="solid"/>
-          </a:ln>
-        </p:spPr>
+              <a:t>Las áreas de producción que rodean al plató</a:t>
+            </a:r>
+            <a:endParaRPr lang="en-US" sz="1600" dirty="0"/>
+          </a:p>
+        </p:txBody>
       </p:sp>
       <p:pic>
         <p:nvPicPr>
-          <p:cNvPr id="10" name="Image 0" descr="preencoded.png">    </p:cNvPr>
+          <p:cNvPr id="4" name="Image 0" descr="/tmp/claude-0/-home-user-other/d8041478-dfcc-5ca6-9236-09cb61fbd919/scratchpad/img/p1.jpg">    </p:cNvPr>
           <p:cNvPicPr>
             <a:picLocks noChangeAspect="1"/>
           </p:cNvPicPr>
@@ -2814,14 +2703,194 @@
         </p:blipFill>
         <p:spPr>
           <a:xfrm>
-            <a:off x="4137660" y="2674620"/>
-            <a:ext cx="411480" cy="411480"/>
+            <a:off x="457200" y="1508760"/>
+            <a:ext cx="4023360" cy="2263140"/>
           </a:xfrm>
           <a:prstGeom prst="rect">
             <a:avLst/>
           </a:prstGeom>
         </p:spPr>
       </p:pic>
+      <p:sp>
+        <p:nvSpPr>
+          <p:cNvPr id="5" name="Text 2"/>
+          <p:cNvSpPr txBox="1"/>
+          <p:nvPr/>
+        </p:nvSpPr>
+        <p:spPr>
+          <a:xfrm>
+            <a:off x="457200" y="3886200"/>
+            <a:ext cx="4023360" cy="320040"/>
+          </a:xfrm>
+          <a:prstGeom prst="rect">
+            <a:avLst/>
+          </a:prstGeom>
+          <a:noFill/>
+          <a:ln/>
+        </p:spPr>
+        <p:txBody>
+          <a:bodyPr wrap="square" lIns="0" tIns="0" rIns="0" bIns="0" rtlCol="0" anchor="t"/>
+          <a:lstStyle/>
+          <a:p>
+            <a:pPr indent="0" marL="0">
+              <a:buNone/>
+            </a:pPr>
+            <a:r>
+              <a:rPr lang="en-US" sz="1800" b="1" dirty="0">
+                <a:solidFill>
+                  <a:srgbClr val="F2EEE8"/>
+                </a:solidFill>
+                <a:latin typeface="Cambria" pitchFamily="34" charset="0"/>
+                <a:ea typeface="Cambria" pitchFamily="34" charset="-122"/>
+                <a:cs typeface="Cambria" pitchFamily="34" charset="-120"/>
+              </a:rPr>
+              <a:t>Sala de control</a:t>
+            </a:r>
+            <a:endParaRPr lang="en-US" sz="1800" dirty="0"/>
+          </a:p>
+        </p:txBody>
+      </p:sp>
+      <p:sp>
+        <p:nvSpPr>
+          <p:cNvPr id="6" name="Text 3"/>
+          <p:cNvSpPr txBox="1"/>
+          <p:nvPr/>
+        </p:nvSpPr>
+        <p:spPr>
+          <a:xfrm>
+            <a:off x="457200" y="4224528"/>
+            <a:ext cx="4023360" cy="457200"/>
+          </a:xfrm>
+          <a:prstGeom prst="rect">
+            <a:avLst/>
+          </a:prstGeom>
+          <a:noFill/>
+          <a:ln/>
+        </p:spPr>
+        <p:txBody>
+          <a:bodyPr wrap="square" lIns="0" tIns="0" rIns="0" bIns="0" rtlCol="0" anchor="t"/>
+          <a:lstStyle/>
+          <a:p>
+            <a:pPr indent="0" marL="0">
+              <a:buNone/>
+            </a:pPr>
+            <a:r>
+              <a:rPr lang="en-US" sz="1300" dirty="0">
+                <a:solidFill>
+                  <a:srgbClr val="A39B90"/>
+                </a:solidFill>
+                <a:latin typeface="Calibri" pitchFamily="34" charset="0"/>
+                <a:ea typeface="Calibri" pitchFamily="34" charset="-122"/>
+                <a:cs typeface="Calibri" pitchFamily="34" charset="-120"/>
+              </a:rPr>
+              <a:t>Muro de pantallas con la señal del partido y consolas de trabajo.</a:t>
+            </a:r>
+            <a:endParaRPr lang="en-US" sz="1300" dirty="0"/>
+          </a:p>
+        </p:txBody>
+      </p:sp>
+      <p:pic>
+        <p:nvPicPr>
+          <p:cNvPr id="7" name="Image 1" descr="/tmp/claude-0/-home-user-other/d8041478-dfcc-5ca6-9236-09cb61fbd919/scratchpad/img/p2.jpg">    </p:cNvPr>
+          <p:cNvPicPr>
+            <a:picLocks noChangeAspect="1"/>
+          </p:cNvPicPr>
+          <p:nvPr/>
+        </p:nvPicPr>
+        <p:blipFill>
+          <a:blip r:embed="rId2"/>
+          <a:stretch>
+            <a:fillRect/>
+          </a:stretch>
+        </p:blipFill>
+        <p:spPr>
+          <a:xfrm>
+            <a:off x="4663440" y="1508760"/>
+            <a:ext cx="4023360" cy="2263140"/>
+          </a:xfrm>
+          <a:prstGeom prst="rect">
+            <a:avLst/>
+          </a:prstGeom>
+        </p:spPr>
+      </p:pic>
+      <p:sp>
+        <p:nvSpPr>
+          <p:cNvPr id="8" name="Text 4"/>
+          <p:cNvSpPr txBox="1"/>
+          <p:nvPr/>
+        </p:nvSpPr>
+        <p:spPr>
+          <a:xfrm>
+            <a:off x="4663440" y="3886200"/>
+            <a:ext cx="4023360" cy="320040"/>
+          </a:xfrm>
+          <a:prstGeom prst="rect">
+            <a:avLst/>
+          </a:prstGeom>
+          <a:noFill/>
+          <a:ln/>
+        </p:spPr>
+        <p:txBody>
+          <a:bodyPr wrap="square" lIns="0" tIns="0" rIns="0" bIns="0" rtlCol="0" anchor="t"/>
+          <a:lstStyle/>
+          <a:p>
+            <a:pPr indent="0" marL="0">
+              <a:buNone/>
+            </a:pPr>
+            <a:r>
+              <a:rPr lang="en-US" sz="1800" b="1" dirty="0">
+                <a:solidFill>
+                  <a:srgbClr val="F2EEE8"/>
+                </a:solidFill>
+                <a:latin typeface="Cambria" pitchFamily="34" charset="0"/>
+                <a:ea typeface="Cambria" pitchFamily="34" charset="-122"/>
+                <a:cs typeface="Cambria" pitchFamily="34" charset="-120"/>
+              </a:rPr>
+              <a:t>Redacción</a:t>
+            </a:r>
+            <a:endParaRPr lang="en-US" sz="1800" dirty="0"/>
+          </a:p>
+        </p:txBody>
+      </p:sp>
+      <p:sp>
+        <p:nvSpPr>
+          <p:cNvPr id="9" name="Text 5"/>
+          <p:cNvSpPr txBox="1"/>
+          <p:nvPr/>
+        </p:nvSpPr>
+        <p:spPr>
+          <a:xfrm>
+            <a:off x="4663440" y="4224528"/>
+            <a:ext cx="4023360" cy="457200"/>
+          </a:xfrm>
+          <a:prstGeom prst="rect">
+            <a:avLst/>
+          </a:prstGeom>
+          <a:noFill/>
+          <a:ln/>
+        </p:spPr>
+        <p:txBody>
+          <a:bodyPr wrap="square" lIns="0" tIns="0" rIns="0" bIns="0" rtlCol="0" anchor="t"/>
+          <a:lstStyle/>
+          <a:p>
+            <a:pPr indent="0" marL="0">
+              <a:buNone/>
+            </a:pPr>
+            <a:r>
+              <a:rPr lang="en-US" sz="1300" dirty="0">
+                <a:solidFill>
+                  <a:srgbClr val="A39B90"/>
+                </a:solidFill>
+                <a:latin typeface="Calibri" pitchFamily="34" charset="0"/>
+                <a:ea typeface="Calibri" pitchFamily="34" charset="-122"/>
+                <a:cs typeface="Calibri" pitchFamily="34" charset="-120"/>
+              </a:rPr>
+              <a:t>Filas de puestos con doble monitor, bajo paneles de luz.</a:t>
+            </a:r>
+            <a:endParaRPr lang="en-US" sz="1300" dirty="0"/>
+          </a:p>
+        </p:txBody>
+      </p:sp>
     </p:spTree>
   </p:cSld>
   <p:clrMapOvr>
@@ -2836,7 +2905,7 @@
     <p:bg>
       <p:bgPr>
         <a:solidFill>
-          <a:srgbClr val="FFFFFF"/>
+          <a:srgbClr val="12100E"/>
         </a:solidFill>
       </p:bgPr>
     </p:bg>
@@ -2863,7 +2932,7 @@
         <p:spPr>
           <a:xfrm>
             <a:off x="457200" y="320040"/>
-            <a:ext cx="8229600" cy="731520"/>
+            <a:ext cx="8229600" cy="640080"/>
           </a:xfrm>
           <a:prstGeom prst="rect">
             <a:avLst/>
@@ -2881,78 +2950,21 @@
             <a:r>
               <a:rPr lang="en-US" sz="3400" b="1" dirty="0">
                 <a:solidFill>
-                  <a:srgbClr val="0F2F3A"/>
+                  <a:srgbClr val="F2EEE8"/>
                 </a:solidFill>
                 <a:latin typeface="Cambria" pitchFamily="34" charset="0"/>
                 <a:ea typeface="Cambria" pitchFamily="34" charset="-122"/>
                 <a:cs typeface="Cambria" pitchFamily="34" charset="-120"/>
               </a:rPr>
-              <a:t>Nuestra solución</a:t>
+              <a:t>12 planos del set</a:t>
             </a:r>
             <a:endParaRPr lang="en-US" sz="3400" dirty="0"/>
           </a:p>
         </p:txBody>
-      </p:sp>
-      <p:sp>
-        <p:nvSpPr>
-          <p:cNvPr id="3" name="Shape 1"/>
-          <p:cNvSpPr/>
-          <p:nvPr/>
-        </p:nvSpPr>
-        <p:spPr>
-          <a:xfrm>
-            <a:off x="457200" y="1371600"/>
-            <a:ext cx="2560320" cy="3108960"/>
-          </a:xfrm>
-          <a:prstGeom prst="rect">
-            <a:avLst/>
-          </a:prstGeom>
-          <a:solidFill>
-            <a:srgbClr val="E8F1F2"/>
-          </a:solidFill>
-          <a:ln w="12700">
-            <a:solidFill>
-              <a:srgbClr val="E8F1F2"/>
-            </a:solidFill>
-            <a:prstDash val="solid"/>
-          </a:ln>
-          <a:effectLst>
-            <a:outerShdw sx="100000" sy="100000" kx="0" ky="0" algn="bl" rotWithShape="0" blurRad="101600" dist="25400" dir="5400000">
-              <a:srgbClr val="000000">
-                <a:alpha val="15000"/>
-              </a:srgbClr>
-            </a:outerShdw>
-          </a:effectLst>
-        </p:spPr>
-      </p:sp>
-      <p:sp>
-        <p:nvSpPr>
-          <p:cNvPr id="4" name="Shape 2"/>
-          <p:cNvSpPr/>
-          <p:nvPr/>
-        </p:nvSpPr>
-        <p:spPr>
-          <a:xfrm>
-            <a:off x="731520" y="1645920"/>
-            <a:ext cx="777240" cy="777240"/>
-          </a:xfrm>
-          <a:prstGeom prst="ellipse">
-            <a:avLst/>
-          </a:prstGeom>
-          <a:solidFill>
-            <a:srgbClr val="1C7C7D"/>
-          </a:solidFill>
-          <a:ln w="12700">
-            <a:solidFill>
-              <a:srgbClr val="1C7C7D"/>
-            </a:solidFill>
-            <a:prstDash val="solid"/>
-          </a:ln>
-        </p:spPr>
       </p:sp>
       <p:pic>
         <p:nvPicPr>
-          <p:cNvPr id="5" name="Image 0" descr="preencoded.png">    </p:cNvPr>
+          <p:cNvPr id="3" name="Image 0" descr="/tmp/claude-0/-home-user-other/d8041478-dfcc-5ca6-9236-09cb61fbd919/scratchpad/img/t1.jpg">    </p:cNvPr>
           <p:cNvPicPr>
             <a:picLocks noChangeAspect="1"/>
           </p:cNvPicPr>
@@ -2966,152 +2978,17 @@
         </p:blipFill>
         <p:spPr>
           <a:xfrm>
-            <a:off x="925830" y="1840230"/>
-            <a:ext cx="388620" cy="388620"/>
+            <a:off x="457200" y="1188720"/>
+            <a:ext cx="1965960" cy="1105510"/>
           </a:xfrm>
           <a:prstGeom prst="rect">
             <a:avLst/>
           </a:prstGeom>
         </p:spPr>
       </p:pic>
-      <p:sp>
-        <p:nvSpPr>
-          <p:cNvPr id="6" name="Text 3"/>
-          <p:cNvSpPr txBox="1"/>
-          <p:nvPr/>
-        </p:nvSpPr>
-        <p:spPr>
-          <a:xfrm>
-            <a:off x="731520" y="2651760"/>
-            <a:ext cx="2103120" cy="457200"/>
-          </a:xfrm>
-          <a:prstGeom prst="rect">
-            <a:avLst/>
-          </a:prstGeom>
-          <a:noFill/>
-          <a:ln/>
-        </p:spPr>
-        <p:txBody>
-          <a:bodyPr wrap="square" lIns="0" tIns="0" rIns="0" bIns="0" rtlCol="0" anchor="ctr"/>
-          <a:lstStyle/>
-          <a:p>
-            <a:pPr indent="0" marL="0">
-              <a:buNone/>
-            </a:pPr>
-            <a:r>
-              <a:rPr lang="en-US" sz="2000" b="1" dirty="0">
-                <a:solidFill>
-                  <a:srgbClr val="0F2F3A"/>
-                </a:solidFill>
-                <a:latin typeface="Cambria" pitchFamily="34" charset="0"/>
-                <a:ea typeface="Cambria" pitchFamily="34" charset="-122"/>
-                <a:cs typeface="Cambria" pitchFamily="34" charset="-120"/>
-              </a:rPr>
-              <a:t>Servicio 1</a:t>
-            </a:r>
-            <a:endParaRPr lang="en-US" sz="2000" dirty="0"/>
-          </a:p>
-        </p:txBody>
-      </p:sp>
-      <p:sp>
-        <p:nvSpPr>
-          <p:cNvPr id="7" name="Text 4"/>
-          <p:cNvSpPr txBox="1"/>
-          <p:nvPr/>
-        </p:nvSpPr>
-        <p:spPr>
-          <a:xfrm>
-            <a:off x="731520" y="3154680"/>
-            <a:ext cx="2103120" cy="1188720"/>
-          </a:xfrm>
-          <a:prstGeom prst="rect">
-            <a:avLst/>
-          </a:prstGeom>
-          <a:noFill/>
-          <a:ln/>
-        </p:spPr>
-        <p:txBody>
-          <a:bodyPr wrap="square" lIns="0" tIns="0" rIns="0" bIns="0" rtlCol="0" anchor="t"/>
-          <a:lstStyle/>
-          <a:p>
-            <a:pPr indent="0" marL="0">
-              <a:buNone/>
-            </a:pPr>
-            <a:r>
-              <a:rPr lang="en-US" sz="1400" dirty="0">
-                <a:solidFill>
-                  <a:srgbClr val="1F2D33"/>
-                </a:solidFill>
-                <a:latin typeface="Calibri" pitchFamily="34" charset="0"/>
-                <a:ea typeface="Calibri" pitchFamily="34" charset="-122"/>
-                <a:cs typeface="Calibri" pitchFamily="34" charset="-120"/>
-              </a:rPr>
-              <a:t>Describe en una o dos frases qué ofrece y qué problema resuelve.</a:t>
-            </a:r>
-            <a:endParaRPr lang="en-US" sz="1400" dirty="0"/>
-          </a:p>
-        </p:txBody>
-      </p:sp>
-      <p:sp>
-        <p:nvSpPr>
-          <p:cNvPr id="8" name="Shape 5"/>
-          <p:cNvSpPr/>
-          <p:nvPr/>
-        </p:nvSpPr>
-        <p:spPr>
-          <a:xfrm>
-            <a:off x="3291840" y="1371600"/>
-            <a:ext cx="2560320" cy="3108960"/>
-          </a:xfrm>
-          <a:prstGeom prst="rect">
-            <a:avLst/>
-          </a:prstGeom>
-          <a:solidFill>
-            <a:srgbClr val="E8F1F2"/>
-          </a:solidFill>
-          <a:ln w="12700">
-            <a:solidFill>
-              <a:srgbClr val="E8F1F2"/>
-            </a:solidFill>
-            <a:prstDash val="solid"/>
-          </a:ln>
-          <a:effectLst>
-            <a:outerShdw sx="100000" sy="100000" kx="0" ky="0" algn="bl" rotWithShape="0" blurRad="101600" dist="25400" dir="5400000">
-              <a:srgbClr val="000000">
-                <a:alpha val="15000"/>
-              </a:srgbClr>
-            </a:outerShdw>
-          </a:effectLst>
-        </p:spPr>
-      </p:sp>
-      <p:sp>
-        <p:nvSpPr>
-          <p:cNvPr id="9" name="Shape 6"/>
-          <p:cNvSpPr/>
-          <p:nvPr/>
-        </p:nvSpPr>
-        <p:spPr>
-          <a:xfrm>
-            <a:off x="3566160" y="1645920"/>
-            <a:ext cx="777240" cy="777240"/>
-          </a:xfrm>
-          <a:prstGeom prst="ellipse">
-            <a:avLst/>
-          </a:prstGeom>
-          <a:solidFill>
-            <a:srgbClr val="1C7C7D"/>
-          </a:solidFill>
-          <a:ln w="12700">
-            <a:solidFill>
-              <a:srgbClr val="1C7C7D"/>
-            </a:solidFill>
-            <a:prstDash val="solid"/>
-          </a:ln>
-        </p:spPr>
-      </p:sp>
       <p:pic>
         <p:nvPicPr>
-          <p:cNvPr id="10" name="Image 1" descr="preencoded.png">    </p:cNvPr>
+          <p:cNvPr id="4" name="Image 1" descr="/tmp/claude-0/-home-user-other/d8041478-dfcc-5ca6-9236-09cb61fbd919/scratchpad/img/t2.jpg">    </p:cNvPr>
           <p:cNvPicPr>
             <a:picLocks noChangeAspect="1"/>
           </p:cNvPicPr>
@@ -3125,152 +3002,17 @@
         </p:blipFill>
         <p:spPr>
           <a:xfrm>
-            <a:off x="3760470" y="1840230"/>
-            <a:ext cx="388620" cy="388620"/>
+            <a:off x="2514600" y="1188720"/>
+            <a:ext cx="1965960" cy="1105510"/>
           </a:xfrm>
           <a:prstGeom prst="rect">
             <a:avLst/>
           </a:prstGeom>
         </p:spPr>
       </p:pic>
-      <p:sp>
-        <p:nvSpPr>
-          <p:cNvPr id="11" name="Text 7"/>
-          <p:cNvSpPr txBox="1"/>
-          <p:nvPr/>
-        </p:nvSpPr>
-        <p:spPr>
-          <a:xfrm>
-            <a:off x="3566160" y="2651760"/>
-            <a:ext cx="2103120" cy="457200"/>
-          </a:xfrm>
-          <a:prstGeom prst="rect">
-            <a:avLst/>
-          </a:prstGeom>
-          <a:noFill/>
-          <a:ln/>
-        </p:spPr>
-        <p:txBody>
-          <a:bodyPr wrap="square" lIns="0" tIns="0" rIns="0" bIns="0" rtlCol="0" anchor="ctr"/>
-          <a:lstStyle/>
-          <a:p>
-            <a:pPr indent="0" marL="0">
-              <a:buNone/>
-            </a:pPr>
-            <a:r>
-              <a:rPr lang="en-US" sz="2000" b="1" dirty="0">
-                <a:solidFill>
-                  <a:srgbClr val="0F2F3A"/>
-                </a:solidFill>
-                <a:latin typeface="Cambria" pitchFamily="34" charset="0"/>
-                <a:ea typeface="Cambria" pitchFamily="34" charset="-122"/>
-                <a:cs typeface="Cambria" pitchFamily="34" charset="-120"/>
-              </a:rPr>
-              <a:t>Servicio 2</a:t>
-            </a:r>
-            <a:endParaRPr lang="en-US" sz="2000" dirty="0"/>
-          </a:p>
-        </p:txBody>
-      </p:sp>
-      <p:sp>
-        <p:nvSpPr>
-          <p:cNvPr id="12" name="Text 8"/>
-          <p:cNvSpPr txBox="1"/>
-          <p:nvPr/>
-        </p:nvSpPr>
-        <p:spPr>
-          <a:xfrm>
-            <a:off x="3566160" y="3154680"/>
-            <a:ext cx="2103120" cy="1188720"/>
-          </a:xfrm>
-          <a:prstGeom prst="rect">
-            <a:avLst/>
-          </a:prstGeom>
-          <a:noFill/>
-          <a:ln/>
-        </p:spPr>
-        <p:txBody>
-          <a:bodyPr wrap="square" lIns="0" tIns="0" rIns="0" bIns="0" rtlCol="0" anchor="t"/>
-          <a:lstStyle/>
-          <a:p>
-            <a:pPr indent="0" marL="0">
-              <a:buNone/>
-            </a:pPr>
-            <a:r>
-              <a:rPr lang="en-US" sz="1400" dirty="0">
-                <a:solidFill>
-                  <a:srgbClr val="1F2D33"/>
-                </a:solidFill>
-                <a:latin typeface="Calibri" pitchFamily="34" charset="0"/>
-                <a:ea typeface="Calibri" pitchFamily="34" charset="-122"/>
-                <a:cs typeface="Calibri" pitchFamily="34" charset="-120"/>
-              </a:rPr>
-              <a:t>Describe en una o dos frases qué ofrece y qué problema resuelve.</a:t>
-            </a:r>
-            <a:endParaRPr lang="en-US" sz="1400" dirty="0"/>
-          </a:p>
-        </p:txBody>
-      </p:sp>
-      <p:sp>
-        <p:nvSpPr>
-          <p:cNvPr id="13" name="Shape 9"/>
-          <p:cNvSpPr/>
-          <p:nvPr/>
-        </p:nvSpPr>
-        <p:spPr>
-          <a:xfrm>
-            <a:off x="6126480" y="1371600"/>
-            <a:ext cx="2560320" cy="3108960"/>
-          </a:xfrm>
-          <a:prstGeom prst="rect">
-            <a:avLst/>
-          </a:prstGeom>
-          <a:solidFill>
-            <a:srgbClr val="E8F1F2"/>
-          </a:solidFill>
-          <a:ln w="12700">
-            <a:solidFill>
-              <a:srgbClr val="E8F1F2"/>
-            </a:solidFill>
-            <a:prstDash val="solid"/>
-          </a:ln>
-          <a:effectLst>
-            <a:outerShdw sx="100000" sy="100000" kx="0" ky="0" algn="bl" rotWithShape="0" blurRad="101600" dist="25400" dir="5400000">
-              <a:srgbClr val="000000">
-                <a:alpha val="15000"/>
-              </a:srgbClr>
-            </a:outerShdw>
-          </a:effectLst>
-        </p:spPr>
-      </p:sp>
-      <p:sp>
-        <p:nvSpPr>
-          <p:cNvPr id="14" name="Shape 10"/>
-          <p:cNvSpPr/>
-          <p:nvPr/>
-        </p:nvSpPr>
-        <p:spPr>
-          <a:xfrm>
-            <a:off x="6400800" y="1645920"/>
-            <a:ext cx="777240" cy="777240"/>
-          </a:xfrm>
-          <a:prstGeom prst="ellipse">
-            <a:avLst/>
-          </a:prstGeom>
-          <a:solidFill>
-            <a:srgbClr val="1C7C7D"/>
-          </a:solidFill>
-          <a:ln w="12700">
-            <a:solidFill>
-              <a:srgbClr val="1C7C7D"/>
-            </a:solidFill>
-            <a:prstDash val="solid"/>
-          </a:ln>
-        </p:spPr>
-      </p:sp>
       <p:pic>
         <p:nvPicPr>
-          <p:cNvPr id="15" name="Image 2" descr="preencoded.png">    </p:cNvPr>
+          <p:cNvPr id="5" name="Image 2" descr="/tmp/claude-0/-home-user-other/d8041478-dfcc-5ca6-9236-09cb61fbd919/scratchpad/img/t3.jpg">    </p:cNvPr>
           <p:cNvPicPr>
             <a:picLocks noChangeAspect="1"/>
           </p:cNvPicPr>
@@ -3284,92 +3026,230 @@
         </p:blipFill>
         <p:spPr>
           <a:xfrm>
-            <a:off x="6595110" y="1840230"/>
-            <a:ext cx="388620" cy="388620"/>
+            <a:off x="4572000" y="1188720"/>
+            <a:ext cx="1965960" cy="1105510"/>
           </a:xfrm>
           <a:prstGeom prst="rect">
             <a:avLst/>
           </a:prstGeom>
         </p:spPr>
       </p:pic>
-      <p:sp>
-        <p:nvSpPr>
-          <p:cNvPr id="16" name="Text 11"/>
-          <p:cNvSpPr txBox="1"/>
-          <p:nvPr/>
-        </p:nvSpPr>
-        <p:spPr>
-          <a:xfrm>
-            <a:off x="6400800" y="2651760"/>
-            <a:ext cx="2103120" cy="457200"/>
-          </a:xfrm>
-          <a:prstGeom prst="rect">
-            <a:avLst/>
-          </a:prstGeom>
-          <a:noFill/>
-          <a:ln/>
-        </p:spPr>
-        <p:txBody>
-          <a:bodyPr wrap="square" lIns="0" tIns="0" rIns="0" bIns="0" rtlCol="0" anchor="ctr"/>
-          <a:lstStyle/>
-          <a:p>
-            <a:pPr indent="0" marL="0">
-              <a:buNone/>
-            </a:pPr>
-            <a:r>
-              <a:rPr lang="en-US" sz="2000" b="1" dirty="0">
-                <a:solidFill>
-                  <a:srgbClr val="0F2F3A"/>
-                </a:solidFill>
-                <a:latin typeface="Cambria" pitchFamily="34" charset="0"/>
-                <a:ea typeface="Cambria" pitchFamily="34" charset="-122"/>
-                <a:cs typeface="Cambria" pitchFamily="34" charset="-120"/>
-              </a:rPr>
-              <a:t>Servicio 3</a:t>
-            </a:r>
-            <a:endParaRPr lang="en-US" sz="2000" dirty="0"/>
-          </a:p>
-        </p:txBody>
-      </p:sp>
-      <p:sp>
-        <p:nvSpPr>
-          <p:cNvPr id="17" name="Text 12"/>
-          <p:cNvSpPr txBox="1"/>
-          <p:nvPr/>
-        </p:nvSpPr>
-        <p:spPr>
-          <a:xfrm>
-            <a:off x="6400800" y="3154680"/>
-            <a:ext cx="2103120" cy="1188720"/>
-          </a:xfrm>
-          <a:prstGeom prst="rect">
-            <a:avLst/>
-          </a:prstGeom>
-          <a:noFill/>
-          <a:ln/>
-        </p:spPr>
-        <p:txBody>
-          <a:bodyPr wrap="square" lIns="0" tIns="0" rIns="0" bIns="0" rtlCol="0" anchor="t"/>
-          <a:lstStyle/>
-          <a:p>
-            <a:pPr indent="0" marL="0">
-              <a:buNone/>
-            </a:pPr>
-            <a:r>
-              <a:rPr lang="en-US" sz="1400" dirty="0">
-                <a:solidFill>
-                  <a:srgbClr val="1F2D33"/>
-                </a:solidFill>
-                <a:latin typeface="Calibri" pitchFamily="34" charset="0"/>
-                <a:ea typeface="Calibri" pitchFamily="34" charset="-122"/>
-                <a:cs typeface="Calibri" pitchFamily="34" charset="-120"/>
-              </a:rPr>
-              <a:t>Describe en una o dos frases qué ofrece y qué problema resuelve.</a:t>
-            </a:r>
-            <a:endParaRPr lang="en-US" sz="1400" dirty="0"/>
-          </a:p>
-        </p:txBody>
-      </p:sp>
+      <p:pic>
+        <p:nvPicPr>
+          <p:cNvPr id="6" name="Image 3" descr="/tmp/claude-0/-home-user-other/d8041478-dfcc-5ca6-9236-09cb61fbd919/scratchpad/img/t4.jpg">    </p:cNvPr>
+          <p:cNvPicPr>
+            <a:picLocks noChangeAspect="1"/>
+          </p:cNvPicPr>
+          <p:nvPr/>
+        </p:nvPicPr>
+        <p:blipFill>
+          <a:blip r:embed="rId4"/>
+          <a:stretch>
+            <a:fillRect/>
+          </a:stretch>
+        </p:blipFill>
+        <p:spPr>
+          <a:xfrm>
+            <a:off x="6629400" y="1188720"/>
+            <a:ext cx="1965960" cy="1105510"/>
+          </a:xfrm>
+          <a:prstGeom prst="rect">
+            <a:avLst/>
+          </a:prstGeom>
+        </p:spPr>
+      </p:pic>
+      <p:pic>
+        <p:nvPicPr>
+          <p:cNvPr id="7" name="Image 4" descr="/tmp/claude-0/-home-user-other/d8041478-dfcc-5ca6-9236-09cb61fbd919/scratchpad/img/t5.jpg">    </p:cNvPr>
+          <p:cNvPicPr>
+            <a:picLocks noChangeAspect="1"/>
+          </p:cNvPicPr>
+          <p:nvPr/>
+        </p:nvPicPr>
+        <p:blipFill>
+          <a:blip r:embed="rId5"/>
+          <a:stretch>
+            <a:fillRect/>
+          </a:stretch>
+        </p:blipFill>
+        <p:spPr>
+          <a:xfrm>
+            <a:off x="457200" y="2386584"/>
+            <a:ext cx="1965960" cy="1105510"/>
+          </a:xfrm>
+          <a:prstGeom prst="rect">
+            <a:avLst/>
+          </a:prstGeom>
+        </p:spPr>
+      </p:pic>
+      <p:pic>
+        <p:nvPicPr>
+          <p:cNvPr id="8" name="Image 5" descr="/tmp/claude-0/-home-user-other/d8041478-dfcc-5ca6-9236-09cb61fbd919/scratchpad/img/t6.jpg">    </p:cNvPr>
+          <p:cNvPicPr>
+            <a:picLocks noChangeAspect="1"/>
+          </p:cNvPicPr>
+          <p:nvPr/>
+        </p:nvPicPr>
+        <p:blipFill>
+          <a:blip r:embed="rId6"/>
+          <a:stretch>
+            <a:fillRect/>
+          </a:stretch>
+        </p:blipFill>
+        <p:spPr>
+          <a:xfrm>
+            <a:off x="2514600" y="2386584"/>
+            <a:ext cx="1965960" cy="1105510"/>
+          </a:xfrm>
+          <a:prstGeom prst="rect">
+            <a:avLst/>
+          </a:prstGeom>
+        </p:spPr>
+      </p:pic>
+      <p:pic>
+        <p:nvPicPr>
+          <p:cNvPr id="9" name="Image 6" descr="/tmp/claude-0/-home-user-other/d8041478-dfcc-5ca6-9236-09cb61fbd919/scratchpad/img/t7.jpg">    </p:cNvPr>
+          <p:cNvPicPr>
+            <a:picLocks noChangeAspect="1"/>
+          </p:cNvPicPr>
+          <p:nvPr/>
+        </p:nvPicPr>
+        <p:blipFill>
+          <a:blip r:embed="rId7"/>
+          <a:stretch>
+            <a:fillRect/>
+          </a:stretch>
+        </p:blipFill>
+        <p:spPr>
+          <a:xfrm>
+            <a:off x="4572000" y="2386584"/>
+            <a:ext cx="1965960" cy="1105510"/>
+          </a:xfrm>
+          <a:prstGeom prst="rect">
+            <a:avLst/>
+          </a:prstGeom>
+        </p:spPr>
+      </p:pic>
+      <p:pic>
+        <p:nvPicPr>
+          <p:cNvPr id="10" name="Image 7" descr="/tmp/claude-0/-home-user-other/d8041478-dfcc-5ca6-9236-09cb61fbd919/scratchpad/img/t8.jpg">    </p:cNvPr>
+          <p:cNvPicPr>
+            <a:picLocks noChangeAspect="1"/>
+          </p:cNvPicPr>
+          <p:nvPr/>
+        </p:nvPicPr>
+        <p:blipFill>
+          <a:blip r:embed="rId8"/>
+          <a:stretch>
+            <a:fillRect/>
+          </a:stretch>
+        </p:blipFill>
+        <p:spPr>
+          <a:xfrm>
+            <a:off x="6629400" y="2386584"/>
+            <a:ext cx="1965960" cy="1105510"/>
+          </a:xfrm>
+          <a:prstGeom prst="rect">
+            <a:avLst/>
+          </a:prstGeom>
+        </p:spPr>
+      </p:pic>
+      <p:pic>
+        <p:nvPicPr>
+          <p:cNvPr id="11" name="Image 8" descr="/tmp/claude-0/-home-user-other/d8041478-dfcc-5ca6-9236-09cb61fbd919/scratchpad/img/t9.jpg">    </p:cNvPr>
+          <p:cNvPicPr>
+            <a:picLocks noChangeAspect="1"/>
+          </p:cNvPicPr>
+          <p:nvPr/>
+        </p:nvPicPr>
+        <p:blipFill>
+          <a:blip r:embed="rId9"/>
+          <a:stretch>
+            <a:fillRect/>
+          </a:stretch>
+        </p:blipFill>
+        <p:spPr>
+          <a:xfrm>
+            <a:off x="457200" y="3584448"/>
+            <a:ext cx="1965960" cy="1105510"/>
+          </a:xfrm>
+          <a:prstGeom prst="rect">
+            <a:avLst/>
+          </a:prstGeom>
+        </p:spPr>
+      </p:pic>
+      <p:pic>
+        <p:nvPicPr>
+          <p:cNvPr id="12" name="Image 9" descr="/tmp/claude-0/-home-user-other/d8041478-dfcc-5ca6-9236-09cb61fbd919/scratchpad/img/t10.jpg">    </p:cNvPr>
+          <p:cNvPicPr>
+            <a:picLocks noChangeAspect="1"/>
+          </p:cNvPicPr>
+          <p:nvPr/>
+        </p:nvPicPr>
+        <p:blipFill>
+          <a:blip r:embed="rId10"/>
+          <a:stretch>
+            <a:fillRect/>
+          </a:stretch>
+        </p:blipFill>
+        <p:spPr>
+          <a:xfrm>
+            <a:off x="2514600" y="3584448"/>
+            <a:ext cx="1965960" cy="1105510"/>
+          </a:xfrm>
+          <a:prstGeom prst="rect">
+            <a:avLst/>
+          </a:prstGeom>
+        </p:spPr>
+      </p:pic>
+      <p:pic>
+        <p:nvPicPr>
+          <p:cNvPr id="13" name="Image 10" descr="/tmp/claude-0/-home-user-other/d8041478-dfcc-5ca6-9236-09cb61fbd919/scratchpad/img/t11.jpg">    </p:cNvPr>
+          <p:cNvPicPr>
+            <a:picLocks noChangeAspect="1"/>
+          </p:cNvPicPr>
+          <p:nvPr/>
+        </p:nvPicPr>
+        <p:blipFill>
+          <a:blip r:embed="rId11"/>
+          <a:stretch>
+            <a:fillRect/>
+          </a:stretch>
+        </p:blipFill>
+        <p:spPr>
+          <a:xfrm>
+            <a:off x="4572000" y="3584448"/>
+            <a:ext cx="1965960" cy="1105510"/>
+          </a:xfrm>
+          <a:prstGeom prst="rect">
+            <a:avLst/>
+          </a:prstGeom>
+        </p:spPr>
+      </p:pic>
+      <p:pic>
+        <p:nvPicPr>
+          <p:cNvPr id="14" name="Image 11" descr="/tmp/claude-0/-home-user-other/d8041478-dfcc-5ca6-9236-09cb61fbd919/scratchpad/img/t12.jpg">    </p:cNvPr>
+          <p:cNvPicPr>
+            <a:picLocks noChangeAspect="1"/>
+          </p:cNvPicPr>
+          <p:nvPr/>
+        </p:nvPicPr>
+        <p:blipFill>
+          <a:blip r:embed="rId12"/>
+          <a:stretch>
+            <a:fillRect/>
+          </a:stretch>
+        </p:blipFill>
+        <p:spPr>
+          <a:xfrm>
+            <a:off x="6629400" y="3584448"/>
+            <a:ext cx="1965960" cy="1105510"/>
+          </a:xfrm>
+          <a:prstGeom prst="rect">
+            <a:avLst/>
+          </a:prstGeom>
+        </p:spPr>
+      </p:pic>
     </p:spTree>
   </p:cSld>
   <p:clrMapOvr>
@@ -3384,7 +3264,7 @@
     <p:bg>
       <p:bgPr>
         <a:solidFill>
-          <a:srgbClr val="FFFFFF"/>
+          <a:srgbClr val="12100E"/>
         </a:solidFill>
       </p:bgPr>
     </p:bg>
@@ -3411,7 +3291,7 @@
         <p:spPr>
           <a:xfrm>
             <a:off x="457200" y="320040"/>
-            <a:ext cx="8229600" cy="731520"/>
+            <a:ext cx="8229600" cy="640080"/>
           </a:xfrm>
           <a:prstGeom prst="rect">
             <a:avLst/>
@@ -3429,27 +3309,66 @@
             <a:r>
               <a:rPr lang="en-US" sz="3400" b="1" dirty="0">
                 <a:solidFill>
-                  <a:srgbClr val="0F2F3A"/>
+                  <a:srgbClr val="F2EEE8"/>
                 </a:solidFill>
                 <a:latin typeface="Cambria" pitchFamily="34" charset="0"/>
                 <a:ea typeface="Cambria" pitchFamily="34" charset="-122"/>
                 <a:cs typeface="Cambria" pitchFamily="34" charset="-120"/>
               </a:rPr>
-              <a:t>Resultados</a:t>
+              <a:t>Tiempo invertido</a:t>
             </a:r>
             <a:endParaRPr lang="en-US" sz="3400" dirty="0"/>
+          </a:p>
+        </p:txBody>
+      </p:sp>
+      <p:sp>
+        <p:nvSpPr>
+          <p:cNvPr id="3" name="Text 1"/>
+          <p:cNvSpPr txBox="1"/>
+          <p:nvPr/>
+        </p:nvSpPr>
+        <p:spPr>
+          <a:xfrm>
+            <a:off x="457200" y="960120"/>
+            <a:ext cx="8229600" cy="365760"/>
+          </a:xfrm>
+          <a:prstGeom prst="rect">
+            <a:avLst/>
+          </a:prstGeom>
+          <a:noFill/>
+          <a:ln/>
+        </p:spPr>
+        <p:txBody>
+          <a:bodyPr wrap="square" lIns="0" tIns="0" rIns="0" bIns="0" rtlCol="0" anchor="ctr"/>
+          <a:lstStyle/>
+          <a:p>
+            <a:pPr indent="0" marL="0">
+              <a:buNone/>
+            </a:pPr>
+            <a:r>
+              <a:rPr lang="en-US" sz="1600" dirty="0">
+                <a:solidFill>
+                  <a:srgbClr val="A39B90"/>
+                </a:solidFill>
+                <a:latin typeface="Calibri" pitchFamily="34" charset="0"/>
+                <a:ea typeface="Calibri" pitchFamily="34" charset="-122"/>
+                <a:cs typeface="Calibri" pitchFamily="34" charset="-120"/>
+              </a:rPr>
+              <a:t>50 h de reloj, pero solo ≈ 24 h de actividad y renders</a:t>
+            </a:r>
+            <a:endParaRPr lang="en-US" sz="1600" dirty="0"/>
           </a:p>
         </p:txBody>
       </p:sp>
       <p:graphicFrame>
         <p:nvGraphicFramePr>
-          <p:cNvPr id="3" name="Chart 0" descr=""/>
+          <p:cNvPr id="4" name="Chart 0" descr=""/>
           <p:cNvGraphicFramePr/>
           <p:nvPr/>
         </p:nvGraphicFramePr>
         <p:xfrm>
-          <a:off x="457200" y="1280160"/>
-          <a:ext cx="5120640" cy="3200400"/>
+          <a:off x="274320" y="1417320"/>
+          <a:ext cx="4206240" cy="3063240"/>
         </p:xfrm>
         <a:graphic xmlns:a="http://schemas.openxmlformats.org/drawingml/2006/main">
           <a:graphicData uri="http://schemas.openxmlformats.org/drawingml/2006/chart">
@@ -3459,24 +3378,24 @@
       </p:graphicFrame>
       <p:sp>
         <p:nvSpPr>
-          <p:cNvPr id="4" name="Shape 1"/>
+          <p:cNvPr id="5" name="Shape 2"/>
           <p:cNvSpPr/>
           <p:nvPr/>
         </p:nvSpPr>
         <p:spPr>
           <a:xfrm>
-            <a:off x="5852160" y="1280160"/>
-            <a:ext cx="2834640" cy="3200400"/>
+            <a:off x="4754880" y="1463040"/>
+            <a:ext cx="3931920" cy="713232"/>
           </a:xfrm>
           <a:prstGeom prst="rect">
             <a:avLst/>
           </a:prstGeom>
           <a:solidFill>
-            <a:srgbClr val="0F2F3A"/>
+            <a:srgbClr val="221F1B"/>
           </a:solidFill>
           <a:ln w="12700">
             <a:solidFill>
-              <a:srgbClr val="0F2F3A"/>
+              <a:srgbClr val="221F1B"/>
             </a:solidFill>
             <a:prstDash val="solid"/>
           </a:ln>
@@ -3484,24 +3403,24 @@
       </p:sp>
       <p:sp>
         <p:nvSpPr>
-          <p:cNvPr id="5" name="Shape 2"/>
+          <p:cNvPr id="6" name="Shape 3"/>
           <p:cNvSpPr/>
           <p:nvPr/>
         </p:nvSpPr>
         <p:spPr>
           <a:xfrm>
-            <a:off x="6126480" y="1554480"/>
-            <a:ext cx="640080" cy="640080"/>
+            <a:off x="4892040" y="1591056"/>
+            <a:ext cx="457200" cy="457200"/>
           </a:xfrm>
           <a:prstGeom prst="ellipse">
             <a:avLst/>
           </a:prstGeom>
           <a:solidFill>
-            <a:srgbClr val="F28F3B"/>
+            <a:srgbClr val="FFFFFF"/>
           </a:solidFill>
           <a:ln w="12700">
             <a:solidFill>
-              <a:srgbClr val="F28F3B"/>
+              <a:srgbClr val="FFFFFF"/>
             </a:solidFill>
             <a:prstDash val="solid"/>
           </a:ln>
@@ -3509,7 +3428,7 @@
       </p:sp>
       <p:pic>
         <p:nvPicPr>
-          <p:cNvPr id="6" name="Image 0" descr="preencoded.png">    </p:cNvPr>
+          <p:cNvPr id="7" name="Image 0" descr="preencoded.png">    </p:cNvPr>
           <p:cNvPicPr>
             <a:picLocks noChangeAspect="1"/>
           </p:cNvPicPr>
@@ -3523,8 +3442,8 @@
         </p:blipFill>
         <p:spPr>
           <a:xfrm>
-            <a:off x="6286500" y="1714500"/>
-            <a:ext cx="320040" cy="320040"/>
+            <a:off x="5015484" y="1714500"/>
+            <a:ext cx="210312" cy="210312"/>
           </a:xfrm>
           <a:prstGeom prst="rect">
             <a:avLst/>
@@ -3533,14 +3452,14 @@
       </p:pic>
       <p:sp>
         <p:nvSpPr>
-          <p:cNvPr id="7" name="Text 3"/>
+          <p:cNvPr id="8" name="Text 4"/>
           <p:cNvSpPr txBox="1"/>
           <p:nvPr/>
         </p:nvSpPr>
         <p:spPr>
           <a:xfrm>
-            <a:off x="6126480" y="2377440"/>
-            <a:ext cx="2286000" cy="914400"/>
+            <a:off x="5440680" y="1463040"/>
+            <a:ext cx="1600200" cy="713232"/>
           </a:xfrm>
           <a:prstGeom prst="rect">
             <a:avLst/>
@@ -3556,30 +3475,30 @@
               <a:buNone/>
             </a:pPr>
             <a:r>
-              <a:rPr lang="en-US" sz="5400" b="1" dirty="0">
-                <a:solidFill>
-                  <a:srgbClr val="FFFFFF"/>
+              <a:rPr lang="en-US" sz="2000" b="1" dirty="0">
+                <a:solidFill>
+                  <a:srgbClr val="F2EEE8"/>
                 </a:solidFill>
                 <a:latin typeface="Cambria" pitchFamily="34" charset="0"/>
                 <a:ea typeface="Cambria" pitchFamily="34" charset="-122"/>
                 <a:cs typeface="Cambria" pitchFamily="34" charset="-120"/>
               </a:rPr>
-              <a:t>+38%</a:t>
-            </a:r>
-            <a:endParaRPr lang="en-US" sz="5400" dirty="0"/>
-          </a:p>
-        </p:txBody>
-      </p:sp>
-      <p:sp>
-        <p:nvSpPr>
-          <p:cNvPr id="8" name="Text 4"/>
+              <a:t>50 h</a:t>
+            </a:r>
+            <a:endParaRPr lang="en-US" sz="2000" dirty="0"/>
+          </a:p>
+        </p:txBody>
+      </p:sp>
+      <p:sp>
+        <p:nvSpPr>
+          <p:cNvPr id="9" name="Text 5"/>
           <p:cNvSpPr txBox="1"/>
           <p:nvPr/>
         </p:nvSpPr>
         <p:spPr>
           <a:xfrm>
-            <a:off x="6126480" y="3337560"/>
-            <a:ext cx="2286000" cy="822960"/>
+            <a:off x="7086600" y="1463040"/>
+            <a:ext cx="1554480" cy="713232"/>
           </a:xfrm>
           <a:prstGeom prst="rect">
             <a:avLst/>
@@ -3588,24 +3507,587 @@
           <a:ln/>
         </p:spPr>
         <p:txBody>
-          <a:bodyPr wrap="square" lIns="0" tIns="0" rIns="0" bIns="0" rtlCol="0" anchor="t"/>
-          <a:lstStyle/>
-          <a:p>
-            <a:pPr indent="0" marL="0">
-              <a:buNone/>
-            </a:pPr>
-            <a:r>
-              <a:rPr lang="en-US" sz="1400" dirty="0">
-                <a:solidFill>
-                  <a:srgbClr val="CADCE0"/>
+          <a:bodyPr wrap="square" lIns="0" tIns="0" rIns="0" bIns="0" rtlCol="0" anchor="ctr"/>
+          <a:lstStyle/>
+          <a:p>
+            <a:pPr indent="0" marL="0">
+              <a:buNone/>
+            </a:pPr>
+            <a:r>
+              <a:rPr lang="en-US" sz="1100" b="1" dirty="0">
+                <a:solidFill>
+                  <a:srgbClr val="F2EEE8"/>
                 </a:solidFill>
                 <a:latin typeface="Calibri" pitchFamily="34" charset="0"/>
                 <a:ea typeface="Calibri" pitchFamily="34" charset="-122"/>
                 <a:cs typeface="Calibri" pitchFamily="34" charset="-120"/>
               </a:rPr>
-              <a:t>crecimiento anual frente al año anterior</a:t>
-            </a:r>
-            <a:endParaRPr lang="en-US" sz="1400" dirty="0"/>
+              <a:t>Reloj total</a:t>
+            </a:r>
+            <a:endParaRPr lang="en-US" sz="1100" dirty="0"/>
+          </a:p>
+          <a:p>
+            <a:pPr indent="0" marL="0">
+              <a:buNone/>
+            </a:pPr>
+            <a:r>
+              <a:rPr lang="en-US" sz="1100" dirty="0">
+                <a:solidFill>
+                  <a:srgbClr val="A39B90"/>
+                </a:solidFill>
+                <a:latin typeface="Calibri" pitchFamily="34" charset="0"/>
+                <a:ea typeface="Calibri" pitchFamily="34" charset="-122"/>
+                <a:cs typeface="Calibri" pitchFamily="34" charset="-120"/>
+              </a:rPr>
+              <a:t>28/09 16:16 → 30/09 18:26</a:t>
+            </a:r>
+            <a:endParaRPr lang="en-US" sz="1100" dirty="0"/>
+          </a:p>
+        </p:txBody>
+      </p:sp>
+      <p:sp>
+        <p:nvSpPr>
+          <p:cNvPr id="10" name="Shape 6"/>
+          <p:cNvSpPr/>
+          <p:nvPr/>
+        </p:nvSpPr>
+        <p:spPr>
+          <a:xfrm>
+            <a:off x="4754880" y="2286000"/>
+            <a:ext cx="3931920" cy="713232"/>
+          </a:xfrm>
+          <a:prstGeom prst="rect">
+            <a:avLst/>
+          </a:prstGeom>
+          <a:solidFill>
+            <a:srgbClr val="221F1B"/>
+          </a:solidFill>
+          <a:ln w="12700">
+            <a:solidFill>
+              <a:srgbClr val="221F1B"/>
+            </a:solidFill>
+            <a:prstDash val="solid"/>
+          </a:ln>
+        </p:spPr>
+      </p:sp>
+      <p:sp>
+        <p:nvSpPr>
+          <p:cNvPr id="11" name="Shape 7"/>
+          <p:cNvSpPr/>
+          <p:nvPr/>
+        </p:nvSpPr>
+        <p:spPr>
+          <a:xfrm>
+            <a:off x="4892040" y="2414016"/>
+            <a:ext cx="457200" cy="457200"/>
+          </a:xfrm>
+          <a:prstGeom prst="ellipse">
+            <a:avLst/>
+          </a:prstGeom>
+          <a:solidFill>
+            <a:srgbClr val="5B9BFF"/>
+          </a:solidFill>
+          <a:ln w="12700">
+            <a:solidFill>
+              <a:srgbClr val="5B9BFF"/>
+            </a:solidFill>
+            <a:prstDash val="solid"/>
+          </a:ln>
+        </p:spPr>
+      </p:sp>
+      <p:pic>
+        <p:nvPicPr>
+          <p:cNvPr id="12" name="Image 1" descr="preencoded.png">    </p:cNvPr>
+          <p:cNvPicPr>
+            <a:picLocks noChangeAspect="1"/>
+          </p:cNvPicPr>
+          <p:nvPr/>
+        </p:nvPicPr>
+        <p:blipFill>
+          <a:blip r:embed="rId3"/>
+          <a:stretch>
+            <a:fillRect/>
+          </a:stretch>
+        </p:blipFill>
+        <p:spPr>
+          <a:xfrm>
+            <a:off x="5015484" y="2537460"/>
+            <a:ext cx="210312" cy="210312"/>
+          </a:xfrm>
+          <a:prstGeom prst="rect">
+            <a:avLst/>
+          </a:prstGeom>
+        </p:spPr>
+      </p:pic>
+      <p:sp>
+        <p:nvSpPr>
+          <p:cNvPr id="13" name="Text 8"/>
+          <p:cNvSpPr txBox="1"/>
+          <p:nvPr/>
+        </p:nvSpPr>
+        <p:spPr>
+          <a:xfrm>
+            <a:off x="5440680" y="2286000"/>
+            <a:ext cx="1600200" cy="713232"/>
+          </a:xfrm>
+          <a:prstGeom prst="rect">
+            <a:avLst/>
+          </a:prstGeom>
+          <a:noFill/>
+          <a:ln/>
+        </p:spPr>
+        <p:txBody>
+          <a:bodyPr wrap="square" lIns="0" tIns="0" rIns="0" bIns="0" rtlCol="0" anchor="ctr"/>
+          <a:lstStyle/>
+          <a:p>
+            <a:pPr indent="0" marL="0">
+              <a:buNone/>
+            </a:pPr>
+            <a:r>
+              <a:rPr lang="en-US" sz="2000" b="1" dirty="0">
+                <a:solidFill>
+                  <a:srgbClr val="F2EEE8"/>
+                </a:solidFill>
+                <a:latin typeface="Cambria" pitchFamily="34" charset="0"/>
+                <a:ea typeface="Cambria" pitchFamily="34" charset="-122"/>
+                <a:cs typeface="Cambria" pitchFamily="34" charset="-120"/>
+              </a:rPr>
+              <a:t>≈ 9 h</a:t>
+            </a:r>
+            <a:endParaRPr lang="en-US" sz="2000" dirty="0"/>
+          </a:p>
+        </p:txBody>
+      </p:sp>
+      <p:sp>
+        <p:nvSpPr>
+          <p:cNvPr id="14" name="Text 9"/>
+          <p:cNvSpPr txBox="1"/>
+          <p:nvPr/>
+        </p:nvSpPr>
+        <p:spPr>
+          <a:xfrm>
+            <a:off x="7086600" y="2286000"/>
+            <a:ext cx="1554480" cy="713232"/>
+          </a:xfrm>
+          <a:prstGeom prst="rect">
+            <a:avLst/>
+          </a:prstGeom>
+          <a:noFill/>
+          <a:ln/>
+        </p:spPr>
+        <p:txBody>
+          <a:bodyPr wrap="square" lIns="0" tIns="0" rIns="0" bIns="0" rtlCol="0" anchor="ctr"/>
+          <a:lstStyle/>
+          <a:p>
+            <a:pPr indent="0" marL="0">
+              <a:buNone/>
+            </a:pPr>
+            <a:r>
+              <a:rPr lang="en-US" sz="1100" b="1" dirty="0">
+                <a:solidFill>
+                  <a:srgbClr val="F2EEE8"/>
+                </a:solidFill>
+                <a:latin typeface="Calibri" pitchFamily="34" charset="0"/>
+                <a:ea typeface="Calibri" pitchFamily="34" charset="-122"/>
+                <a:cs typeface="Calibri" pitchFamily="34" charset="-120"/>
+              </a:rPr>
+              <a:t>Trabajo activo</a:t>
+            </a:r>
+            <a:endParaRPr lang="en-US" sz="1100" dirty="0"/>
+          </a:p>
+          <a:p>
+            <a:pPr indent="0" marL="0">
+              <a:buNone/>
+            </a:pPr>
+            <a:r>
+              <a:rPr lang="en-US" sz="1100" dirty="0">
+                <a:solidFill>
+                  <a:srgbClr val="A39B90"/>
+                </a:solidFill>
+                <a:latin typeface="Calibri" pitchFamily="34" charset="0"/>
+                <a:ea typeface="Calibri" pitchFamily="34" charset="-122"/>
+                <a:cs typeface="Calibri" pitchFamily="34" charset="-120"/>
+              </a:rPr>
+              <a:t>de Claude, sin renders</a:t>
+            </a:r>
+            <a:endParaRPr lang="en-US" sz="1100" dirty="0"/>
+          </a:p>
+        </p:txBody>
+      </p:sp>
+      <p:sp>
+        <p:nvSpPr>
+          <p:cNvPr id="15" name="Shape 10"/>
+          <p:cNvSpPr/>
+          <p:nvPr/>
+        </p:nvSpPr>
+        <p:spPr>
+          <a:xfrm>
+            <a:off x="4754880" y="3108960"/>
+            <a:ext cx="3931920" cy="713232"/>
+          </a:xfrm>
+          <a:prstGeom prst="rect">
+            <a:avLst/>
+          </a:prstGeom>
+          <a:solidFill>
+            <a:srgbClr val="221F1B"/>
+          </a:solidFill>
+          <a:ln w="12700">
+            <a:solidFill>
+              <a:srgbClr val="221F1B"/>
+            </a:solidFill>
+            <a:prstDash val="solid"/>
+          </a:ln>
+        </p:spPr>
+      </p:sp>
+      <p:sp>
+        <p:nvSpPr>
+          <p:cNvPr id="16" name="Shape 11"/>
+          <p:cNvSpPr/>
+          <p:nvPr/>
+        </p:nvSpPr>
+        <p:spPr>
+          <a:xfrm>
+            <a:off x="4892040" y="3236976"/>
+            <a:ext cx="457200" cy="457200"/>
+          </a:xfrm>
+          <a:prstGeom prst="ellipse">
+            <a:avLst/>
+          </a:prstGeom>
+          <a:solidFill>
+            <a:srgbClr val="4CAF50"/>
+          </a:solidFill>
+          <a:ln w="12700">
+            <a:solidFill>
+              <a:srgbClr val="4CAF50"/>
+            </a:solidFill>
+            <a:prstDash val="solid"/>
+          </a:ln>
+        </p:spPr>
+      </p:sp>
+      <p:pic>
+        <p:nvPicPr>
+          <p:cNvPr id="17" name="Image 2" descr="preencoded.png">    </p:cNvPr>
+          <p:cNvPicPr>
+            <a:picLocks noChangeAspect="1"/>
+          </p:cNvPicPr>
+          <p:nvPr/>
+        </p:nvPicPr>
+        <p:blipFill>
+          <a:blip r:embed="rId4"/>
+          <a:stretch>
+            <a:fillRect/>
+          </a:stretch>
+        </p:blipFill>
+        <p:spPr>
+          <a:xfrm>
+            <a:off x="5015484" y="3360420"/>
+            <a:ext cx="210312" cy="210312"/>
+          </a:xfrm>
+          <a:prstGeom prst="rect">
+            <a:avLst/>
+          </a:prstGeom>
+        </p:spPr>
+      </p:pic>
+      <p:sp>
+        <p:nvSpPr>
+          <p:cNvPr id="18" name="Text 12"/>
+          <p:cNvSpPr txBox="1"/>
+          <p:nvPr/>
+        </p:nvSpPr>
+        <p:spPr>
+          <a:xfrm>
+            <a:off x="5440680" y="3108960"/>
+            <a:ext cx="1600200" cy="713232"/>
+          </a:xfrm>
+          <a:prstGeom prst="rect">
+            <a:avLst/>
+          </a:prstGeom>
+          <a:noFill/>
+          <a:ln/>
+        </p:spPr>
+        <p:txBody>
+          <a:bodyPr wrap="square" lIns="0" tIns="0" rIns="0" bIns="0" rtlCol="0" anchor="ctr"/>
+          <a:lstStyle/>
+          <a:p>
+            <a:pPr indent="0" marL="0">
+              <a:buNone/>
+            </a:pPr>
+            <a:r>
+              <a:rPr lang="en-US" sz="2000" b="1" dirty="0">
+                <a:solidFill>
+                  <a:srgbClr val="F2EEE8"/>
+                </a:solidFill>
+                <a:latin typeface="Cambria" pitchFamily="34" charset="0"/>
+                <a:ea typeface="Cambria" pitchFamily="34" charset="-122"/>
+                <a:cs typeface="Cambria" pitchFamily="34" charset="-120"/>
+              </a:rPr>
+              <a:t>≈ 14–15 h</a:t>
+            </a:r>
+            <a:endParaRPr lang="en-US" sz="2000" dirty="0"/>
+          </a:p>
+        </p:txBody>
+      </p:sp>
+      <p:sp>
+        <p:nvSpPr>
+          <p:cNvPr id="19" name="Text 13"/>
+          <p:cNvSpPr txBox="1"/>
+          <p:nvPr/>
+        </p:nvSpPr>
+        <p:spPr>
+          <a:xfrm>
+            <a:off x="7086600" y="3108960"/>
+            <a:ext cx="1554480" cy="713232"/>
+          </a:xfrm>
+          <a:prstGeom prst="rect">
+            <a:avLst/>
+          </a:prstGeom>
+          <a:noFill/>
+          <a:ln/>
+        </p:spPr>
+        <p:txBody>
+          <a:bodyPr wrap="square" lIns="0" tIns="0" rIns="0" bIns="0" rtlCol="0" anchor="ctr"/>
+          <a:lstStyle/>
+          <a:p>
+            <a:pPr indent="0" marL="0">
+              <a:buNone/>
+            </a:pPr>
+            <a:r>
+              <a:rPr lang="en-US" sz="1100" b="1" dirty="0">
+                <a:solidFill>
+                  <a:srgbClr val="F2EEE8"/>
+                </a:solidFill>
+                <a:latin typeface="Calibri" pitchFamily="34" charset="0"/>
+                <a:ea typeface="Calibri" pitchFamily="34" charset="-122"/>
+                <a:cs typeface="Calibri" pitchFamily="34" charset="-120"/>
+              </a:rPr>
+              <a:t>Renders</a:t>
+            </a:r>
+            <a:endParaRPr lang="en-US" sz="1100" dirty="0"/>
+          </a:p>
+          <a:p>
+            <a:pPr indent="0" marL="0">
+              <a:buNone/>
+            </a:pPr>
+            <a:r>
+              <a:rPr lang="en-US" sz="1100" dirty="0">
+                <a:solidFill>
+                  <a:srgbClr val="A39B90"/>
+                </a:solidFill>
+                <a:latin typeface="Calibri" pitchFamily="34" charset="0"/>
+                <a:ea typeface="Calibri" pitchFamily="34" charset="-122"/>
+                <a:cs typeface="Calibri" pitchFamily="34" charset="-120"/>
+              </a:rPr>
+              <a:t>espera de la máquina</a:t>
+            </a:r>
+            <a:endParaRPr lang="en-US" sz="1100" dirty="0"/>
+          </a:p>
+        </p:txBody>
+      </p:sp>
+      <p:sp>
+        <p:nvSpPr>
+          <p:cNvPr id="20" name="Shape 14"/>
+          <p:cNvSpPr/>
+          <p:nvPr/>
+        </p:nvSpPr>
+        <p:spPr>
+          <a:xfrm>
+            <a:off x="4754880" y="3931920"/>
+            <a:ext cx="3931920" cy="713232"/>
+          </a:xfrm>
+          <a:prstGeom prst="rect">
+            <a:avLst/>
+          </a:prstGeom>
+          <a:solidFill>
+            <a:srgbClr val="221F1B"/>
+          </a:solidFill>
+          <a:ln w="12700">
+            <a:solidFill>
+              <a:srgbClr val="221F1B"/>
+            </a:solidFill>
+            <a:prstDash val="solid"/>
+          </a:ln>
+        </p:spPr>
+      </p:sp>
+      <p:sp>
+        <p:nvSpPr>
+          <p:cNvPr id="21" name="Shape 15"/>
+          <p:cNvSpPr/>
+          <p:nvPr/>
+        </p:nvSpPr>
+        <p:spPr>
+          <a:xfrm>
+            <a:off x="4892040" y="4059936"/>
+            <a:ext cx="457200" cy="457200"/>
+          </a:xfrm>
+          <a:prstGeom prst="ellipse">
+            <a:avLst/>
+          </a:prstGeom>
+          <a:solidFill>
+            <a:srgbClr val="E0A84A"/>
+          </a:solidFill>
+          <a:ln w="12700">
+            <a:solidFill>
+              <a:srgbClr val="E0A84A"/>
+            </a:solidFill>
+            <a:prstDash val="solid"/>
+          </a:ln>
+        </p:spPr>
+      </p:sp>
+      <p:pic>
+        <p:nvPicPr>
+          <p:cNvPr id="22" name="Image 3" descr="preencoded.png">    </p:cNvPr>
+          <p:cNvPicPr>
+            <a:picLocks noChangeAspect="1"/>
+          </p:cNvPicPr>
+          <p:nvPr/>
+        </p:nvPicPr>
+        <p:blipFill>
+          <a:blip r:embed="rId5"/>
+          <a:stretch>
+            <a:fillRect/>
+          </a:stretch>
+        </p:blipFill>
+        <p:spPr>
+          <a:xfrm>
+            <a:off x="5015484" y="4183380"/>
+            <a:ext cx="210312" cy="210312"/>
+          </a:xfrm>
+          <a:prstGeom prst="rect">
+            <a:avLst/>
+          </a:prstGeom>
+        </p:spPr>
+      </p:pic>
+      <p:sp>
+        <p:nvSpPr>
+          <p:cNvPr id="23" name="Text 16"/>
+          <p:cNvSpPr txBox="1"/>
+          <p:nvPr/>
+        </p:nvSpPr>
+        <p:spPr>
+          <a:xfrm>
+            <a:off x="5440680" y="3931920"/>
+            <a:ext cx="1600200" cy="713232"/>
+          </a:xfrm>
+          <a:prstGeom prst="rect">
+            <a:avLst/>
+          </a:prstGeom>
+          <a:noFill/>
+          <a:ln/>
+        </p:spPr>
+        <p:txBody>
+          <a:bodyPr wrap="square" lIns="0" tIns="0" rIns="0" bIns="0" rtlCol="0" anchor="ctr"/>
+          <a:lstStyle/>
+          <a:p>
+            <a:pPr indent="0" marL="0">
+              <a:buNone/>
+            </a:pPr>
+            <a:r>
+              <a:rPr lang="en-US" sz="2000" b="1" dirty="0">
+                <a:solidFill>
+                  <a:srgbClr val="F2EEE8"/>
+                </a:solidFill>
+                <a:latin typeface="Cambria" pitchFamily="34" charset="0"/>
+                <a:ea typeface="Cambria" pitchFamily="34" charset="-122"/>
+                <a:cs typeface="Cambria" pitchFamily="34" charset="-120"/>
+              </a:rPr>
+              <a:t>≈ 24 h</a:t>
+            </a:r>
+            <a:endParaRPr lang="en-US" sz="2000" dirty="0"/>
+          </a:p>
+        </p:txBody>
+      </p:sp>
+      <p:sp>
+        <p:nvSpPr>
+          <p:cNvPr id="24" name="Text 17"/>
+          <p:cNvSpPr txBox="1"/>
+          <p:nvPr/>
+        </p:nvSpPr>
+        <p:spPr>
+          <a:xfrm>
+            <a:off x="7086600" y="3931920"/>
+            <a:ext cx="1554480" cy="713232"/>
+          </a:xfrm>
+          <a:prstGeom prst="rect">
+            <a:avLst/>
+          </a:prstGeom>
+          <a:noFill/>
+          <a:ln/>
+        </p:spPr>
+        <p:txBody>
+          <a:bodyPr wrap="square" lIns="0" tIns="0" rIns="0" bIns="0" rtlCol="0" anchor="ctr"/>
+          <a:lstStyle/>
+          <a:p>
+            <a:pPr indent="0" marL="0">
+              <a:buNone/>
+            </a:pPr>
+            <a:r>
+              <a:rPr lang="en-US" sz="1100" b="1" dirty="0">
+                <a:solidFill>
+                  <a:srgbClr val="F2EEE8"/>
+                </a:solidFill>
+                <a:latin typeface="Calibri" pitchFamily="34" charset="0"/>
+                <a:ea typeface="Calibri" pitchFamily="34" charset="-122"/>
+                <a:cs typeface="Calibri" pitchFamily="34" charset="-120"/>
+              </a:rPr>
+              <a:t>Actividad + renders</a:t>
+            </a:r>
+            <a:endParaRPr lang="en-US" sz="1100" dirty="0"/>
+          </a:p>
+          <a:p>
+            <a:pPr indent="0" marL="0">
+              <a:buNone/>
+            </a:pPr>
+            <a:r>
+              <a:rPr lang="en-US" sz="1100" dirty="0">
+                <a:solidFill>
+                  <a:srgbClr val="A39B90"/>
+                </a:solidFill>
+                <a:latin typeface="Calibri" pitchFamily="34" charset="0"/>
+                <a:ea typeface="Calibri" pitchFamily="34" charset="-122"/>
+                <a:cs typeface="Calibri" pitchFamily="34" charset="-120"/>
+              </a:rPr>
+              <a:t>50 h − 26 h sin actividad</a:t>
+            </a:r>
+            <a:endParaRPr lang="en-US" sz="1100" dirty="0"/>
+          </a:p>
+        </p:txBody>
+      </p:sp>
+      <p:sp>
+        <p:nvSpPr>
+          <p:cNvPr id="25" name="Text 18"/>
+          <p:cNvSpPr txBox="1"/>
+          <p:nvPr/>
+        </p:nvSpPr>
+        <p:spPr>
+          <a:xfrm>
+            <a:off x="457200" y="4526280"/>
+            <a:ext cx="4114800" cy="320040"/>
+          </a:xfrm>
+          <a:prstGeom prst="rect">
+            <a:avLst/>
+          </a:prstGeom>
+          <a:noFill/>
+          <a:ln/>
+        </p:spPr>
+        <p:txBody>
+          <a:bodyPr wrap="square" lIns="0" tIns="0" rIns="0" bIns="0" rtlCol="0" anchor="ctr"/>
+          <a:lstStyle/>
+          <a:p>
+            <a:pPr indent="0" marL="0">
+              <a:buNone/>
+            </a:pPr>
+            <a:r>
+              <a:rPr lang="en-US" sz="1000" dirty="0">
+                <a:solidFill>
+                  <a:srgbClr val="A39B90"/>
+                </a:solidFill>
+                <a:latin typeface="Calibri" pitchFamily="34" charset="0"/>
+                <a:ea typeface="Calibri" pitchFamily="34" charset="-122"/>
+                <a:cs typeface="Calibri" pitchFamily="34" charset="-120"/>
+              </a:rPr>
+              <a:t>El gráfico usa 15 h para los renders (rango medido: 14–15 h).</a:t>
+            </a:r>
+            <a:endParaRPr lang="en-US" sz="1000" dirty="0"/>
           </a:p>
         </p:txBody>
       </p:sp>
@@ -3623,7 +4105,7 @@
     <p:bg>
       <p:bgPr>
         <a:solidFill>
-          <a:srgbClr val="FFFFFF"/>
+          <a:srgbClr val="12100E"/>
         </a:solidFill>
       </p:bgPr>
     </p:bg>
@@ -3650,7 +4132,7 @@
         <p:spPr>
           <a:xfrm>
             <a:off x="457200" y="320040"/>
-            <a:ext cx="8229600" cy="731520"/>
+            <a:ext cx="8229600" cy="640080"/>
           </a:xfrm>
           <a:prstGeom prst="rect">
             <a:avLst/>
@@ -3668,13 +4150,13 @@
             <a:r>
               <a:rPr lang="en-US" sz="3400" b="1" dirty="0">
                 <a:solidFill>
-                  <a:srgbClr val="0F2F3A"/>
+                  <a:srgbClr val="F2EEE8"/>
                 </a:solidFill>
                 <a:latin typeface="Cambria" pitchFamily="34" charset="0"/>
                 <a:ea typeface="Cambria" pitchFamily="34" charset="-122"/>
                 <a:cs typeface="Cambria" pitchFamily="34" charset="-120"/>
               </a:rPr>
-              <a:t>Hoja de ruta</a:t>
+              <a:t>Límites de uso</a:t>
             </a:r>
             <a:endParaRPr lang="en-US" sz="3400" dirty="0"/>
           </a:p>
@@ -3682,22 +4164,63 @@
       </p:sp>
       <p:sp>
         <p:nvSpPr>
-          <p:cNvPr id="3" name="Shape 1"/>
+          <p:cNvPr id="3" name="Text 1"/>
+          <p:cNvSpPr txBox="1"/>
+          <p:nvPr/>
+        </p:nvSpPr>
+        <p:spPr>
+          <a:xfrm>
+            <a:off x="457200" y="960120"/>
+            <a:ext cx="8229600" cy="365760"/>
+          </a:xfrm>
+          <a:prstGeom prst="rect">
+            <a:avLst/>
+          </a:prstGeom>
+          <a:noFill/>
+          <a:ln/>
+        </p:spPr>
+        <p:txBody>
+          <a:bodyPr wrap="square" lIns="0" tIns="0" rIns="0" bIns="0" rtlCol="0" anchor="ctr"/>
+          <a:lstStyle/>
+          <a:p>
+            <a:pPr indent="0" marL="0">
+              <a:buNone/>
+            </a:pPr>
+            <a:r>
+              <a:rPr lang="en-US" sz="1600" dirty="0">
+                <a:solidFill>
+                  <a:srgbClr val="A39B90"/>
+                </a:solidFill>
+                <a:latin typeface="Calibri" pitchFamily="34" charset="0"/>
+                <a:ea typeface="Calibri" pitchFamily="34" charset="-122"/>
+                <a:cs typeface="Calibri" pitchFamily="34" charset="-120"/>
+              </a:rPr>
+              <a:t>Consumo de la cuenta durante el proyecto</a:t>
+            </a:r>
+            <a:endParaRPr lang="en-US" sz="1600" dirty="0"/>
+          </a:p>
+        </p:txBody>
+      </p:sp>
+      <p:sp>
+        <p:nvSpPr>
+          <p:cNvPr id="4" name="Shape 2"/>
           <p:cNvSpPr/>
           <p:nvPr/>
         </p:nvSpPr>
         <p:spPr>
           <a:xfrm>
-            <a:off x="1097280" y="2331720"/>
-            <a:ext cx="6309360" cy="0"/>
-          </a:xfrm>
-          <a:prstGeom prst="line">
-            <a:avLst/>
-          </a:prstGeom>
-          <a:noFill/>
-          <a:ln w="31750">
+            <a:off x="457200" y="1508760"/>
+            <a:ext cx="2560320" cy="3017520"/>
+          </a:xfrm>
+          <a:prstGeom prst="rect">
+            <a:avLst/>
+          </a:prstGeom>
+          <a:solidFill>
+            <a:srgbClr val="221F1B"/>
+          </a:solidFill>
+          <a:ln w="12700">
             <a:solidFill>
-              <a:srgbClr val="1C7C7D"/>
+              <a:srgbClr val="221F1B"/>
             </a:solidFill>
             <a:prstDash val="solid"/>
           </a:ln>
@@ -3705,24 +4228,116 @@
       </p:sp>
       <p:sp>
         <p:nvSpPr>
-          <p:cNvPr id="4" name="Shape 2"/>
+          <p:cNvPr id="5" name="Text 3"/>
+          <p:cNvSpPr txBox="1"/>
+          <p:nvPr/>
+        </p:nvSpPr>
+        <p:spPr>
+          <a:xfrm>
+            <a:off x="685800" y="1645920"/>
+            <a:ext cx="2103120" cy="411480"/>
+          </a:xfrm>
+          <a:prstGeom prst="rect">
+            <a:avLst/>
+          </a:prstGeom>
+          <a:noFill/>
+          <a:ln/>
+        </p:spPr>
+        <p:txBody>
+          <a:bodyPr wrap="square" lIns="0" tIns="0" rIns="0" bIns="0" rtlCol="0" anchor="t"/>
+          <a:lstStyle/>
+          <a:p>
+            <a:pPr indent="0" marL="0">
+              <a:buNone/>
+            </a:pPr>
+            <a:r>
+              <a:rPr lang="en-US" sz="1100" b="1" spc="100" kern="0" dirty="0">
+                <a:solidFill>
+                  <a:srgbClr val="A39B90"/>
+                </a:solidFill>
+                <a:latin typeface="Calibri" pitchFamily="34" charset="0"/>
+                <a:ea typeface="Calibri" pitchFamily="34" charset="-122"/>
+                <a:cs typeface="Calibri" pitchFamily="34" charset="-120"/>
+              </a:rPr>
+              <a:t>LÍMITE DE 5 HORAS</a:t>
+            </a:r>
+            <a:endParaRPr lang="en-US" sz="1100" dirty="0"/>
+          </a:p>
+        </p:txBody>
+      </p:sp>
+      <p:sp>
+        <p:nvSpPr>
+          <p:cNvPr id="6" name="Text 4"/>
+          <p:cNvSpPr txBox="1"/>
+          <p:nvPr/>
+        </p:nvSpPr>
+        <p:spPr>
+          <a:xfrm>
+            <a:off x="685800" y="2103120"/>
+            <a:ext cx="2103120" cy="640080"/>
+          </a:xfrm>
+          <a:prstGeom prst="rect">
+            <a:avLst/>
+          </a:prstGeom>
+          <a:noFill/>
+          <a:ln/>
+        </p:spPr>
+        <p:txBody>
+          <a:bodyPr wrap="square" lIns="0" tIns="0" rIns="0" bIns="0" rtlCol="0" anchor="ctr"/>
+          <a:lstStyle/>
+          <a:p>
+            <a:pPr indent="0" marL="0">
+              <a:buNone/>
+            </a:pPr>
+            <a:r>
+              <a:rPr lang="en-US" sz="4000" b="1" dirty="0">
+                <a:solidFill>
+                  <a:srgbClr val="F2EEE8"/>
+                </a:solidFill>
+                <a:latin typeface="Cambria" pitchFamily="34" charset="0"/>
+                <a:ea typeface="Cambria" pitchFamily="34" charset="-122"/>
+                <a:cs typeface="Cambria" pitchFamily="34" charset="-120"/>
+              </a:rPr>
+              <a:t>10 %</a:t>
+            </a:r>
+            <a:pPr indent="0" marL="0">
+              <a:buNone/>
+            </a:pPr>
+            <a:r>
+              <a:rPr lang="en-US" sz="1400" dirty="0">
+                <a:solidFill>
+                  <a:srgbClr val="A39B90"/>
+                </a:solidFill>
+                <a:latin typeface="Cambria" pitchFamily="34" charset="0"/>
+                <a:ea typeface="Cambria" pitchFamily="34" charset="-122"/>
+                <a:cs typeface="Cambria" pitchFamily="34" charset="-120"/>
+              </a:rPr>
+              <a:t>  usado</a:t>
+            </a:r>
+            <a:endParaRPr lang="en-US" sz="4000" dirty="0"/>
+          </a:p>
+        </p:txBody>
+      </p:sp>
+      <p:sp>
+        <p:nvSpPr>
+          <p:cNvPr id="7" name="Shape 5"/>
           <p:cNvSpPr/>
           <p:nvPr/>
         </p:nvSpPr>
         <p:spPr>
           <a:xfrm>
-            <a:off x="457200" y="2011680"/>
-            <a:ext cx="640080" cy="640080"/>
-          </a:xfrm>
-          <a:prstGeom prst="ellipse">
+            <a:off x="685800" y="2834640"/>
+            <a:ext cx="2103120" cy="128016"/>
+          </a:xfrm>
+          <a:prstGeom prst="rect">
             <a:avLst/>
           </a:prstGeom>
           <a:solidFill>
-            <a:srgbClr val="F28F3B"/>
+            <a:srgbClr val="3A362F"/>
           </a:solidFill>
           <a:ln w="12700">
             <a:solidFill>
-              <a:srgbClr val="F28F3B"/>
+              <a:srgbClr val="3A362F"/>
             </a:solidFill>
             <a:prstDash val="solid"/>
           </a:ln>
@@ -3730,14 +4345,39 @@
       </p:sp>
       <p:sp>
         <p:nvSpPr>
-          <p:cNvPr id="5" name="Text 3"/>
+          <p:cNvPr id="8" name="Shape 6"/>
+          <p:cNvSpPr/>
+          <p:nvPr/>
+        </p:nvSpPr>
+        <p:spPr>
+          <a:xfrm>
+            <a:off x="685800" y="2834640"/>
+            <a:ext cx="210312" cy="128016"/>
+          </a:xfrm>
+          <a:prstGeom prst="rect">
+            <a:avLst/>
+          </a:prstGeom>
+          <a:solidFill>
+            <a:srgbClr val="5B9BFF"/>
+          </a:solidFill>
+          <a:ln w="12700">
+            <a:solidFill>
+              <a:srgbClr val="5B9BFF"/>
+            </a:solidFill>
+            <a:prstDash val="solid"/>
+          </a:ln>
+        </p:spPr>
+      </p:sp>
+      <p:sp>
+        <p:nvSpPr>
+          <p:cNvPr id="9" name="Text 7"/>
           <p:cNvSpPr txBox="1"/>
           <p:nvPr/>
         </p:nvSpPr>
         <p:spPr>
           <a:xfrm>
-            <a:off x="457200" y="2011680"/>
-            <a:ext cx="640080" cy="640080"/>
+            <a:off x="685800" y="3108960"/>
+            <a:ext cx="2103120" cy="1280160"/>
           </a:xfrm>
           <a:prstGeom prst="rect">
             <a:avLst/>
@@ -3746,37 +4386,224 @@
           <a:ln/>
         </p:spPr>
         <p:txBody>
+          <a:bodyPr wrap="square" lIns="0" tIns="0" rIns="0" bIns="0" rtlCol="0" anchor="t"/>
+          <a:lstStyle/>
+          <a:p>
+            <a:pPr indent="0" marL="0">
+              <a:spcAft>
+                <a:spcPts val="400"/>
+              </a:spcAft>
+              <a:buNone/>
+            </a:pPr>
+            <a:r>
+              <a:rPr lang="en-US" sz="1200" b="1" dirty="0">
+                <a:solidFill>
+                  <a:srgbClr val="F2EEE8"/>
+                </a:solidFill>
+                <a:latin typeface="Calibri" pitchFamily="34" charset="0"/>
+                <a:ea typeface="Calibri" pitchFamily="34" charset="-122"/>
+                <a:cs typeface="Calibri" pitchFamily="34" charset="-120"/>
+              </a:rPr>
+              <a:t>Se reinicia en 1 h 43 min.</a:t>
+            </a:r>
+            <a:endParaRPr lang="en-US" sz="1200" dirty="0"/>
+          </a:p>
+          <a:p>
+            <a:pPr indent="0" marL="0">
+              <a:buNone/>
+            </a:pPr>
+            <a:r>
+              <a:rPr lang="en-US" sz="1200" dirty="0">
+                <a:solidFill>
+                  <a:srgbClr val="A39B90"/>
+                </a:solidFill>
+                <a:latin typeface="Calibri" pitchFamily="34" charset="0"/>
+                <a:ea typeface="Calibri" pitchFamily="34" charset="-122"/>
+                <a:cs typeface="Calibri" pitchFamily="34" charset="-120"/>
+              </a:rPr>
+              <a:t>Hoy se alcanzó una vez.</a:t>
+            </a:r>
+            <a:endParaRPr lang="en-US" sz="1200" dirty="0"/>
+          </a:p>
+        </p:txBody>
+      </p:sp>
+      <p:sp>
+        <p:nvSpPr>
+          <p:cNvPr id="10" name="Shape 8"/>
+          <p:cNvSpPr/>
+          <p:nvPr/>
+        </p:nvSpPr>
+        <p:spPr>
+          <a:xfrm>
+            <a:off x="3291840" y="1508760"/>
+            <a:ext cx="2560320" cy="3017520"/>
+          </a:xfrm>
+          <a:prstGeom prst="rect">
+            <a:avLst/>
+          </a:prstGeom>
+          <a:solidFill>
+            <a:srgbClr val="221F1B"/>
+          </a:solidFill>
+          <a:ln w="12700">
+            <a:solidFill>
+              <a:srgbClr val="221F1B"/>
+            </a:solidFill>
+            <a:prstDash val="solid"/>
+          </a:ln>
+        </p:spPr>
+      </p:sp>
+      <p:sp>
+        <p:nvSpPr>
+          <p:cNvPr id="11" name="Text 9"/>
+          <p:cNvSpPr txBox="1"/>
+          <p:nvPr/>
+        </p:nvSpPr>
+        <p:spPr>
+          <a:xfrm>
+            <a:off x="3520440" y="1645920"/>
+            <a:ext cx="2103120" cy="411480"/>
+          </a:xfrm>
+          <a:prstGeom prst="rect">
+            <a:avLst/>
+          </a:prstGeom>
+          <a:noFill/>
+          <a:ln/>
+        </p:spPr>
+        <p:txBody>
+          <a:bodyPr wrap="square" lIns="0" tIns="0" rIns="0" bIns="0" rtlCol="0" anchor="t"/>
+          <a:lstStyle/>
+          <a:p>
+            <a:pPr indent="0" marL="0">
+              <a:buNone/>
+            </a:pPr>
+            <a:r>
+              <a:rPr lang="en-US" sz="1100" b="1" spc="100" kern="0" dirty="0">
+                <a:solidFill>
+                  <a:srgbClr val="A39B90"/>
+                </a:solidFill>
+                <a:latin typeface="Calibri" pitchFamily="34" charset="0"/>
+                <a:ea typeface="Calibri" pitchFamily="34" charset="-122"/>
+                <a:cs typeface="Calibri" pitchFamily="34" charset="-120"/>
+              </a:rPr>
+              <a:t>LÍMITE SEMANAL · TODOS LOS MODELOS</a:t>
+            </a:r>
+            <a:endParaRPr lang="en-US" sz="1100" dirty="0"/>
+          </a:p>
+        </p:txBody>
+      </p:sp>
+      <p:sp>
+        <p:nvSpPr>
+          <p:cNvPr id="12" name="Text 10"/>
+          <p:cNvSpPr txBox="1"/>
+          <p:nvPr/>
+        </p:nvSpPr>
+        <p:spPr>
+          <a:xfrm>
+            <a:off x="3520440" y="2103120"/>
+            <a:ext cx="2103120" cy="640080"/>
+          </a:xfrm>
+          <a:prstGeom prst="rect">
+            <a:avLst/>
+          </a:prstGeom>
+          <a:noFill/>
+          <a:ln/>
+        </p:spPr>
+        <p:txBody>
           <a:bodyPr wrap="square" lIns="0" tIns="0" rIns="0" bIns="0" rtlCol="0" anchor="ctr"/>
           <a:lstStyle/>
           <a:p>
-            <a:pPr algn="ctr" indent="0" marL="0">
-              <a:buNone/>
-            </a:pPr>
-            <a:r>
-              <a:rPr lang="en-US" sz="2000" b="1" dirty="0">
-                <a:solidFill>
-                  <a:srgbClr val="FFFFFF"/>
+            <a:pPr indent="0" marL="0">
+              <a:buNone/>
+            </a:pPr>
+            <a:r>
+              <a:rPr lang="en-US" sz="4000" b="1" dirty="0">
+                <a:solidFill>
+                  <a:srgbClr val="F2EEE8"/>
                 </a:solidFill>
                 <a:latin typeface="Cambria" pitchFamily="34" charset="0"/>
                 <a:ea typeface="Cambria" pitchFamily="34" charset="-122"/>
                 <a:cs typeface="Cambria" pitchFamily="34" charset="-120"/>
               </a:rPr>
-              <a:t>1</a:t>
-            </a:r>
-            <a:endParaRPr lang="en-US" sz="2000" dirty="0"/>
-          </a:p>
-        </p:txBody>
-      </p:sp>
-      <p:sp>
-        <p:nvSpPr>
-          <p:cNvPr id="6" name="Text 4"/>
+              <a:t>40 %</a:t>
+            </a:r>
+            <a:pPr indent="0" marL="0">
+              <a:buNone/>
+            </a:pPr>
+            <a:r>
+              <a:rPr lang="en-US" sz="1400" dirty="0">
+                <a:solidFill>
+                  <a:srgbClr val="A39B90"/>
+                </a:solidFill>
+                <a:latin typeface="Cambria" pitchFamily="34" charset="0"/>
+                <a:ea typeface="Cambria" pitchFamily="34" charset="-122"/>
+                <a:cs typeface="Cambria" pitchFamily="34" charset="-120"/>
+              </a:rPr>
+              <a:t>  usado</a:t>
+            </a:r>
+            <a:endParaRPr lang="en-US" sz="4000" dirty="0"/>
+          </a:p>
+        </p:txBody>
+      </p:sp>
+      <p:sp>
+        <p:nvSpPr>
+          <p:cNvPr id="13" name="Shape 11"/>
+          <p:cNvSpPr/>
+          <p:nvPr/>
+        </p:nvSpPr>
+        <p:spPr>
+          <a:xfrm>
+            <a:off x="3520440" y="2834640"/>
+            <a:ext cx="2103120" cy="128016"/>
+          </a:xfrm>
+          <a:prstGeom prst="rect">
+            <a:avLst/>
+          </a:prstGeom>
+          <a:solidFill>
+            <a:srgbClr val="3A362F"/>
+          </a:solidFill>
+          <a:ln w="12700">
+            <a:solidFill>
+              <a:srgbClr val="3A362F"/>
+            </a:solidFill>
+            <a:prstDash val="solid"/>
+          </a:ln>
+        </p:spPr>
+      </p:sp>
+      <p:sp>
+        <p:nvSpPr>
+          <p:cNvPr id="14" name="Shape 12"/>
+          <p:cNvSpPr/>
+          <p:nvPr/>
+        </p:nvSpPr>
+        <p:spPr>
+          <a:xfrm>
+            <a:off x="3520440" y="2834640"/>
+            <a:ext cx="841248" cy="128016"/>
+          </a:xfrm>
+          <a:prstGeom prst="rect">
+            <a:avLst/>
+          </a:prstGeom>
+          <a:solidFill>
+            <a:srgbClr val="4CAF50"/>
+          </a:solidFill>
+          <a:ln w="12700">
+            <a:solidFill>
+              <a:srgbClr val="4CAF50"/>
+            </a:solidFill>
+            <a:prstDash val="solid"/>
+          </a:ln>
+        </p:spPr>
+      </p:sp>
+      <p:sp>
+        <p:nvSpPr>
+          <p:cNvPr id="15" name="Text 13"/>
           <p:cNvSpPr txBox="1"/>
           <p:nvPr/>
         </p:nvSpPr>
         <p:spPr>
           <a:xfrm>
-            <a:off x="457200" y="2971800"/>
-            <a:ext cx="2011680" cy="365760"/>
+            <a:off x="3520440" y="3108960"/>
+            <a:ext cx="2103120" cy="1280160"/>
           </a:xfrm>
           <a:prstGeom prst="rect">
             <a:avLst/>
@@ -3785,37 +4612,82 @@
           <a:ln/>
         </p:spPr>
         <p:txBody>
-          <a:bodyPr wrap="square" lIns="0" tIns="0" rIns="0" bIns="0" rtlCol="0" anchor="ctr"/>
-          <a:lstStyle/>
-          <a:p>
-            <a:pPr indent="0" marL="0">
-              <a:buNone/>
-            </a:pPr>
-            <a:r>
-              <a:rPr lang="en-US" sz="1400" b="1" dirty="0">
-                <a:solidFill>
-                  <a:srgbClr val="1C7C7D"/>
+          <a:bodyPr wrap="square" lIns="0" tIns="0" rIns="0" bIns="0" rtlCol="0" anchor="t"/>
+          <a:lstStyle/>
+          <a:p>
+            <a:pPr indent="0" marL="0">
+              <a:spcAft>
+                <a:spcPts val="400"/>
+              </a:spcAft>
+              <a:buNone/>
+            </a:pPr>
+            <a:r>
+              <a:rPr lang="en-US" sz="1200" b="1" dirty="0">
+                <a:solidFill>
+                  <a:srgbClr val="F2EEE8"/>
                 </a:solidFill>
                 <a:latin typeface="Calibri" pitchFamily="34" charset="0"/>
                 <a:ea typeface="Calibri" pitchFamily="34" charset="-122"/>
                 <a:cs typeface="Calibri" pitchFamily="34" charset="-120"/>
               </a:rPr>
-              <a:t>Q4 2026</a:t>
-            </a:r>
-            <a:endParaRPr lang="en-US" sz="1400" dirty="0"/>
-          </a:p>
-        </p:txBody>
-      </p:sp>
-      <p:sp>
-        <p:nvSpPr>
-          <p:cNvPr id="7" name="Text 5"/>
+              <a:t>Se reinicia el 03/10.</a:t>
+            </a:r>
+            <a:endParaRPr lang="en-US" sz="1200" dirty="0"/>
+          </a:p>
+          <a:p>
+            <a:pPr indent="0" marL="0">
+              <a:buNone/>
+            </a:pPr>
+            <a:r>
+              <a:rPr lang="en-US" sz="1200" dirty="0">
+                <a:solidFill>
+                  <a:srgbClr val="A39B90"/>
+                </a:solidFill>
+                <a:latin typeface="Calibri" pitchFamily="34" charset="0"/>
+                <a:ea typeface="Calibri" pitchFamily="34" charset="-122"/>
+                <a:cs typeface="Calibri" pitchFamily="34" charset="-120"/>
+              </a:rPr>
+              <a:t>No se puede aislar la parte de este proyecto; como empezó el 28/09, probablemente es la mayor parte.</a:t>
+            </a:r>
+            <a:endParaRPr lang="en-US" sz="1200" dirty="0"/>
+          </a:p>
+        </p:txBody>
+      </p:sp>
+      <p:sp>
+        <p:nvSpPr>
+          <p:cNvPr id="16" name="Shape 14"/>
+          <p:cNvSpPr/>
+          <p:nvPr/>
+        </p:nvSpPr>
+        <p:spPr>
+          <a:xfrm>
+            <a:off x="6126480" y="1508760"/>
+            <a:ext cx="2560320" cy="3017520"/>
+          </a:xfrm>
+          <a:prstGeom prst="rect">
+            <a:avLst/>
+          </a:prstGeom>
+          <a:solidFill>
+            <a:srgbClr val="221F1B"/>
+          </a:solidFill>
+          <a:ln w="12700">
+            <a:solidFill>
+              <a:srgbClr val="221F1B"/>
+            </a:solidFill>
+            <a:prstDash val="solid"/>
+          </a:ln>
+        </p:spPr>
+      </p:sp>
+      <p:sp>
+        <p:nvSpPr>
+          <p:cNvPr id="17" name="Text 15"/>
           <p:cNvSpPr txBox="1"/>
           <p:nvPr/>
         </p:nvSpPr>
         <p:spPr>
           <a:xfrm>
-            <a:off x="457200" y="3337560"/>
-            <a:ext cx="2011680" cy="457200"/>
+            <a:off x="6355080" y="1645920"/>
+            <a:ext cx="2103120" cy="411480"/>
           </a:xfrm>
           <a:prstGeom prst="rect">
             <a:avLst/>
@@ -3824,6 +4696,45 @@
           <a:ln/>
         </p:spPr>
         <p:txBody>
+          <a:bodyPr wrap="square" lIns="0" tIns="0" rIns="0" bIns="0" rtlCol="0" anchor="t"/>
+          <a:lstStyle/>
+          <a:p>
+            <a:pPr indent="0" marL="0">
+              <a:buNone/>
+            </a:pPr>
+            <a:r>
+              <a:rPr lang="en-US" sz="1100" b="1" spc="100" kern="0" dirty="0">
+                <a:solidFill>
+                  <a:srgbClr val="A39B90"/>
+                </a:solidFill>
+                <a:latin typeface="Calibri" pitchFamily="34" charset="0"/>
+                <a:ea typeface="Calibri" pitchFamily="34" charset="-122"/>
+                <a:cs typeface="Calibri" pitchFamily="34" charset="-120"/>
+              </a:rPr>
+              <a:t>USO EXTRA</a:t>
+            </a:r>
+            <a:endParaRPr lang="en-US" sz="1100" dirty="0"/>
+          </a:p>
+        </p:txBody>
+      </p:sp>
+      <p:sp>
+        <p:nvSpPr>
+          <p:cNvPr id="18" name="Text 16"/>
+          <p:cNvSpPr txBox="1"/>
+          <p:nvPr/>
+        </p:nvSpPr>
+        <p:spPr>
+          <a:xfrm>
+            <a:off x="6355080" y="2103120"/>
+            <a:ext cx="2103120" cy="640080"/>
+          </a:xfrm>
+          <a:prstGeom prst="rect">
+            <a:avLst/>
+          </a:prstGeom>
+          <a:noFill/>
+          <a:ln/>
+        </p:spPr>
+        <p:txBody>
           <a:bodyPr wrap="square" lIns="0" tIns="0" rIns="0" bIns="0" rtlCol="0" anchor="ctr"/>
           <a:lstStyle/>
           <a:p>
@@ -3831,30 +4742,30 @@
               <a:buNone/>
             </a:pPr>
             <a:r>
-              <a:rPr lang="en-US" sz="1800" b="1" dirty="0">
-                <a:solidFill>
-                  <a:srgbClr val="0F2F3A"/>
+              <a:rPr lang="en-US" sz="2200" b="1" dirty="0">
+                <a:solidFill>
+                  <a:srgbClr val="F2EEE8"/>
                 </a:solidFill>
                 <a:latin typeface="Cambria" pitchFamily="34" charset="0"/>
                 <a:ea typeface="Cambria" pitchFamily="34" charset="-122"/>
                 <a:cs typeface="Cambria" pitchFamily="34" charset="-120"/>
               </a:rPr>
-              <a:t>Lanzamiento</a:t>
-            </a:r>
-            <a:endParaRPr lang="en-US" sz="1800" dirty="0"/>
-          </a:p>
-        </p:txBody>
-      </p:sp>
-      <p:sp>
-        <p:nvSpPr>
-          <p:cNvPr id="8" name="Text 6"/>
+              <a:t>Desactivado</a:t>
+            </a:r>
+            <a:endParaRPr lang="en-US" sz="2200" dirty="0"/>
+          </a:p>
+        </p:txBody>
+      </p:sp>
+      <p:sp>
+        <p:nvSpPr>
+          <p:cNvPr id="19" name="Text 17"/>
           <p:cNvSpPr txBox="1"/>
           <p:nvPr/>
         </p:nvSpPr>
         <p:spPr>
           <a:xfrm>
-            <a:off x="457200" y="3840480"/>
-            <a:ext cx="1828800" cy="731520"/>
+            <a:off x="6355080" y="2788920"/>
+            <a:ext cx="2103120" cy="365760"/>
           </a:xfrm>
           <a:prstGeom prst="rect">
             <a:avLst/>
@@ -3863,567 +4774,83 @@
           <a:ln/>
         </p:spPr>
         <p:txBody>
+          <a:bodyPr wrap="square" lIns="0" tIns="0" rIns="0" bIns="0" rtlCol="0" anchor="ctr"/>
+          <a:lstStyle/>
+          <a:p>
+            <a:pPr indent="0" marL="0">
+              <a:buNone/>
+            </a:pPr>
+            <a:r>
+              <a:rPr lang="en-US" sz="2000" b="1" dirty="0">
+                <a:solidFill>
+                  <a:srgbClr val="E0A84A"/>
+                </a:solidFill>
+                <a:latin typeface="Cambria" pitchFamily="34" charset="0"/>
+                <a:ea typeface="Cambria" pitchFamily="34" charset="-122"/>
+                <a:cs typeface="Cambria" pitchFamily="34" charset="-120"/>
+              </a:rPr>
+              <a:t>43,47 USD</a:t>
+            </a:r>
+            <a:endParaRPr lang="en-US" sz="2000" dirty="0"/>
+          </a:p>
+        </p:txBody>
+      </p:sp>
+      <p:sp>
+        <p:nvSpPr>
+          <p:cNvPr id="20" name="Text 18"/>
+          <p:cNvSpPr txBox="1"/>
+          <p:nvPr/>
+        </p:nvSpPr>
+        <p:spPr>
+          <a:xfrm>
+            <a:off x="6355080" y="3200400"/>
+            <a:ext cx="2103120" cy="1234440"/>
+          </a:xfrm>
+          <a:prstGeom prst="rect">
+            <a:avLst/>
+          </a:prstGeom>
+          <a:noFill/>
+          <a:ln/>
+        </p:spPr>
+        <p:txBody>
           <a:bodyPr wrap="square" lIns="0" tIns="0" rIns="0" bIns="0" rtlCol="0" anchor="t"/>
           <a:lstStyle/>
           <a:p>
             <a:pPr indent="0" marL="0">
-              <a:buNone/>
-            </a:pPr>
-            <a:r>
-              <a:rPr lang="en-US" sz="1400" dirty="0">
-                <a:solidFill>
-                  <a:srgbClr val="1F2D33"/>
+              <a:spcAft>
+                <a:spcPts val="400"/>
+              </a:spcAft>
+              <a:buNone/>
+            </a:pPr>
+            <a:r>
+              <a:rPr lang="en-US" sz="1200" dirty="0">
+                <a:solidFill>
+                  <a:srgbClr val="F2EEE8"/>
                 </a:solidFill>
                 <a:latin typeface="Calibri" pitchFamily="34" charset="0"/>
                 <a:ea typeface="Calibri" pitchFamily="34" charset="-122"/>
                 <a:cs typeface="Calibri" pitchFamily="34" charset="-120"/>
               </a:rPr>
-              <a:t>Hito principal del período.</a:t>
-            </a:r>
-            <a:endParaRPr lang="en-US" sz="1400" dirty="0"/>
-          </a:p>
-        </p:txBody>
-      </p:sp>
-      <p:sp>
-        <p:nvSpPr>
-          <p:cNvPr id="9" name="Shape 7"/>
-          <p:cNvSpPr/>
-          <p:nvPr/>
-        </p:nvSpPr>
-        <p:spPr>
-          <a:xfrm>
-            <a:off x="2560320" y="2011680"/>
-            <a:ext cx="640080" cy="640080"/>
-          </a:xfrm>
-          <a:prstGeom prst="ellipse">
-            <a:avLst/>
-          </a:prstGeom>
-          <a:solidFill>
-            <a:srgbClr val="1C7C7D"/>
-          </a:solidFill>
-          <a:ln w="12700">
-            <a:solidFill>
-              <a:srgbClr val="1C7C7D"/>
-            </a:solidFill>
-            <a:prstDash val="solid"/>
-          </a:ln>
-        </p:spPr>
-      </p:sp>
-      <p:sp>
-        <p:nvSpPr>
-          <p:cNvPr id="10" name="Text 8"/>
-          <p:cNvSpPr txBox="1"/>
-          <p:nvPr/>
-        </p:nvSpPr>
-        <p:spPr>
-          <a:xfrm>
-            <a:off x="2560320" y="2011680"/>
-            <a:ext cx="640080" cy="640080"/>
-          </a:xfrm>
-          <a:prstGeom prst="rect">
-            <a:avLst/>
-          </a:prstGeom>
-          <a:noFill/>
-          <a:ln/>
-        </p:spPr>
-        <p:txBody>
-          <a:bodyPr wrap="square" lIns="0" tIns="0" rIns="0" bIns="0" rtlCol="0" anchor="ctr"/>
-          <a:lstStyle/>
-          <a:p>
-            <a:pPr algn="ctr" indent="0" marL="0">
-              <a:buNone/>
-            </a:pPr>
-            <a:r>
-              <a:rPr lang="en-US" sz="2000" b="1" dirty="0">
-                <a:solidFill>
-                  <a:srgbClr val="FFFFFF"/>
-                </a:solidFill>
-                <a:latin typeface="Cambria" pitchFamily="34" charset="0"/>
-                <a:ea typeface="Cambria" pitchFamily="34" charset="-122"/>
-                <a:cs typeface="Cambria" pitchFamily="34" charset="-120"/>
-              </a:rPr>
-              <a:t>2</a:t>
-            </a:r>
-            <a:endParaRPr lang="en-US" sz="2000" dirty="0"/>
-          </a:p>
-        </p:txBody>
-      </p:sp>
-      <p:sp>
-        <p:nvSpPr>
-          <p:cNvPr id="11" name="Text 9"/>
-          <p:cNvSpPr txBox="1"/>
-          <p:nvPr/>
-        </p:nvSpPr>
-        <p:spPr>
-          <a:xfrm>
-            <a:off x="2560320" y="2971800"/>
-            <a:ext cx="2011680" cy="365760"/>
-          </a:xfrm>
-          <a:prstGeom prst="rect">
-            <a:avLst/>
-          </a:prstGeom>
-          <a:noFill/>
-          <a:ln/>
-        </p:spPr>
-        <p:txBody>
-          <a:bodyPr wrap="square" lIns="0" tIns="0" rIns="0" bIns="0" rtlCol="0" anchor="ctr"/>
-          <a:lstStyle/>
-          <a:p>
-            <a:pPr indent="0" marL="0">
-              <a:buNone/>
-            </a:pPr>
-            <a:r>
-              <a:rPr lang="en-US" sz="1400" b="1" dirty="0">
-                <a:solidFill>
-                  <a:srgbClr val="1C7C7D"/>
+              <a:t>en el contador de la cuenta, con límite mensual de 10 USD.</a:t>
+            </a:r>
+            <a:endParaRPr lang="en-US" sz="1200" dirty="0"/>
+          </a:p>
+          <a:p>
+            <a:pPr indent="0" marL="0">
+              <a:buNone/>
+            </a:pPr>
+            <a:r>
+              <a:rPr lang="en-US" sz="1200" dirty="0">
+                <a:solidFill>
+                  <a:srgbClr val="A39B90"/>
                 </a:solidFill>
                 <a:latin typeface="Calibri" pitchFamily="34" charset="0"/>
                 <a:ea typeface="Calibri" pitchFamily="34" charset="-122"/>
                 <a:cs typeface="Calibri" pitchFamily="34" charset="-120"/>
               </a:rPr>
-              <a:t>Q1 2027</a:t>
-            </a:r>
-            <a:endParaRPr lang="en-US" sz="1400" dirty="0"/>
-          </a:p>
-        </p:txBody>
-      </p:sp>
-      <p:sp>
-        <p:nvSpPr>
-          <p:cNvPr id="12" name="Text 10"/>
-          <p:cNvSpPr txBox="1"/>
-          <p:nvPr/>
-        </p:nvSpPr>
-        <p:spPr>
-          <a:xfrm>
-            <a:off x="2560320" y="3337560"/>
-            <a:ext cx="2011680" cy="457200"/>
-          </a:xfrm>
-          <a:prstGeom prst="rect">
-            <a:avLst/>
-          </a:prstGeom>
-          <a:noFill/>
-          <a:ln/>
-        </p:spPr>
-        <p:txBody>
-          <a:bodyPr wrap="square" lIns="0" tIns="0" rIns="0" bIns="0" rtlCol="0" anchor="ctr"/>
-          <a:lstStyle/>
-          <a:p>
-            <a:pPr indent="0" marL="0">
-              <a:buNone/>
-            </a:pPr>
-            <a:r>
-              <a:rPr lang="en-US" sz="1800" b="1" dirty="0">
-                <a:solidFill>
-                  <a:srgbClr val="0F2F3A"/>
-                </a:solidFill>
-                <a:latin typeface="Cambria" pitchFamily="34" charset="0"/>
-                <a:ea typeface="Cambria" pitchFamily="34" charset="-122"/>
-                <a:cs typeface="Cambria" pitchFamily="34" charset="-120"/>
-              </a:rPr>
-              <a:t>Expansión</a:t>
-            </a:r>
-            <a:endParaRPr lang="en-US" sz="1800" dirty="0"/>
-          </a:p>
-        </p:txBody>
-      </p:sp>
-      <p:sp>
-        <p:nvSpPr>
-          <p:cNvPr id="13" name="Text 11"/>
-          <p:cNvSpPr txBox="1"/>
-          <p:nvPr/>
-        </p:nvSpPr>
-        <p:spPr>
-          <a:xfrm>
-            <a:off x="2560320" y="3840480"/>
-            <a:ext cx="1828800" cy="731520"/>
-          </a:xfrm>
-          <a:prstGeom prst="rect">
-            <a:avLst/>
-          </a:prstGeom>
-          <a:noFill/>
-          <a:ln/>
-        </p:spPr>
-        <p:txBody>
-          <a:bodyPr wrap="square" lIns="0" tIns="0" rIns="0" bIns="0" rtlCol="0" anchor="t"/>
-          <a:lstStyle/>
-          <a:p>
-            <a:pPr indent="0" marL="0">
-              <a:buNone/>
-            </a:pPr>
-            <a:r>
-              <a:rPr lang="en-US" sz="1400" dirty="0">
-                <a:solidFill>
-                  <a:srgbClr val="1F2D33"/>
-                </a:solidFill>
-                <a:latin typeface="Calibri" pitchFamily="34" charset="0"/>
-                <a:ea typeface="Calibri" pitchFamily="34" charset="-122"/>
-                <a:cs typeface="Calibri" pitchFamily="34" charset="-120"/>
-              </a:rPr>
-              <a:t>Nuevos clientes o mercados.</a:t>
-            </a:r>
-            <a:endParaRPr lang="en-US" sz="1400" dirty="0"/>
-          </a:p>
-        </p:txBody>
-      </p:sp>
-      <p:sp>
-        <p:nvSpPr>
-          <p:cNvPr id="14" name="Shape 12"/>
-          <p:cNvSpPr/>
-          <p:nvPr/>
-        </p:nvSpPr>
-        <p:spPr>
-          <a:xfrm>
-            <a:off x="4663440" y="2011680"/>
-            <a:ext cx="640080" cy="640080"/>
-          </a:xfrm>
-          <a:prstGeom prst="ellipse">
-            <a:avLst/>
-          </a:prstGeom>
-          <a:solidFill>
-            <a:srgbClr val="1C7C7D"/>
-          </a:solidFill>
-          <a:ln w="12700">
-            <a:solidFill>
-              <a:srgbClr val="1C7C7D"/>
-            </a:solidFill>
-            <a:prstDash val="solid"/>
-          </a:ln>
-        </p:spPr>
-      </p:sp>
-      <p:sp>
-        <p:nvSpPr>
-          <p:cNvPr id="15" name="Text 13"/>
-          <p:cNvSpPr txBox="1"/>
-          <p:nvPr/>
-        </p:nvSpPr>
-        <p:spPr>
-          <a:xfrm>
-            <a:off x="4663440" y="2011680"/>
-            <a:ext cx="640080" cy="640080"/>
-          </a:xfrm>
-          <a:prstGeom prst="rect">
-            <a:avLst/>
-          </a:prstGeom>
-          <a:noFill/>
-          <a:ln/>
-        </p:spPr>
-        <p:txBody>
-          <a:bodyPr wrap="square" lIns="0" tIns="0" rIns="0" bIns="0" rtlCol="0" anchor="ctr"/>
-          <a:lstStyle/>
-          <a:p>
-            <a:pPr algn="ctr" indent="0" marL="0">
-              <a:buNone/>
-            </a:pPr>
-            <a:r>
-              <a:rPr lang="en-US" sz="2000" b="1" dirty="0">
-                <a:solidFill>
-                  <a:srgbClr val="FFFFFF"/>
-                </a:solidFill>
-                <a:latin typeface="Cambria" pitchFamily="34" charset="0"/>
-                <a:ea typeface="Cambria" pitchFamily="34" charset="-122"/>
-                <a:cs typeface="Cambria" pitchFamily="34" charset="-120"/>
-              </a:rPr>
-              <a:t>3</a:t>
-            </a:r>
-            <a:endParaRPr lang="en-US" sz="2000" dirty="0"/>
-          </a:p>
-        </p:txBody>
-      </p:sp>
-      <p:sp>
-        <p:nvSpPr>
-          <p:cNvPr id="16" name="Text 14"/>
-          <p:cNvSpPr txBox="1"/>
-          <p:nvPr/>
-        </p:nvSpPr>
-        <p:spPr>
-          <a:xfrm>
-            <a:off x="4663440" y="2971800"/>
-            <a:ext cx="2011680" cy="365760"/>
-          </a:xfrm>
-          <a:prstGeom prst="rect">
-            <a:avLst/>
-          </a:prstGeom>
-          <a:noFill/>
-          <a:ln/>
-        </p:spPr>
-        <p:txBody>
-          <a:bodyPr wrap="square" lIns="0" tIns="0" rIns="0" bIns="0" rtlCol="0" anchor="ctr"/>
-          <a:lstStyle/>
-          <a:p>
-            <a:pPr indent="0" marL="0">
-              <a:buNone/>
-            </a:pPr>
-            <a:r>
-              <a:rPr lang="en-US" sz="1400" b="1" dirty="0">
-                <a:solidFill>
-                  <a:srgbClr val="1C7C7D"/>
-                </a:solidFill>
-                <a:latin typeface="Calibri" pitchFamily="34" charset="0"/>
-                <a:ea typeface="Calibri" pitchFamily="34" charset="-122"/>
-                <a:cs typeface="Calibri" pitchFamily="34" charset="-120"/>
-              </a:rPr>
-              <a:t>Q2 2027</a:t>
-            </a:r>
-            <a:endParaRPr lang="en-US" sz="1400" dirty="0"/>
-          </a:p>
-        </p:txBody>
-      </p:sp>
-      <p:sp>
-        <p:nvSpPr>
-          <p:cNvPr id="17" name="Text 15"/>
-          <p:cNvSpPr txBox="1"/>
-          <p:nvPr/>
-        </p:nvSpPr>
-        <p:spPr>
-          <a:xfrm>
-            <a:off x="4663440" y="3337560"/>
-            <a:ext cx="2011680" cy="457200"/>
-          </a:xfrm>
-          <a:prstGeom prst="rect">
-            <a:avLst/>
-          </a:prstGeom>
-          <a:noFill/>
-          <a:ln/>
-        </p:spPr>
-        <p:txBody>
-          <a:bodyPr wrap="square" lIns="0" tIns="0" rIns="0" bIns="0" rtlCol="0" anchor="ctr"/>
-          <a:lstStyle/>
-          <a:p>
-            <a:pPr indent="0" marL="0">
-              <a:buNone/>
-            </a:pPr>
-            <a:r>
-              <a:rPr lang="en-US" sz="1800" b="1" dirty="0">
-                <a:solidFill>
-                  <a:srgbClr val="0F2F3A"/>
-                </a:solidFill>
-                <a:latin typeface="Cambria" pitchFamily="34" charset="0"/>
-                <a:ea typeface="Cambria" pitchFamily="34" charset="-122"/>
-                <a:cs typeface="Cambria" pitchFamily="34" charset="-120"/>
-              </a:rPr>
-              <a:t>Optimización</a:t>
-            </a:r>
-            <a:endParaRPr lang="en-US" sz="1800" dirty="0"/>
-          </a:p>
-        </p:txBody>
-      </p:sp>
-      <p:sp>
-        <p:nvSpPr>
-          <p:cNvPr id="18" name="Text 16"/>
-          <p:cNvSpPr txBox="1"/>
-          <p:nvPr/>
-        </p:nvSpPr>
-        <p:spPr>
-          <a:xfrm>
-            <a:off x="4663440" y="3840480"/>
-            <a:ext cx="1828800" cy="731520"/>
-          </a:xfrm>
-          <a:prstGeom prst="rect">
-            <a:avLst/>
-          </a:prstGeom>
-          <a:noFill/>
-          <a:ln/>
-        </p:spPr>
-        <p:txBody>
-          <a:bodyPr wrap="square" lIns="0" tIns="0" rIns="0" bIns="0" rtlCol="0" anchor="t"/>
-          <a:lstStyle/>
-          <a:p>
-            <a:pPr indent="0" marL="0">
-              <a:buNone/>
-            </a:pPr>
-            <a:r>
-              <a:rPr lang="en-US" sz="1400" dirty="0">
-                <a:solidFill>
-                  <a:srgbClr val="1F2D33"/>
-                </a:solidFill>
-                <a:latin typeface="Calibri" pitchFamily="34" charset="0"/>
-                <a:ea typeface="Calibri" pitchFamily="34" charset="-122"/>
-                <a:cs typeface="Calibri" pitchFamily="34" charset="-120"/>
-              </a:rPr>
-              <a:t>Mejoras de producto y procesos.</a:t>
-            </a:r>
-            <a:endParaRPr lang="en-US" sz="1400" dirty="0"/>
-          </a:p>
-        </p:txBody>
-      </p:sp>
-      <p:sp>
-        <p:nvSpPr>
-          <p:cNvPr id="19" name="Shape 17"/>
-          <p:cNvSpPr/>
-          <p:nvPr/>
-        </p:nvSpPr>
-        <p:spPr>
-          <a:xfrm>
-            <a:off x="6766560" y="2011680"/>
-            <a:ext cx="640080" cy="640080"/>
-          </a:xfrm>
-          <a:prstGeom prst="ellipse">
-            <a:avLst/>
-          </a:prstGeom>
-          <a:solidFill>
-            <a:srgbClr val="1C7C7D"/>
-          </a:solidFill>
-          <a:ln w="12700">
-            <a:solidFill>
-              <a:srgbClr val="1C7C7D"/>
-            </a:solidFill>
-            <a:prstDash val="solid"/>
-          </a:ln>
-        </p:spPr>
-      </p:sp>
-      <p:sp>
-        <p:nvSpPr>
-          <p:cNvPr id="20" name="Text 18"/>
-          <p:cNvSpPr txBox="1"/>
-          <p:nvPr/>
-        </p:nvSpPr>
-        <p:spPr>
-          <a:xfrm>
-            <a:off x="6766560" y="2011680"/>
-            <a:ext cx="640080" cy="640080"/>
-          </a:xfrm>
-          <a:prstGeom prst="rect">
-            <a:avLst/>
-          </a:prstGeom>
-          <a:noFill/>
-          <a:ln/>
-        </p:spPr>
-        <p:txBody>
-          <a:bodyPr wrap="square" lIns="0" tIns="0" rIns="0" bIns="0" rtlCol="0" anchor="ctr"/>
-          <a:lstStyle/>
-          <a:p>
-            <a:pPr algn="ctr" indent="0" marL="0">
-              <a:buNone/>
-            </a:pPr>
-            <a:r>
-              <a:rPr lang="en-US" sz="2000" b="1" dirty="0">
-                <a:solidFill>
-                  <a:srgbClr val="FFFFFF"/>
-                </a:solidFill>
-                <a:latin typeface="Cambria" pitchFamily="34" charset="0"/>
-                <a:ea typeface="Cambria" pitchFamily="34" charset="-122"/>
-                <a:cs typeface="Cambria" pitchFamily="34" charset="-120"/>
-              </a:rPr>
-              <a:t>4</a:t>
-            </a:r>
-            <a:endParaRPr lang="en-US" sz="2000" dirty="0"/>
-          </a:p>
-        </p:txBody>
-      </p:sp>
-      <p:sp>
-        <p:nvSpPr>
-          <p:cNvPr id="21" name="Text 19"/>
-          <p:cNvSpPr txBox="1"/>
-          <p:nvPr/>
-        </p:nvSpPr>
-        <p:spPr>
-          <a:xfrm>
-            <a:off x="6766560" y="2971800"/>
-            <a:ext cx="2011680" cy="365760"/>
-          </a:xfrm>
-          <a:prstGeom prst="rect">
-            <a:avLst/>
-          </a:prstGeom>
-          <a:noFill/>
-          <a:ln/>
-        </p:spPr>
-        <p:txBody>
-          <a:bodyPr wrap="square" lIns="0" tIns="0" rIns="0" bIns="0" rtlCol="0" anchor="ctr"/>
-          <a:lstStyle/>
-          <a:p>
-            <a:pPr indent="0" marL="0">
-              <a:buNone/>
-            </a:pPr>
-            <a:r>
-              <a:rPr lang="en-US" sz="1400" b="1" dirty="0">
-                <a:solidFill>
-                  <a:srgbClr val="1C7C7D"/>
-                </a:solidFill>
-                <a:latin typeface="Calibri" pitchFamily="34" charset="0"/>
-                <a:ea typeface="Calibri" pitchFamily="34" charset="-122"/>
-                <a:cs typeface="Calibri" pitchFamily="34" charset="-120"/>
-              </a:rPr>
-              <a:t>Q3 2027</a:t>
-            </a:r>
-            <a:endParaRPr lang="en-US" sz="1400" dirty="0"/>
-          </a:p>
-        </p:txBody>
-      </p:sp>
-      <p:sp>
-        <p:nvSpPr>
-          <p:cNvPr id="22" name="Text 20"/>
-          <p:cNvSpPr txBox="1"/>
-          <p:nvPr/>
-        </p:nvSpPr>
-        <p:spPr>
-          <a:xfrm>
-            <a:off x="6766560" y="3337560"/>
-            <a:ext cx="2011680" cy="457200"/>
-          </a:xfrm>
-          <a:prstGeom prst="rect">
-            <a:avLst/>
-          </a:prstGeom>
-          <a:noFill/>
-          <a:ln/>
-        </p:spPr>
-        <p:txBody>
-          <a:bodyPr wrap="square" lIns="0" tIns="0" rIns="0" bIns="0" rtlCol="0" anchor="ctr"/>
-          <a:lstStyle/>
-          <a:p>
-            <a:pPr indent="0" marL="0">
-              <a:buNone/>
-            </a:pPr>
-            <a:r>
-              <a:rPr lang="en-US" sz="1800" b="1" dirty="0">
-                <a:solidFill>
-                  <a:srgbClr val="0F2F3A"/>
-                </a:solidFill>
-                <a:latin typeface="Cambria" pitchFamily="34" charset="0"/>
-                <a:ea typeface="Cambria" pitchFamily="34" charset="-122"/>
-                <a:cs typeface="Cambria" pitchFamily="34" charset="-120"/>
-              </a:rPr>
-              <a:t>Escala</a:t>
-            </a:r>
-            <a:endParaRPr lang="en-US" sz="1800" dirty="0"/>
-          </a:p>
-        </p:txBody>
-      </p:sp>
-      <p:sp>
-        <p:nvSpPr>
-          <p:cNvPr id="23" name="Text 21"/>
-          <p:cNvSpPr txBox="1"/>
-          <p:nvPr/>
-        </p:nvSpPr>
-        <p:spPr>
-          <a:xfrm>
-            <a:off x="6766560" y="3840480"/>
-            <a:ext cx="1828800" cy="731520"/>
-          </a:xfrm>
-          <a:prstGeom prst="rect">
-            <a:avLst/>
-          </a:prstGeom>
-          <a:noFill/>
-          <a:ln/>
-        </p:spPr>
-        <p:txBody>
-          <a:bodyPr wrap="square" lIns="0" tIns="0" rIns="0" bIns="0" rtlCol="0" anchor="t"/>
-          <a:lstStyle/>
-          <a:p>
-            <a:pPr indent="0" marL="0">
-              <a:buNone/>
-            </a:pPr>
-            <a:r>
-              <a:rPr lang="en-US" sz="1400" dirty="0">
-                <a:solidFill>
-                  <a:srgbClr val="1F2D33"/>
-                </a:solidFill>
-                <a:latin typeface="Calibri" pitchFamily="34" charset="0"/>
-                <a:ea typeface="Calibri" pitchFamily="34" charset="-122"/>
-                <a:cs typeface="Calibri" pitchFamily="34" charset="-120"/>
-              </a:rPr>
-              <a:t>Consolidación y crecimiento.</a:t>
-            </a:r>
-            <a:endParaRPr lang="en-US" sz="1400" dirty="0"/>
+              <a:t>Es un dato de la cuenta; no se sabe a qué sesión corresponde.</a:t>
+            </a:r>
+            <a:endParaRPr lang="en-US" sz="1200" dirty="0"/>
           </a:p>
         </p:txBody>
       </p:sp>
@@ -4441,7 +4868,7 @@
     <p:bg>
       <p:bgPr>
         <a:solidFill>
-          <a:srgbClr val="0F2F3A"/>
+          <a:srgbClr val="12100E"/>
         </a:solidFill>
       </p:bgPr>
     </p:bg>
@@ -4461,24 +4888,102 @@
       </p:grpSpPr>
       <p:sp>
         <p:nvSpPr>
-          <p:cNvPr id="2" name="Shape 0"/>
+          <p:cNvPr id="2" name="Text 0"/>
+          <p:cNvSpPr txBox="1"/>
+          <p:nvPr/>
+        </p:nvSpPr>
+        <p:spPr>
+          <a:xfrm>
+            <a:off x="457200" y="320040"/>
+            <a:ext cx="8229600" cy="640080"/>
+          </a:xfrm>
+          <a:prstGeom prst="rect">
+            <a:avLst/>
+          </a:prstGeom>
+          <a:noFill/>
+          <a:ln/>
+        </p:spPr>
+        <p:txBody>
+          <a:bodyPr wrap="square" lIns="0" tIns="0" rIns="0" bIns="0" rtlCol="0" anchor="ctr"/>
+          <a:lstStyle/>
+          <a:p>
+            <a:pPr indent="0" marL="0">
+              <a:buNone/>
+            </a:pPr>
+            <a:r>
+              <a:rPr lang="en-US" sz="3400" b="1" dirty="0">
+                <a:solidFill>
+                  <a:srgbClr val="F2EEE8"/>
+                </a:solidFill>
+                <a:latin typeface="Cambria" pitchFamily="34" charset="0"/>
+                <a:ea typeface="Cambria" pitchFamily="34" charset="-122"/>
+                <a:cs typeface="Cambria" pitchFamily="34" charset="-120"/>
+              </a:rPr>
+              <a:t>Tokens de la sesión</a:t>
+            </a:r>
+            <a:endParaRPr lang="en-US" sz="3400" dirty="0"/>
+          </a:p>
+        </p:txBody>
+      </p:sp>
+      <p:sp>
+        <p:nvSpPr>
+          <p:cNvPr id="3" name="Text 1"/>
+          <p:cNvSpPr txBox="1"/>
+          <p:nvPr/>
+        </p:nvSpPr>
+        <p:spPr>
+          <a:xfrm>
+            <a:off x="457200" y="960120"/>
+            <a:ext cx="8229600" cy="365760"/>
+          </a:xfrm>
+          <a:prstGeom prst="rect">
+            <a:avLst/>
+          </a:prstGeom>
+          <a:noFill/>
+          <a:ln/>
+        </p:spPr>
+        <p:txBody>
+          <a:bodyPr wrap="square" lIns="0" tIns="0" rIns="0" bIns="0" rtlCol="0" anchor="ctr"/>
+          <a:lstStyle/>
+          <a:p>
+            <a:pPr indent="0" marL="0">
+              <a:buNone/>
+            </a:pPr>
+            <a:r>
+              <a:rPr lang="en-US" sz="1600" dirty="0">
+                <a:solidFill>
+                  <a:srgbClr val="A39B90"/>
+                </a:solidFill>
+                <a:latin typeface="Calibri" pitchFamily="34" charset="0"/>
+                <a:ea typeface="Calibri" pitchFamily="34" charset="-122"/>
+                <a:cs typeface="Calibri" pitchFamily="34" charset="-120"/>
+              </a:rPr>
+              <a:t>Contados desde la transcripción</a:t>
+            </a:r>
+            <a:endParaRPr lang="en-US" sz="1600" dirty="0"/>
+          </a:p>
+        </p:txBody>
+      </p:sp>
+      <p:sp>
+        <p:nvSpPr>
+          <p:cNvPr id="4" name="Shape 2"/>
           <p:cNvSpPr/>
           <p:nvPr/>
         </p:nvSpPr>
         <p:spPr>
           <a:xfrm>
-            <a:off x="6583680" y="-731520"/>
-            <a:ext cx="3108960" cy="3108960"/>
-          </a:xfrm>
-          <a:prstGeom prst="ellipse">
+            <a:off x="457200" y="1508760"/>
+            <a:ext cx="3108960" cy="1417320"/>
+          </a:xfrm>
+          <a:prstGeom prst="rect">
             <a:avLst/>
           </a:prstGeom>
           <a:solidFill>
-            <a:srgbClr val="1C7C7D"/>
+            <a:srgbClr val="221F1B"/>
           </a:solidFill>
           <a:ln w="12700">
             <a:solidFill>
-              <a:srgbClr val="1C7C7D"/>
+              <a:srgbClr val="221F1B"/>
             </a:solidFill>
             <a:prstDash val="solid"/>
           </a:ln>
@@ -4486,102 +4991,24 @@
       </p:sp>
       <p:sp>
         <p:nvSpPr>
-          <p:cNvPr id="3" name="Text 1"/>
-          <p:cNvSpPr txBox="1"/>
-          <p:nvPr/>
-        </p:nvSpPr>
-        <p:spPr>
-          <a:xfrm>
-            <a:off x="548640" y="822960"/>
-            <a:ext cx="5486400" cy="914400"/>
-          </a:xfrm>
-          <a:prstGeom prst="rect">
-            <a:avLst/>
-          </a:prstGeom>
-          <a:noFill/>
-          <a:ln/>
-        </p:spPr>
-        <p:txBody>
-          <a:bodyPr wrap="square" lIns="0" tIns="0" rIns="0" bIns="0" rtlCol="0" anchor="ctr"/>
-          <a:lstStyle/>
-          <a:p>
-            <a:pPr indent="0" marL="0">
-              <a:buNone/>
-            </a:pPr>
-            <a:r>
-              <a:rPr lang="en-US" sz="4800" b="1" dirty="0">
-                <a:solidFill>
-                  <a:srgbClr val="FFFFFF"/>
-                </a:solidFill>
-                <a:latin typeface="Cambria" pitchFamily="34" charset="0"/>
-                <a:ea typeface="Cambria" pitchFamily="34" charset="-122"/>
-                <a:cs typeface="Cambria" pitchFamily="34" charset="-120"/>
-              </a:rPr>
-              <a:t>Gracias</a:t>
-            </a:r>
-            <a:endParaRPr lang="en-US" sz="4800" dirty="0"/>
-          </a:p>
-        </p:txBody>
-      </p:sp>
-      <p:sp>
-        <p:nvSpPr>
-          <p:cNvPr id="4" name="Text 2"/>
-          <p:cNvSpPr txBox="1"/>
-          <p:nvPr/>
-        </p:nvSpPr>
-        <p:spPr>
-          <a:xfrm>
-            <a:off x="548640" y="1737360"/>
-            <a:ext cx="5486400" cy="548640"/>
-          </a:xfrm>
-          <a:prstGeom prst="rect">
-            <a:avLst/>
-          </a:prstGeom>
-          <a:noFill/>
-          <a:ln/>
-        </p:spPr>
-        <p:txBody>
-          <a:bodyPr wrap="square" lIns="0" tIns="0" rIns="0" bIns="0" rtlCol="0" anchor="ctr"/>
-          <a:lstStyle/>
-          <a:p>
-            <a:pPr indent="0" marL="0">
-              <a:buNone/>
-            </a:pPr>
-            <a:r>
-              <a:rPr lang="en-US" sz="2200" dirty="0">
-                <a:solidFill>
-                  <a:srgbClr val="F28F3B"/>
-                </a:solidFill>
-                <a:latin typeface="Calibri" pitchFamily="34" charset="0"/>
-                <a:ea typeface="Calibri" pitchFamily="34" charset="-122"/>
-                <a:cs typeface="Calibri" pitchFamily="34" charset="-120"/>
-              </a:rPr>
-              <a:t>¿Conversamos?</a:t>
-            </a:r>
-            <a:endParaRPr lang="en-US" sz="2200" dirty="0"/>
-          </a:p>
-        </p:txBody>
-      </p:sp>
-      <p:sp>
-        <p:nvSpPr>
           <p:cNvPr id="5" name="Shape 3"/>
           <p:cNvSpPr/>
           <p:nvPr/>
         </p:nvSpPr>
         <p:spPr>
           <a:xfrm>
-            <a:off x="548640" y="2743200"/>
+            <a:off x="685800" y="1737360"/>
             <a:ext cx="502920" cy="502920"/>
           </a:xfrm>
           <a:prstGeom prst="ellipse">
             <a:avLst/>
           </a:prstGeom>
           <a:solidFill>
-            <a:srgbClr val="1C7C7D"/>
+            <a:srgbClr val="5B9BFF"/>
           </a:solidFill>
           <a:ln w="12700">
             <a:solidFill>
-              <a:srgbClr val="1C7C7D"/>
+              <a:srgbClr val="5B9BFF"/>
             </a:solidFill>
             <a:prstDash val="solid"/>
           </a:ln>
@@ -4603,8 +5030,8 @@
         </p:blipFill>
         <p:spPr>
           <a:xfrm>
-            <a:off x="674370" y="2868930"/>
-            <a:ext cx="251460" cy="251460"/>
+            <a:off x="821588" y="1873148"/>
+            <a:ext cx="231343" cy="231343"/>
           </a:xfrm>
           <a:prstGeom prst="rect">
             <a:avLst/>
@@ -4619,8 +5046,8 @@
         </p:nvSpPr>
         <p:spPr>
           <a:xfrm>
-            <a:off x="1280160" y="2743200"/>
-            <a:ext cx="4572000" cy="502920"/>
+            <a:off x="685800" y="2286000"/>
+            <a:ext cx="2743200" cy="457200"/>
           </a:xfrm>
           <a:prstGeom prst="rect">
             <a:avLst/>
@@ -4636,48 +5063,112 @@
               <a:buNone/>
             </a:pPr>
             <a:r>
-              <a:rPr lang="en-US" sz="1800" dirty="0">
-                <a:solidFill>
-                  <a:srgbClr val="FFFFFF"/>
+              <a:rPr lang="en-US" sz="3000" b="1" dirty="0">
+                <a:solidFill>
+                  <a:srgbClr val="F2EEE8"/>
+                </a:solidFill>
+                <a:latin typeface="Cambria" pitchFamily="34" charset="0"/>
+                <a:ea typeface="Cambria" pitchFamily="34" charset="-122"/>
+                <a:cs typeface="Cambria" pitchFamily="34" charset="-120"/>
+              </a:rPr>
+              <a:t>≈ 1,3 M</a:t>
+            </a:r>
+            <a:endParaRPr lang="en-US" sz="3000" dirty="0"/>
+          </a:p>
+        </p:txBody>
+      </p:sp>
+      <p:sp>
+        <p:nvSpPr>
+          <p:cNvPr id="8" name="Text 5"/>
+          <p:cNvSpPr txBox="1"/>
+          <p:nvPr/>
+        </p:nvSpPr>
+        <p:spPr>
+          <a:xfrm>
+            <a:off x="1325880" y="1783080"/>
+            <a:ext cx="2103120" cy="411480"/>
+          </a:xfrm>
+          <a:prstGeom prst="rect">
+            <a:avLst/>
+          </a:prstGeom>
+          <a:noFill/>
+          <a:ln/>
+        </p:spPr>
+        <p:txBody>
+          <a:bodyPr wrap="square" lIns="0" tIns="0" rIns="0" bIns="0" rtlCol="0" anchor="ctr"/>
+          <a:lstStyle/>
+          <a:p>
+            <a:pPr indent="0" marL="0">
+              <a:buNone/>
+            </a:pPr>
+            <a:r>
+              <a:rPr lang="en-US" sz="1400" dirty="0">
+                <a:solidFill>
+                  <a:srgbClr val="A39B90"/>
                 </a:solidFill>
                 <a:latin typeface="Calibri" pitchFamily="34" charset="0"/>
                 <a:ea typeface="Calibri" pitchFamily="34" charset="-122"/>
                 <a:cs typeface="Calibri" pitchFamily="34" charset="-120"/>
               </a:rPr>
-              <a:t>correo@empresa.com</a:t>
-            </a:r>
-            <a:endParaRPr lang="en-US" sz="1800" dirty="0"/>
-          </a:p>
-        </p:txBody>
-      </p:sp>
-      <p:sp>
-        <p:nvSpPr>
-          <p:cNvPr id="8" name="Shape 5"/>
+              <a:t>Tokens generados</a:t>
+            </a:r>
+            <a:endParaRPr lang="en-US" sz="1400" dirty="0"/>
+          </a:p>
+        </p:txBody>
+      </p:sp>
+      <p:sp>
+        <p:nvSpPr>
+          <p:cNvPr id="9" name="Shape 6"/>
           <p:cNvSpPr/>
           <p:nvPr/>
         </p:nvSpPr>
         <p:spPr>
           <a:xfrm>
-            <a:off x="548640" y="3474720"/>
-            <a:ext cx="502920" cy="502920"/>
-          </a:xfrm>
-          <a:prstGeom prst="ellipse">
+            <a:off x="457200" y="3108960"/>
+            <a:ext cx="3108960" cy="1417320"/>
+          </a:xfrm>
+          <a:prstGeom prst="rect">
             <a:avLst/>
           </a:prstGeom>
           <a:solidFill>
-            <a:srgbClr val="1C7C7D"/>
+            <a:srgbClr val="221F1B"/>
           </a:solidFill>
           <a:ln w="12700">
             <a:solidFill>
-              <a:srgbClr val="1C7C7D"/>
+              <a:srgbClr val="221F1B"/>
             </a:solidFill>
             <a:prstDash val="solid"/>
           </a:ln>
         </p:spPr>
       </p:sp>
+      <p:sp>
+        <p:nvSpPr>
+          <p:cNvPr id="10" name="Shape 7"/>
+          <p:cNvSpPr/>
+          <p:nvPr/>
+        </p:nvSpPr>
+        <p:spPr>
+          <a:xfrm>
+            <a:off x="685800" y="3337560"/>
+            <a:ext cx="502920" cy="502920"/>
+          </a:xfrm>
+          <a:prstGeom prst="ellipse">
+            <a:avLst/>
+          </a:prstGeom>
+          <a:solidFill>
+            <a:srgbClr val="4CAF50"/>
+          </a:solidFill>
+          <a:ln w="12700">
+            <a:solidFill>
+              <a:srgbClr val="4CAF50"/>
+            </a:solidFill>
+            <a:prstDash val="solid"/>
+          </a:ln>
+        </p:spPr>
+      </p:sp>
       <p:pic>
         <p:nvPicPr>
-          <p:cNvPr id="9" name="Image 1" descr="preencoded.png">    </p:cNvPr>
+          <p:cNvPr id="11" name="Image 1" descr="preencoded.png">    </p:cNvPr>
           <p:cNvPicPr>
             <a:picLocks noChangeAspect="1"/>
           </p:cNvPicPr>
@@ -4691,8 +5182,8 @@
         </p:blipFill>
         <p:spPr>
           <a:xfrm>
-            <a:off x="674370" y="3600450"/>
-            <a:ext cx="251460" cy="251460"/>
+            <a:off x="821588" y="3473348"/>
+            <a:ext cx="231343" cy="231343"/>
           </a:xfrm>
           <a:prstGeom prst="rect">
             <a:avLst/>
@@ -4701,14 +5192,14 @@
       </p:pic>
       <p:sp>
         <p:nvSpPr>
-          <p:cNvPr id="10" name="Text 6"/>
+          <p:cNvPr id="12" name="Text 8"/>
           <p:cNvSpPr txBox="1"/>
           <p:nvPr/>
         </p:nvSpPr>
         <p:spPr>
           <a:xfrm>
-            <a:off x="1280160" y="3474720"/>
-            <a:ext cx="4572000" cy="502920"/>
+            <a:off x="685800" y="3886200"/>
+            <a:ext cx="2743200" cy="457200"/>
           </a:xfrm>
           <a:prstGeom prst="rect">
             <a:avLst/>
@@ -4724,48 +5215,112 @@
               <a:buNone/>
             </a:pPr>
             <a:r>
-              <a:rPr lang="en-US" sz="1800" dirty="0">
-                <a:solidFill>
-                  <a:srgbClr val="FFFFFF"/>
+              <a:rPr lang="en-US" sz="3000" b="1" dirty="0">
+                <a:solidFill>
+                  <a:srgbClr val="F2EEE8"/>
+                </a:solidFill>
+                <a:latin typeface="Cambria" pitchFamily="34" charset="0"/>
+                <a:ea typeface="Cambria" pitchFamily="34" charset="-122"/>
+                <a:cs typeface="Cambria" pitchFamily="34" charset="-120"/>
+              </a:rPr>
+              <a:t>2,7 M</a:t>
+            </a:r>
+            <a:endParaRPr lang="en-US" sz="3000" dirty="0"/>
+          </a:p>
+        </p:txBody>
+      </p:sp>
+      <p:sp>
+        <p:nvSpPr>
+          <p:cNvPr id="13" name="Text 9"/>
+          <p:cNvSpPr txBox="1"/>
+          <p:nvPr/>
+        </p:nvSpPr>
+        <p:spPr>
+          <a:xfrm>
+            <a:off x="1325880" y="3383280"/>
+            <a:ext cx="2103120" cy="411480"/>
+          </a:xfrm>
+          <a:prstGeom prst="rect">
+            <a:avLst/>
+          </a:prstGeom>
+          <a:noFill/>
+          <a:ln/>
+        </p:spPr>
+        <p:txBody>
+          <a:bodyPr wrap="square" lIns="0" tIns="0" rIns="0" bIns="0" rtlCol="0" anchor="ctr"/>
+          <a:lstStyle/>
+          <a:p>
+            <a:pPr indent="0" marL="0">
+              <a:buNone/>
+            </a:pPr>
+            <a:r>
+              <a:rPr lang="en-US" sz="1400" dirty="0">
+                <a:solidFill>
+                  <a:srgbClr val="A39B90"/>
                 </a:solidFill>
                 <a:latin typeface="Calibri" pitchFamily="34" charset="0"/>
                 <a:ea typeface="Calibri" pitchFamily="34" charset="-122"/>
                 <a:cs typeface="Calibri" pitchFamily="34" charset="-120"/>
               </a:rPr>
-              <a:t>+00 000 000 000</a:t>
-            </a:r>
-            <a:endParaRPr lang="en-US" sz="1800" dirty="0"/>
-          </a:p>
-        </p:txBody>
-      </p:sp>
-      <p:sp>
-        <p:nvSpPr>
-          <p:cNvPr id="11" name="Shape 7"/>
+              <a:t>Tokens escritos a la caché</a:t>
+            </a:r>
+            <a:endParaRPr lang="en-US" sz="1400" dirty="0"/>
+          </a:p>
+        </p:txBody>
+      </p:sp>
+      <p:sp>
+        <p:nvSpPr>
+          <p:cNvPr id="14" name="Shape 10"/>
           <p:cNvSpPr/>
           <p:nvPr/>
         </p:nvSpPr>
         <p:spPr>
           <a:xfrm>
-            <a:off x="548640" y="4206240"/>
-            <a:ext cx="502920" cy="502920"/>
-          </a:xfrm>
-          <a:prstGeom prst="ellipse">
+            <a:off x="3794760" y="1508760"/>
+            <a:ext cx="4892040" cy="3017520"/>
+          </a:xfrm>
+          <a:prstGeom prst="rect">
             <a:avLst/>
           </a:prstGeom>
           <a:solidFill>
-            <a:srgbClr val="1C7C7D"/>
+            <a:srgbClr val="16263F"/>
           </a:solidFill>
           <a:ln w="12700">
             <a:solidFill>
-              <a:srgbClr val="1C7C7D"/>
+              <a:srgbClr val="16263F"/>
             </a:solidFill>
             <a:prstDash val="solid"/>
           </a:ln>
         </p:spPr>
       </p:sp>
+      <p:sp>
+        <p:nvSpPr>
+          <p:cNvPr id="15" name="Shape 11"/>
+          <p:cNvSpPr/>
+          <p:nvPr/>
+        </p:nvSpPr>
+        <p:spPr>
+          <a:xfrm>
+            <a:off x="4114800" y="1783080"/>
+            <a:ext cx="640080" cy="640080"/>
+          </a:xfrm>
+          <a:prstGeom prst="ellipse">
+            <a:avLst/>
+          </a:prstGeom>
+          <a:solidFill>
+            <a:srgbClr val="5B9BFF"/>
+          </a:solidFill>
+          <a:ln w="12700">
+            <a:solidFill>
+              <a:srgbClr val="5B9BFF"/>
+            </a:solidFill>
+            <a:prstDash val="solid"/>
+          </a:ln>
+        </p:spPr>
+      </p:sp>
       <p:pic>
         <p:nvPicPr>
-          <p:cNvPr id="12" name="Image 2" descr="preencoded.png">    </p:cNvPr>
+          <p:cNvPr id="16" name="Image 2" descr="preencoded.png">    </p:cNvPr>
           <p:cNvPicPr>
             <a:picLocks noChangeAspect="1"/>
           </p:cNvPicPr>
@@ -4779,8 +5334,8 @@
         </p:blipFill>
         <p:spPr>
           <a:xfrm>
-            <a:off x="674370" y="4331970"/>
-            <a:ext cx="251460" cy="251460"/>
+            <a:off x="4287622" y="1955902"/>
+            <a:ext cx="294437" cy="294437"/>
           </a:xfrm>
           <a:prstGeom prst="rect">
             <a:avLst/>
@@ -4789,14 +5344,14 @@
       </p:pic>
       <p:sp>
         <p:nvSpPr>
-          <p:cNvPr id="13" name="Text 8"/>
+          <p:cNvPr id="17" name="Text 12"/>
           <p:cNvSpPr txBox="1"/>
           <p:nvPr/>
         </p:nvSpPr>
         <p:spPr>
           <a:xfrm>
-            <a:off x="1280160" y="4206240"/>
-            <a:ext cx="4572000" cy="502920"/>
+            <a:off x="4114800" y="2606040"/>
+            <a:ext cx="4297680" cy="914400"/>
           </a:xfrm>
           <a:prstGeom prst="rect">
             <a:avLst/>
@@ -4812,17 +5367,571 @@
               <a:buNone/>
             </a:pPr>
             <a:r>
-              <a:rPr lang="en-US" sz="1800" dirty="0">
-                <a:solidFill>
-                  <a:srgbClr val="FFFFFF"/>
+              <a:rPr lang="en-US" sz="6000" b="1" dirty="0">
+                <a:solidFill>
+                  <a:srgbClr val="F2EEE8"/>
+                </a:solidFill>
+                <a:latin typeface="Cambria" pitchFamily="34" charset="0"/>
+                <a:ea typeface="Cambria" pitchFamily="34" charset="-122"/>
+                <a:cs typeface="Cambria" pitchFamily="34" charset="-120"/>
+              </a:rPr>
+              <a:t>≈ 335 M</a:t>
+            </a:r>
+            <a:endParaRPr lang="en-US" sz="6000" dirty="0"/>
+          </a:p>
+        </p:txBody>
+      </p:sp>
+      <p:sp>
+        <p:nvSpPr>
+          <p:cNvPr id="18" name="Text 13"/>
+          <p:cNvSpPr txBox="1"/>
+          <p:nvPr/>
+        </p:nvSpPr>
+        <p:spPr>
+          <a:xfrm>
+            <a:off x="4114800" y="3520440"/>
+            <a:ext cx="4297680" cy="365760"/>
+          </a:xfrm>
+          <a:prstGeom prst="rect">
+            <a:avLst/>
+          </a:prstGeom>
+          <a:noFill/>
+          <a:ln/>
+        </p:spPr>
+        <p:txBody>
+          <a:bodyPr wrap="square" lIns="0" tIns="0" rIns="0" bIns="0" rtlCol="0" anchor="ctr"/>
+          <a:lstStyle/>
+          <a:p>
+            <a:pPr indent="0" marL="0">
+              <a:buNone/>
+            </a:pPr>
+            <a:r>
+              <a:rPr lang="en-US" sz="1800" b="1" dirty="0">
+                <a:solidFill>
+                  <a:srgbClr val="5B9BFF"/>
                 </a:solidFill>
                 <a:latin typeface="Calibri" pitchFamily="34" charset="0"/>
                 <a:ea typeface="Calibri" pitchFamily="34" charset="-122"/>
                 <a:cs typeface="Calibri" pitchFamily="34" charset="-120"/>
               </a:rPr>
-              <a:t>www.empresa.com</a:t>
+              <a:t>tokens leídos de la caché</a:t>
             </a:r>
             <a:endParaRPr lang="en-US" sz="1800" dirty="0"/>
+          </a:p>
+        </p:txBody>
+      </p:sp>
+      <p:sp>
+        <p:nvSpPr>
+          <p:cNvPr id="19" name="Text 14"/>
+          <p:cNvSpPr txBox="1"/>
+          <p:nvPr/>
+        </p:nvSpPr>
+        <p:spPr>
+          <a:xfrm>
+            <a:off x="4114800" y="3886200"/>
+            <a:ext cx="4297680" cy="548640"/>
+          </a:xfrm>
+          <a:prstGeom prst="rect">
+            <a:avLst/>
+          </a:prstGeom>
+          <a:noFill/>
+          <a:ln/>
+        </p:spPr>
+        <p:txBody>
+          <a:bodyPr wrap="square" lIns="0" tIns="0" rIns="0" bIns="0" rtlCol="0" anchor="t"/>
+          <a:lstStyle/>
+          <a:p>
+            <a:pPr indent="0" marL="0">
+              <a:buNone/>
+            </a:pPr>
+            <a:r>
+              <a:rPr lang="en-US" sz="1400" dirty="0">
+                <a:solidFill>
+                  <a:srgbClr val="C9D6EA"/>
+                </a:solidFill>
+                <a:latin typeface="Calibri" pitchFamily="34" charset="0"/>
+                <a:ea typeface="Calibri" pitchFamily="34" charset="-122"/>
+                <a:cs typeface="Calibri" pitchFamily="34" charset="-120"/>
+              </a:rPr>
+              <a:t>Son ≈ 99 % de los tokens contados y se cobran mucho más barato.</a:t>
+            </a:r>
+            <a:endParaRPr lang="en-US" sz="1400" dirty="0"/>
+          </a:p>
+        </p:txBody>
+      </p:sp>
+    </p:spTree>
+  </p:cSld>
+  <p:clrMapOvr>
+    <a:masterClrMapping/>
+  </p:clrMapOvr>
+</p:sld>
+</file>
+
+<file path=ppt/slides/slide8.xml><?xml version="1.0" encoding="utf-8"?>
+<p:sld xmlns:a="http://schemas.openxmlformats.org/drawingml/2006/main" xmlns:r="http://schemas.openxmlformats.org/officeDocument/2006/relationships" xmlns:p="http://schemas.openxmlformats.org/presentationml/2006/main">
+  <p:cSld name="Slide 8">
+    <p:bg>
+      <p:bgPr>
+        <a:solidFill>
+          <a:srgbClr val="12100E"/>
+        </a:solidFill>
+      </p:bgPr>
+    </p:bg>
+    <p:spTree>
+      <p:nvGrpSpPr>
+        <p:cNvPr id="1" name=""/>
+        <p:cNvGrpSpPr/>
+        <p:nvPr/>
+      </p:nvGrpSpPr>
+      <p:grpSpPr>
+        <a:xfrm>
+          <a:off x="0" y="0"/>
+          <a:ext cx="0" cy="0"/>
+          <a:chOff x="0" y="0"/>
+          <a:chExt cx="0" cy="0"/>
+        </a:xfrm>
+      </p:grpSpPr>
+      <p:pic>
+        <p:nvPicPr>
+          <p:cNvPr id="2" name="Image 0" descr="/tmp/claude-0/-home-user-other/d8041478-dfcc-5ca6-9236-09cb61fbd919/scratchpad/img/bg1.jpg">    </p:cNvPr>
+          <p:cNvPicPr>
+            <a:picLocks noChangeAspect="1"/>
+          </p:cNvPicPr>
+          <p:nvPr/>
+        </p:nvPicPr>
+        <p:blipFill>
+          <a:blip r:embed="rId1"/>
+          <a:stretch>
+            <a:fillRect/>
+          </a:stretch>
+        </p:blipFill>
+        <p:spPr>
+          <a:xfrm>
+            <a:off x="0" y="0"/>
+            <a:ext cx="9144000" cy="5143500"/>
+          </a:xfrm>
+          <a:prstGeom prst="rect">
+            <a:avLst/>
+          </a:prstGeom>
+        </p:spPr>
+      </p:pic>
+      <p:sp>
+        <p:nvSpPr>
+          <p:cNvPr id="3" name="Text 0"/>
+          <p:cNvSpPr txBox="1"/>
+          <p:nvPr/>
+        </p:nvSpPr>
+        <p:spPr>
+          <a:xfrm>
+            <a:off x="548640" y="457200"/>
+            <a:ext cx="5486400" cy="731520"/>
+          </a:xfrm>
+          <a:prstGeom prst="rect">
+            <a:avLst/>
+          </a:prstGeom>
+          <a:noFill/>
+          <a:ln/>
+        </p:spPr>
+        <p:txBody>
+          <a:bodyPr wrap="square" lIns="0" tIns="0" rIns="0" bIns="0" rtlCol="0" anchor="ctr"/>
+          <a:lstStyle/>
+          <a:p>
+            <a:pPr indent="0" marL="0">
+              <a:buNone/>
+            </a:pPr>
+            <a:r>
+              <a:rPr lang="en-US" sz="3800" b="1" dirty="0">
+                <a:solidFill>
+                  <a:srgbClr val="F2EEE8"/>
+                </a:solidFill>
+                <a:latin typeface="Cambria" pitchFamily="34" charset="0"/>
+                <a:ea typeface="Cambria" pitchFamily="34" charset="-122"/>
+                <a:cs typeface="Cambria" pitchFamily="34" charset="-120"/>
+              </a:rPr>
+              <a:t>En resumen</a:t>
+            </a:r>
+            <a:endParaRPr lang="en-US" sz="3800" dirty="0"/>
+          </a:p>
+        </p:txBody>
+      </p:sp>
+      <p:sp>
+        <p:nvSpPr>
+          <p:cNvPr id="4" name="Shape 1"/>
+          <p:cNvSpPr/>
+          <p:nvPr/>
+        </p:nvSpPr>
+        <p:spPr>
+          <a:xfrm>
+            <a:off x="548640" y="1554480"/>
+            <a:ext cx="594360" cy="594360"/>
+          </a:xfrm>
+          <a:prstGeom prst="ellipse">
+            <a:avLst/>
+          </a:prstGeom>
+          <a:solidFill>
+            <a:srgbClr val="5B9BFF"/>
+          </a:solidFill>
+          <a:ln w="12700">
+            <a:solidFill>
+              <a:srgbClr val="5B9BFF"/>
+            </a:solidFill>
+            <a:prstDash val="solid"/>
+          </a:ln>
+        </p:spPr>
+      </p:sp>
+      <p:pic>
+        <p:nvPicPr>
+          <p:cNvPr id="5" name="Image 1" descr="preencoded.png">    </p:cNvPr>
+          <p:cNvPicPr>
+            <a:picLocks noChangeAspect="1"/>
+          </p:cNvPicPr>
+          <p:nvPr/>
+        </p:nvPicPr>
+        <p:blipFill>
+          <a:blip r:embed="rId2"/>
+          <a:stretch>
+            <a:fillRect/>
+          </a:stretch>
+        </p:blipFill>
+        <p:spPr>
+          <a:xfrm>
+            <a:off x="709117" y="1714957"/>
+            <a:ext cx="273406" cy="273406"/>
+          </a:xfrm>
+          <a:prstGeom prst="rect">
+            <a:avLst/>
+          </a:prstGeom>
+        </p:spPr>
+      </p:pic>
+      <p:sp>
+        <p:nvSpPr>
+          <p:cNvPr id="6" name="Text 2"/>
+          <p:cNvSpPr txBox="1"/>
+          <p:nvPr/>
+        </p:nvSpPr>
+        <p:spPr>
+          <a:xfrm>
+            <a:off x="1371600" y="1508760"/>
+            <a:ext cx="4389120" cy="365760"/>
+          </a:xfrm>
+          <a:prstGeom prst="rect">
+            <a:avLst/>
+          </a:prstGeom>
+          <a:noFill/>
+          <a:ln/>
+        </p:spPr>
+        <p:txBody>
+          <a:bodyPr wrap="square" lIns="0" tIns="0" rIns="0" bIns="0" rtlCol="0" anchor="t"/>
+          <a:lstStyle/>
+          <a:p>
+            <a:pPr indent="0" marL="0">
+              <a:buNone/>
+            </a:pPr>
+            <a:r>
+              <a:rPr lang="en-US" sz="1700" b="1" dirty="0">
+                <a:solidFill>
+                  <a:srgbClr val="F2EEE8"/>
+                </a:solidFill>
+                <a:latin typeface="Calibri" pitchFamily="34" charset="0"/>
+                <a:ea typeface="Calibri" pitchFamily="34" charset="-122"/>
+                <a:cs typeface="Calibri" pitchFamily="34" charset="-120"/>
+              </a:rPr>
+              <a:t>Set completo en ≈ 9 h activas</a:t>
+            </a:r>
+            <a:endParaRPr lang="en-US" sz="1700" dirty="0"/>
+          </a:p>
+        </p:txBody>
+      </p:sp>
+      <p:sp>
+        <p:nvSpPr>
+          <p:cNvPr id="7" name="Text 3"/>
+          <p:cNvSpPr txBox="1"/>
+          <p:nvPr/>
+        </p:nvSpPr>
+        <p:spPr>
+          <a:xfrm>
+            <a:off x="1371600" y="1874520"/>
+            <a:ext cx="4389120" cy="548640"/>
+          </a:xfrm>
+          <a:prstGeom prst="rect">
+            <a:avLst/>
+          </a:prstGeom>
+          <a:noFill/>
+          <a:ln/>
+        </p:spPr>
+        <p:txBody>
+          <a:bodyPr wrap="square" lIns="0" tIns="0" rIns="0" bIns="0" rtlCol="0" anchor="t"/>
+          <a:lstStyle/>
+          <a:p>
+            <a:pPr indent="0" marL="0">
+              <a:buNone/>
+            </a:pPr>
+            <a:r>
+              <a:rPr lang="en-US" sz="1300" dirty="0">
+                <a:solidFill>
+                  <a:srgbClr val="D9D4CC"/>
+                </a:solidFill>
+                <a:latin typeface="Calibri" pitchFamily="34" charset="0"/>
+                <a:ea typeface="Calibri" pitchFamily="34" charset="-122"/>
+                <a:cs typeface="Calibri" pitchFamily="34" charset="-120"/>
+              </a:rPr>
+              <a:t>Plató, sala de control, redacción, servidores y zonas de descanso.</a:t>
+            </a:r>
+            <a:endParaRPr lang="en-US" sz="1300" dirty="0"/>
+          </a:p>
+        </p:txBody>
+      </p:sp>
+      <p:sp>
+        <p:nvSpPr>
+          <p:cNvPr id="8" name="Shape 4"/>
+          <p:cNvSpPr/>
+          <p:nvPr/>
+        </p:nvSpPr>
+        <p:spPr>
+          <a:xfrm>
+            <a:off x="548640" y="2606040"/>
+            <a:ext cx="594360" cy="594360"/>
+          </a:xfrm>
+          <a:prstGeom prst="ellipse">
+            <a:avLst/>
+          </a:prstGeom>
+          <a:solidFill>
+            <a:srgbClr val="4CAF50"/>
+          </a:solidFill>
+          <a:ln w="12700">
+            <a:solidFill>
+              <a:srgbClr val="4CAF50"/>
+            </a:solidFill>
+            <a:prstDash val="solid"/>
+          </a:ln>
+        </p:spPr>
+      </p:sp>
+      <p:pic>
+        <p:nvPicPr>
+          <p:cNvPr id="9" name="Image 2" descr="preencoded.png">    </p:cNvPr>
+          <p:cNvPicPr>
+            <a:picLocks noChangeAspect="1"/>
+          </p:cNvPicPr>
+          <p:nvPr/>
+        </p:nvPicPr>
+        <p:blipFill>
+          <a:blip r:embed="rId3"/>
+          <a:stretch>
+            <a:fillRect/>
+          </a:stretch>
+        </p:blipFill>
+        <p:spPr>
+          <a:xfrm>
+            <a:off x="709117" y="2766517"/>
+            <a:ext cx="273406" cy="273406"/>
+          </a:xfrm>
+          <a:prstGeom prst="rect">
+            <a:avLst/>
+          </a:prstGeom>
+        </p:spPr>
+      </p:pic>
+      <p:sp>
+        <p:nvSpPr>
+          <p:cNvPr id="10" name="Text 5"/>
+          <p:cNvSpPr txBox="1"/>
+          <p:nvPr/>
+        </p:nvSpPr>
+        <p:spPr>
+          <a:xfrm>
+            <a:off x="1371600" y="2560320"/>
+            <a:ext cx="4389120" cy="365760"/>
+          </a:xfrm>
+          <a:prstGeom prst="rect">
+            <a:avLst/>
+          </a:prstGeom>
+          <a:noFill/>
+          <a:ln/>
+        </p:spPr>
+        <p:txBody>
+          <a:bodyPr wrap="square" lIns="0" tIns="0" rIns="0" bIns="0" rtlCol="0" anchor="t"/>
+          <a:lstStyle/>
+          <a:p>
+            <a:pPr indent="0" marL="0">
+              <a:buNone/>
+            </a:pPr>
+            <a:r>
+              <a:rPr lang="en-US" sz="1700" b="1" dirty="0">
+                <a:solidFill>
+                  <a:srgbClr val="F2EEE8"/>
+                </a:solidFill>
+                <a:latin typeface="Calibri" pitchFamily="34" charset="0"/>
+                <a:ea typeface="Calibri" pitchFamily="34" charset="-122"/>
+                <a:cs typeface="Calibri" pitchFamily="34" charset="-120"/>
+              </a:rPr>
+              <a:t>Los renders pesaron más</a:t>
+            </a:r>
+            <a:endParaRPr lang="en-US" sz="1700" dirty="0"/>
+          </a:p>
+        </p:txBody>
+      </p:sp>
+      <p:sp>
+        <p:nvSpPr>
+          <p:cNvPr id="11" name="Text 6"/>
+          <p:cNvSpPr txBox="1"/>
+          <p:nvPr/>
+        </p:nvSpPr>
+        <p:spPr>
+          <a:xfrm>
+            <a:off x="1371600" y="2926080"/>
+            <a:ext cx="4389120" cy="548640"/>
+          </a:xfrm>
+          <a:prstGeom prst="rect">
+            <a:avLst/>
+          </a:prstGeom>
+          <a:noFill/>
+          <a:ln/>
+        </p:spPr>
+        <p:txBody>
+          <a:bodyPr wrap="square" lIns="0" tIns="0" rIns="0" bIns="0" rtlCol="0" anchor="t"/>
+          <a:lstStyle/>
+          <a:p>
+            <a:pPr indent="0" marL="0">
+              <a:buNone/>
+            </a:pPr>
+            <a:r>
+              <a:rPr lang="en-US" sz="1300" dirty="0">
+                <a:solidFill>
+                  <a:srgbClr val="D9D4CC"/>
+                </a:solidFill>
+                <a:latin typeface="Calibri" pitchFamily="34" charset="0"/>
+                <a:ea typeface="Calibri" pitchFamily="34" charset="-122"/>
+                <a:cs typeface="Calibri" pitchFamily="34" charset="-120"/>
+              </a:rPr>
+              <a:t>≈ 14–15 h de render, frente a ≈ 9 h de trabajo activo, dentro de 50 h de reloj.</a:t>
+            </a:r>
+            <a:endParaRPr lang="en-US" sz="1300" dirty="0"/>
+          </a:p>
+        </p:txBody>
+      </p:sp>
+      <p:sp>
+        <p:nvSpPr>
+          <p:cNvPr id="12" name="Shape 7"/>
+          <p:cNvSpPr/>
+          <p:nvPr/>
+        </p:nvSpPr>
+        <p:spPr>
+          <a:xfrm>
+            <a:off x="548640" y="3657600"/>
+            <a:ext cx="594360" cy="594360"/>
+          </a:xfrm>
+          <a:prstGeom prst="ellipse">
+            <a:avLst/>
+          </a:prstGeom>
+          <a:solidFill>
+            <a:srgbClr val="E0A84A"/>
+          </a:solidFill>
+          <a:ln w="12700">
+            <a:solidFill>
+              <a:srgbClr val="E0A84A"/>
+            </a:solidFill>
+            <a:prstDash val="solid"/>
+          </a:ln>
+        </p:spPr>
+      </p:sp>
+      <p:pic>
+        <p:nvPicPr>
+          <p:cNvPr id="13" name="Image 3" descr="preencoded.png">    </p:cNvPr>
+          <p:cNvPicPr>
+            <a:picLocks noChangeAspect="1"/>
+          </p:cNvPicPr>
+          <p:nvPr/>
+        </p:nvPicPr>
+        <p:blipFill>
+          <a:blip r:embed="rId4"/>
+          <a:stretch>
+            <a:fillRect/>
+          </a:stretch>
+        </p:blipFill>
+        <p:spPr>
+          <a:xfrm>
+            <a:off x="709117" y="3818077"/>
+            <a:ext cx="273406" cy="273406"/>
+          </a:xfrm>
+          <a:prstGeom prst="rect">
+            <a:avLst/>
+          </a:prstGeom>
+        </p:spPr>
+      </p:pic>
+      <p:sp>
+        <p:nvSpPr>
+          <p:cNvPr id="14" name="Text 8"/>
+          <p:cNvSpPr txBox="1"/>
+          <p:nvPr/>
+        </p:nvSpPr>
+        <p:spPr>
+          <a:xfrm>
+            <a:off x="1371600" y="3611880"/>
+            <a:ext cx="4389120" cy="365760"/>
+          </a:xfrm>
+          <a:prstGeom prst="rect">
+            <a:avLst/>
+          </a:prstGeom>
+          <a:noFill/>
+          <a:ln/>
+        </p:spPr>
+        <p:txBody>
+          <a:bodyPr wrap="square" lIns="0" tIns="0" rIns="0" bIns="0" rtlCol="0" anchor="t"/>
+          <a:lstStyle/>
+          <a:p>
+            <a:pPr indent="0" marL="0">
+              <a:buNone/>
+            </a:pPr>
+            <a:r>
+              <a:rPr lang="en-US" sz="1700" b="1" dirty="0">
+                <a:solidFill>
+                  <a:srgbClr val="F2EEE8"/>
+                </a:solidFill>
+                <a:latin typeface="Calibri" pitchFamily="34" charset="0"/>
+                <a:ea typeface="Calibri" pitchFamily="34" charset="-122"/>
+                <a:cs typeface="Calibri" pitchFamily="34" charset="-120"/>
+              </a:rPr>
+              <a:t>La caché domina el consumo</a:t>
+            </a:r>
+            <a:endParaRPr lang="en-US" sz="1700" dirty="0"/>
+          </a:p>
+        </p:txBody>
+      </p:sp>
+      <p:sp>
+        <p:nvSpPr>
+          <p:cNvPr id="15" name="Text 9"/>
+          <p:cNvSpPr txBox="1"/>
+          <p:nvPr/>
+        </p:nvSpPr>
+        <p:spPr>
+          <a:xfrm>
+            <a:off x="1371600" y="3977640"/>
+            <a:ext cx="4389120" cy="548640"/>
+          </a:xfrm>
+          <a:prstGeom prst="rect">
+            <a:avLst/>
+          </a:prstGeom>
+          <a:noFill/>
+          <a:ln/>
+        </p:spPr>
+        <p:txBody>
+          <a:bodyPr wrap="square" lIns="0" tIns="0" rIns="0" bIns="0" rtlCol="0" anchor="t"/>
+          <a:lstStyle/>
+          <a:p>
+            <a:pPr indent="0" marL="0">
+              <a:buNone/>
+            </a:pPr>
+            <a:r>
+              <a:rPr lang="en-US" sz="1300" dirty="0">
+                <a:solidFill>
+                  <a:srgbClr val="D9D4CC"/>
+                </a:solidFill>
+                <a:latin typeface="Calibri" pitchFamily="34" charset="0"/>
+                <a:ea typeface="Calibri" pitchFamily="34" charset="-122"/>
+                <a:cs typeface="Calibri" pitchFamily="34" charset="-120"/>
+              </a:rPr>
+              <a:t>≈ 335 M de tokens leídos de caché, que se cobran mucho más barato.</a:t>
+            </a:r>
+            <a:endParaRPr lang="en-US" sz="1300" dirty="0"/>
           </a:p>
         </p:txBody>
       </p:sp>

--- a/presentacion.pptx
+++ b/presentacion.pptx
@@ -13,9 +13,13 @@
     <p:sldId id="261" r:id="rId7"/>
     <p:sldId id="262" r:id="rId8"/>
     <p:sldId id="263" r:id="rId9"/>
+    <p:sldId id="264" r:id="rId10"/>
+    <p:sldId id="265" r:id="rId11"/>
+    <p:sldId id="266" r:id="rId12"/>
+    <p:sldId id="267" r:id="rId13"/>
   </p:sldIdLst>
   <p:notesMasterIdLst>
-    <p:notesMasterId r:id="rId10"/>
+    <p:notesMasterId r:id="rId14"/>
   </p:notesMasterIdLst>
   <p:sldSz cx="9144000" cy="5143500"/>
   <p:notesSz cx="5143500" cy="9144000"/>
@@ -778,7 +782,7 @@
           <a:p>
             <a:r>
               <a:rPr lang="en-US" dirty="0"/>
-              <a:t>Proyecto: un estudio de televisión deportiva modelado, iluminado y renderizado en Blender, controlado desde Claude mediante el MCP de Blender.</a:t>
+              <a:t>Informe ejecutivo del proyecto: una instalación de televisión fotorrealista modelada, iluminada y renderizada en Blender, controlada desde Claude mediante el MCP de Blender.</a:t>
             </a:r>
             <a:endParaRPr lang="en-US" dirty="0"/>
           </a:p>
@@ -802,6 +806,270 @@
             <a:fld id="{F7021451-1387-4CA6-816F-3879F97B5CBC}" type="slidenum">
               <a:rPr lang="en-US"/>
               <a:t>1</a:t>
+            </a:fld>
+            <a:endParaRPr lang="en-US"/>
+          </a:p>
+        </p:txBody>
+      </p:sp>
+    </p:spTree>
+    <p:extLst>
+      <p:ext uri="{BB962C8B-B14F-4D97-AF65-F5344CB8AC3E}">
+        <p14:creationId xmlns:p14="http://schemas.microsoft.com/office/powerpoint/2010/main" val="1024086991"/>
+      </p:ext>
+    </p:extLst>
+  </p:cSld>
+  <p:clrMapOvr>
+    <a:masterClrMapping/>
+  </p:clrMapOvr>
+</p:notes>
+</file>
+
+<file path=ppt/notesSlides/notesSlide10.xml><?xml version="1.0" encoding="utf-8"?>
+<p:notes xmlns:a="http://schemas.openxmlformats.org/drawingml/2006/main" xmlns:r="http://schemas.openxmlformats.org/officeDocument/2006/relationships" xmlns:p="http://schemas.openxmlformats.org/presentationml/2006/main">
+  <p:cSld>
+    <p:spTree>
+      <p:nvGrpSpPr>
+        <p:cNvPr id="1" name=""/>
+        <p:cNvGrpSpPr/>
+        <p:nvPr/>
+      </p:nvGrpSpPr>
+      <p:grpSpPr>
+        <a:xfrm>
+          <a:off x="0" y="0"/>
+          <a:ext cx="0" cy="0"/>
+          <a:chOff x="0" y="0"/>
+          <a:chExt cx="0" cy="0"/>
+        </a:xfrm>
+      </p:grpSpPr>
+      <p:sp>
+        <p:nvSpPr>
+          <p:cNvPr id="2" name="Slide Image Placeholder 1"/>
+          <p:cNvSpPr>
+            <a:spLocks noGrp="1" noRot="1" noChangeAspect="1"/>
+          </p:cNvSpPr>
+          <p:nvPr>
+            <p:ph type="sldImg"/>
+          </p:nvPr>
+        </p:nvSpPr>
+        <p:spPr/>
+      </p:sp>
+      <p:sp>
+        <p:nvSpPr>
+          <p:cNvPr id="3" name="Notes Placeholder 2"/>
+          <p:cNvSpPr>
+            <a:spLocks noGrp="1"/>
+          </p:cNvSpPr>
+          <p:nvPr>
+            <p:ph type="body" idx="1"/>
+          </p:nvPr>
+        </p:nvSpPr>
+        <p:spPr/>
+        <p:txBody>
+          <a:bodyPr/>
+          <a:lstStyle/>
+          <a:p>
+            <a:r>
+              <a:rPr lang="en-US" dirty="0"/>
+              <a:t>Valores tal como se reportaron. El importe de uso extra es de la cuenta y no se puede atribuir a este proyecto.</a:t>
+            </a:r>
+            <a:endParaRPr lang="en-US" dirty="0"/>
+          </a:p>
+        </p:txBody>
+      </p:sp>
+      <p:sp>
+        <p:nvSpPr>
+          <p:cNvPr id="4" name="Slide Number Placeholder 3"/>
+          <p:cNvSpPr>
+            <a:spLocks noGrp="1"/>
+          </p:cNvSpPr>
+          <p:nvPr>
+            <p:ph type="sldNum" sz="quarter" idx="10"/>
+          </p:nvPr>
+        </p:nvSpPr>
+        <p:spPr/>
+        <p:txBody>
+          <a:bodyPr/>
+          <a:lstStyle/>
+          <a:p>
+            <a:fld id="{F7021451-1387-4CA6-816F-3879F97B5CBC}" type="slidenum">
+              <a:rPr lang="en-US"/>
+              <a:t>10</a:t>
+            </a:fld>
+            <a:endParaRPr lang="en-US"/>
+          </a:p>
+        </p:txBody>
+      </p:sp>
+    </p:spTree>
+    <p:extLst>
+      <p:ext uri="{BB962C8B-B14F-4D97-AF65-F5344CB8AC3E}">
+        <p14:creationId xmlns:p14="http://schemas.microsoft.com/office/powerpoint/2010/main" val="1024086991"/>
+      </p:ext>
+    </p:extLst>
+  </p:cSld>
+  <p:clrMapOvr>
+    <a:masterClrMapping/>
+  </p:clrMapOvr>
+</p:notes>
+</file>
+
+<file path=ppt/notesSlides/notesSlide11.xml><?xml version="1.0" encoding="utf-8"?>
+<p:notes xmlns:a="http://schemas.openxmlformats.org/drawingml/2006/main" xmlns:r="http://schemas.openxmlformats.org/officeDocument/2006/relationships" xmlns:p="http://schemas.openxmlformats.org/presentationml/2006/main">
+  <p:cSld>
+    <p:spTree>
+      <p:nvGrpSpPr>
+        <p:cNvPr id="1" name=""/>
+        <p:cNvGrpSpPr/>
+        <p:nvPr/>
+      </p:nvGrpSpPr>
+      <p:grpSpPr>
+        <a:xfrm>
+          <a:off x="0" y="0"/>
+          <a:ext cx="0" cy="0"/>
+          <a:chOff x="0" y="0"/>
+          <a:chExt cx="0" cy="0"/>
+        </a:xfrm>
+      </p:grpSpPr>
+      <p:sp>
+        <p:nvSpPr>
+          <p:cNvPr id="2" name="Slide Image Placeholder 1"/>
+          <p:cNvSpPr>
+            <a:spLocks noGrp="1" noRot="1" noChangeAspect="1"/>
+          </p:cNvSpPr>
+          <p:nvPr>
+            <p:ph type="sldImg"/>
+          </p:nvPr>
+        </p:nvSpPr>
+        <p:spPr/>
+      </p:sp>
+      <p:sp>
+        <p:nvSpPr>
+          <p:cNvPr id="3" name="Notes Placeholder 2"/>
+          <p:cNvSpPr>
+            <a:spLocks noGrp="1"/>
+          </p:cNvSpPr>
+          <p:nvPr>
+            <p:ph type="body" idx="1"/>
+          </p:nvPr>
+        </p:nvSpPr>
+        <p:spPr/>
+        <p:txBody>
+          <a:bodyPr/>
+          <a:lstStyle/>
+          <a:p>
+            <a:r>
+              <a:rPr lang="en-US" dirty="0"/>
+              <a:t>335 M de 339 M contados (1,3 + 2,7 + 335) son lecturas de caché, ≈ 99 %.</a:t>
+            </a:r>
+            <a:endParaRPr lang="en-US" dirty="0"/>
+          </a:p>
+        </p:txBody>
+      </p:sp>
+      <p:sp>
+        <p:nvSpPr>
+          <p:cNvPr id="4" name="Slide Number Placeholder 3"/>
+          <p:cNvSpPr>
+            <a:spLocks noGrp="1"/>
+          </p:cNvSpPr>
+          <p:nvPr>
+            <p:ph type="sldNum" sz="quarter" idx="10"/>
+          </p:nvPr>
+        </p:nvSpPr>
+        <p:spPr/>
+        <p:txBody>
+          <a:bodyPr/>
+          <a:lstStyle/>
+          <a:p>
+            <a:fld id="{F7021451-1387-4CA6-816F-3879F97B5CBC}" type="slidenum">
+              <a:rPr lang="en-US"/>
+              <a:t>11</a:t>
+            </a:fld>
+            <a:endParaRPr lang="en-US"/>
+          </a:p>
+        </p:txBody>
+      </p:sp>
+    </p:spTree>
+    <p:extLst>
+      <p:ext uri="{BB962C8B-B14F-4D97-AF65-F5344CB8AC3E}">
+        <p14:creationId xmlns:p14="http://schemas.microsoft.com/office/powerpoint/2010/main" val="1024086991"/>
+      </p:ext>
+    </p:extLst>
+  </p:cSld>
+  <p:clrMapOvr>
+    <a:masterClrMapping/>
+  </p:clrMapOvr>
+</p:notes>
+</file>
+
+<file path=ppt/notesSlides/notesSlide12.xml><?xml version="1.0" encoding="utf-8"?>
+<p:notes xmlns:a="http://schemas.openxmlformats.org/drawingml/2006/main" xmlns:r="http://schemas.openxmlformats.org/officeDocument/2006/relationships" xmlns:p="http://schemas.openxmlformats.org/presentationml/2006/main">
+  <p:cSld>
+    <p:spTree>
+      <p:nvGrpSpPr>
+        <p:cNvPr id="1" name=""/>
+        <p:cNvGrpSpPr/>
+        <p:nvPr/>
+      </p:nvGrpSpPr>
+      <p:grpSpPr>
+        <a:xfrm>
+          <a:off x="0" y="0"/>
+          <a:ext cx="0" cy="0"/>
+          <a:chOff x="0" y="0"/>
+          <a:chExt cx="0" cy="0"/>
+        </a:xfrm>
+      </p:grpSpPr>
+      <p:sp>
+        <p:nvSpPr>
+          <p:cNvPr id="2" name="Slide Image Placeholder 1"/>
+          <p:cNvSpPr>
+            <a:spLocks noGrp="1" noRot="1" noChangeAspect="1"/>
+          </p:cNvSpPr>
+          <p:nvPr>
+            <p:ph type="sldImg"/>
+          </p:nvPr>
+        </p:nvSpPr>
+        <p:spPr/>
+      </p:sp>
+      <p:sp>
+        <p:nvSpPr>
+          <p:cNvPr id="3" name="Notes Placeholder 2"/>
+          <p:cNvSpPr>
+            <a:spLocks noGrp="1"/>
+          </p:cNvSpPr>
+          <p:nvPr>
+            <p:ph type="body" idx="1"/>
+          </p:nvPr>
+        </p:nvSpPr>
+        <p:spPr/>
+        <p:txBody>
+          <a:bodyPr/>
+          <a:lstStyle/>
+          <a:p>
+            <a:r>
+              <a:rPr lang="en-US" dirty="0"/>
+              <a:t>Cierre con las tres conclusiones del proyecto.</a:t>
+            </a:r>
+            <a:endParaRPr lang="en-US" dirty="0"/>
+          </a:p>
+        </p:txBody>
+      </p:sp>
+      <p:sp>
+        <p:nvSpPr>
+          <p:cNvPr id="4" name="Slide Number Placeholder 3"/>
+          <p:cNvSpPr>
+            <a:spLocks noGrp="1"/>
+          </p:cNvSpPr>
+          <p:nvPr>
+            <p:ph type="sldNum" sz="quarter" idx="10"/>
+          </p:nvPr>
+        </p:nvSpPr>
+        <p:spPr/>
+        <p:txBody>
+          <a:bodyPr/>
+          <a:lstStyle/>
+          <a:p>
+            <a:fld id="{F7021451-1387-4CA6-816F-3879F97B5CBC}" type="slidenum">
+              <a:rPr lang="en-US"/>
+              <a:t>12</a:t>
             </a:fld>
             <a:endParaRPr lang="en-US"/>
           </a:p>
@@ -866,7 +1134,7 @@
           <a:p>
             <a:r>
               <a:rPr lang="en-US" dirty="0"/>
-              <a:t>El corazón del set: mesa de presentadores, muro LED con gráficas de fútbol, iluminación y cámaras.</a:t>
+              <a:t>El PRD define el objetivo, cómo medir el realismo y los 21 criterios de aceptación. Cumplen 17, 1 parcialmente y 3 no cumplen; los tres vienen de decisiones del usuario (solo el plató tiene puertas; la nave norte no se vistió).</a:t>
             </a:r>
             <a:endParaRPr lang="en-US" dirty="0"/>
           </a:p>
@@ -954,7 +1222,7 @@
           <a:p>
             <a:r>
               <a:rPr lang="en-US" dirty="0"/>
-              <a:t>Sala de control con muro de pantallas y redacción abierta con puestos de trabajo.</a:t>
+              <a:t>El corazón del set: mesa de presentadores, muro LED con gráficas de fútbol, iluminación y cámaras.</a:t>
             </a:r>
             <a:endParaRPr lang="en-US" dirty="0"/>
           </a:p>
@@ -1042,7 +1310,7 @@
           <a:p>
             <a:r>
               <a:rPr lang="en-US" dirty="0"/>
-              <a:t>Plató, mesa, truss de luces, cicloramas, sala de control, zona de descanso, redacción, sala de servidores, cartel ON AIR, pantalla táctica y otra sala de descanso.</a:t>
+              <a:t>Sala de control con muro de pantallas y redacción abierta con puestos de trabajo.</a:t>
             </a:r>
             <a:endParaRPr lang="en-US" dirty="0"/>
           </a:p>
@@ -1130,7 +1398,7 @@
           <a:p>
             <a:r>
               <a:rPr lang="en-US" dirty="0"/>
-              <a:t>26 h de noches y ausencias + 9 h de trabajo activo + 14–15 h de renders = 50 h de reloj.</a:t>
+              <a:t>Plató, mesa, truss de luces, cicloramas, sala de control, zona de descanso, redacción, sala de servidores, cartel ON AIR, pantalla táctica y otra sala de descanso.</a:t>
             </a:r>
             <a:endParaRPr lang="en-US" dirty="0"/>
           </a:p>
@@ -1218,7 +1486,7 @@
           <a:p>
             <a:r>
               <a:rPr lang="en-US" dirty="0"/>
-              <a:t>Valores tal como se reportaron. El importe de uso extra es de la cuenta y no se puede atribuir a este proyecto.</a:t>
+              <a:t>Fases 0 a 9: preparación, blockout, envolvente, escenografía, props, materiales, iluminación, cámaras y recorrido, render final y entrega. Una auditoría automática (reglas M1-M12 y las añadidas por fase) decide si se pasa de fase.</a:t>
             </a:r>
             <a:endParaRPr lang="en-US" dirty="0"/>
           </a:p>
@@ -1306,7 +1574,7 @@
           <a:p>
             <a:r>
               <a:rPr lang="en-US" dirty="0"/>
-              <a:t>335 M de 339 M contados (1,3 + 2,7 + 335) son lecturas de caché, ≈ 99 %.</a:t>
+              <a:t>Todo se construyó con 70 scripts de Python; no se descargó ni importó nada (ni texturas, ni HDRI, ni props). El archivo final pesa 6,3 MB: 2 468 objetos, ≈ 453 000 polígonos, 0 n-gons; con instancias ≈ 1,9 M de triángulos, el 13 % del presupuesto de 15 M del PRD. El 84 % de los objetos comparte geometría.</a:t>
             </a:r>
             <a:endParaRPr lang="en-US" dirty="0"/>
           </a:p>
@@ -1394,7 +1662,7 @@
           <a:p>
             <a:r>
               <a:rPr lang="en-US" dirty="0"/>
-              <a:t>Cierre con las tres conclusiones del proyecto.</a:t>
+              <a:t>Se hicieron 3 juegos de 12 planos 4K en Cycles (solo se entrega el último) y 8 100 fotogramas de vídeo. Los 2 MP4 de Cycles son a 1080p, no a 4K; el entregado pesa 53 MB. EEVEE se usó solo en el borrador del recorrido y en dos pruebas sueltas.</a:t>
             </a:r>
             <a:endParaRPr lang="en-US" dirty="0"/>
           </a:p>
@@ -1418,6 +1686,94 @@
             <a:fld id="{F7021451-1387-4CA6-816F-3879F97B5CBC}" type="slidenum">
               <a:rPr lang="en-US"/>
               <a:t>8</a:t>
+            </a:fld>
+            <a:endParaRPr lang="en-US"/>
+          </a:p>
+        </p:txBody>
+      </p:sp>
+    </p:spTree>
+    <p:extLst>
+      <p:ext uri="{BB962C8B-B14F-4D97-AF65-F5344CB8AC3E}">
+        <p14:creationId xmlns:p14="http://schemas.microsoft.com/office/powerpoint/2010/main" val="1024086991"/>
+      </p:ext>
+    </p:extLst>
+  </p:cSld>
+  <p:clrMapOvr>
+    <a:masterClrMapping/>
+  </p:clrMapOvr>
+</p:notes>
+</file>
+
+<file path=ppt/notesSlides/notesSlide9.xml><?xml version="1.0" encoding="utf-8"?>
+<p:notes xmlns:a="http://schemas.openxmlformats.org/drawingml/2006/main" xmlns:r="http://schemas.openxmlformats.org/officeDocument/2006/relationships" xmlns:p="http://schemas.openxmlformats.org/presentationml/2006/main">
+  <p:cSld>
+    <p:spTree>
+      <p:nvGrpSpPr>
+        <p:cNvPr id="1" name=""/>
+        <p:cNvGrpSpPr/>
+        <p:nvPr/>
+      </p:nvGrpSpPr>
+      <p:grpSpPr>
+        <a:xfrm>
+          <a:off x="0" y="0"/>
+          <a:ext cx="0" cy="0"/>
+          <a:chOff x="0" y="0"/>
+          <a:chExt cx="0" cy="0"/>
+        </a:xfrm>
+      </p:grpSpPr>
+      <p:sp>
+        <p:nvSpPr>
+          <p:cNvPr id="2" name="Slide Image Placeholder 1"/>
+          <p:cNvSpPr>
+            <a:spLocks noGrp="1" noRot="1" noChangeAspect="1"/>
+          </p:cNvSpPr>
+          <p:nvPr>
+            <p:ph type="sldImg"/>
+          </p:nvPr>
+        </p:nvSpPr>
+        <p:spPr/>
+      </p:sp>
+      <p:sp>
+        <p:nvSpPr>
+          <p:cNvPr id="3" name="Notes Placeholder 2"/>
+          <p:cNvSpPr>
+            <a:spLocks noGrp="1"/>
+          </p:cNvSpPr>
+          <p:nvPr>
+            <p:ph type="body" idx="1"/>
+          </p:nvPr>
+        </p:nvSpPr>
+        <p:spPr/>
+        <p:txBody>
+          <a:bodyPr/>
+          <a:lstStyle/>
+          <a:p>
+            <a:r>
+              <a:rPr lang="en-US" dirty="0"/>
+              <a:t>26 h de noches y ausencias + 9 h de trabajo activo + 14–15 h de renders = 50 h de reloj.</a:t>
+            </a:r>
+            <a:endParaRPr lang="en-US" dirty="0"/>
+          </a:p>
+        </p:txBody>
+      </p:sp>
+      <p:sp>
+        <p:nvSpPr>
+          <p:cNvPr id="4" name="Slide Number Placeholder 3"/>
+          <p:cNvSpPr>
+            <a:spLocks noGrp="1"/>
+          </p:cNvSpPr>
+          <p:nvPr>
+            <p:ph type="sldNum" sz="quarter" idx="10"/>
+          </p:nvPr>
+        </p:nvSpPr>
+        <p:spPr/>
+        <p:txBody>
+          <a:bodyPr/>
+          <a:lstStyle/>
+          <a:p>
+            <a:fld id="{F7021451-1387-4CA6-816F-3879F97B5CBC}" type="slidenum">
+              <a:rPr lang="en-US"/>
+              <a:t>9</a:t>
             </a:fld>
             <a:endParaRPr lang="en-US"/>
           </a:p>
@@ -1866,7 +2222,7 @@
         <p:spPr>
           <a:xfrm>
             <a:off x="548640" y="1463040"/>
-            <a:ext cx="4754880" cy="1554480"/>
+            <a:ext cx="4754880" cy="1737360"/>
           </a:xfrm>
           <a:prstGeom prst="rect">
             <a:avLst/>
@@ -1882,7 +2238,7 @@
               <a:buNone/>
             </a:pPr>
             <a:r>
-              <a:rPr lang="en-US" sz="4000" b="1" dirty="0">
+              <a:rPr lang="en-US" sz="3800" b="1" dirty="0">
                 <a:solidFill>
                   <a:srgbClr val="F2EEE8"/>
                 </a:solidFill>
@@ -1890,9 +2246,9 @@
                 <a:ea typeface="Cambria" pitchFamily="34" charset="-122"/>
                 <a:cs typeface="Cambria" pitchFamily="34" charset="-120"/>
               </a:rPr>
-              <a:t>Estudio de TV deportiva en 3D</a:t>
-            </a:r>
-            <a:endParaRPr lang="en-US" sz="4000" dirty="0"/>
+              <a:t>Estudio de TV fotorrealista en Blender</a:t>
+            </a:r>
+            <a:endParaRPr lang="en-US" sz="3800" dirty="0"/>
           </a:p>
         </p:txBody>
       </p:sp>
@@ -1904,8 +2260,8 @@
         </p:nvSpPr>
         <p:spPr>
           <a:xfrm>
-            <a:off x="548640" y="3154680"/>
-            <a:ext cx="4206240" cy="822960"/>
+            <a:off x="548640" y="3337560"/>
+            <a:ext cx="4297680" cy="868680"/>
           </a:xfrm>
           <a:prstGeom prst="rect">
             <a:avLst/>
@@ -1921,7 +2277,7 @@
               <a:buNone/>
             </a:pPr>
             <a:r>
-              <a:rPr lang="en-US" sz="1800" dirty="0">
+              <a:rPr lang="en-US" sz="1600" dirty="0">
                 <a:solidFill>
                   <a:srgbClr val="D9D4CC"/>
                 </a:solidFill>
@@ -1929,9 +2285,9 @@
                 <a:ea typeface="Calibri" pitchFamily="34" charset="-122"/>
                 <a:cs typeface="Calibri" pitchFamily="34" charset="-120"/>
               </a:rPr>
-              <a:t>Un set de televisión completo, construido con Claude a través del MCP de Blender</a:t>
-            </a:r>
-            <a:endParaRPr lang="en-US" sz="1800" dirty="0"/>
+              <a:t>Informe ejecutivo: una instalación de TV completa, modelada desde cero con Claude y el MCP de Blender</a:t>
+            </a:r>
+            <a:endParaRPr lang="en-US" sz="1600" dirty="0"/>
           </a:p>
         </p:txBody>
       </p:sp>
@@ -1968,9 +2324,1853 @@
                 <a:ea typeface="Calibri" pitchFamily="34" charset="-122"/>
                 <a:cs typeface="Calibri" pitchFamily="34" charset="-120"/>
               </a:rPr>
-              <a:t>28 – 30 de septiembre de 2026</a:t>
+              <a:t>1 de octubre de 2026</a:t>
             </a:r>
             <a:endParaRPr lang="en-US" sz="1400" dirty="0"/>
+          </a:p>
+        </p:txBody>
+      </p:sp>
+    </p:spTree>
+  </p:cSld>
+  <p:clrMapOvr>
+    <a:masterClrMapping/>
+  </p:clrMapOvr>
+</p:sld>
+</file>
+
+<file path=ppt/slides/slide10.xml><?xml version="1.0" encoding="utf-8"?>
+<p:sld xmlns:a="http://schemas.openxmlformats.org/drawingml/2006/main" xmlns:r="http://schemas.openxmlformats.org/officeDocument/2006/relationships" xmlns:p="http://schemas.openxmlformats.org/presentationml/2006/main">
+  <p:cSld name="Slide 10">
+    <p:bg>
+      <p:bgPr>
+        <a:solidFill>
+          <a:srgbClr val="12100E"/>
+        </a:solidFill>
+      </p:bgPr>
+    </p:bg>
+    <p:spTree>
+      <p:nvGrpSpPr>
+        <p:cNvPr id="1" name=""/>
+        <p:cNvGrpSpPr/>
+        <p:nvPr/>
+      </p:nvGrpSpPr>
+      <p:grpSpPr>
+        <a:xfrm>
+          <a:off x="0" y="0"/>
+          <a:ext cx="0" cy="0"/>
+          <a:chOff x="0" y="0"/>
+          <a:chExt cx="0" cy="0"/>
+        </a:xfrm>
+      </p:grpSpPr>
+      <p:sp>
+        <p:nvSpPr>
+          <p:cNvPr id="2" name="Text 0"/>
+          <p:cNvSpPr txBox="1"/>
+          <p:nvPr/>
+        </p:nvSpPr>
+        <p:spPr>
+          <a:xfrm>
+            <a:off x="457200" y="320040"/>
+            <a:ext cx="8229600" cy="640080"/>
+          </a:xfrm>
+          <a:prstGeom prst="rect">
+            <a:avLst/>
+          </a:prstGeom>
+          <a:noFill/>
+          <a:ln/>
+        </p:spPr>
+        <p:txBody>
+          <a:bodyPr wrap="square" lIns="0" tIns="0" rIns="0" bIns="0" rtlCol="0" anchor="ctr"/>
+          <a:lstStyle/>
+          <a:p>
+            <a:pPr indent="0" marL="0">
+              <a:buNone/>
+            </a:pPr>
+            <a:r>
+              <a:rPr lang="en-US" sz="3400" b="1" dirty="0">
+                <a:solidFill>
+                  <a:srgbClr val="F2EEE8"/>
+                </a:solidFill>
+                <a:latin typeface="Cambria" pitchFamily="34" charset="0"/>
+                <a:ea typeface="Cambria" pitchFamily="34" charset="-122"/>
+                <a:cs typeface="Cambria" pitchFamily="34" charset="-120"/>
+              </a:rPr>
+              <a:t>Límites de uso</a:t>
+            </a:r>
+            <a:endParaRPr lang="en-US" sz="3400" dirty="0"/>
+          </a:p>
+        </p:txBody>
+      </p:sp>
+      <p:sp>
+        <p:nvSpPr>
+          <p:cNvPr id="3" name="Text 1"/>
+          <p:cNvSpPr txBox="1"/>
+          <p:nvPr/>
+        </p:nvSpPr>
+        <p:spPr>
+          <a:xfrm>
+            <a:off x="457200" y="960120"/>
+            <a:ext cx="8229600" cy="365760"/>
+          </a:xfrm>
+          <a:prstGeom prst="rect">
+            <a:avLst/>
+          </a:prstGeom>
+          <a:noFill/>
+          <a:ln/>
+        </p:spPr>
+        <p:txBody>
+          <a:bodyPr wrap="square" lIns="0" tIns="0" rIns="0" bIns="0" rtlCol="0" anchor="ctr"/>
+          <a:lstStyle/>
+          <a:p>
+            <a:pPr indent="0" marL="0">
+              <a:buNone/>
+            </a:pPr>
+            <a:r>
+              <a:rPr lang="en-US" sz="1600" dirty="0">
+                <a:solidFill>
+                  <a:srgbClr val="A39B90"/>
+                </a:solidFill>
+                <a:latin typeface="Calibri" pitchFamily="34" charset="0"/>
+                <a:ea typeface="Calibri" pitchFamily="34" charset="-122"/>
+                <a:cs typeface="Calibri" pitchFamily="34" charset="-120"/>
+              </a:rPr>
+              <a:t>Consumo de la cuenta durante el proyecto</a:t>
+            </a:r>
+            <a:endParaRPr lang="en-US" sz="1600" dirty="0"/>
+          </a:p>
+        </p:txBody>
+      </p:sp>
+      <p:sp>
+        <p:nvSpPr>
+          <p:cNvPr id="4" name="Shape 2"/>
+          <p:cNvSpPr/>
+          <p:nvPr/>
+        </p:nvSpPr>
+        <p:spPr>
+          <a:xfrm>
+            <a:off x="457200" y="1508760"/>
+            <a:ext cx="2560320" cy="3017520"/>
+          </a:xfrm>
+          <a:prstGeom prst="rect">
+            <a:avLst/>
+          </a:prstGeom>
+          <a:solidFill>
+            <a:srgbClr val="221F1B"/>
+          </a:solidFill>
+          <a:ln w="12700">
+            <a:solidFill>
+              <a:srgbClr val="221F1B"/>
+            </a:solidFill>
+            <a:prstDash val="solid"/>
+          </a:ln>
+        </p:spPr>
+      </p:sp>
+      <p:sp>
+        <p:nvSpPr>
+          <p:cNvPr id="5" name="Text 3"/>
+          <p:cNvSpPr txBox="1"/>
+          <p:nvPr/>
+        </p:nvSpPr>
+        <p:spPr>
+          <a:xfrm>
+            <a:off x="685800" y="1645920"/>
+            <a:ext cx="2103120" cy="411480"/>
+          </a:xfrm>
+          <a:prstGeom prst="rect">
+            <a:avLst/>
+          </a:prstGeom>
+          <a:noFill/>
+          <a:ln/>
+        </p:spPr>
+        <p:txBody>
+          <a:bodyPr wrap="square" lIns="0" tIns="0" rIns="0" bIns="0" rtlCol="0" anchor="t"/>
+          <a:lstStyle/>
+          <a:p>
+            <a:pPr indent="0" marL="0">
+              <a:buNone/>
+            </a:pPr>
+            <a:r>
+              <a:rPr lang="en-US" sz="1100" b="1" spc="100" kern="0" dirty="0">
+                <a:solidFill>
+                  <a:srgbClr val="A39B90"/>
+                </a:solidFill>
+                <a:latin typeface="Calibri" pitchFamily="34" charset="0"/>
+                <a:ea typeface="Calibri" pitchFamily="34" charset="-122"/>
+                <a:cs typeface="Calibri" pitchFamily="34" charset="-120"/>
+              </a:rPr>
+              <a:t>LÍMITE DE 5 HORAS</a:t>
+            </a:r>
+            <a:endParaRPr lang="en-US" sz="1100" dirty="0"/>
+          </a:p>
+        </p:txBody>
+      </p:sp>
+      <p:sp>
+        <p:nvSpPr>
+          <p:cNvPr id="6" name="Text 4"/>
+          <p:cNvSpPr txBox="1"/>
+          <p:nvPr/>
+        </p:nvSpPr>
+        <p:spPr>
+          <a:xfrm>
+            <a:off x="685800" y="2103120"/>
+            <a:ext cx="2103120" cy="640080"/>
+          </a:xfrm>
+          <a:prstGeom prst="rect">
+            <a:avLst/>
+          </a:prstGeom>
+          <a:noFill/>
+          <a:ln/>
+        </p:spPr>
+        <p:txBody>
+          <a:bodyPr wrap="square" lIns="0" tIns="0" rIns="0" bIns="0" rtlCol="0" anchor="ctr"/>
+          <a:lstStyle/>
+          <a:p>
+            <a:pPr indent="0" marL="0">
+              <a:buNone/>
+            </a:pPr>
+            <a:r>
+              <a:rPr lang="en-US" sz="4000" b="1" dirty="0">
+                <a:solidFill>
+                  <a:srgbClr val="F2EEE8"/>
+                </a:solidFill>
+                <a:latin typeface="Cambria" pitchFamily="34" charset="0"/>
+                <a:ea typeface="Cambria" pitchFamily="34" charset="-122"/>
+                <a:cs typeface="Cambria" pitchFamily="34" charset="-120"/>
+              </a:rPr>
+              <a:t>10 %</a:t>
+            </a:r>
+            <a:pPr indent="0" marL="0">
+              <a:buNone/>
+            </a:pPr>
+            <a:r>
+              <a:rPr lang="en-US" sz="1400" dirty="0">
+                <a:solidFill>
+                  <a:srgbClr val="A39B90"/>
+                </a:solidFill>
+                <a:latin typeface="Cambria" pitchFamily="34" charset="0"/>
+                <a:ea typeface="Cambria" pitchFamily="34" charset="-122"/>
+                <a:cs typeface="Cambria" pitchFamily="34" charset="-120"/>
+              </a:rPr>
+              <a:t>  usado</a:t>
+            </a:r>
+            <a:endParaRPr lang="en-US" sz="4000" dirty="0"/>
+          </a:p>
+        </p:txBody>
+      </p:sp>
+      <p:sp>
+        <p:nvSpPr>
+          <p:cNvPr id="7" name="Shape 5"/>
+          <p:cNvSpPr/>
+          <p:nvPr/>
+        </p:nvSpPr>
+        <p:spPr>
+          <a:xfrm>
+            <a:off x="685800" y="2834640"/>
+            <a:ext cx="2103120" cy="128016"/>
+          </a:xfrm>
+          <a:prstGeom prst="rect">
+            <a:avLst/>
+          </a:prstGeom>
+          <a:solidFill>
+            <a:srgbClr val="3A362F"/>
+          </a:solidFill>
+          <a:ln w="12700">
+            <a:solidFill>
+              <a:srgbClr val="3A362F"/>
+            </a:solidFill>
+            <a:prstDash val="solid"/>
+          </a:ln>
+        </p:spPr>
+      </p:sp>
+      <p:sp>
+        <p:nvSpPr>
+          <p:cNvPr id="8" name="Shape 6"/>
+          <p:cNvSpPr/>
+          <p:nvPr/>
+        </p:nvSpPr>
+        <p:spPr>
+          <a:xfrm>
+            <a:off x="685800" y="2834640"/>
+            <a:ext cx="210312" cy="128016"/>
+          </a:xfrm>
+          <a:prstGeom prst="rect">
+            <a:avLst/>
+          </a:prstGeom>
+          <a:solidFill>
+            <a:srgbClr val="5B9BFF"/>
+          </a:solidFill>
+          <a:ln w="12700">
+            <a:solidFill>
+              <a:srgbClr val="5B9BFF"/>
+            </a:solidFill>
+            <a:prstDash val="solid"/>
+          </a:ln>
+        </p:spPr>
+      </p:sp>
+      <p:sp>
+        <p:nvSpPr>
+          <p:cNvPr id="9" name="Text 7"/>
+          <p:cNvSpPr txBox="1"/>
+          <p:nvPr/>
+        </p:nvSpPr>
+        <p:spPr>
+          <a:xfrm>
+            <a:off x="685800" y="3108960"/>
+            <a:ext cx="2103120" cy="1280160"/>
+          </a:xfrm>
+          <a:prstGeom prst="rect">
+            <a:avLst/>
+          </a:prstGeom>
+          <a:noFill/>
+          <a:ln/>
+        </p:spPr>
+        <p:txBody>
+          <a:bodyPr wrap="square" lIns="0" tIns="0" rIns="0" bIns="0" rtlCol="0" anchor="t"/>
+          <a:lstStyle/>
+          <a:p>
+            <a:pPr indent="0" marL="0">
+              <a:spcAft>
+                <a:spcPts val="400"/>
+              </a:spcAft>
+              <a:buNone/>
+            </a:pPr>
+            <a:r>
+              <a:rPr lang="en-US" sz="1200" b="1" dirty="0">
+                <a:solidFill>
+                  <a:srgbClr val="F2EEE8"/>
+                </a:solidFill>
+                <a:latin typeface="Calibri" pitchFamily="34" charset="0"/>
+                <a:ea typeface="Calibri" pitchFamily="34" charset="-122"/>
+                <a:cs typeface="Calibri" pitchFamily="34" charset="-120"/>
+              </a:rPr>
+              <a:t>Se reinicia en 1 h 43 min.</a:t>
+            </a:r>
+            <a:endParaRPr lang="en-US" sz="1200" dirty="0"/>
+          </a:p>
+          <a:p>
+            <a:pPr indent="0" marL="0">
+              <a:buNone/>
+            </a:pPr>
+            <a:r>
+              <a:rPr lang="en-US" sz="1200" dirty="0">
+                <a:solidFill>
+                  <a:srgbClr val="A39B90"/>
+                </a:solidFill>
+                <a:latin typeface="Calibri" pitchFamily="34" charset="0"/>
+                <a:ea typeface="Calibri" pitchFamily="34" charset="-122"/>
+                <a:cs typeface="Calibri" pitchFamily="34" charset="-120"/>
+              </a:rPr>
+              <a:t>Hoy se alcanzó una vez.</a:t>
+            </a:r>
+            <a:endParaRPr lang="en-US" sz="1200" dirty="0"/>
+          </a:p>
+        </p:txBody>
+      </p:sp>
+      <p:sp>
+        <p:nvSpPr>
+          <p:cNvPr id="10" name="Shape 8"/>
+          <p:cNvSpPr/>
+          <p:nvPr/>
+        </p:nvSpPr>
+        <p:spPr>
+          <a:xfrm>
+            <a:off x="3291840" y="1508760"/>
+            <a:ext cx="2560320" cy="3017520"/>
+          </a:xfrm>
+          <a:prstGeom prst="rect">
+            <a:avLst/>
+          </a:prstGeom>
+          <a:solidFill>
+            <a:srgbClr val="221F1B"/>
+          </a:solidFill>
+          <a:ln w="12700">
+            <a:solidFill>
+              <a:srgbClr val="221F1B"/>
+            </a:solidFill>
+            <a:prstDash val="solid"/>
+          </a:ln>
+        </p:spPr>
+      </p:sp>
+      <p:sp>
+        <p:nvSpPr>
+          <p:cNvPr id="11" name="Text 9"/>
+          <p:cNvSpPr txBox="1"/>
+          <p:nvPr/>
+        </p:nvSpPr>
+        <p:spPr>
+          <a:xfrm>
+            <a:off x="3520440" y="1645920"/>
+            <a:ext cx="2103120" cy="411480"/>
+          </a:xfrm>
+          <a:prstGeom prst="rect">
+            <a:avLst/>
+          </a:prstGeom>
+          <a:noFill/>
+          <a:ln/>
+        </p:spPr>
+        <p:txBody>
+          <a:bodyPr wrap="square" lIns="0" tIns="0" rIns="0" bIns="0" rtlCol="0" anchor="t"/>
+          <a:lstStyle/>
+          <a:p>
+            <a:pPr indent="0" marL="0">
+              <a:buNone/>
+            </a:pPr>
+            <a:r>
+              <a:rPr lang="en-US" sz="1100" b="1" spc="100" kern="0" dirty="0">
+                <a:solidFill>
+                  <a:srgbClr val="A39B90"/>
+                </a:solidFill>
+                <a:latin typeface="Calibri" pitchFamily="34" charset="0"/>
+                <a:ea typeface="Calibri" pitchFamily="34" charset="-122"/>
+                <a:cs typeface="Calibri" pitchFamily="34" charset="-120"/>
+              </a:rPr>
+              <a:t>LÍMITE SEMANAL · TODOS LOS MODELOS</a:t>
+            </a:r>
+            <a:endParaRPr lang="en-US" sz="1100" dirty="0"/>
+          </a:p>
+        </p:txBody>
+      </p:sp>
+      <p:sp>
+        <p:nvSpPr>
+          <p:cNvPr id="12" name="Text 10"/>
+          <p:cNvSpPr txBox="1"/>
+          <p:nvPr/>
+        </p:nvSpPr>
+        <p:spPr>
+          <a:xfrm>
+            <a:off x="3520440" y="2103120"/>
+            <a:ext cx="2103120" cy="640080"/>
+          </a:xfrm>
+          <a:prstGeom prst="rect">
+            <a:avLst/>
+          </a:prstGeom>
+          <a:noFill/>
+          <a:ln/>
+        </p:spPr>
+        <p:txBody>
+          <a:bodyPr wrap="square" lIns="0" tIns="0" rIns="0" bIns="0" rtlCol="0" anchor="ctr"/>
+          <a:lstStyle/>
+          <a:p>
+            <a:pPr indent="0" marL="0">
+              <a:buNone/>
+            </a:pPr>
+            <a:r>
+              <a:rPr lang="en-US" sz="4000" b="1" dirty="0">
+                <a:solidFill>
+                  <a:srgbClr val="F2EEE8"/>
+                </a:solidFill>
+                <a:latin typeface="Cambria" pitchFamily="34" charset="0"/>
+                <a:ea typeface="Cambria" pitchFamily="34" charset="-122"/>
+                <a:cs typeface="Cambria" pitchFamily="34" charset="-120"/>
+              </a:rPr>
+              <a:t>40 %</a:t>
+            </a:r>
+            <a:pPr indent="0" marL="0">
+              <a:buNone/>
+            </a:pPr>
+            <a:r>
+              <a:rPr lang="en-US" sz="1400" dirty="0">
+                <a:solidFill>
+                  <a:srgbClr val="A39B90"/>
+                </a:solidFill>
+                <a:latin typeface="Cambria" pitchFamily="34" charset="0"/>
+                <a:ea typeface="Cambria" pitchFamily="34" charset="-122"/>
+                <a:cs typeface="Cambria" pitchFamily="34" charset="-120"/>
+              </a:rPr>
+              <a:t>  usado</a:t>
+            </a:r>
+            <a:endParaRPr lang="en-US" sz="4000" dirty="0"/>
+          </a:p>
+        </p:txBody>
+      </p:sp>
+      <p:sp>
+        <p:nvSpPr>
+          <p:cNvPr id="13" name="Shape 11"/>
+          <p:cNvSpPr/>
+          <p:nvPr/>
+        </p:nvSpPr>
+        <p:spPr>
+          <a:xfrm>
+            <a:off x="3520440" y="2834640"/>
+            <a:ext cx="2103120" cy="128016"/>
+          </a:xfrm>
+          <a:prstGeom prst="rect">
+            <a:avLst/>
+          </a:prstGeom>
+          <a:solidFill>
+            <a:srgbClr val="3A362F"/>
+          </a:solidFill>
+          <a:ln w="12700">
+            <a:solidFill>
+              <a:srgbClr val="3A362F"/>
+            </a:solidFill>
+            <a:prstDash val="solid"/>
+          </a:ln>
+        </p:spPr>
+      </p:sp>
+      <p:sp>
+        <p:nvSpPr>
+          <p:cNvPr id="14" name="Shape 12"/>
+          <p:cNvSpPr/>
+          <p:nvPr/>
+        </p:nvSpPr>
+        <p:spPr>
+          <a:xfrm>
+            <a:off x="3520440" y="2834640"/>
+            <a:ext cx="841248" cy="128016"/>
+          </a:xfrm>
+          <a:prstGeom prst="rect">
+            <a:avLst/>
+          </a:prstGeom>
+          <a:solidFill>
+            <a:srgbClr val="4CAF50"/>
+          </a:solidFill>
+          <a:ln w="12700">
+            <a:solidFill>
+              <a:srgbClr val="4CAF50"/>
+            </a:solidFill>
+            <a:prstDash val="solid"/>
+          </a:ln>
+        </p:spPr>
+      </p:sp>
+      <p:sp>
+        <p:nvSpPr>
+          <p:cNvPr id="15" name="Text 13"/>
+          <p:cNvSpPr txBox="1"/>
+          <p:nvPr/>
+        </p:nvSpPr>
+        <p:spPr>
+          <a:xfrm>
+            <a:off x="3520440" y="3108960"/>
+            <a:ext cx="2103120" cy="1280160"/>
+          </a:xfrm>
+          <a:prstGeom prst="rect">
+            <a:avLst/>
+          </a:prstGeom>
+          <a:noFill/>
+          <a:ln/>
+        </p:spPr>
+        <p:txBody>
+          <a:bodyPr wrap="square" lIns="0" tIns="0" rIns="0" bIns="0" rtlCol="0" anchor="t"/>
+          <a:lstStyle/>
+          <a:p>
+            <a:pPr indent="0" marL="0">
+              <a:spcAft>
+                <a:spcPts val="400"/>
+              </a:spcAft>
+              <a:buNone/>
+            </a:pPr>
+            <a:r>
+              <a:rPr lang="en-US" sz="1200" b="1" dirty="0">
+                <a:solidFill>
+                  <a:srgbClr val="F2EEE8"/>
+                </a:solidFill>
+                <a:latin typeface="Calibri" pitchFamily="34" charset="0"/>
+                <a:ea typeface="Calibri" pitchFamily="34" charset="-122"/>
+                <a:cs typeface="Calibri" pitchFamily="34" charset="-120"/>
+              </a:rPr>
+              <a:t>Se reinicia el 03/10.</a:t>
+            </a:r>
+            <a:endParaRPr lang="en-US" sz="1200" dirty="0"/>
+          </a:p>
+          <a:p>
+            <a:pPr indent="0" marL="0">
+              <a:buNone/>
+            </a:pPr>
+            <a:r>
+              <a:rPr lang="en-US" sz="1200" dirty="0">
+                <a:solidFill>
+                  <a:srgbClr val="A39B90"/>
+                </a:solidFill>
+                <a:latin typeface="Calibri" pitchFamily="34" charset="0"/>
+                <a:ea typeface="Calibri" pitchFamily="34" charset="-122"/>
+                <a:cs typeface="Calibri" pitchFamily="34" charset="-120"/>
+              </a:rPr>
+              <a:t>No se puede aislar la parte de este proyecto; como empezó el 28/09, probablemente es la mayor parte.</a:t>
+            </a:r>
+            <a:endParaRPr lang="en-US" sz="1200" dirty="0"/>
+          </a:p>
+        </p:txBody>
+      </p:sp>
+      <p:sp>
+        <p:nvSpPr>
+          <p:cNvPr id="16" name="Shape 14"/>
+          <p:cNvSpPr/>
+          <p:nvPr/>
+        </p:nvSpPr>
+        <p:spPr>
+          <a:xfrm>
+            <a:off x="6126480" y="1508760"/>
+            <a:ext cx="2560320" cy="3017520"/>
+          </a:xfrm>
+          <a:prstGeom prst="rect">
+            <a:avLst/>
+          </a:prstGeom>
+          <a:solidFill>
+            <a:srgbClr val="221F1B"/>
+          </a:solidFill>
+          <a:ln w="12700">
+            <a:solidFill>
+              <a:srgbClr val="221F1B"/>
+            </a:solidFill>
+            <a:prstDash val="solid"/>
+          </a:ln>
+        </p:spPr>
+      </p:sp>
+      <p:sp>
+        <p:nvSpPr>
+          <p:cNvPr id="17" name="Text 15"/>
+          <p:cNvSpPr txBox="1"/>
+          <p:nvPr/>
+        </p:nvSpPr>
+        <p:spPr>
+          <a:xfrm>
+            <a:off x="6355080" y="1645920"/>
+            <a:ext cx="2103120" cy="411480"/>
+          </a:xfrm>
+          <a:prstGeom prst="rect">
+            <a:avLst/>
+          </a:prstGeom>
+          <a:noFill/>
+          <a:ln/>
+        </p:spPr>
+        <p:txBody>
+          <a:bodyPr wrap="square" lIns="0" tIns="0" rIns="0" bIns="0" rtlCol="0" anchor="t"/>
+          <a:lstStyle/>
+          <a:p>
+            <a:pPr indent="0" marL="0">
+              <a:buNone/>
+            </a:pPr>
+            <a:r>
+              <a:rPr lang="en-US" sz="1100" b="1" spc="100" kern="0" dirty="0">
+                <a:solidFill>
+                  <a:srgbClr val="A39B90"/>
+                </a:solidFill>
+                <a:latin typeface="Calibri" pitchFamily="34" charset="0"/>
+                <a:ea typeface="Calibri" pitchFamily="34" charset="-122"/>
+                <a:cs typeface="Calibri" pitchFamily="34" charset="-120"/>
+              </a:rPr>
+              <a:t>USO EXTRA</a:t>
+            </a:r>
+            <a:endParaRPr lang="en-US" sz="1100" dirty="0"/>
+          </a:p>
+        </p:txBody>
+      </p:sp>
+      <p:sp>
+        <p:nvSpPr>
+          <p:cNvPr id="18" name="Text 16"/>
+          <p:cNvSpPr txBox="1"/>
+          <p:nvPr/>
+        </p:nvSpPr>
+        <p:spPr>
+          <a:xfrm>
+            <a:off x="6355080" y="2103120"/>
+            <a:ext cx="2103120" cy="640080"/>
+          </a:xfrm>
+          <a:prstGeom prst="rect">
+            <a:avLst/>
+          </a:prstGeom>
+          <a:noFill/>
+          <a:ln/>
+        </p:spPr>
+        <p:txBody>
+          <a:bodyPr wrap="square" lIns="0" tIns="0" rIns="0" bIns="0" rtlCol="0" anchor="ctr"/>
+          <a:lstStyle/>
+          <a:p>
+            <a:pPr indent="0" marL="0">
+              <a:buNone/>
+            </a:pPr>
+            <a:r>
+              <a:rPr lang="en-US" sz="2200" b="1" dirty="0">
+                <a:solidFill>
+                  <a:srgbClr val="F2EEE8"/>
+                </a:solidFill>
+                <a:latin typeface="Cambria" pitchFamily="34" charset="0"/>
+                <a:ea typeface="Cambria" pitchFamily="34" charset="-122"/>
+                <a:cs typeface="Cambria" pitchFamily="34" charset="-120"/>
+              </a:rPr>
+              <a:t>Desactivado</a:t>
+            </a:r>
+            <a:endParaRPr lang="en-US" sz="2200" dirty="0"/>
+          </a:p>
+        </p:txBody>
+      </p:sp>
+      <p:sp>
+        <p:nvSpPr>
+          <p:cNvPr id="19" name="Text 17"/>
+          <p:cNvSpPr txBox="1"/>
+          <p:nvPr/>
+        </p:nvSpPr>
+        <p:spPr>
+          <a:xfrm>
+            <a:off x="6355080" y="2788920"/>
+            <a:ext cx="2103120" cy="365760"/>
+          </a:xfrm>
+          <a:prstGeom prst="rect">
+            <a:avLst/>
+          </a:prstGeom>
+          <a:noFill/>
+          <a:ln/>
+        </p:spPr>
+        <p:txBody>
+          <a:bodyPr wrap="square" lIns="0" tIns="0" rIns="0" bIns="0" rtlCol="0" anchor="ctr"/>
+          <a:lstStyle/>
+          <a:p>
+            <a:pPr indent="0" marL="0">
+              <a:buNone/>
+            </a:pPr>
+            <a:r>
+              <a:rPr lang="en-US" sz="2000" b="1" dirty="0">
+                <a:solidFill>
+                  <a:srgbClr val="E0A84A"/>
+                </a:solidFill>
+                <a:latin typeface="Cambria" pitchFamily="34" charset="0"/>
+                <a:ea typeface="Cambria" pitchFamily="34" charset="-122"/>
+                <a:cs typeface="Cambria" pitchFamily="34" charset="-120"/>
+              </a:rPr>
+              <a:t>43,47 USD</a:t>
+            </a:r>
+            <a:endParaRPr lang="en-US" sz="2000" dirty="0"/>
+          </a:p>
+        </p:txBody>
+      </p:sp>
+      <p:sp>
+        <p:nvSpPr>
+          <p:cNvPr id="20" name="Text 18"/>
+          <p:cNvSpPr txBox="1"/>
+          <p:nvPr/>
+        </p:nvSpPr>
+        <p:spPr>
+          <a:xfrm>
+            <a:off x="6355080" y="3200400"/>
+            <a:ext cx="2103120" cy="1234440"/>
+          </a:xfrm>
+          <a:prstGeom prst="rect">
+            <a:avLst/>
+          </a:prstGeom>
+          <a:noFill/>
+          <a:ln/>
+        </p:spPr>
+        <p:txBody>
+          <a:bodyPr wrap="square" lIns="0" tIns="0" rIns="0" bIns="0" rtlCol="0" anchor="t"/>
+          <a:lstStyle/>
+          <a:p>
+            <a:pPr indent="0" marL="0">
+              <a:spcAft>
+                <a:spcPts val="400"/>
+              </a:spcAft>
+              <a:buNone/>
+            </a:pPr>
+            <a:r>
+              <a:rPr lang="en-US" sz="1200" dirty="0">
+                <a:solidFill>
+                  <a:srgbClr val="F2EEE8"/>
+                </a:solidFill>
+                <a:latin typeface="Calibri" pitchFamily="34" charset="0"/>
+                <a:ea typeface="Calibri" pitchFamily="34" charset="-122"/>
+                <a:cs typeface="Calibri" pitchFamily="34" charset="-120"/>
+              </a:rPr>
+              <a:t>en el contador de la cuenta, con límite mensual de 10 USD.</a:t>
+            </a:r>
+            <a:endParaRPr lang="en-US" sz="1200" dirty="0"/>
+          </a:p>
+          <a:p>
+            <a:pPr indent="0" marL="0">
+              <a:buNone/>
+            </a:pPr>
+            <a:r>
+              <a:rPr lang="en-US" sz="1200" dirty="0">
+                <a:solidFill>
+                  <a:srgbClr val="A39B90"/>
+                </a:solidFill>
+                <a:latin typeface="Calibri" pitchFamily="34" charset="0"/>
+                <a:ea typeface="Calibri" pitchFamily="34" charset="-122"/>
+                <a:cs typeface="Calibri" pitchFamily="34" charset="-120"/>
+              </a:rPr>
+              <a:t>Es un dato de la cuenta; no se sabe a qué sesión corresponde.</a:t>
+            </a:r>
+            <a:endParaRPr lang="en-US" sz="1200" dirty="0"/>
+          </a:p>
+        </p:txBody>
+      </p:sp>
+    </p:spTree>
+  </p:cSld>
+  <p:clrMapOvr>
+    <a:masterClrMapping/>
+  </p:clrMapOvr>
+</p:sld>
+</file>
+
+<file path=ppt/slides/slide11.xml><?xml version="1.0" encoding="utf-8"?>
+<p:sld xmlns:a="http://schemas.openxmlformats.org/drawingml/2006/main" xmlns:r="http://schemas.openxmlformats.org/officeDocument/2006/relationships" xmlns:p="http://schemas.openxmlformats.org/presentationml/2006/main">
+  <p:cSld name="Slide 11">
+    <p:bg>
+      <p:bgPr>
+        <a:solidFill>
+          <a:srgbClr val="12100E"/>
+        </a:solidFill>
+      </p:bgPr>
+    </p:bg>
+    <p:spTree>
+      <p:nvGrpSpPr>
+        <p:cNvPr id="1" name=""/>
+        <p:cNvGrpSpPr/>
+        <p:nvPr/>
+      </p:nvGrpSpPr>
+      <p:grpSpPr>
+        <a:xfrm>
+          <a:off x="0" y="0"/>
+          <a:ext cx="0" cy="0"/>
+          <a:chOff x="0" y="0"/>
+          <a:chExt cx="0" cy="0"/>
+        </a:xfrm>
+      </p:grpSpPr>
+      <p:sp>
+        <p:nvSpPr>
+          <p:cNvPr id="2" name="Text 0"/>
+          <p:cNvSpPr txBox="1"/>
+          <p:nvPr/>
+        </p:nvSpPr>
+        <p:spPr>
+          <a:xfrm>
+            <a:off x="457200" y="320040"/>
+            <a:ext cx="8229600" cy="640080"/>
+          </a:xfrm>
+          <a:prstGeom prst="rect">
+            <a:avLst/>
+          </a:prstGeom>
+          <a:noFill/>
+          <a:ln/>
+        </p:spPr>
+        <p:txBody>
+          <a:bodyPr wrap="square" lIns="0" tIns="0" rIns="0" bIns="0" rtlCol="0" anchor="ctr"/>
+          <a:lstStyle/>
+          <a:p>
+            <a:pPr indent="0" marL="0">
+              <a:buNone/>
+            </a:pPr>
+            <a:r>
+              <a:rPr lang="en-US" sz="3400" b="1" dirty="0">
+                <a:solidFill>
+                  <a:srgbClr val="F2EEE8"/>
+                </a:solidFill>
+                <a:latin typeface="Cambria" pitchFamily="34" charset="0"/>
+                <a:ea typeface="Cambria" pitchFamily="34" charset="-122"/>
+                <a:cs typeface="Cambria" pitchFamily="34" charset="-120"/>
+              </a:rPr>
+              <a:t>Tokens de la sesión</a:t>
+            </a:r>
+            <a:endParaRPr lang="en-US" sz="3400" dirty="0"/>
+          </a:p>
+        </p:txBody>
+      </p:sp>
+      <p:sp>
+        <p:nvSpPr>
+          <p:cNvPr id="3" name="Text 1"/>
+          <p:cNvSpPr txBox="1"/>
+          <p:nvPr/>
+        </p:nvSpPr>
+        <p:spPr>
+          <a:xfrm>
+            <a:off x="457200" y="960120"/>
+            <a:ext cx="8229600" cy="365760"/>
+          </a:xfrm>
+          <a:prstGeom prst="rect">
+            <a:avLst/>
+          </a:prstGeom>
+          <a:noFill/>
+          <a:ln/>
+        </p:spPr>
+        <p:txBody>
+          <a:bodyPr wrap="square" lIns="0" tIns="0" rIns="0" bIns="0" rtlCol="0" anchor="ctr"/>
+          <a:lstStyle/>
+          <a:p>
+            <a:pPr indent="0" marL="0">
+              <a:buNone/>
+            </a:pPr>
+            <a:r>
+              <a:rPr lang="en-US" sz="1600" dirty="0">
+                <a:solidFill>
+                  <a:srgbClr val="A39B90"/>
+                </a:solidFill>
+                <a:latin typeface="Calibri" pitchFamily="34" charset="0"/>
+                <a:ea typeface="Calibri" pitchFamily="34" charset="-122"/>
+                <a:cs typeface="Calibri" pitchFamily="34" charset="-120"/>
+              </a:rPr>
+              <a:t>Contados desde la transcripción</a:t>
+            </a:r>
+            <a:endParaRPr lang="en-US" sz="1600" dirty="0"/>
+          </a:p>
+        </p:txBody>
+      </p:sp>
+      <p:sp>
+        <p:nvSpPr>
+          <p:cNvPr id="4" name="Shape 2"/>
+          <p:cNvSpPr/>
+          <p:nvPr/>
+        </p:nvSpPr>
+        <p:spPr>
+          <a:xfrm>
+            <a:off x="457200" y="1508760"/>
+            <a:ext cx="3108960" cy="1417320"/>
+          </a:xfrm>
+          <a:prstGeom prst="rect">
+            <a:avLst/>
+          </a:prstGeom>
+          <a:solidFill>
+            <a:srgbClr val="221F1B"/>
+          </a:solidFill>
+          <a:ln w="12700">
+            <a:solidFill>
+              <a:srgbClr val="221F1B"/>
+            </a:solidFill>
+            <a:prstDash val="solid"/>
+          </a:ln>
+        </p:spPr>
+      </p:sp>
+      <p:sp>
+        <p:nvSpPr>
+          <p:cNvPr id="5" name="Shape 3"/>
+          <p:cNvSpPr/>
+          <p:nvPr/>
+        </p:nvSpPr>
+        <p:spPr>
+          <a:xfrm>
+            <a:off x="685800" y="1737360"/>
+            <a:ext cx="502920" cy="502920"/>
+          </a:xfrm>
+          <a:prstGeom prst="ellipse">
+            <a:avLst/>
+          </a:prstGeom>
+          <a:solidFill>
+            <a:srgbClr val="5B9BFF"/>
+          </a:solidFill>
+          <a:ln w="12700">
+            <a:solidFill>
+              <a:srgbClr val="5B9BFF"/>
+            </a:solidFill>
+            <a:prstDash val="solid"/>
+          </a:ln>
+        </p:spPr>
+      </p:sp>
+      <p:pic>
+        <p:nvPicPr>
+          <p:cNvPr id="6" name="Image 0" descr="preencoded.png">    </p:cNvPr>
+          <p:cNvPicPr>
+            <a:picLocks noChangeAspect="1"/>
+          </p:cNvPicPr>
+          <p:nvPr/>
+        </p:nvPicPr>
+        <p:blipFill>
+          <a:blip r:embed="rId1"/>
+          <a:stretch>
+            <a:fillRect/>
+          </a:stretch>
+        </p:blipFill>
+        <p:spPr>
+          <a:xfrm>
+            <a:off x="821588" y="1873148"/>
+            <a:ext cx="231343" cy="231343"/>
+          </a:xfrm>
+          <a:prstGeom prst="rect">
+            <a:avLst/>
+          </a:prstGeom>
+        </p:spPr>
+      </p:pic>
+      <p:sp>
+        <p:nvSpPr>
+          <p:cNvPr id="7" name="Text 4"/>
+          <p:cNvSpPr txBox="1"/>
+          <p:nvPr/>
+        </p:nvSpPr>
+        <p:spPr>
+          <a:xfrm>
+            <a:off x="685800" y="2286000"/>
+            <a:ext cx="2743200" cy="457200"/>
+          </a:xfrm>
+          <a:prstGeom prst="rect">
+            <a:avLst/>
+          </a:prstGeom>
+          <a:noFill/>
+          <a:ln/>
+        </p:spPr>
+        <p:txBody>
+          <a:bodyPr wrap="square" lIns="0" tIns="0" rIns="0" bIns="0" rtlCol="0" anchor="ctr"/>
+          <a:lstStyle/>
+          <a:p>
+            <a:pPr indent="0" marL="0">
+              <a:buNone/>
+            </a:pPr>
+            <a:r>
+              <a:rPr lang="en-US" sz="3000" b="1" dirty="0">
+                <a:solidFill>
+                  <a:srgbClr val="F2EEE8"/>
+                </a:solidFill>
+                <a:latin typeface="Cambria" pitchFamily="34" charset="0"/>
+                <a:ea typeface="Cambria" pitchFamily="34" charset="-122"/>
+                <a:cs typeface="Cambria" pitchFamily="34" charset="-120"/>
+              </a:rPr>
+              <a:t>≈ 1,3 M</a:t>
+            </a:r>
+            <a:endParaRPr lang="en-US" sz="3000" dirty="0"/>
+          </a:p>
+        </p:txBody>
+      </p:sp>
+      <p:sp>
+        <p:nvSpPr>
+          <p:cNvPr id="8" name="Text 5"/>
+          <p:cNvSpPr txBox="1"/>
+          <p:nvPr/>
+        </p:nvSpPr>
+        <p:spPr>
+          <a:xfrm>
+            <a:off x="1325880" y="1783080"/>
+            <a:ext cx="2103120" cy="411480"/>
+          </a:xfrm>
+          <a:prstGeom prst="rect">
+            <a:avLst/>
+          </a:prstGeom>
+          <a:noFill/>
+          <a:ln/>
+        </p:spPr>
+        <p:txBody>
+          <a:bodyPr wrap="square" lIns="0" tIns="0" rIns="0" bIns="0" rtlCol="0" anchor="ctr"/>
+          <a:lstStyle/>
+          <a:p>
+            <a:pPr indent="0" marL="0">
+              <a:buNone/>
+            </a:pPr>
+            <a:r>
+              <a:rPr lang="en-US" sz="1400" dirty="0">
+                <a:solidFill>
+                  <a:srgbClr val="A39B90"/>
+                </a:solidFill>
+                <a:latin typeface="Calibri" pitchFamily="34" charset="0"/>
+                <a:ea typeface="Calibri" pitchFamily="34" charset="-122"/>
+                <a:cs typeface="Calibri" pitchFamily="34" charset="-120"/>
+              </a:rPr>
+              <a:t>Tokens generados</a:t>
+            </a:r>
+            <a:endParaRPr lang="en-US" sz="1400" dirty="0"/>
+          </a:p>
+        </p:txBody>
+      </p:sp>
+      <p:sp>
+        <p:nvSpPr>
+          <p:cNvPr id="9" name="Shape 6"/>
+          <p:cNvSpPr/>
+          <p:nvPr/>
+        </p:nvSpPr>
+        <p:spPr>
+          <a:xfrm>
+            <a:off x="457200" y="3108960"/>
+            <a:ext cx="3108960" cy="1417320"/>
+          </a:xfrm>
+          <a:prstGeom prst="rect">
+            <a:avLst/>
+          </a:prstGeom>
+          <a:solidFill>
+            <a:srgbClr val="221F1B"/>
+          </a:solidFill>
+          <a:ln w="12700">
+            <a:solidFill>
+              <a:srgbClr val="221F1B"/>
+            </a:solidFill>
+            <a:prstDash val="solid"/>
+          </a:ln>
+        </p:spPr>
+      </p:sp>
+      <p:sp>
+        <p:nvSpPr>
+          <p:cNvPr id="10" name="Shape 7"/>
+          <p:cNvSpPr/>
+          <p:nvPr/>
+        </p:nvSpPr>
+        <p:spPr>
+          <a:xfrm>
+            <a:off x="685800" y="3337560"/>
+            <a:ext cx="502920" cy="502920"/>
+          </a:xfrm>
+          <a:prstGeom prst="ellipse">
+            <a:avLst/>
+          </a:prstGeom>
+          <a:solidFill>
+            <a:srgbClr val="4CAF50"/>
+          </a:solidFill>
+          <a:ln w="12700">
+            <a:solidFill>
+              <a:srgbClr val="4CAF50"/>
+            </a:solidFill>
+            <a:prstDash val="solid"/>
+          </a:ln>
+        </p:spPr>
+      </p:sp>
+      <p:pic>
+        <p:nvPicPr>
+          <p:cNvPr id="11" name="Image 1" descr="preencoded.png">    </p:cNvPr>
+          <p:cNvPicPr>
+            <a:picLocks noChangeAspect="1"/>
+          </p:cNvPicPr>
+          <p:nvPr/>
+        </p:nvPicPr>
+        <p:blipFill>
+          <a:blip r:embed="rId2"/>
+          <a:stretch>
+            <a:fillRect/>
+          </a:stretch>
+        </p:blipFill>
+        <p:spPr>
+          <a:xfrm>
+            <a:off x="821588" y="3473348"/>
+            <a:ext cx="231343" cy="231343"/>
+          </a:xfrm>
+          <a:prstGeom prst="rect">
+            <a:avLst/>
+          </a:prstGeom>
+        </p:spPr>
+      </p:pic>
+      <p:sp>
+        <p:nvSpPr>
+          <p:cNvPr id="12" name="Text 8"/>
+          <p:cNvSpPr txBox="1"/>
+          <p:nvPr/>
+        </p:nvSpPr>
+        <p:spPr>
+          <a:xfrm>
+            <a:off x="685800" y="3886200"/>
+            <a:ext cx="2743200" cy="457200"/>
+          </a:xfrm>
+          <a:prstGeom prst="rect">
+            <a:avLst/>
+          </a:prstGeom>
+          <a:noFill/>
+          <a:ln/>
+        </p:spPr>
+        <p:txBody>
+          <a:bodyPr wrap="square" lIns="0" tIns="0" rIns="0" bIns="0" rtlCol="0" anchor="ctr"/>
+          <a:lstStyle/>
+          <a:p>
+            <a:pPr indent="0" marL="0">
+              <a:buNone/>
+            </a:pPr>
+            <a:r>
+              <a:rPr lang="en-US" sz="3000" b="1" dirty="0">
+                <a:solidFill>
+                  <a:srgbClr val="F2EEE8"/>
+                </a:solidFill>
+                <a:latin typeface="Cambria" pitchFamily="34" charset="0"/>
+                <a:ea typeface="Cambria" pitchFamily="34" charset="-122"/>
+                <a:cs typeface="Cambria" pitchFamily="34" charset="-120"/>
+              </a:rPr>
+              <a:t>2,7 M</a:t>
+            </a:r>
+            <a:endParaRPr lang="en-US" sz="3000" dirty="0"/>
+          </a:p>
+        </p:txBody>
+      </p:sp>
+      <p:sp>
+        <p:nvSpPr>
+          <p:cNvPr id="13" name="Text 9"/>
+          <p:cNvSpPr txBox="1"/>
+          <p:nvPr/>
+        </p:nvSpPr>
+        <p:spPr>
+          <a:xfrm>
+            <a:off x="1325880" y="3383280"/>
+            <a:ext cx="2103120" cy="411480"/>
+          </a:xfrm>
+          <a:prstGeom prst="rect">
+            <a:avLst/>
+          </a:prstGeom>
+          <a:noFill/>
+          <a:ln/>
+        </p:spPr>
+        <p:txBody>
+          <a:bodyPr wrap="square" lIns="0" tIns="0" rIns="0" bIns="0" rtlCol="0" anchor="ctr"/>
+          <a:lstStyle/>
+          <a:p>
+            <a:pPr indent="0" marL="0">
+              <a:buNone/>
+            </a:pPr>
+            <a:r>
+              <a:rPr lang="en-US" sz="1400" dirty="0">
+                <a:solidFill>
+                  <a:srgbClr val="A39B90"/>
+                </a:solidFill>
+                <a:latin typeface="Calibri" pitchFamily="34" charset="0"/>
+                <a:ea typeface="Calibri" pitchFamily="34" charset="-122"/>
+                <a:cs typeface="Calibri" pitchFamily="34" charset="-120"/>
+              </a:rPr>
+              <a:t>Tokens escritos a la caché</a:t>
+            </a:r>
+            <a:endParaRPr lang="en-US" sz="1400" dirty="0"/>
+          </a:p>
+        </p:txBody>
+      </p:sp>
+      <p:sp>
+        <p:nvSpPr>
+          <p:cNvPr id="14" name="Shape 10"/>
+          <p:cNvSpPr/>
+          <p:nvPr/>
+        </p:nvSpPr>
+        <p:spPr>
+          <a:xfrm>
+            <a:off x="3794760" y="1508760"/>
+            <a:ext cx="4892040" cy="3017520"/>
+          </a:xfrm>
+          <a:prstGeom prst="rect">
+            <a:avLst/>
+          </a:prstGeom>
+          <a:solidFill>
+            <a:srgbClr val="16263F"/>
+          </a:solidFill>
+          <a:ln w="12700">
+            <a:solidFill>
+              <a:srgbClr val="16263F"/>
+            </a:solidFill>
+            <a:prstDash val="solid"/>
+          </a:ln>
+        </p:spPr>
+      </p:sp>
+      <p:sp>
+        <p:nvSpPr>
+          <p:cNvPr id="15" name="Shape 11"/>
+          <p:cNvSpPr/>
+          <p:nvPr/>
+        </p:nvSpPr>
+        <p:spPr>
+          <a:xfrm>
+            <a:off x="4114800" y="1783080"/>
+            <a:ext cx="640080" cy="640080"/>
+          </a:xfrm>
+          <a:prstGeom prst="ellipse">
+            <a:avLst/>
+          </a:prstGeom>
+          <a:solidFill>
+            <a:srgbClr val="5B9BFF"/>
+          </a:solidFill>
+          <a:ln w="12700">
+            <a:solidFill>
+              <a:srgbClr val="5B9BFF"/>
+            </a:solidFill>
+            <a:prstDash val="solid"/>
+          </a:ln>
+        </p:spPr>
+      </p:sp>
+      <p:pic>
+        <p:nvPicPr>
+          <p:cNvPr id="16" name="Image 2" descr="preencoded.png">    </p:cNvPr>
+          <p:cNvPicPr>
+            <a:picLocks noChangeAspect="1"/>
+          </p:cNvPicPr>
+          <p:nvPr/>
+        </p:nvPicPr>
+        <p:blipFill>
+          <a:blip r:embed="rId3"/>
+          <a:stretch>
+            <a:fillRect/>
+          </a:stretch>
+        </p:blipFill>
+        <p:spPr>
+          <a:xfrm>
+            <a:off x="4287622" y="1955902"/>
+            <a:ext cx="294437" cy="294437"/>
+          </a:xfrm>
+          <a:prstGeom prst="rect">
+            <a:avLst/>
+          </a:prstGeom>
+        </p:spPr>
+      </p:pic>
+      <p:sp>
+        <p:nvSpPr>
+          <p:cNvPr id="17" name="Text 12"/>
+          <p:cNvSpPr txBox="1"/>
+          <p:nvPr/>
+        </p:nvSpPr>
+        <p:spPr>
+          <a:xfrm>
+            <a:off x="4114800" y="2606040"/>
+            <a:ext cx="4297680" cy="914400"/>
+          </a:xfrm>
+          <a:prstGeom prst="rect">
+            <a:avLst/>
+          </a:prstGeom>
+          <a:noFill/>
+          <a:ln/>
+        </p:spPr>
+        <p:txBody>
+          <a:bodyPr wrap="square" lIns="0" tIns="0" rIns="0" bIns="0" rtlCol="0" anchor="ctr"/>
+          <a:lstStyle/>
+          <a:p>
+            <a:pPr indent="0" marL="0">
+              <a:buNone/>
+            </a:pPr>
+            <a:r>
+              <a:rPr lang="en-US" sz="6000" b="1" dirty="0">
+                <a:solidFill>
+                  <a:srgbClr val="F2EEE8"/>
+                </a:solidFill>
+                <a:latin typeface="Cambria" pitchFamily="34" charset="0"/>
+                <a:ea typeface="Cambria" pitchFamily="34" charset="-122"/>
+                <a:cs typeface="Cambria" pitchFamily="34" charset="-120"/>
+              </a:rPr>
+              <a:t>≈ 335 M</a:t>
+            </a:r>
+            <a:endParaRPr lang="en-US" sz="6000" dirty="0"/>
+          </a:p>
+        </p:txBody>
+      </p:sp>
+      <p:sp>
+        <p:nvSpPr>
+          <p:cNvPr id="18" name="Text 13"/>
+          <p:cNvSpPr txBox="1"/>
+          <p:nvPr/>
+        </p:nvSpPr>
+        <p:spPr>
+          <a:xfrm>
+            <a:off x="4114800" y="3520440"/>
+            <a:ext cx="4297680" cy="365760"/>
+          </a:xfrm>
+          <a:prstGeom prst="rect">
+            <a:avLst/>
+          </a:prstGeom>
+          <a:noFill/>
+          <a:ln/>
+        </p:spPr>
+        <p:txBody>
+          <a:bodyPr wrap="square" lIns="0" tIns="0" rIns="0" bIns="0" rtlCol="0" anchor="ctr"/>
+          <a:lstStyle/>
+          <a:p>
+            <a:pPr indent="0" marL="0">
+              <a:buNone/>
+            </a:pPr>
+            <a:r>
+              <a:rPr lang="en-US" sz="1800" b="1" dirty="0">
+                <a:solidFill>
+                  <a:srgbClr val="5B9BFF"/>
+                </a:solidFill>
+                <a:latin typeface="Calibri" pitchFamily="34" charset="0"/>
+                <a:ea typeface="Calibri" pitchFamily="34" charset="-122"/>
+                <a:cs typeface="Calibri" pitchFamily="34" charset="-120"/>
+              </a:rPr>
+              <a:t>tokens leídos de la caché</a:t>
+            </a:r>
+            <a:endParaRPr lang="en-US" sz="1800" dirty="0"/>
+          </a:p>
+        </p:txBody>
+      </p:sp>
+      <p:sp>
+        <p:nvSpPr>
+          <p:cNvPr id="19" name="Text 14"/>
+          <p:cNvSpPr txBox="1"/>
+          <p:nvPr/>
+        </p:nvSpPr>
+        <p:spPr>
+          <a:xfrm>
+            <a:off x="4114800" y="3886200"/>
+            <a:ext cx="4297680" cy="548640"/>
+          </a:xfrm>
+          <a:prstGeom prst="rect">
+            <a:avLst/>
+          </a:prstGeom>
+          <a:noFill/>
+          <a:ln/>
+        </p:spPr>
+        <p:txBody>
+          <a:bodyPr wrap="square" lIns="0" tIns="0" rIns="0" bIns="0" rtlCol="0" anchor="t"/>
+          <a:lstStyle/>
+          <a:p>
+            <a:pPr indent="0" marL="0">
+              <a:buNone/>
+            </a:pPr>
+            <a:r>
+              <a:rPr lang="en-US" sz="1400" dirty="0">
+                <a:solidFill>
+                  <a:srgbClr val="C9D6EA"/>
+                </a:solidFill>
+                <a:latin typeface="Calibri" pitchFamily="34" charset="0"/>
+                <a:ea typeface="Calibri" pitchFamily="34" charset="-122"/>
+                <a:cs typeface="Calibri" pitchFamily="34" charset="-120"/>
+              </a:rPr>
+              <a:t>Son ≈ 99 % de los tokens contados y se cobran mucho más barato.</a:t>
+            </a:r>
+            <a:endParaRPr lang="en-US" sz="1400" dirty="0"/>
+          </a:p>
+        </p:txBody>
+      </p:sp>
+    </p:spTree>
+  </p:cSld>
+  <p:clrMapOvr>
+    <a:masterClrMapping/>
+  </p:clrMapOvr>
+</p:sld>
+</file>
+
+<file path=ppt/slides/slide12.xml><?xml version="1.0" encoding="utf-8"?>
+<p:sld xmlns:a="http://schemas.openxmlformats.org/drawingml/2006/main" xmlns:r="http://schemas.openxmlformats.org/officeDocument/2006/relationships" xmlns:p="http://schemas.openxmlformats.org/presentationml/2006/main">
+  <p:cSld name="Slide 12">
+    <p:bg>
+      <p:bgPr>
+        <a:solidFill>
+          <a:srgbClr val="12100E"/>
+        </a:solidFill>
+      </p:bgPr>
+    </p:bg>
+    <p:spTree>
+      <p:nvGrpSpPr>
+        <p:cNvPr id="1" name=""/>
+        <p:cNvGrpSpPr/>
+        <p:nvPr/>
+      </p:nvGrpSpPr>
+      <p:grpSpPr>
+        <a:xfrm>
+          <a:off x="0" y="0"/>
+          <a:ext cx="0" cy="0"/>
+          <a:chOff x="0" y="0"/>
+          <a:chExt cx="0" cy="0"/>
+        </a:xfrm>
+      </p:grpSpPr>
+      <p:pic>
+        <p:nvPicPr>
+          <p:cNvPr id="2" name="Image 0" descr="/tmp/claude-0/-home-user-other/d8041478-dfcc-5ca6-9236-09cb61fbd919/scratchpad/img/bg1.jpg">    </p:cNvPr>
+          <p:cNvPicPr>
+            <a:picLocks noChangeAspect="1"/>
+          </p:cNvPicPr>
+          <p:nvPr/>
+        </p:nvPicPr>
+        <p:blipFill>
+          <a:blip r:embed="rId1"/>
+          <a:stretch>
+            <a:fillRect/>
+          </a:stretch>
+        </p:blipFill>
+        <p:spPr>
+          <a:xfrm>
+            <a:off x="0" y="0"/>
+            <a:ext cx="9144000" cy="5143500"/>
+          </a:xfrm>
+          <a:prstGeom prst="rect">
+            <a:avLst/>
+          </a:prstGeom>
+        </p:spPr>
+      </p:pic>
+      <p:sp>
+        <p:nvSpPr>
+          <p:cNvPr id="3" name="Text 0"/>
+          <p:cNvSpPr txBox="1"/>
+          <p:nvPr/>
+        </p:nvSpPr>
+        <p:spPr>
+          <a:xfrm>
+            <a:off x="548640" y="457200"/>
+            <a:ext cx="5486400" cy="731520"/>
+          </a:xfrm>
+          <a:prstGeom prst="rect">
+            <a:avLst/>
+          </a:prstGeom>
+          <a:noFill/>
+          <a:ln/>
+        </p:spPr>
+        <p:txBody>
+          <a:bodyPr wrap="square" lIns="0" tIns="0" rIns="0" bIns="0" rtlCol="0" anchor="ctr"/>
+          <a:lstStyle/>
+          <a:p>
+            <a:pPr indent="0" marL="0">
+              <a:buNone/>
+            </a:pPr>
+            <a:r>
+              <a:rPr lang="en-US" sz="3800" b="1" dirty="0">
+                <a:solidFill>
+                  <a:srgbClr val="F2EEE8"/>
+                </a:solidFill>
+                <a:latin typeface="Cambria" pitchFamily="34" charset="0"/>
+                <a:ea typeface="Cambria" pitchFamily="34" charset="-122"/>
+                <a:cs typeface="Cambria" pitchFamily="34" charset="-120"/>
+              </a:rPr>
+              <a:t>En resumen</a:t>
+            </a:r>
+            <a:endParaRPr lang="en-US" sz="3800" dirty="0"/>
+          </a:p>
+        </p:txBody>
+      </p:sp>
+      <p:sp>
+        <p:nvSpPr>
+          <p:cNvPr id="4" name="Shape 1"/>
+          <p:cNvSpPr/>
+          <p:nvPr/>
+        </p:nvSpPr>
+        <p:spPr>
+          <a:xfrm>
+            <a:off x="548640" y="1554480"/>
+            <a:ext cx="594360" cy="594360"/>
+          </a:xfrm>
+          <a:prstGeom prst="ellipse">
+            <a:avLst/>
+          </a:prstGeom>
+          <a:solidFill>
+            <a:srgbClr val="5B9BFF"/>
+          </a:solidFill>
+          <a:ln w="12700">
+            <a:solidFill>
+              <a:srgbClr val="5B9BFF"/>
+            </a:solidFill>
+            <a:prstDash val="solid"/>
+          </a:ln>
+        </p:spPr>
+      </p:sp>
+      <p:pic>
+        <p:nvPicPr>
+          <p:cNvPr id="5" name="Image 1" descr="preencoded.png">    </p:cNvPr>
+          <p:cNvPicPr>
+            <a:picLocks noChangeAspect="1"/>
+          </p:cNvPicPr>
+          <p:nvPr/>
+        </p:nvPicPr>
+        <p:blipFill>
+          <a:blip r:embed="rId2"/>
+          <a:stretch>
+            <a:fillRect/>
+          </a:stretch>
+        </p:blipFill>
+        <p:spPr>
+          <a:xfrm>
+            <a:off x="709117" y="1714957"/>
+            <a:ext cx="273406" cy="273406"/>
+          </a:xfrm>
+          <a:prstGeom prst="rect">
+            <a:avLst/>
+          </a:prstGeom>
+        </p:spPr>
+      </p:pic>
+      <p:sp>
+        <p:nvSpPr>
+          <p:cNvPr id="6" name="Text 2"/>
+          <p:cNvSpPr txBox="1"/>
+          <p:nvPr/>
+        </p:nvSpPr>
+        <p:spPr>
+          <a:xfrm>
+            <a:off x="1371600" y="1508760"/>
+            <a:ext cx="4389120" cy="365760"/>
+          </a:xfrm>
+          <a:prstGeom prst="rect">
+            <a:avLst/>
+          </a:prstGeom>
+          <a:noFill/>
+          <a:ln/>
+        </p:spPr>
+        <p:txBody>
+          <a:bodyPr wrap="square" lIns="0" tIns="0" rIns="0" bIns="0" rtlCol="0" anchor="t"/>
+          <a:lstStyle/>
+          <a:p>
+            <a:pPr indent="0" marL="0">
+              <a:buNone/>
+            </a:pPr>
+            <a:r>
+              <a:rPr lang="en-US" sz="1700" b="1" dirty="0">
+                <a:solidFill>
+                  <a:srgbClr val="F2EEE8"/>
+                </a:solidFill>
+                <a:latin typeface="Calibri" pitchFamily="34" charset="0"/>
+                <a:ea typeface="Calibri" pitchFamily="34" charset="-122"/>
+                <a:cs typeface="Calibri" pitchFamily="34" charset="-120"/>
+              </a:rPr>
+              <a:t>Completo y 100 % desde cero</a:t>
+            </a:r>
+            <a:endParaRPr lang="en-US" sz="1700" dirty="0"/>
+          </a:p>
+        </p:txBody>
+      </p:sp>
+      <p:sp>
+        <p:nvSpPr>
+          <p:cNvPr id="7" name="Text 3"/>
+          <p:cNvSpPr txBox="1"/>
+          <p:nvPr/>
+        </p:nvSpPr>
+        <p:spPr>
+          <a:xfrm>
+            <a:off x="1371600" y="1874520"/>
+            <a:ext cx="4389120" cy="548640"/>
+          </a:xfrm>
+          <a:prstGeom prst="rect">
+            <a:avLst/>
+          </a:prstGeom>
+          <a:noFill/>
+          <a:ln/>
+        </p:spPr>
+        <p:txBody>
+          <a:bodyPr wrap="square" lIns="0" tIns="0" rIns="0" bIns="0" rtlCol="0" anchor="t"/>
+          <a:lstStyle/>
+          <a:p>
+            <a:pPr indent="0" marL="0">
+              <a:buNone/>
+            </a:pPr>
+            <a:r>
+              <a:rPr lang="en-US" sz="1300" dirty="0">
+                <a:solidFill>
+                  <a:srgbClr val="D9D4CC"/>
+                </a:solidFill>
+                <a:latin typeface="Calibri" pitchFamily="34" charset="0"/>
+                <a:ea typeface="Calibri" pitchFamily="34" charset="-122"/>
+                <a:cs typeface="Calibri" pitchFamily="34" charset="-120"/>
+              </a:rPr>
+              <a:t>8 salas, 70 scripts y ningún recurso descargado. Cumple 17 de 21 criterios.</a:t>
+            </a:r>
+            <a:endParaRPr lang="en-US" sz="1300" dirty="0"/>
+          </a:p>
+        </p:txBody>
+      </p:sp>
+      <p:sp>
+        <p:nvSpPr>
+          <p:cNvPr id="8" name="Shape 4"/>
+          <p:cNvSpPr/>
+          <p:nvPr/>
+        </p:nvSpPr>
+        <p:spPr>
+          <a:xfrm>
+            <a:off x="548640" y="2606040"/>
+            <a:ext cx="594360" cy="594360"/>
+          </a:xfrm>
+          <a:prstGeom prst="ellipse">
+            <a:avLst/>
+          </a:prstGeom>
+          <a:solidFill>
+            <a:srgbClr val="4CAF50"/>
+          </a:solidFill>
+          <a:ln w="12700">
+            <a:solidFill>
+              <a:srgbClr val="4CAF50"/>
+            </a:solidFill>
+            <a:prstDash val="solid"/>
+          </a:ln>
+        </p:spPr>
+      </p:sp>
+      <p:pic>
+        <p:nvPicPr>
+          <p:cNvPr id="9" name="Image 2" descr="preencoded.png">    </p:cNvPr>
+          <p:cNvPicPr>
+            <a:picLocks noChangeAspect="1"/>
+          </p:cNvPicPr>
+          <p:nvPr/>
+        </p:nvPicPr>
+        <p:blipFill>
+          <a:blip r:embed="rId3"/>
+          <a:stretch>
+            <a:fillRect/>
+          </a:stretch>
+        </p:blipFill>
+        <p:spPr>
+          <a:xfrm>
+            <a:off x="709117" y="2766517"/>
+            <a:ext cx="273406" cy="273406"/>
+          </a:xfrm>
+          <a:prstGeom prst="rect">
+            <a:avLst/>
+          </a:prstGeom>
+        </p:spPr>
+      </p:pic>
+      <p:sp>
+        <p:nvSpPr>
+          <p:cNvPr id="10" name="Text 5"/>
+          <p:cNvSpPr txBox="1"/>
+          <p:nvPr/>
+        </p:nvSpPr>
+        <p:spPr>
+          <a:xfrm>
+            <a:off x="1371600" y="2560320"/>
+            <a:ext cx="4389120" cy="365760"/>
+          </a:xfrm>
+          <a:prstGeom prst="rect">
+            <a:avLst/>
+          </a:prstGeom>
+          <a:noFill/>
+          <a:ln/>
+        </p:spPr>
+        <p:txBody>
+          <a:bodyPr wrap="square" lIns="0" tIns="0" rIns="0" bIns="0" rtlCol="0" anchor="t"/>
+          <a:lstStyle/>
+          <a:p>
+            <a:pPr indent="0" marL="0">
+              <a:buNone/>
+            </a:pPr>
+            <a:r>
+              <a:rPr lang="en-US" sz="1700" b="1" dirty="0">
+                <a:solidFill>
+                  <a:srgbClr val="F2EEE8"/>
+                </a:solidFill>
+                <a:latin typeface="Calibri" pitchFamily="34" charset="0"/>
+                <a:ea typeface="Calibri" pitchFamily="34" charset="-122"/>
+                <a:cs typeface="Calibri" pitchFamily="34" charset="-120"/>
+              </a:rPr>
+              <a:t>Liviano y fácil de mover</a:t>
+            </a:r>
+            <a:endParaRPr lang="en-US" sz="1700" dirty="0"/>
+          </a:p>
+        </p:txBody>
+      </p:sp>
+      <p:sp>
+        <p:nvSpPr>
+          <p:cNvPr id="11" name="Text 6"/>
+          <p:cNvSpPr txBox="1"/>
+          <p:nvPr/>
+        </p:nvSpPr>
+        <p:spPr>
+          <a:xfrm>
+            <a:off x="1371600" y="2926080"/>
+            <a:ext cx="4389120" cy="548640"/>
+          </a:xfrm>
+          <a:prstGeom prst="rect">
+            <a:avLst/>
+          </a:prstGeom>
+          <a:noFill/>
+          <a:ln/>
+        </p:spPr>
+        <p:txBody>
+          <a:bodyPr wrap="square" lIns="0" tIns="0" rIns="0" bIns="0" rtlCol="0" anchor="t"/>
+          <a:lstStyle/>
+          <a:p>
+            <a:pPr indent="0" marL="0">
+              <a:buNone/>
+            </a:pPr>
+            <a:r>
+              <a:rPr lang="en-US" sz="1300" dirty="0">
+                <a:solidFill>
+                  <a:srgbClr val="D9D4CC"/>
+                </a:solidFill>
+                <a:latin typeface="Calibri" pitchFamily="34" charset="0"/>
+                <a:ea typeface="Calibri" pitchFamily="34" charset="-122"/>
+                <a:cs typeface="Calibri" pitchFamily="34" charset="-120"/>
+              </a:rPr>
+              <a:t>6,3 MB y ≈ 1,9 M de triángulos: el 13 % del presupuesto del PRD.</a:t>
+            </a:r>
+            <a:endParaRPr lang="en-US" sz="1300" dirty="0"/>
+          </a:p>
+        </p:txBody>
+      </p:sp>
+      <p:sp>
+        <p:nvSpPr>
+          <p:cNvPr id="12" name="Shape 7"/>
+          <p:cNvSpPr/>
+          <p:nvPr/>
+        </p:nvSpPr>
+        <p:spPr>
+          <a:xfrm>
+            <a:off x="548640" y="3657600"/>
+            <a:ext cx="594360" cy="594360"/>
+          </a:xfrm>
+          <a:prstGeom prst="ellipse">
+            <a:avLst/>
+          </a:prstGeom>
+          <a:solidFill>
+            <a:srgbClr val="E0A84A"/>
+          </a:solidFill>
+          <a:ln w="12700">
+            <a:solidFill>
+              <a:srgbClr val="E0A84A"/>
+            </a:solidFill>
+            <a:prstDash val="solid"/>
+          </a:ln>
+        </p:spPr>
+      </p:sp>
+      <p:pic>
+        <p:nvPicPr>
+          <p:cNvPr id="13" name="Image 3" descr="preencoded.png">    </p:cNvPr>
+          <p:cNvPicPr>
+            <a:picLocks noChangeAspect="1"/>
+          </p:cNvPicPr>
+          <p:nvPr/>
+        </p:nvPicPr>
+        <p:blipFill>
+          <a:blip r:embed="rId4"/>
+          <a:stretch>
+            <a:fillRect/>
+          </a:stretch>
+        </p:blipFill>
+        <p:spPr>
+          <a:xfrm>
+            <a:off x="709117" y="3818077"/>
+            <a:ext cx="273406" cy="273406"/>
+          </a:xfrm>
+          <a:prstGeom prst="rect">
+            <a:avLst/>
+          </a:prstGeom>
+        </p:spPr>
+      </p:pic>
+      <p:sp>
+        <p:nvSpPr>
+          <p:cNvPr id="14" name="Text 8"/>
+          <p:cNvSpPr txBox="1"/>
+          <p:nvPr/>
+        </p:nvSpPr>
+        <p:spPr>
+          <a:xfrm>
+            <a:off x="1371600" y="3611880"/>
+            <a:ext cx="4389120" cy="365760"/>
+          </a:xfrm>
+          <a:prstGeom prst="rect">
+            <a:avLst/>
+          </a:prstGeom>
+          <a:noFill/>
+          <a:ln/>
+        </p:spPr>
+        <p:txBody>
+          <a:bodyPr wrap="square" lIns="0" tIns="0" rIns="0" bIns="0" rtlCol="0" anchor="t"/>
+          <a:lstStyle/>
+          <a:p>
+            <a:pPr indent="0" marL="0">
+              <a:buNone/>
+            </a:pPr>
+            <a:r>
+              <a:rPr lang="en-US" sz="1700" b="1" dirty="0">
+                <a:solidFill>
+                  <a:srgbClr val="F2EEE8"/>
+                </a:solidFill>
+                <a:latin typeface="Calibri" pitchFamily="34" charset="0"/>
+                <a:ea typeface="Calibri" pitchFamily="34" charset="-122"/>
+                <a:cs typeface="Calibri" pitchFamily="34" charset="-120"/>
+              </a:rPr>
+              <a:t>≈ 9 h activas y ≈ 15 h de render</a:t>
+            </a:r>
+            <a:endParaRPr lang="en-US" sz="1700" dirty="0"/>
+          </a:p>
+        </p:txBody>
+      </p:sp>
+      <p:sp>
+        <p:nvSpPr>
+          <p:cNvPr id="15" name="Text 9"/>
+          <p:cNvSpPr txBox="1"/>
+          <p:nvPr/>
+        </p:nvSpPr>
+        <p:spPr>
+          <a:xfrm>
+            <a:off x="1371600" y="3977640"/>
+            <a:ext cx="4389120" cy="548640"/>
+          </a:xfrm>
+          <a:prstGeom prst="rect">
+            <a:avLst/>
+          </a:prstGeom>
+          <a:noFill/>
+          <a:ln/>
+        </p:spPr>
+        <p:txBody>
+          <a:bodyPr wrap="square" lIns="0" tIns="0" rIns="0" bIns="0" rtlCol="0" anchor="t"/>
+          <a:lstStyle/>
+          <a:p>
+            <a:pPr indent="0" marL="0">
+              <a:buNone/>
+            </a:pPr>
+            <a:r>
+              <a:rPr lang="en-US" sz="1300" dirty="0">
+                <a:solidFill>
+                  <a:srgbClr val="D9D4CC"/>
+                </a:solidFill>
+                <a:latin typeface="Calibri" pitchFamily="34" charset="0"/>
+                <a:ea typeface="Calibri" pitchFamily="34" charset="-122"/>
+                <a:cs typeface="Calibri" pitchFamily="34" charset="-120"/>
+              </a:rPr>
+              <a:t>50 h de reloj en total; la caché domina el consumo de tokens.</a:t>
+            </a:r>
+            <a:endParaRPr lang="en-US" sz="1300" dirty="0"/>
           </a:p>
         </p:txBody>
       </p:sp>
@@ -2006,33 +4206,9 @@
           <a:chExt cx="0" cy="0"/>
         </a:xfrm>
       </p:grpSpPr>
-      <p:pic>
-        <p:nvPicPr>
-          <p:cNvPr id="2" name="Image 0" descr="/tmp/claude-0/-home-user-other/d8041478-dfcc-5ca6-9236-09cb61fbd919/scratchpad/img/crop5.jpg">    </p:cNvPr>
-          <p:cNvPicPr>
-            <a:picLocks noChangeAspect="1"/>
-          </p:cNvPicPr>
-          <p:nvPr/>
-        </p:nvPicPr>
-        <p:blipFill>
-          <a:blip r:embed="rId1"/>
-          <a:stretch>
-            <a:fillRect/>
-          </a:stretch>
-        </p:blipFill>
-        <p:spPr>
-          <a:xfrm>
-            <a:off x="4023360" y="0"/>
-            <a:ext cx="5120640" cy="5143500"/>
-          </a:xfrm>
-          <a:prstGeom prst="rect">
-            <a:avLst/>
-          </a:prstGeom>
-        </p:spPr>
-      </p:pic>
-      <p:sp>
-        <p:nvSpPr>
-          <p:cNvPr id="3" name="Text 0"/>
+      <p:sp>
+        <p:nvSpPr>
+          <p:cNvPr id="2" name="Text 0"/>
           <p:cNvSpPr txBox="1"/>
           <p:nvPr/>
         </p:nvSpPr>
@@ -2063,7 +4239,7 @@
                 <a:ea typeface="Cambria" pitchFamily="34" charset="-122"/>
                 <a:cs typeface="Cambria" pitchFamily="34" charset="-120"/>
               </a:rPr>
-              <a:t>El plató</a:t>
+              <a:t>El proyecto en una página</a:t>
             </a:r>
             <a:endParaRPr lang="en-US" sz="3400" dirty="0"/>
           </a:p>
@@ -2071,14 +4247,14 @@
       </p:sp>
       <p:sp>
         <p:nvSpPr>
-          <p:cNvPr id="4" name="Shape 1"/>
+          <p:cNvPr id="3" name="Shape 1"/>
           <p:cNvSpPr/>
           <p:nvPr/>
         </p:nvSpPr>
         <p:spPr>
           <a:xfrm>
-            <a:off x="457200" y="1234440"/>
-            <a:ext cx="548640" cy="548640"/>
+            <a:off x="457200" y="1325880"/>
+            <a:ext cx="594360" cy="594360"/>
           </a:xfrm>
           <a:prstGeom prst="ellipse">
             <a:avLst/>
@@ -2096,22 +4272,22 @@
       </p:sp>
       <p:pic>
         <p:nvPicPr>
-          <p:cNvPr id="5" name="Image 1" descr="preencoded.png">    </p:cNvPr>
+          <p:cNvPr id="4" name="Image 0" descr="preencoded.png">    </p:cNvPr>
           <p:cNvPicPr>
             <a:picLocks noChangeAspect="1"/>
           </p:cNvPicPr>
           <p:nvPr/>
         </p:nvPicPr>
         <p:blipFill>
-          <a:blip r:embed="rId2"/>
+          <a:blip r:embed="rId1"/>
           <a:stretch>
             <a:fillRect/>
           </a:stretch>
         </p:blipFill>
         <p:spPr>
           <a:xfrm>
-            <a:off x="605333" y="1382573"/>
-            <a:ext cx="252374" cy="252374"/>
+            <a:off x="617677" y="1486357"/>
+            <a:ext cx="273406" cy="273406"/>
           </a:xfrm>
           <a:prstGeom prst="rect">
             <a:avLst/>
@@ -2120,14 +4296,14 @@
       </p:pic>
       <p:sp>
         <p:nvSpPr>
-          <p:cNvPr id="6" name="Text 2"/>
-          <p:cNvSpPr txBox="1"/>
-          <p:nvPr/>
-        </p:nvSpPr>
-        <p:spPr>
-          <a:xfrm>
-            <a:off x="1188720" y="1216152"/>
-            <a:ext cx="2743200" cy="292608"/>
+          <p:cNvPr id="5" name="Text 2"/>
+          <p:cNvSpPr txBox="1"/>
+          <p:nvPr/>
+        </p:nvSpPr>
+        <p:spPr>
+          <a:xfrm>
+            <a:off x="1280160" y="1280160"/>
+            <a:ext cx="4023360" cy="320040"/>
           </a:xfrm>
           <a:prstGeom prst="rect">
             <a:avLst/>
@@ -2143,7 +4319,7 @@
               <a:buNone/>
             </a:pPr>
             <a:r>
-              <a:rPr lang="en-US" sz="1500" b="1" dirty="0">
+              <a:rPr lang="en-US" sz="1700" b="1" dirty="0">
                 <a:solidFill>
                   <a:srgbClr val="F2EEE8"/>
                 </a:solidFill>
@@ -2151,22 +4327,22 @@
                 <a:ea typeface="Calibri" pitchFamily="34" charset="-122"/>
                 <a:cs typeface="Calibri" pitchFamily="34" charset="-120"/>
               </a:rPr>
-              <a:t>Mesa curva</a:t>
-            </a:r>
-            <a:endParaRPr lang="en-US" sz="1500" dirty="0"/>
-          </a:p>
-        </p:txBody>
-      </p:sp>
-      <p:sp>
-        <p:nvSpPr>
-          <p:cNvPr id="7" name="Text 3"/>
-          <p:cNvSpPr txBox="1"/>
-          <p:nvPr/>
-        </p:nvSpPr>
-        <p:spPr>
-          <a:xfrm>
-            <a:off x="1188720" y="1527048"/>
-            <a:ext cx="2743200" cy="457200"/>
+              <a:t>Objetivo</a:t>
+            </a:r>
+            <a:endParaRPr lang="en-US" sz="1700" dirty="0"/>
+          </a:p>
+        </p:txBody>
+      </p:sp>
+      <p:sp>
+        <p:nvSpPr>
+          <p:cNvPr id="6" name="Text 3"/>
+          <p:cNvSpPr txBox="1"/>
+          <p:nvPr/>
+        </p:nvSpPr>
+        <p:spPr>
+          <a:xfrm>
+            <a:off x="1280160" y="1618488"/>
+            <a:ext cx="4023360" cy="594360"/>
           </a:xfrm>
           <a:prstGeom prst="rect">
             <a:avLst/>
@@ -2190,7 +4366,7 @@
                 <a:ea typeface="Calibri" pitchFamily="34" charset="-122"/>
                 <a:cs typeface="Calibri" pitchFamily="34" charset="-120"/>
               </a:rPr>
-              <a:t>Tres puestos de presentador, con botellas, vasos y papeles.</a:t>
+              <a:t>Una instalación de TV completa en Blender, con acabado que pase por fotografía.</a:t>
             </a:r>
             <a:endParaRPr lang="en-US" sz="1300" dirty="0"/>
           </a:p>
@@ -2198,14 +4374,14 @@
       </p:sp>
       <p:sp>
         <p:nvSpPr>
-          <p:cNvPr id="8" name="Shape 4"/>
+          <p:cNvPr id="7" name="Shape 4"/>
           <p:cNvSpPr/>
           <p:nvPr/>
         </p:nvSpPr>
         <p:spPr>
           <a:xfrm>
-            <a:off x="457200" y="2121408"/>
-            <a:ext cx="548640" cy="548640"/>
+            <a:off x="457200" y="2423160"/>
+            <a:ext cx="594360" cy="594360"/>
           </a:xfrm>
           <a:prstGeom prst="ellipse">
             <a:avLst/>
@@ -2223,22 +4399,22 @@
       </p:sp>
       <p:pic>
         <p:nvPicPr>
-          <p:cNvPr id="9" name="Image 2" descr="preencoded.png">    </p:cNvPr>
+          <p:cNvPr id="8" name="Image 1" descr="preencoded.png">    </p:cNvPr>
           <p:cNvPicPr>
             <a:picLocks noChangeAspect="1"/>
           </p:cNvPicPr>
           <p:nvPr/>
         </p:nvPicPr>
         <p:blipFill>
-          <a:blip r:embed="rId3"/>
+          <a:blip r:embed="rId2"/>
           <a:stretch>
             <a:fillRect/>
           </a:stretch>
         </p:blipFill>
         <p:spPr>
           <a:xfrm>
-            <a:off x="605333" y="2269541"/>
-            <a:ext cx="252374" cy="252374"/>
+            <a:off x="617677" y="2583637"/>
+            <a:ext cx="273406" cy="273406"/>
           </a:xfrm>
           <a:prstGeom prst="rect">
             <a:avLst/>
@@ -2247,14 +4423,14 @@
       </p:pic>
       <p:sp>
         <p:nvSpPr>
-          <p:cNvPr id="10" name="Text 5"/>
-          <p:cNvSpPr txBox="1"/>
-          <p:nvPr/>
-        </p:nvSpPr>
-        <p:spPr>
-          <a:xfrm>
-            <a:off x="1188720" y="2103120"/>
-            <a:ext cx="2743200" cy="292608"/>
+          <p:cNvPr id="9" name="Text 5"/>
+          <p:cNvSpPr txBox="1"/>
+          <p:nvPr/>
+        </p:nvSpPr>
+        <p:spPr>
+          <a:xfrm>
+            <a:off x="1280160" y="2377440"/>
+            <a:ext cx="4023360" cy="320040"/>
           </a:xfrm>
           <a:prstGeom prst="rect">
             <a:avLst/>
@@ -2270,7 +4446,7 @@
               <a:buNone/>
             </a:pPr>
             <a:r>
-              <a:rPr lang="en-US" sz="1500" b="1" dirty="0">
+              <a:rPr lang="en-US" sz="1700" b="1" dirty="0">
                 <a:solidFill>
                   <a:srgbClr val="F2EEE8"/>
                 </a:solidFill>
@@ -2278,22 +4454,22 @@
                 <a:ea typeface="Calibri" pitchFamily="34" charset="-122"/>
                 <a:cs typeface="Calibri" pitchFamily="34" charset="-120"/>
               </a:rPr>
-              <a:t>Muro LED</a:t>
-            </a:r>
-            <a:endParaRPr lang="en-US" sz="1500" dirty="0"/>
-          </a:p>
-        </p:txBody>
-      </p:sp>
-      <p:sp>
-        <p:nvSpPr>
-          <p:cNvPr id="11" name="Text 6"/>
-          <p:cNvSpPr txBox="1"/>
-          <p:nvPr/>
-        </p:nvSpPr>
-        <p:spPr>
-          <a:xfrm>
-            <a:off x="1188720" y="2414016"/>
-            <a:ext cx="2743200" cy="457200"/>
+              <a:t>Realista = medible</a:t>
+            </a:r>
+            <a:endParaRPr lang="en-US" sz="1700" dirty="0"/>
+          </a:p>
+        </p:txBody>
+      </p:sp>
+      <p:sp>
+        <p:nvSpPr>
+          <p:cNvPr id="10" name="Text 6"/>
+          <p:cNvSpPr txBox="1"/>
+          <p:nvPr/>
+        </p:nvSpPr>
+        <p:spPr>
+          <a:xfrm>
+            <a:off x="1280160" y="2715768"/>
+            <a:ext cx="4023360" cy="594360"/>
           </a:xfrm>
           <a:prstGeom prst="rect">
             <a:avLst/>
@@ -2317,7 +4493,7 @@
                 <a:ea typeface="Calibri" pitchFamily="34" charset="-122"/>
                 <a:cs typeface="Calibri" pitchFamily="34" charset="-120"/>
               </a:rPr>
-              <a:t>Gráficas de campo de fútbol, también integradas en la mesa.</a:t>
+              <a:t>Cotas a ±1 cm, luz calibrada en lux y cero artefactos de render.</a:t>
             </a:r>
             <a:endParaRPr lang="en-US" sz="1300" dirty="0"/>
           </a:p>
@@ -2325,14 +4501,14 @@
       </p:sp>
       <p:sp>
         <p:nvSpPr>
-          <p:cNvPr id="12" name="Shape 7"/>
+          <p:cNvPr id="11" name="Shape 7"/>
           <p:cNvSpPr/>
           <p:nvPr/>
         </p:nvSpPr>
         <p:spPr>
           <a:xfrm>
-            <a:off x="457200" y="3008376"/>
-            <a:ext cx="548640" cy="548640"/>
+            <a:off x="457200" y="3520440"/>
+            <a:ext cx="594360" cy="594360"/>
           </a:xfrm>
           <a:prstGeom prst="ellipse">
             <a:avLst/>
@@ -2350,22 +4526,22 @@
       </p:sp>
       <p:pic>
         <p:nvPicPr>
-          <p:cNvPr id="13" name="Image 3" descr="preencoded.png">    </p:cNvPr>
+          <p:cNvPr id="12" name="Image 2" descr="preencoded.png">    </p:cNvPr>
           <p:cNvPicPr>
             <a:picLocks noChangeAspect="1"/>
           </p:cNvPicPr>
           <p:nvPr/>
         </p:nvPicPr>
         <p:blipFill>
-          <a:blip r:embed="rId4"/>
+          <a:blip r:embed="rId3"/>
           <a:stretch>
             <a:fillRect/>
           </a:stretch>
         </p:blipFill>
         <p:spPr>
           <a:xfrm>
-            <a:off x="605333" y="3156509"/>
-            <a:ext cx="252374" cy="252374"/>
+            <a:off x="617677" y="3680917"/>
+            <a:ext cx="273406" cy="273406"/>
           </a:xfrm>
           <a:prstGeom prst="rect">
             <a:avLst/>
@@ -2374,14 +4550,14 @@
       </p:pic>
       <p:sp>
         <p:nvSpPr>
-          <p:cNvPr id="14" name="Text 8"/>
-          <p:cNvSpPr txBox="1"/>
-          <p:nvPr/>
-        </p:nvSpPr>
-        <p:spPr>
-          <a:xfrm>
-            <a:off x="1188720" y="2990088"/>
-            <a:ext cx="2743200" cy="292608"/>
+          <p:cNvPr id="13" name="Text 8"/>
+          <p:cNvSpPr txBox="1"/>
+          <p:nvPr/>
+        </p:nvSpPr>
+        <p:spPr>
+          <a:xfrm>
+            <a:off x="1280160" y="3474720"/>
+            <a:ext cx="4023360" cy="320040"/>
           </a:xfrm>
           <a:prstGeom prst="rect">
             <a:avLst/>
@@ -2397,7 +4573,7 @@
               <a:buNone/>
             </a:pPr>
             <a:r>
-              <a:rPr lang="en-US" sz="1500" b="1" dirty="0">
+              <a:rPr lang="en-US" sz="1700" b="1" dirty="0">
                 <a:solidFill>
                   <a:srgbClr val="F2EEE8"/>
                 </a:solidFill>
@@ -2405,22 +4581,22 @@
                 <a:ea typeface="Calibri" pitchFamily="34" charset="-122"/>
                 <a:cs typeface="Calibri" pitchFamily="34" charset="-120"/>
               </a:rPr>
-              <a:t>Iluminación</a:t>
-            </a:r>
-            <a:endParaRPr lang="en-US" sz="1500" dirty="0"/>
-          </a:p>
-        </p:txBody>
-      </p:sp>
-      <p:sp>
-        <p:nvSpPr>
-          <p:cNvPr id="15" name="Text 9"/>
-          <p:cNvSpPr txBox="1"/>
-          <p:nvPr/>
-        </p:nvSpPr>
-        <p:spPr>
-          <a:xfrm>
-            <a:off x="1188720" y="3300984"/>
-            <a:ext cx="2743200" cy="457200"/>
+              <a:t>Entrega</a:t>
+            </a:r>
+            <a:endParaRPr lang="en-US" sz="1700" dirty="0"/>
+          </a:p>
+        </p:txBody>
+      </p:sp>
+      <p:sp>
+        <p:nvSpPr>
+          <p:cNvPr id="14" name="Text 9"/>
+          <p:cNvSpPr txBox="1"/>
+          <p:nvPr/>
+        </p:nvSpPr>
+        <p:spPr>
+          <a:xfrm>
+            <a:off x="1280160" y="3813048"/>
+            <a:ext cx="4023360" cy="594360"/>
           </a:xfrm>
           <a:prstGeom prst="rect">
             <a:avLst/>
@@ -2444,7 +4620,7 @@
                 <a:ea typeface="Calibri" pitchFamily="34" charset="-122"/>
                 <a:cs typeface="Calibri" pitchFamily="34" charset="-120"/>
               </a:rPr>
-              <a:t>Anillo de luz LED sobre truss y paneles de luz.</a:t>
+              <a:t>Un .blend recorrible de 45 × 30 m y 8 salas, 12 planos 4K y un recorrido de 90 s.</a:t>
             </a:r>
             <a:endParaRPr lang="en-US" sz="1300" dirty="0"/>
           </a:p>
@@ -2452,102 +4628,117 @@
       </p:sp>
       <p:sp>
         <p:nvSpPr>
-          <p:cNvPr id="16" name="Shape 10"/>
+          <p:cNvPr id="15" name="Shape 10"/>
           <p:cNvSpPr/>
           <p:nvPr/>
         </p:nvSpPr>
         <p:spPr>
           <a:xfrm>
-            <a:off x="457200" y="3895344"/>
-            <a:ext cx="548640" cy="548640"/>
-          </a:xfrm>
-          <a:prstGeom prst="ellipse">
+            <a:off x="5577840" y="1325880"/>
+            <a:ext cx="3108960" cy="3200400"/>
+          </a:xfrm>
+          <a:prstGeom prst="rect">
             <a:avLst/>
           </a:prstGeom>
           <a:solidFill>
-            <a:srgbClr val="E5484D"/>
+            <a:srgbClr val="16263F"/>
           </a:solidFill>
           <a:ln w="12700">
             <a:solidFill>
-              <a:srgbClr val="E5484D"/>
+              <a:srgbClr val="16263F"/>
             </a:solidFill>
             <a:prstDash val="solid"/>
           </a:ln>
         </p:spPr>
       </p:sp>
-      <p:pic>
-        <p:nvPicPr>
-          <p:cNvPr id="17" name="Image 4" descr="preencoded.png">    </p:cNvPr>
-          <p:cNvPicPr>
-            <a:picLocks noChangeAspect="1"/>
-          </p:cNvPicPr>
-          <p:nvPr/>
-        </p:nvPicPr>
-        <p:blipFill>
-          <a:blip r:embed="rId5"/>
-          <a:stretch>
-            <a:fillRect/>
-          </a:stretch>
-        </p:blipFill>
-        <p:spPr>
-          <a:xfrm>
-            <a:off x="605333" y="4043477"/>
-            <a:ext cx="252374" cy="252374"/>
-          </a:xfrm>
-          <a:prstGeom prst="rect">
-            <a:avLst/>
-          </a:prstGeom>
-        </p:spPr>
-      </p:pic>
-      <p:sp>
-        <p:nvSpPr>
-          <p:cNvPr id="18" name="Text 11"/>
-          <p:cNvSpPr txBox="1"/>
-          <p:nvPr/>
-        </p:nvSpPr>
-        <p:spPr>
-          <a:xfrm>
-            <a:off x="1188720" y="3877056"/>
-            <a:ext cx="2743200" cy="292608"/>
-          </a:xfrm>
-          <a:prstGeom prst="rect">
-            <a:avLst/>
-          </a:prstGeom>
-          <a:noFill/>
-          <a:ln/>
-        </p:spPr>
-        <p:txBody>
-          <a:bodyPr wrap="square" lIns="0" tIns="0" rIns="0" bIns="0" rtlCol="0" anchor="t"/>
-          <a:lstStyle/>
-          <a:p>
-            <a:pPr indent="0" marL="0">
-              <a:buNone/>
-            </a:pPr>
-            <a:r>
-              <a:rPr lang="en-US" sz="1500" b="1" dirty="0">
-                <a:solidFill>
-                  <a:srgbClr val="F2EEE8"/>
+      <p:sp>
+        <p:nvSpPr>
+          <p:cNvPr id="16" name="Text 11"/>
+          <p:cNvSpPr txBox="1"/>
+          <p:nvPr/>
+        </p:nvSpPr>
+        <p:spPr>
+          <a:xfrm>
+            <a:off x="5852160" y="1508760"/>
+            <a:ext cx="2560320" cy="274320"/>
+          </a:xfrm>
+          <a:prstGeom prst="rect">
+            <a:avLst/>
+          </a:prstGeom>
+          <a:noFill/>
+          <a:ln/>
+        </p:spPr>
+        <p:txBody>
+          <a:bodyPr wrap="square" lIns="0" tIns="0" rIns="0" bIns="0" rtlCol="0" anchor="ctr"/>
+          <a:lstStyle/>
+          <a:p>
+            <a:pPr indent="0" marL="0">
+              <a:buNone/>
+            </a:pPr>
+            <a:r>
+              <a:rPr lang="en-US" sz="1100" b="1" spc="200" kern="0" dirty="0">
+                <a:solidFill>
+                  <a:srgbClr val="5B9BFF"/>
                 </a:solidFill>
                 <a:latin typeface="Calibri" pitchFamily="34" charset="0"/>
                 <a:ea typeface="Calibri" pitchFamily="34" charset="-122"/>
                 <a:cs typeface="Calibri" pitchFamily="34" charset="-120"/>
               </a:rPr>
-              <a:t>Cámaras y fondo</a:t>
-            </a:r>
-            <a:endParaRPr lang="en-US" sz="1500" dirty="0"/>
-          </a:p>
-        </p:txBody>
-      </p:sp>
-      <p:sp>
-        <p:nvSpPr>
-          <p:cNvPr id="19" name="Text 12"/>
-          <p:cNvSpPr txBox="1"/>
-          <p:nvPr/>
-        </p:nvSpPr>
-        <p:spPr>
-          <a:xfrm>
-            <a:off x="1188720" y="4187952"/>
-            <a:ext cx="2743200" cy="457200"/>
+              <a:t>RESULTADO</a:t>
+            </a:r>
+            <a:endParaRPr lang="en-US" sz="1100" dirty="0"/>
+          </a:p>
+        </p:txBody>
+      </p:sp>
+      <p:sp>
+        <p:nvSpPr>
+          <p:cNvPr id="17" name="Text 12"/>
+          <p:cNvSpPr txBox="1"/>
+          <p:nvPr/>
+        </p:nvSpPr>
+        <p:spPr>
+          <a:xfrm>
+            <a:off x="5852160" y="1828800"/>
+            <a:ext cx="2560320" cy="868680"/>
+          </a:xfrm>
+          <a:prstGeom prst="rect">
+            <a:avLst/>
+          </a:prstGeom>
+          <a:noFill/>
+          <a:ln/>
+        </p:spPr>
+        <p:txBody>
+          <a:bodyPr wrap="square" lIns="0" tIns="0" rIns="0" bIns="0" rtlCol="0" anchor="ctr"/>
+          <a:lstStyle/>
+          <a:p>
+            <a:pPr indent="0" marL="0">
+              <a:buNone/>
+            </a:pPr>
+            <a:r>
+              <a:rPr lang="en-US" sz="5200" b="1" dirty="0">
+                <a:solidFill>
+                  <a:srgbClr val="F2EEE8"/>
+                </a:solidFill>
+                <a:latin typeface="Cambria" pitchFamily="34" charset="0"/>
+                <a:ea typeface="Cambria" pitchFamily="34" charset="-122"/>
+                <a:cs typeface="Cambria" pitchFamily="34" charset="-120"/>
+              </a:rPr>
+              <a:t>17 / 21</a:t>
+            </a:r>
+            <a:endParaRPr lang="en-US" sz="5200" dirty="0"/>
+          </a:p>
+        </p:txBody>
+      </p:sp>
+      <p:sp>
+        <p:nvSpPr>
+          <p:cNvPr id="18" name="Text 13"/>
+          <p:cNvSpPr txBox="1"/>
+          <p:nvPr/>
+        </p:nvSpPr>
+        <p:spPr>
+          <a:xfrm>
+            <a:off x="5852160" y="2697480"/>
+            <a:ext cx="2560320" cy="502920"/>
           </a:xfrm>
           <a:prstGeom prst="rect">
             <a:avLst/>
@@ -2563,17 +4754,56 @@
               <a:buNone/>
             </a:pPr>
             <a:r>
-              <a:rPr lang="en-US" sz="1300" dirty="0">
-                <a:solidFill>
-                  <a:srgbClr val="A39B90"/>
+              <a:rPr lang="en-US" sz="1400" b="1" dirty="0">
+                <a:solidFill>
+                  <a:srgbClr val="5B9BFF"/>
                 </a:solidFill>
                 <a:latin typeface="Calibri" pitchFamily="34" charset="0"/>
                 <a:ea typeface="Calibri" pitchFamily="34" charset="-122"/>
                 <a:cs typeface="Calibri" pitchFamily="34" charset="-120"/>
               </a:rPr>
-              <a:t>Cámaras de estudio frente a un fondo blanco curvo.</a:t>
-            </a:r>
-            <a:endParaRPr lang="en-US" sz="1300" dirty="0"/>
+              <a:t>criterios de aceptación cumplidos</a:t>
+            </a:r>
+            <a:endParaRPr lang="en-US" sz="1400" dirty="0"/>
+          </a:p>
+        </p:txBody>
+      </p:sp>
+      <p:sp>
+        <p:nvSpPr>
+          <p:cNvPr id="19" name="Text 14"/>
+          <p:cNvSpPr txBox="1"/>
+          <p:nvPr/>
+        </p:nvSpPr>
+        <p:spPr>
+          <a:xfrm>
+            <a:off x="5852160" y="3337560"/>
+            <a:ext cx="2560320" cy="1051560"/>
+          </a:xfrm>
+          <a:prstGeom prst="rect">
+            <a:avLst/>
+          </a:prstGeom>
+          <a:noFill/>
+          <a:ln/>
+        </p:spPr>
+        <p:txBody>
+          <a:bodyPr wrap="square" lIns="0" tIns="0" rIns="0" bIns="0" rtlCol="0" anchor="t"/>
+          <a:lstStyle/>
+          <a:p>
+            <a:pPr indent="0" marL="0">
+              <a:buNone/>
+            </a:pPr>
+            <a:r>
+              <a:rPr lang="en-US" sz="1200" dirty="0">
+                <a:solidFill>
+                  <a:srgbClr val="C9D6EA"/>
+                </a:solidFill>
+                <a:latin typeface="Calibri" pitchFamily="34" charset="0"/>
+                <a:ea typeface="Calibri" pitchFamily="34" charset="-122"/>
+                <a:cs typeface="Calibri" pitchFamily="34" charset="-120"/>
+              </a:rPr>
+              <a:t>1 parcial y 3 no cumplen, por decisiones de alcance: puertas solo en el plató y nave norte sin vestir.</a:t>
+            </a:r>
+            <a:endParaRPr lang="en-US" sz="1200" dirty="0"/>
           </a:p>
         </p:txBody>
       </p:sp>
@@ -2609,87 +4839,9 @@
           <a:chExt cx="0" cy="0"/>
         </a:xfrm>
       </p:grpSpPr>
-      <p:sp>
-        <p:nvSpPr>
-          <p:cNvPr id="2" name="Text 0"/>
-          <p:cNvSpPr txBox="1"/>
-          <p:nvPr/>
-        </p:nvSpPr>
-        <p:spPr>
-          <a:xfrm>
-            <a:off x="457200" y="320040"/>
-            <a:ext cx="8229600" cy="640080"/>
-          </a:xfrm>
-          <a:prstGeom prst="rect">
-            <a:avLst/>
-          </a:prstGeom>
-          <a:noFill/>
-          <a:ln/>
-        </p:spPr>
-        <p:txBody>
-          <a:bodyPr wrap="square" lIns="0" tIns="0" rIns="0" bIns="0" rtlCol="0" anchor="ctr"/>
-          <a:lstStyle/>
-          <a:p>
-            <a:pPr indent="0" marL="0">
-              <a:buNone/>
-            </a:pPr>
-            <a:r>
-              <a:rPr lang="en-US" sz="3400" b="1" dirty="0">
-                <a:solidFill>
-                  <a:srgbClr val="F2EEE8"/>
-                </a:solidFill>
-                <a:latin typeface="Cambria" pitchFamily="34" charset="0"/>
-                <a:ea typeface="Cambria" pitchFamily="34" charset="-122"/>
-                <a:cs typeface="Cambria" pitchFamily="34" charset="-120"/>
-              </a:rPr>
-              <a:t>Detrás de cámaras</a:t>
-            </a:r>
-            <a:endParaRPr lang="en-US" sz="3400" dirty="0"/>
-          </a:p>
-        </p:txBody>
-      </p:sp>
-      <p:sp>
-        <p:nvSpPr>
-          <p:cNvPr id="3" name="Text 1"/>
-          <p:cNvSpPr txBox="1"/>
-          <p:nvPr/>
-        </p:nvSpPr>
-        <p:spPr>
-          <a:xfrm>
-            <a:off x="457200" y="960120"/>
-            <a:ext cx="8229600" cy="365760"/>
-          </a:xfrm>
-          <a:prstGeom prst="rect">
-            <a:avLst/>
-          </a:prstGeom>
-          <a:noFill/>
-          <a:ln/>
-        </p:spPr>
-        <p:txBody>
-          <a:bodyPr wrap="square" lIns="0" tIns="0" rIns="0" bIns="0" rtlCol="0" anchor="ctr"/>
-          <a:lstStyle/>
-          <a:p>
-            <a:pPr indent="0" marL="0">
-              <a:buNone/>
-            </a:pPr>
-            <a:r>
-              <a:rPr lang="en-US" sz="1600" dirty="0">
-                <a:solidFill>
-                  <a:srgbClr val="A39B90"/>
-                </a:solidFill>
-                <a:latin typeface="Calibri" pitchFamily="34" charset="0"/>
-                <a:ea typeface="Calibri" pitchFamily="34" charset="-122"/>
-                <a:cs typeface="Calibri" pitchFamily="34" charset="-120"/>
-              </a:rPr>
-              <a:t>Las áreas de producción que rodean al plató</a:t>
-            </a:r>
-            <a:endParaRPr lang="en-US" sz="1600" dirty="0"/>
-          </a:p>
-        </p:txBody>
-      </p:sp>
       <p:pic>
         <p:nvPicPr>
-          <p:cNvPr id="4" name="Image 0" descr="/tmp/claude-0/-home-user-other/d8041478-dfcc-5ca6-9236-09cb61fbd919/scratchpad/img/p1.jpg">    </p:cNvPr>
+          <p:cNvPr id="2" name="Image 0" descr="/tmp/claude-0/-home-user-other/d8041478-dfcc-5ca6-9236-09cb61fbd919/scratchpad/img/crop5.jpg">    </p:cNvPr>
           <p:cNvPicPr>
             <a:picLocks noChangeAspect="1"/>
           </p:cNvPicPr>
@@ -2703,8 +4855,8 @@
         </p:blipFill>
         <p:spPr>
           <a:xfrm>
-            <a:off x="457200" y="1508760"/>
-            <a:ext cx="4023360" cy="2263140"/>
+            <a:off x="4023360" y="0"/>
+            <a:ext cx="5120640" cy="5143500"/>
           </a:xfrm>
           <a:prstGeom prst="rect">
             <a:avLst/>
@@ -2713,30 +4865,30 @@
       </p:pic>
       <p:sp>
         <p:nvSpPr>
-          <p:cNvPr id="5" name="Text 2"/>
-          <p:cNvSpPr txBox="1"/>
-          <p:nvPr/>
-        </p:nvSpPr>
-        <p:spPr>
-          <a:xfrm>
-            <a:off x="457200" y="3886200"/>
-            <a:ext cx="4023360" cy="320040"/>
-          </a:xfrm>
-          <a:prstGeom prst="rect">
-            <a:avLst/>
-          </a:prstGeom>
-          <a:noFill/>
-          <a:ln/>
-        </p:spPr>
-        <p:txBody>
-          <a:bodyPr wrap="square" lIns="0" tIns="0" rIns="0" bIns="0" rtlCol="0" anchor="t"/>
-          <a:lstStyle/>
-          <a:p>
-            <a:pPr indent="0" marL="0">
-              <a:buNone/>
-            </a:pPr>
-            <a:r>
-              <a:rPr lang="en-US" sz="1800" b="1" dirty="0">
+          <p:cNvPr id="3" name="Text 0"/>
+          <p:cNvSpPr txBox="1"/>
+          <p:nvPr/>
+        </p:nvSpPr>
+        <p:spPr>
+          <a:xfrm>
+            <a:off x="457200" y="320040"/>
+            <a:ext cx="8229600" cy="640080"/>
+          </a:xfrm>
+          <a:prstGeom prst="rect">
+            <a:avLst/>
+          </a:prstGeom>
+          <a:noFill/>
+          <a:ln/>
+        </p:spPr>
+        <p:txBody>
+          <a:bodyPr wrap="square" lIns="0" tIns="0" rIns="0" bIns="0" rtlCol="0" anchor="ctr"/>
+          <a:lstStyle/>
+          <a:p>
+            <a:pPr indent="0" marL="0">
+              <a:buNone/>
+            </a:pPr>
+            <a:r>
+              <a:rPr lang="en-US" sz="3400" b="1" dirty="0">
                 <a:solidFill>
                   <a:srgbClr val="F2EEE8"/>
                 </a:solidFill>
@@ -2744,54 +4896,40 @@
                 <a:ea typeface="Cambria" pitchFamily="34" charset="-122"/>
                 <a:cs typeface="Cambria" pitchFamily="34" charset="-120"/>
               </a:rPr>
-              <a:t>Sala de control</a:t>
-            </a:r>
-            <a:endParaRPr lang="en-US" sz="1800" dirty="0"/>
-          </a:p>
-        </p:txBody>
-      </p:sp>
-      <p:sp>
-        <p:nvSpPr>
-          <p:cNvPr id="6" name="Text 3"/>
-          <p:cNvSpPr txBox="1"/>
-          <p:nvPr/>
-        </p:nvSpPr>
-        <p:spPr>
-          <a:xfrm>
-            <a:off x="457200" y="4224528"/>
-            <a:ext cx="4023360" cy="457200"/>
-          </a:xfrm>
-          <a:prstGeom prst="rect">
-            <a:avLst/>
-          </a:prstGeom>
-          <a:noFill/>
-          <a:ln/>
-        </p:spPr>
-        <p:txBody>
-          <a:bodyPr wrap="square" lIns="0" tIns="0" rIns="0" bIns="0" rtlCol="0" anchor="t"/>
-          <a:lstStyle/>
-          <a:p>
-            <a:pPr indent="0" marL="0">
-              <a:buNone/>
-            </a:pPr>
-            <a:r>
-              <a:rPr lang="en-US" sz="1300" dirty="0">
-                <a:solidFill>
-                  <a:srgbClr val="A39B90"/>
-                </a:solidFill>
-                <a:latin typeface="Calibri" pitchFamily="34" charset="0"/>
-                <a:ea typeface="Calibri" pitchFamily="34" charset="-122"/>
-                <a:cs typeface="Calibri" pitchFamily="34" charset="-120"/>
-              </a:rPr>
-              <a:t>Muro de pantallas con la señal del partido y consolas de trabajo.</a:t>
-            </a:r>
-            <a:endParaRPr lang="en-US" sz="1300" dirty="0"/>
-          </a:p>
-        </p:txBody>
+              <a:t>El plató</a:t>
+            </a:r>
+            <a:endParaRPr lang="en-US" sz="3400" dirty="0"/>
+          </a:p>
+        </p:txBody>
+      </p:sp>
+      <p:sp>
+        <p:nvSpPr>
+          <p:cNvPr id="4" name="Shape 1"/>
+          <p:cNvSpPr/>
+          <p:nvPr/>
+        </p:nvSpPr>
+        <p:spPr>
+          <a:xfrm>
+            <a:off x="457200" y="1234440"/>
+            <a:ext cx="548640" cy="548640"/>
+          </a:xfrm>
+          <a:prstGeom prst="ellipse">
+            <a:avLst/>
+          </a:prstGeom>
+          <a:solidFill>
+            <a:srgbClr val="5B9BFF"/>
+          </a:solidFill>
+          <a:ln w="12700">
+            <a:solidFill>
+              <a:srgbClr val="5B9BFF"/>
+            </a:solidFill>
+            <a:prstDash val="solid"/>
+          </a:ln>
+        </p:spPr>
       </p:sp>
       <p:pic>
         <p:nvPicPr>
-          <p:cNvPr id="7" name="Image 1" descr="/tmp/claude-0/-home-user-other/d8041478-dfcc-5ca6-9236-09cb61fbd919/scratchpad/img/p2.jpg">    </p:cNvPr>
+          <p:cNvPr id="5" name="Image 1" descr="preencoded.png">    </p:cNvPr>
           <p:cNvPicPr>
             <a:picLocks noChangeAspect="1"/>
           </p:cNvPicPr>
@@ -2805,8 +4943,8 @@
         </p:blipFill>
         <p:spPr>
           <a:xfrm>
-            <a:off x="4663440" y="1508760"/>
-            <a:ext cx="4023360" cy="2263140"/>
+            <a:off x="605333" y="1382573"/>
+            <a:ext cx="252374" cy="252374"/>
           </a:xfrm>
           <a:prstGeom prst="rect">
             <a:avLst/>
@@ -2815,14 +4953,14 @@
       </p:pic>
       <p:sp>
         <p:nvSpPr>
-          <p:cNvPr id="8" name="Text 4"/>
-          <p:cNvSpPr txBox="1"/>
-          <p:nvPr/>
-        </p:nvSpPr>
-        <p:spPr>
-          <a:xfrm>
-            <a:off x="4663440" y="3886200"/>
-            <a:ext cx="4023360" cy="320040"/>
+          <p:cNvPr id="6" name="Text 2"/>
+          <p:cNvSpPr txBox="1"/>
+          <p:nvPr/>
+        </p:nvSpPr>
+        <p:spPr>
+          <a:xfrm>
+            <a:off x="1188720" y="1216152"/>
+            <a:ext cx="2743200" cy="292608"/>
           </a:xfrm>
           <a:prstGeom prst="rect">
             <a:avLst/>
@@ -2838,54 +4976,435 @@
               <a:buNone/>
             </a:pPr>
             <a:r>
-              <a:rPr lang="en-US" sz="1800" b="1" dirty="0">
+              <a:rPr lang="en-US" sz="1500" b="1" dirty="0">
                 <a:solidFill>
                   <a:srgbClr val="F2EEE8"/>
-                </a:solidFill>
-                <a:latin typeface="Cambria" pitchFamily="34" charset="0"/>
-                <a:ea typeface="Cambria" pitchFamily="34" charset="-122"/>
-                <a:cs typeface="Cambria" pitchFamily="34" charset="-120"/>
-              </a:rPr>
-              <a:t>Redacción</a:t>
-            </a:r>
-            <a:endParaRPr lang="en-US" sz="1800" dirty="0"/>
-          </a:p>
-        </p:txBody>
-      </p:sp>
-      <p:sp>
-        <p:nvSpPr>
-          <p:cNvPr id="9" name="Text 5"/>
-          <p:cNvSpPr txBox="1"/>
-          <p:nvPr/>
-        </p:nvSpPr>
-        <p:spPr>
-          <a:xfrm>
-            <a:off x="4663440" y="4224528"/>
-            <a:ext cx="4023360" cy="457200"/>
-          </a:xfrm>
-          <a:prstGeom prst="rect">
-            <a:avLst/>
-          </a:prstGeom>
-          <a:noFill/>
-          <a:ln/>
-        </p:spPr>
-        <p:txBody>
-          <a:bodyPr wrap="square" lIns="0" tIns="0" rIns="0" bIns="0" rtlCol="0" anchor="t"/>
-          <a:lstStyle/>
-          <a:p>
-            <a:pPr indent="0" marL="0">
-              <a:buNone/>
-            </a:pPr>
-            <a:r>
-              <a:rPr lang="en-US" sz="1300" dirty="0">
-                <a:solidFill>
-                  <a:srgbClr val="A39B90"/>
                 </a:solidFill>
                 <a:latin typeface="Calibri" pitchFamily="34" charset="0"/>
                 <a:ea typeface="Calibri" pitchFamily="34" charset="-122"/>
                 <a:cs typeface="Calibri" pitchFamily="34" charset="-120"/>
               </a:rPr>
-              <a:t>Filas de puestos con doble monitor, bajo paneles de luz.</a:t>
+              <a:t>Mesa curva</a:t>
+            </a:r>
+            <a:endParaRPr lang="en-US" sz="1500" dirty="0"/>
+          </a:p>
+        </p:txBody>
+      </p:sp>
+      <p:sp>
+        <p:nvSpPr>
+          <p:cNvPr id="7" name="Text 3"/>
+          <p:cNvSpPr txBox="1"/>
+          <p:nvPr/>
+        </p:nvSpPr>
+        <p:spPr>
+          <a:xfrm>
+            <a:off x="1188720" y="1527048"/>
+            <a:ext cx="2743200" cy="457200"/>
+          </a:xfrm>
+          <a:prstGeom prst="rect">
+            <a:avLst/>
+          </a:prstGeom>
+          <a:noFill/>
+          <a:ln/>
+        </p:spPr>
+        <p:txBody>
+          <a:bodyPr wrap="square" lIns="0" tIns="0" rIns="0" bIns="0" rtlCol="0" anchor="t"/>
+          <a:lstStyle/>
+          <a:p>
+            <a:pPr indent="0" marL="0">
+              <a:buNone/>
+            </a:pPr>
+            <a:r>
+              <a:rPr lang="en-US" sz="1300" dirty="0">
+                <a:solidFill>
+                  <a:srgbClr val="A39B90"/>
+                </a:solidFill>
+                <a:latin typeface="Calibri" pitchFamily="34" charset="0"/>
+                <a:ea typeface="Calibri" pitchFamily="34" charset="-122"/>
+                <a:cs typeface="Calibri" pitchFamily="34" charset="-120"/>
+              </a:rPr>
+              <a:t>Tres puestos de presentador, con botellas, vasos y papeles.</a:t>
+            </a:r>
+            <a:endParaRPr lang="en-US" sz="1300" dirty="0"/>
+          </a:p>
+        </p:txBody>
+      </p:sp>
+      <p:sp>
+        <p:nvSpPr>
+          <p:cNvPr id="8" name="Shape 4"/>
+          <p:cNvSpPr/>
+          <p:nvPr/>
+        </p:nvSpPr>
+        <p:spPr>
+          <a:xfrm>
+            <a:off x="457200" y="2121408"/>
+            <a:ext cx="548640" cy="548640"/>
+          </a:xfrm>
+          <a:prstGeom prst="ellipse">
+            <a:avLst/>
+          </a:prstGeom>
+          <a:solidFill>
+            <a:srgbClr val="4CAF50"/>
+          </a:solidFill>
+          <a:ln w="12700">
+            <a:solidFill>
+              <a:srgbClr val="4CAF50"/>
+            </a:solidFill>
+            <a:prstDash val="solid"/>
+          </a:ln>
+        </p:spPr>
+      </p:sp>
+      <p:pic>
+        <p:nvPicPr>
+          <p:cNvPr id="9" name="Image 2" descr="preencoded.png">    </p:cNvPr>
+          <p:cNvPicPr>
+            <a:picLocks noChangeAspect="1"/>
+          </p:cNvPicPr>
+          <p:nvPr/>
+        </p:nvPicPr>
+        <p:blipFill>
+          <a:blip r:embed="rId3"/>
+          <a:stretch>
+            <a:fillRect/>
+          </a:stretch>
+        </p:blipFill>
+        <p:spPr>
+          <a:xfrm>
+            <a:off x="605333" y="2269541"/>
+            <a:ext cx="252374" cy="252374"/>
+          </a:xfrm>
+          <a:prstGeom prst="rect">
+            <a:avLst/>
+          </a:prstGeom>
+        </p:spPr>
+      </p:pic>
+      <p:sp>
+        <p:nvSpPr>
+          <p:cNvPr id="10" name="Text 5"/>
+          <p:cNvSpPr txBox="1"/>
+          <p:nvPr/>
+        </p:nvSpPr>
+        <p:spPr>
+          <a:xfrm>
+            <a:off x="1188720" y="2103120"/>
+            <a:ext cx="2743200" cy="292608"/>
+          </a:xfrm>
+          <a:prstGeom prst="rect">
+            <a:avLst/>
+          </a:prstGeom>
+          <a:noFill/>
+          <a:ln/>
+        </p:spPr>
+        <p:txBody>
+          <a:bodyPr wrap="square" lIns="0" tIns="0" rIns="0" bIns="0" rtlCol="0" anchor="t"/>
+          <a:lstStyle/>
+          <a:p>
+            <a:pPr indent="0" marL="0">
+              <a:buNone/>
+            </a:pPr>
+            <a:r>
+              <a:rPr lang="en-US" sz="1500" b="1" dirty="0">
+                <a:solidFill>
+                  <a:srgbClr val="F2EEE8"/>
+                </a:solidFill>
+                <a:latin typeface="Calibri" pitchFamily="34" charset="0"/>
+                <a:ea typeface="Calibri" pitchFamily="34" charset="-122"/>
+                <a:cs typeface="Calibri" pitchFamily="34" charset="-120"/>
+              </a:rPr>
+              <a:t>Muro LED</a:t>
+            </a:r>
+            <a:endParaRPr lang="en-US" sz="1500" dirty="0"/>
+          </a:p>
+        </p:txBody>
+      </p:sp>
+      <p:sp>
+        <p:nvSpPr>
+          <p:cNvPr id="11" name="Text 6"/>
+          <p:cNvSpPr txBox="1"/>
+          <p:nvPr/>
+        </p:nvSpPr>
+        <p:spPr>
+          <a:xfrm>
+            <a:off x="1188720" y="2414016"/>
+            <a:ext cx="2743200" cy="457200"/>
+          </a:xfrm>
+          <a:prstGeom prst="rect">
+            <a:avLst/>
+          </a:prstGeom>
+          <a:noFill/>
+          <a:ln/>
+        </p:spPr>
+        <p:txBody>
+          <a:bodyPr wrap="square" lIns="0" tIns="0" rIns="0" bIns="0" rtlCol="0" anchor="t"/>
+          <a:lstStyle/>
+          <a:p>
+            <a:pPr indent="0" marL="0">
+              <a:buNone/>
+            </a:pPr>
+            <a:r>
+              <a:rPr lang="en-US" sz="1300" dirty="0">
+                <a:solidFill>
+                  <a:srgbClr val="A39B90"/>
+                </a:solidFill>
+                <a:latin typeface="Calibri" pitchFamily="34" charset="0"/>
+                <a:ea typeface="Calibri" pitchFamily="34" charset="-122"/>
+                <a:cs typeface="Calibri" pitchFamily="34" charset="-120"/>
+              </a:rPr>
+              <a:t>Gráficas de campo de fútbol, también integradas en la mesa.</a:t>
+            </a:r>
+            <a:endParaRPr lang="en-US" sz="1300" dirty="0"/>
+          </a:p>
+        </p:txBody>
+      </p:sp>
+      <p:sp>
+        <p:nvSpPr>
+          <p:cNvPr id="12" name="Shape 7"/>
+          <p:cNvSpPr/>
+          <p:nvPr/>
+        </p:nvSpPr>
+        <p:spPr>
+          <a:xfrm>
+            <a:off x="457200" y="3008376"/>
+            <a:ext cx="548640" cy="548640"/>
+          </a:xfrm>
+          <a:prstGeom prst="ellipse">
+            <a:avLst/>
+          </a:prstGeom>
+          <a:solidFill>
+            <a:srgbClr val="E0A84A"/>
+          </a:solidFill>
+          <a:ln w="12700">
+            <a:solidFill>
+              <a:srgbClr val="E0A84A"/>
+            </a:solidFill>
+            <a:prstDash val="solid"/>
+          </a:ln>
+        </p:spPr>
+      </p:sp>
+      <p:pic>
+        <p:nvPicPr>
+          <p:cNvPr id="13" name="Image 3" descr="preencoded.png">    </p:cNvPr>
+          <p:cNvPicPr>
+            <a:picLocks noChangeAspect="1"/>
+          </p:cNvPicPr>
+          <p:nvPr/>
+        </p:nvPicPr>
+        <p:blipFill>
+          <a:blip r:embed="rId4"/>
+          <a:stretch>
+            <a:fillRect/>
+          </a:stretch>
+        </p:blipFill>
+        <p:spPr>
+          <a:xfrm>
+            <a:off x="605333" y="3156509"/>
+            <a:ext cx="252374" cy="252374"/>
+          </a:xfrm>
+          <a:prstGeom prst="rect">
+            <a:avLst/>
+          </a:prstGeom>
+        </p:spPr>
+      </p:pic>
+      <p:sp>
+        <p:nvSpPr>
+          <p:cNvPr id="14" name="Text 8"/>
+          <p:cNvSpPr txBox="1"/>
+          <p:nvPr/>
+        </p:nvSpPr>
+        <p:spPr>
+          <a:xfrm>
+            <a:off x="1188720" y="2990088"/>
+            <a:ext cx="2743200" cy="292608"/>
+          </a:xfrm>
+          <a:prstGeom prst="rect">
+            <a:avLst/>
+          </a:prstGeom>
+          <a:noFill/>
+          <a:ln/>
+        </p:spPr>
+        <p:txBody>
+          <a:bodyPr wrap="square" lIns="0" tIns="0" rIns="0" bIns="0" rtlCol="0" anchor="t"/>
+          <a:lstStyle/>
+          <a:p>
+            <a:pPr indent="0" marL="0">
+              <a:buNone/>
+            </a:pPr>
+            <a:r>
+              <a:rPr lang="en-US" sz="1500" b="1" dirty="0">
+                <a:solidFill>
+                  <a:srgbClr val="F2EEE8"/>
+                </a:solidFill>
+                <a:latin typeface="Calibri" pitchFamily="34" charset="0"/>
+                <a:ea typeface="Calibri" pitchFamily="34" charset="-122"/>
+                <a:cs typeface="Calibri" pitchFamily="34" charset="-120"/>
+              </a:rPr>
+              <a:t>Iluminación</a:t>
+            </a:r>
+            <a:endParaRPr lang="en-US" sz="1500" dirty="0"/>
+          </a:p>
+        </p:txBody>
+      </p:sp>
+      <p:sp>
+        <p:nvSpPr>
+          <p:cNvPr id="15" name="Text 9"/>
+          <p:cNvSpPr txBox="1"/>
+          <p:nvPr/>
+        </p:nvSpPr>
+        <p:spPr>
+          <a:xfrm>
+            <a:off x="1188720" y="3300984"/>
+            <a:ext cx="2743200" cy="457200"/>
+          </a:xfrm>
+          <a:prstGeom prst="rect">
+            <a:avLst/>
+          </a:prstGeom>
+          <a:noFill/>
+          <a:ln/>
+        </p:spPr>
+        <p:txBody>
+          <a:bodyPr wrap="square" lIns="0" tIns="0" rIns="0" bIns="0" rtlCol="0" anchor="t"/>
+          <a:lstStyle/>
+          <a:p>
+            <a:pPr indent="0" marL="0">
+              <a:buNone/>
+            </a:pPr>
+            <a:r>
+              <a:rPr lang="en-US" sz="1300" dirty="0">
+                <a:solidFill>
+                  <a:srgbClr val="A39B90"/>
+                </a:solidFill>
+                <a:latin typeface="Calibri" pitchFamily="34" charset="0"/>
+                <a:ea typeface="Calibri" pitchFamily="34" charset="-122"/>
+                <a:cs typeface="Calibri" pitchFamily="34" charset="-120"/>
+              </a:rPr>
+              <a:t>Anillo de luz LED sobre truss y paneles de luz.</a:t>
+            </a:r>
+            <a:endParaRPr lang="en-US" sz="1300" dirty="0"/>
+          </a:p>
+        </p:txBody>
+      </p:sp>
+      <p:sp>
+        <p:nvSpPr>
+          <p:cNvPr id="16" name="Shape 10"/>
+          <p:cNvSpPr/>
+          <p:nvPr/>
+        </p:nvSpPr>
+        <p:spPr>
+          <a:xfrm>
+            <a:off x="457200" y="3895344"/>
+            <a:ext cx="548640" cy="548640"/>
+          </a:xfrm>
+          <a:prstGeom prst="ellipse">
+            <a:avLst/>
+          </a:prstGeom>
+          <a:solidFill>
+            <a:srgbClr val="E5484D"/>
+          </a:solidFill>
+          <a:ln w="12700">
+            <a:solidFill>
+              <a:srgbClr val="E5484D"/>
+            </a:solidFill>
+            <a:prstDash val="solid"/>
+          </a:ln>
+        </p:spPr>
+      </p:sp>
+      <p:pic>
+        <p:nvPicPr>
+          <p:cNvPr id="17" name="Image 4" descr="preencoded.png">    </p:cNvPr>
+          <p:cNvPicPr>
+            <a:picLocks noChangeAspect="1"/>
+          </p:cNvPicPr>
+          <p:nvPr/>
+        </p:nvPicPr>
+        <p:blipFill>
+          <a:blip r:embed="rId5"/>
+          <a:stretch>
+            <a:fillRect/>
+          </a:stretch>
+        </p:blipFill>
+        <p:spPr>
+          <a:xfrm>
+            <a:off x="605333" y="4043477"/>
+            <a:ext cx="252374" cy="252374"/>
+          </a:xfrm>
+          <a:prstGeom prst="rect">
+            <a:avLst/>
+          </a:prstGeom>
+        </p:spPr>
+      </p:pic>
+      <p:sp>
+        <p:nvSpPr>
+          <p:cNvPr id="18" name="Text 11"/>
+          <p:cNvSpPr txBox="1"/>
+          <p:nvPr/>
+        </p:nvSpPr>
+        <p:spPr>
+          <a:xfrm>
+            <a:off x="1188720" y="3877056"/>
+            <a:ext cx="2743200" cy="292608"/>
+          </a:xfrm>
+          <a:prstGeom prst="rect">
+            <a:avLst/>
+          </a:prstGeom>
+          <a:noFill/>
+          <a:ln/>
+        </p:spPr>
+        <p:txBody>
+          <a:bodyPr wrap="square" lIns="0" tIns="0" rIns="0" bIns="0" rtlCol="0" anchor="t"/>
+          <a:lstStyle/>
+          <a:p>
+            <a:pPr indent="0" marL="0">
+              <a:buNone/>
+            </a:pPr>
+            <a:r>
+              <a:rPr lang="en-US" sz="1500" b="1" dirty="0">
+                <a:solidFill>
+                  <a:srgbClr val="F2EEE8"/>
+                </a:solidFill>
+                <a:latin typeface="Calibri" pitchFamily="34" charset="0"/>
+                <a:ea typeface="Calibri" pitchFamily="34" charset="-122"/>
+                <a:cs typeface="Calibri" pitchFamily="34" charset="-120"/>
+              </a:rPr>
+              <a:t>Cámaras y fondo</a:t>
+            </a:r>
+            <a:endParaRPr lang="en-US" sz="1500" dirty="0"/>
+          </a:p>
+        </p:txBody>
+      </p:sp>
+      <p:sp>
+        <p:nvSpPr>
+          <p:cNvPr id="19" name="Text 12"/>
+          <p:cNvSpPr txBox="1"/>
+          <p:nvPr/>
+        </p:nvSpPr>
+        <p:spPr>
+          <a:xfrm>
+            <a:off x="1188720" y="4187952"/>
+            <a:ext cx="2743200" cy="457200"/>
+          </a:xfrm>
+          <a:prstGeom prst="rect">
+            <a:avLst/>
+          </a:prstGeom>
+          <a:noFill/>
+          <a:ln/>
+        </p:spPr>
+        <p:txBody>
+          <a:bodyPr wrap="square" lIns="0" tIns="0" rIns="0" bIns="0" rtlCol="0" anchor="t"/>
+          <a:lstStyle/>
+          <a:p>
+            <a:pPr indent="0" marL="0">
+              <a:buNone/>
+            </a:pPr>
+            <a:r>
+              <a:rPr lang="en-US" sz="1300" dirty="0">
+                <a:solidFill>
+                  <a:srgbClr val="A39B90"/>
+                </a:solidFill>
+                <a:latin typeface="Calibri" pitchFamily="34" charset="0"/>
+                <a:ea typeface="Calibri" pitchFamily="34" charset="-122"/>
+                <a:cs typeface="Calibri" pitchFamily="34" charset="-120"/>
+              </a:rPr>
+              <a:t>Cámaras de estudio frente a un fondo blanco curvo.</a:t>
             </a:r>
             <a:endParaRPr lang="en-US" sz="1300" dirty="0"/>
           </a:p>
@@ -2956,15 +5475,54 @@
                 <a:ea typeface="Cambria" pitchFamily="34" charset="-122"/>
                 <a:cs typeface="Cambria" pitchFamily="34" charset="-120"/>
               </a:rPr>
-              <a:t>12 planos del set</a:t>
+              <a:t>Detrás de cámaras</a:t>
             </a:r>
             <a:endParaRPr lang="en-US" sz="3400" dirty="0"/>
+          </a:p>
+        </p:txBody>
+      </p:sp>
+      <p:sp>
+        <p:nvSpPr>
+          <p:cNvPr id="3" name="Text 1"/>
+          <p:cNvSpPr txBox="1"/>
+          <p:nvPr/>
+        </p:nvSpPr>
+        <p:spPr>
+          <a:xfrm>
+            <a:off x="457200" y="960120"/>
+            <a:ext cx="8229600" cy="365760"/>
+          </a:xfrm>
+          <a:prstGeom prst="rect">
+            <a:avLst/>
+          </a:prstGeom>
+          <a:noFill/>
+          <a:ln/>
+        </p:spPr>
+        <p:txBody>
+          <a:bodyPr wrap="square" lIns="0" tIns="0" rIns="0" bIns="0" rtlCol="0" anchor="ctr"/>
+          <a:lstStyle/>
+          <a:p>
+            <a:pPr indent="0" marL="0">
+              <a:buNone/>
+            </a:pPr>
+            <a:r>
+              <a:rPr lang="en-US" sz="1600" dirty="0">
+                <a:solidFill>
+                  <a:srgbClr val="A39B90"/>
+                </a:solidFill>
+                <a:latin typeface="Calibri" pitchFamily="34" charset="0"/>
+                <a:ea typeface="Calibri" pitchFamily="34" charset="-122"/>
+                <a:cs typeface="Calibri" pitchFamily="34" charset="-120"/>
+              </a:rPr>
+              <a:t>Las áreas de producción que rodean al plató</a:t>
+            </a:r>
+            <a:endParaRPr lang="en-US" sz="1600" dirty="0"/>
           </a:p>
         </p:txBody>
       </p:sp>
       <p:pic>
         <p:nvPicPr>
-          <p:cNvPr id="3" name="Image 0" descr="/tmp/claude-0/-home-user-other/d8041478-dfcc-5ca6-9236-09cb61fbd919/scratchpad/img/t1.jpg">    </p:cNvPr>
+          <p:cNvPr id="4" name="Image 0" descr="/tmp/claude-0/-home-user-other/d8041478-dfcc-5ca6-9236-09cb61fbd919/scratchpad/img/p1.jpg">    </p:cNvPr>
           <p:cNvPicPr>
             <a:picLocks noChangeAspect="1"/>
           </p:cNvPicPr>
@@ -2978,17 +5536,95 @@
         </p:blipFill>
         <p:spPr>
           <a:xfrm>
-            <a:off x="457200" y="1188720"/>
-            <a:ext cx="1965960" cy="1105510"/>
+            <a:off x="457200" y="1508760"/>
+            <a:ext cx="4023360" cy="2263140"/>
           </a:xfrm>
           <a:prstGeom prst="rect">
             <a:avLst/>
           </a:prstGeom>
         </p:spPr>
       </p:pic>
+      <p:sp>
+        <p:nvSpPr>
+          <p:cNvPr id="5" name="Text 2"/>
+          <p:cNvSpPr txBox="1"/>
+          <p:nvPr/>
+        </p:nvSpPr>
+        <p:spPr>
+          <a:xfrm>
+            <a:off x="457200" y="3886200"/>
+            <a:ext cx="4023360" cy="320040"/>
+          </a:xfrm>
+          <a:prstGeom prst="rect">
+            <a:avLst/>
+          </a:prstGeom>
+          <a:noFill/>
+          <a:ln/>
+        </p:spPr>
+        <p:txBody>
+          <a:bodyPr wrap="square" lIns="0" tIns="0" rIns="0" bIns="0" rtlCol="0" anchor="t"/>
+          <a:lstStyle/>
+          <a:p>
+            <a:pPr indent="0" marL="0">
+              <a:buNone/>
+            </a:pPr>
+            <a:r>
+              <a:rPr lang="en-US" sz="1800" b="1" dirty="0">
+                <a:solidFill>
+                  <a:srgbClr val="F2EEE8"/>
+                </a:solidFill>
+                <a:latin typeface="Cambria" pitchFamily="34" charset="0"/>
+                <a:ea typeface="Cambria" pitchFamily="34" charset="-122"/>
+                <a:cs typeface="Cambria" pitchFamily="34" charset="-120"/>
+              </a:rPr>
+              <a:t>Sala de control</a:t>
+            </a:r>
+            <a:endParaRPr lang="en-US" sz="1800" dirty="0"/>
+          </a:p>
+        </p:txBody>
+      </p:sp>
+      <p:sp>
+        <p:nvSpPr>
+          <p:cNvPr id="6" name="Text 3"/>
+          <p:cNvSpPr txBox="1"/>
+          <p:nvPr/>
+        </p:nvSpPr>
+        <p:spPr>
+          <a:xfrm>
+            <a:off x="457200" y="4224528"/>
+            <a:ext cx="4023360" cy="457200"/>
+          </a:xfrm>
+          <a:prstGeom prst="rect">
+            <a:avLst/>
+          </a:prstGeom>
+          <a:noFill/>
+          <a:ln/>
+        </p:spPr>
+        <p:txBody>
+          <a:bodyPr wrap="square" lIns="0" tIns="0" rIns="0" bIns="0" rtlCol="0" anchor="t"/>
+          <a:lstStyle/>
+          <a:p>
+            <a:pPr indent="0" marL="0">
+              <a:buNone/>
+            </a:pPr>
+            <a:r>
+              <a:rPr lang="en-US" sz="1300" dirty="0">
+                <a:solidFill>
+                  <a:srgbClr val="A39B90"/>
+                </a:solidFill>
+                <a:latin typeface="Calibri" pitchFamily="34" charset="0"/>
+                <a:ea typeface="Calibri" pitchFamily="34" charset="-122"/>
+                <a:cs typeface="Calibri" pitchFamily="34" charset="-120"/>
+              </a:rPr>
+              <a:t>Muro de pantallas con la señal del partido y consolas de trabajo.</a:t>
+            </a:r>
+            <a:endParaRPr lang="en-US" sz="1300" dirty="0"/>
+          </a:p>
+        </p:txBody>
+      </p:sp>
       <p:pic>
         <p:nvPicPr>
-          <p:cNvPr id="4" name="Image 1" descr="/tmp/claude-0/-home-user-other/d8041478-dfcc-5ca6-9236-09cb61fbd919/scratchpad/img/t2.jpg">    </p:cNvPr>
+          <p:cNvPr id="7" name="Image 1" descr="/tmp/claude-0/-home-user-other/d8041478-dfcc-5ca6-9236-09cb61fbd919/scratchpad/img/p2.jpg">    </p:cNvPr>
           <p:cNvPicPr>
             <a:picLocks noChangeAspect="1"/>
           </p:cNvPicPr>
@@ -3002,254 +5638,92 @@
         </p:blipFill>
         <p:spPr>
           <a:xfrm>
-            <a:off x="2514600" y="1188720"/>
-            <a:ext cx="1965960" cy="1105510"/>
+            <a:off x="4663440" y="1508760"/>
+            <a:ext cx="4023360" cy="2263140"/>
           </a:xfrm>
           <a:prstGeom prst="rect">
             <a:avLst/>
           </a:prstGeom>
         </p:spPr>
       </p:pic>
-      <p:pic>
-        <p:nvPicPr>
-          <p:cNvPr id="5" name="Image 2" descr="/tmp/claude-0/-home-user-other/d8041478-dfcc-5ca6-9236-09cb61fbd919/scratchpad/img/t3.jpg">    </p:cNvPr>
-          <p:cNvPicPr>
-            <a:picLocks noChangeAspect="1"/>
-          </p:cNvPicPr>
-          <p:nvPr/>
-        </p:nvPicPr>
-        <p:blipFill>
-          <a:blip r:embed="rId3"/>
-          <a:stretch>
-            <a:fillRect/>
-          </a:stretch>
-        </p:blipFill>
-        <p:spPr>
-          <a:xfrm>
-            <a:off x="4572000" y="1188720"/>
-            <a:ext cx="1965960" cy="1105510"/>
-          </a:xfrm>
-          <a:prstGeom prst="rect">
-            <a:avLst/>
-          </a:prstGeom>
-        </p:spPr>
-      </p:pic>
-      <p:pic>
-        <p:nvPicPr>
-          <p:cNvPr id="6" name="Image 3" descr="/tmp/claude-0/-home-user-other/d8041478-dfcc-5ca6-9236-09cb61fbd919/scratchpad/img/t4.jpg">    </p:cNvPr>
-          <p:cNvPicPr>
-            <a:picLocks noChangeAspect="1"/>
-          </p:cNvPicPr>
-          <p:nvPr/>
-        </p:nvPicPr>
-        <p:blipFill>
-          <a:blip r:embed="rId4"/>
-          <a:stretch>
-            <a:fillRect/>
-          </a:stretch>
-        </p:blipFill>
-        <p:spPr>
-          <a:xfrm>
-            <a:off x="6629400" y="1188720"/>
-            <a:ext cx="1965960" cy="1105510"/>
-          </a:xfrm>
-          <a:prstGeom prst="rect">
-            <a:avLst/>
-          </a:prstGeom>
-        </p:spPr>
-      </p:pic>
-      <p:pic>
-        <p:nvPicPr>
-          <p:cNvPr id="7" name="Image 4" descr="/tmp/claude-0/-home-user-other/d8041478-dfcc-5ca6-9236-09cb61fbd919/scratchpad/img/t5.jpg">    </p:cNvPr>
-          <p:cNvPicPr>
-            <a:picLocks noChangeAspect="1"/>
-          </p:cNvPicPr>
-          <p:nvPr/>
-        </p:nvPicPr>
-        <p:blipFill>
-          <a:blip r:embed="rId5"/>
-          <a:stretch>
-            <a:fillRect/>
-          </a:stretch>
-        </p:blipFill>
-        <p:spPr>
-          <a:xfrm>
-            <a:off x="457200" y="2386584"/>
-            <a:ext cx="1965960" cy="1105510"/>
-          </a:xfrm>
-          <a:prstGeom prst="rect">
-            <a:avLst/>
-          </a:prstGeom>
-        </p:spPr>
-      </p:pic>
-      <p:pic>
-        <p:nvPicPr>
-          <p:cNvPr id="8" name="Image 5" descr="/tmp/claude-0/-home-user-other/d8041478-dfcc-5ca6-9236-09cb61fbd919/scratchpad/img/t6.jpg">    </p:cNvPr>
-          <p:cNvPicPr>
-            <a:picLocks noChangeAspect="1"/>
-          </p:cNvPicPr>
-          <p:nvPr/>
-        </p:nvPicPr>
-        <p:blipFill>
-          <a:blip r:embed="rId6"/>
-          <a:stretch>
-            <a:fillRect/>
-          </a:stretch>
-        </p:blipFill>
-        <p:spPr>
-          <a:xfrm>
-            <a:off x="2514600" y="2386584"/>
-            <a:ext cx="1965960" cy="1105510"/>
-          </a:xfrm>
-          <a:prstGeom prst="rect">
-            <a:avLst/>
-          </a:prstGeom>
-        </p:spPr>
-      </p:pic>
-      <p:pic>
-        <p:nvPicPr>
-          <p:cNvPr id="9" name="Image 6" descr="/tmp/claude-0/-home-user-other/d8041478-dfcc-5ca6-9236-09cb61fbd919/scratchpad/img/t7.jpg">    </p:cNvPr>
-          <p:cNvPicPr>
-            <a:picLocks noChangeAspect="1"/>
-          </p:cNvPicPr>
-          <p:nvPr/>
-        </p:nvPicPr>
-        <p:blipFill>
-          <a:blip r:embed="rId7"/>
-          <a:stretch>
-            <a:fillRect/>
-          </a:stretch>
-        </p:blipFill>
-        <p:spPr>
-          <a:xfrm>
-            <a:off x="4572000" y="2386584"/>
-            <a:ext cx="1965960" cy="1105510"/>
-          </a:xfrm>
-          <a:prstGeom prst="rect">
-            <a:avLst/>
-          </a:prstGeom>
-        </p:spPr>
-      </p:pic>
-      <p:pic>
-        <p:nvPicPr>
-          <p:cNvPr id="10" name="Image 7" descr="/tmp/claude-0/-home-user-other/d8041478-dfcc-5ca6-9236-09cb61fbd919/scratchpad/img/t8.jpg">    </p:cNvPr>
-          <p:cNvPicPr>
-            <a:picLocks noChangeAspect="1"/>
-          </p:cNvPicPr>
-          <p:nvPr/>
-        </p:nvPicPr>
-        <p:blipFill>
-          <a:blip r:embed="rId8"/>
-          <a:stretch>
-            <a:fillRect/>
-          </a:stretch>
-        </p:blipFill>
-        <p:spPr>
-          <a:xfrm>
-            <a:off x="6629400" y="2386584"/>
-            <a:ext cx="1965960" cy="1105510"/>
-          </a:xfrm>
-          <a:prstGeom prst="rect">
-            <a:avLst/>
-          </a:prstGeom>
-        </p:spPr>
-      </p:pic>
-      <p:pic>
-        <p:nvPicPr>
-          <p:cNvPr id="11" name="Image 8" descr="/tmp/claude-0/-home-user-other/d8041478-dfcc-5ca6-9236-09cb61fbd919/scratchpad/img/t9.jpg">    </p:cNvPr>
-          <p:cNvPicPr>
-            <a:picLocks noChangeAspect="1"/>
-          </p:cNvPicPr>
-          <p:nvPr/>
-        </p:nvPicPr>
-        <p:blipFill>
-          <a:blip r:embed="rId9"/>
-          <a:stretch>
-            <a:fillRect/>
-          </a:stretch>
-        </p:blipFill>
-        <p:spPr>
-          <a:xfrm>
-            <a:off x="457200" y="3584448"/>
-            <a:ext cx="1965960" cy="1105510"/>
-          </a:xfrm>
-          <a:prstGeom prst="rect">
-            <a:avLst/>
-          </a:prstGeom>
-        </p:spPr>
-      </p:pic>
-      <p:pic>
-        <p:nvPicPr>
-          <p:cNvPr id="12" name="Image 9" descr="/tmp/claude-0/-home-user-other/d8041478-dfcc-5ca6-9236-09cb61fbd919/scratchpad/img/t10.jpg">    </p:cNvPr>
-          <p:cNvPicPr>
-            <a:picLocks noChangeAspect="1"/>
-          </p:cNvPicPr>
-          <p:nvPr/>
-        </p:nvPicPr>
-        <p:blipFill>
-          <a:blip r:embed="rId10"/>
-          <a:stretch>
-            <a:fillRect/>
-          </a:stretch>
-        </p:blipFill>
-        <p:spPr>
-          <a:xfrm>
-            <a:off x="2514600" y="3584448"/>
-            <a:ext cx="1965960" cy="1105510"/>
-          </a:xfrm>
-          <a:prstGeom prst="rect">
-            <a:avLst/>
-          </a:prstGeom>
-        </p:spPr>
-      </p:pic>
-      <p:pic>
-        <p:nvPicPr>
-          <p:cNvPr id="13" name="Image 10" descr="/tmp/claude-0/-home-user-other/d8041478-dfcc-5ca6-9236-09cb61fbd919/scratchpad/img/t11.jpg">    </p:cNvPr>
-          <p:cNvPicPr>
-            <a:picLocks noChangeAspect="1"/>
-          </p:cNvPicPr>
-          <p:nvPr/>
-        </p:nvPicPr>
-        <p:blipFill>
-          <a:blip r:embed="rId11"/>
-          <a:stretch>
-            <a:fillRect/>
-          </a:stretch>
-        </p:blipFill>
-        <p:spPr>
-          <a:xfrm>
-            <a:off x="4572000" y="3584448"/>
-            <a:ext cx="1965960" cy="1105510"/>
-          </a:xfrm>
-          <a:prstGeom prst="rect">
-            <a:avLst/>
-          </a:prstGeom>
-        </p:spPr>
-      </p:pic>
-      <p:pic>
-        <p:nvPicPr>
-          <p:cNvPr id="14" name="Image 11" descr="/tmp/claude-0/-home-user-other/d8041478-dfcc-5ca6-9236-09cb61fbd919/scratchpad/img/t12.jpg">    </p:cNvPr>
-          <p:cNvPicPr>
-            <a:picLocks noChangeAspect="1"/>
-          </p:cNvPicPr>
-          <p:nvPr/>
-        </p:nvPicPr>
-        <p:blipFill>
-          <a:blip r:embed="rId12"/>
-          <a:stretch>
-            <a:fillRect/>
-          </a:stretch>
-        </p:blipFill>
-        <p:spPr>
-          <a:xfrm>
-            <a:off x="6629400" y="3584448"/>
-            <a:ext cx="1965960" cy="1105510"/>
-          </a:xfrm>
-          <a:prstGeom prst="rect">
-            <a:avLst/>
-          </a:prstGeom>
-        </p:spPr>
-      </p:pic>
+      <p:sp>
+        <p:nvSpPr>
+          <p:cNvPr id="8" name="Text 4"/>
+          <p:cNvSpPr txBox="1"/>
+          <p:nvPr/>
+        </p:nvSpPr>
+        <p:spPr>
+          <a:xfrm>
+            <a:off x="4663440" y="3886200"/>
+            <a:ext cx="4023360" cy="320040"/>
+          </a:xfrm>
+          <a:prstGeom prst="rect">
+            <a:avLst/>
+          </a:prstGeom>
+          <a:noFill/>
+          <a:ln/>
+        </p:spPr>
+        <p:txBody>
+          <a:bodyPr wrap="square" lIns="0" tIns="0" rIns="0" bIns="0" rtlCol="0" anchor="t"/>
+          <a:lstStyle/>
+          <a:p>
+            <a:pPr indent="0" marL="0">
+              <a:buNone/>
+            </a:pPr>
+            <a:r>
+              <a:rPr lang="en-US" sz="1800" b="1" dirty="0">
+                <a:solidFill>
+                  <a:srgbClr val="F2EEE8"/>
+                </a:solidFill>
+                <a:latin typeface="Cambria" pitchFamily="34" charset="0"/>
+                <a:ea typeface="Cambria" pitchFamily="34" charset="-122"/>
+                <a:cs typeface="Cambria" pitchFamily="34" charset="-120"/>
+              </a:rPr>
+              <a:t>Redacción</a:t>
+            </a:r>
+            <a:endParaRPr lang="en-US" sz="1800" dirty="0"/>
+          </a:p>
+        </p:txBody>
+      </p:sp>
+      <p:sp>
+        <p:nvSpPr>
+          <p:cNvPr id="9" name="Text 5"/>
+          <p:cNvSpPr txBox="1"/>
+          <p:nvPr/>
+        </p:nvSpPr>
+        <p:spPr>
+          <a:xfrm>
+            <a:off x="4663440" y="4224528"/>
+            <a:ext cx="4023360" cy="457200"/>
+          </a:xfrm>
+          <a:prstGeom prst="rect">
+            <a:avLst/>
+          </a:prstGeom>
+          <a:noFill/>
+          <a:ln/>
+        </p:spPr>
+        <p:txBody>
+          <a:bodyPr wrap="square" lIns="0" tIns="0" rIns="0" bIns="0" rtlCol="0" anchor="t"/>
+          <a:lstStyle/>
+          <a:p>
+            <a:pPr indent="0" marL="0">
+              <a:buNone/>
+            </a:pPr>
+            <a:r>
+              <a:rPr lang="en-US" sz="1300" dirty="0">
+                <a:solidFill>
+                  <a:srgbClr val="A39B90"/>
+                </a:solidFill>
+                <a:latin typeface="Calibri" pitchFamily="34" charset="0"/>
+                <a:ea typeface="Calibri" pitchFamily="34" charset="-122"/>
+                <a:cs typeface="Calibri" pitchFamily="34" charset="-120"/>
+              </a:rPr>
+              <a:t>Filas de puestos con doble monitor, bajo paneles de luz.</a:t>
+            </a:r>
+            <a:endParaRPr lang="en-US" sz="1300" dirty="0"/>
+          </a:p>
+        </p:txBody>
+      </p:sp>
     </p:spTree>
   </p:cSld>
   <p:clrMapOvr>
@@ -3315,120 +5789,39 @@
                 <a:ea typeface="Cambria" pitchFamily="34" charset="-122"/>
                 <a:cs typeface="Cambria" pitchFamily="34" charset="-120"/>
               </a:rPr>
-              <a:t>Tiempo invertido</a:t>
+              <a:t>12 planos del set</a:t>
             </a:r>
             <a:endParaRPr lang="en-US" sz="3400" dirty="0"/>
           </a:p>
         </p:txBody>
-      </p:sp>
-      <p:sp>
-        <p:nvSpPr>
-          <p:cNvPr id="3" name="Text 1"/>
-          <p:cNvSpPr txBox="1"/>
-          <p:nvPr/>
-        </p:nvSpPr>
-        <p:spPr>
-          <a:xfrm>
-            <a:off x="457200" y="960120"/>
-            <a:ext cx="8229600" cy="365760"/>
-          </a:xfrm>
-          <a:prstGeom prst="rect">
-            <a:avLst/>
-          </a:prstGeom>
-          <a:noFill/>
-          <a:ln/>
-        </p:spPr>
-        <p:txBody>
-          <a:bodyPr wrap="square" lIns="0" tIns="0" rIns="0" bIns="0" rtlCol="0" anchor="ctr"/>
-          <a:lstStyle/>
-          <a:p>
-            <a:pPr indent="0" marL="0">
-              <a:buNone/>
-            </a:pPr>
-            <a:r>
-              <a:rPr lang="en-US" sz="1600" dirty="0">
-                <a:solidFill>
-                  <a:srgbClr val="A39B90"/>
-                </a:solidFill>
-                <a:latin typeface="Calibri" pitchFamily="34" charset="0"/>
-                <a:ea typeface="Calibri" pitchFamily="34" charset="-122"/>
-                <a:cs typeface="Calibri" pitchFamily="34" charset="-120"/>
-              </a:rPr>
-              <a:t>50 h de reloj, pero solo ≈ 24 h de actividad y renders</a:t>
-            </a:r>
-            <a:endParaRPr lang="en-US" sz="1600" dirty="0"/>
-          </a:p>
-        </p:txBody>
-      </p:sp>
-      <p:graphicFrame>
-        <p:nvGraphicFramePr>
-          <p:cNvPr id="4" name="Chart 0" descr=""/>
-          <p:cNvGraphicFramePr/>
-          <p:nvPr/>
-        </p:nvGraphicFramePr>
-        <p:xfrm>
-          <a:off x="274320" y="1417320"/>
-          <a:ext cx="4206240" cy="3063240"/>
-        </p:xfrm>
-        <a:graphic xmlns:a="http://schemas.openxmlformats.org/drawingml/2006/main">
-          <a:graphicData uri="http://schemas.openxmlformats.org/drawingml/2006/chart">
-            <c:chart xmlns:c="http://schemas.openxmlformats.org/drawingml/2006/chart" r:id="rId1"/>
-          </a:graphicData>
-        </a:graphic>
-      </p:graphicFrame>
-      <p:sp>
-        <p:nvSpPr>
-          <p:cNvPr id="5" name="Shape 2"/>
-          <p:cNvSpPr/>
-          <p:nvPr/>
-        </p:nvSpPr>
-        <p:spPr>
-          <a:xfrm>
-            <a:off x="4754880" y="1463040"/>
-            <a:ext cx="3931920" cy="713232"/>
-          </a:xfrm>
-          <a:prstGeom prst="rect">
-            <a:avLst/>
-          </a:prstGeom>
-          <a:solidFill>
-            <a:srgbClr val="221F1B"/>
-          </a:solidFill>
-          <a:ln w="12700">
-            <a:solidFill>
-              <a:srgbClr val="221F1B"/>
-            </a:solidFill>
-            <a:prstDash val="solid"/>
-          </a:ln>
-        </p:spPr>
-      </p:sp>
-      <p:sp>
-        <p:nvSpPr>
-          <p:cNvPr id="6" name="Shape 3"/>
-          <p:cNvSpPr/>
-          <p:nvPr/>
-        </p:nvSpPr>
-        <p:spPr>
-          <a:xfrm>
-            <a:off x="4892040" y="1591056"/>
-            <a:ext cx="457200" cy="457200"/>
-          </a:xfrm>
-          <a:prstGeom prst="ellipse">
-            <a:avLst/>
-          </a:prstGeom>
-          <a:solidFill>
-            <a:srgbClr val="FFFFFF"/>
-          </a:solidFill>
-          <a:ln w="12700">
-            <a:solidFill>
-              <a:srgbClr val="FFFFFF"/>
-            </a:solidFill>
-            <a:prstDash val="solid"/>
-          </a:ln>
-        </p:spPr>
       </p:sp>
       <p:pic>
         <p:nvPicPr>
-          <p:cNvPr id="7" name="Image 0" descr="preencoded.png">    </p:cNvPr>
+          <p:cNvPr id="3" name="Image 0" descr="/tmp/claude-0/-home-user-other/d8041478-dfcc-5ca6-9236-09cb61fbd919/scratchpad/img/t1.jpg">    </p:cNvPr>
+          <p:cNvPicPr>
+            <a:picLocks noChangeAspect="1"/>
+          </p:cNvPicPr>
+          <p:nvPr/>
+        </p:nvPicPr>
+        <p:blipFill>
+          <a:blip r:embed="rId1"/>
+          <a:stretch>
+            <a:fillRect/>
+          </a:stretch>
+        </p:blipFill>
+        <p:spPr>
+          <a:xfrm>
+            <a:off x="457200" y="1188720"/>
+            <a:ext cx="1965960" cy="1105510"/>
+          </a:xfrm>
+          <a:prstGeom prst="rect">
+            <a:avLst/>
+          </a:prstGeom>
+        </p:spPr>
+      </p:pic>
+      <p:pic>
+        <p:nvPicPr>
+          <p:cNvPr id="4" name="Image 1" descr="/tmp/claude-0/-home-user-other/d8041478-dfcc-5ca6-9236-09cb61fbd919/scratchpad/img/t2.jpg">    </p:cNvPr>
           <p:cNvPicPr>
             <a:picLocks noChangeAspect="1"/>
           </p:cNvPicPr>
@@ -3442,162 +5835,17 @@
         </p:blipFill>
         <p:spPr>
           <a:xfrm>
-            <a:off x="5015484" y="1714500"/>
-            <a:ext cx="210312" cy="210312"/>
+            <a:off x="2514600" y="1188720"/>
+            <a:ext cx="1965960" cy="1105510"/>
           </a:xfrm>
           <a:prstGeom prst="rect">
             <a:avLst/>
           </a:prstGeom>
         </p:spPr>
       </p:pic>
-      <p:sp>
-        <p:nvSpPr>
-          <p:cNvPr id="8" name="Text 4"/>
-          <p:cNvSpPr txBox="1"/>
-          <p:nvPr/>
-        </p:nvSpPr>
-        <p:spPr>
-          <a:xfrm>
-            <a:off x="5440680" y="1463040"/>
-            <a:ext cx="1600200" cy="713232"/>
-          </a:xfrm>
-          <a:prstGeom prst="rect">
-            <a:avLst/>
-          </a:prstGeom>
-          <a:noFill/>
-          <a:ln/>
-        </p:spPr>
-        <p:txBody>
-          <a:bodyPr wrap="square" lIns="0" tIns="0" rIns="0" bIns="0" rtlCol="0" anchor="ctr"/>
-          <a:lstStyle/>
-          <a:p>
-            <a:pPr indent="0" marL="0">
-              <a:buNone/>
-            </a:pPr>
-            <a:r>
-              <a:rPr lang="en-US" sz="2000" b="1" dirty="0">
-                <a:solidFill>
-                  <a:srgbClr val="F2EEE8"/>
-                </a:solidFill>
-                <a:latin typeface="Cambria" pitchFamily="34" charset="0"/>
-                <a:ea typeface="Cambria" pitchFamily="34" charset="-122"/>
-                <a:cs typeface="Cambria" pitchFamily="34" charset="-120"/>
-              </a:rPr>
-              <a:t>50 h</a:t>
-            </a:r>
-            <a:endParaRPr lang="en-US" sz="2000" dirty="0"/>
-          </a:p>
-        </p:txBody>
-      </p:sp>
-      <p:sp>
-        <p:nvSpPr>
-          <p:cNvPr id="9" name="Text 5"/>
-          <p:cNvSpPr txBox="1"/>
-          <p:nvPr/>
-        </p:nvSpPr>
-        <p:spPr>
-          <a:xfrm>
-            <a:off x="7086600" y="1463040"/>
-            <a:ext cx="1554480" cy="713232"/>
-          </a:xfrm>
-          <a:prstGeom prst="rect">
-            <a:avLst/>
-          </a:prstGeom>
-          <a:noFill/>
-          <a:ln/>
-        </p:spPr>
-        <p:txBody>
-          <a:bodyPr wrap="square" lIns="0" tIns="0" rIns="0" bIns="0" rtlCol="0" anchor="ctr"/>
-          <a:lstStyle/>
-          <a:p>
-            <a:pPr indent="0" marL="0">
-              <a:buNone/>
-            </a:pPr>
-            <a:r>
-              <a:rPr lang="en-US" sz="1100" b="1" dirty="0">
-                <a:solidFill>
-                  <a:srgbClr val="F2EEE8"/>
-                </a:solidFill>
-                <a:latin typeface="Calibri" pitchFamily="34" charset="0"/>
-                <a:ea typeface="Calibri" pitchFamily="34" charset="-122"/>
-                <a:cs typeface="Calibri" pitchFamily="34" charset="-120"/>
-              </a:rPr>
-              <a:t>Reloj total</a:t>
-            </a:r>
-            <a:endParaRPr lang="en-US" sz="1100" dirty="0"/>
-          </a:p>
-          <a:p>
-            <a:pPr indent="0" marL="0">
-              <a:buNone/>
-            </a:pPr>
-            <a:r>
-              <a:rPr lang="en-US" sz="1100" dirty="0">
-                <a:solidFill>
-                  <a:srgbClr val="A39B90"/>
-                </a:solidFill>
-                <a:latin typeface="Calibri" pitchFamily="34" charset="0"/>
-                <a:ea typeface="Calibri" pitchFamily="34" charset="-122"/>
-                <a:cs typeface="Calibri" pitchFamily="34" charset="-120"/>
-              </a:rPr>
-              <a:t>28/09 16:16 → 30/09 18:26</a:t>
-            </a:r>
-            <a:endParaRPr lang="en-US" sz="1100" dirty="0"/>
-          </a:p>
-        </p:txBody>
-      </p:sp>
-      <p:sp>
-        <p:nvSpPr>
-          <p:cNvPr id="10" name="Shape 6"/>
-          <p:cNvSpPr/>
-          <p:nvPr/>
-        </p:nvSpPr>
-        <p:spPr>
-          <a:xfrm>
-            <a:off x="4754880" y="2286000"/>
-            <a:ext cx="3931920" cy="713232"/>
-          </a:xfrm>
-          <a:prstGeom prst="rect">
-            <a:avLst/>
-          </a:prstGeom>
-          <a:solidFill>
-            <a:srgbClr val="221F1B"/>
-          </a:solidFill>
-          <a:ln w="12700">
-            <a:solidFill>
-              <a:srgbClr val="221F1B"/>
-            </a:solidFill>
-            <a:prstDash val="solid"/>
-          </a:ln>
-        </p:spPr>
-      </p:sp>
-      <p:sp>
-        <p:nvSpPr>
-          <p:cNvPr id="11" name="Shape 7"/>
-          <p:cNvSpPr/>
-          <p:nvPr/>
-        </p:nvSpPr>
-        <p:spPr>
-          <a:xfrm>
-            <a:off x="4892040" y="2414016"/>
-            <a:ext cx="457200" cy="457200"/>
-          </a:xfrm>
-          <a:prstGeom prst="ellipse">
-            <a:avLst/>
-          </a:prstGeom>
-          <a:solidFill>
-            <a:srgbClr val="5B9BFF"/>
-          </a:solidFill>
-          <a:ln w="12700">
-            <a:solidFill>
-              <a:srgbClr val="5B9BFF"/>
-            </a:solidFill>
-            <a:prstDash val="solid"/>
-          </a:ln>
-        </p:spPr>
-      </p:sp>
       <p:pic>
         <p:nvPicPr>
-          <p:cNvPr id="12" name="Image 1" descr="preencoded.png">    </p:cNvPr>
+          <p:cNvPr id="5" name="Image 2" descr="/tmp/claude-0/-home-user-other/d8041478-dfcc-5ca6-9236-09cb61fbd919/scratchpad/img/t3.jpg">    </p:cNvPr>
           <p:cNvPicPr>
             <a:picLocks noChangeAspect="1"/>
           </p:cNvPicPr>
@@ -3611,162 +5859,17 @@
         </p:blipFill>
         <p:spPr>
           <a:xfrm>
-            <a:off x="5015484" y="2537460"/>
-            <a:ext cx="210312" cy="210312"/>
+            <a:off x="4572000" y="1188720"/>
+            <a:ext cx="1965960" cy="1105510"/>
           </a:xfrm>
           <a:prstGeom prst="rect">
             <a:avLst/>
           </a:prstGeom>
         </p:spPr>
       </p:pic>
-      <p:sp>
-        <p:nvSpPr>
-          <p:cNvPr id="13" name="Text 8"/>
-          <p:cNvSpPr txBox="1"/>
-          <p:nvPr/>
-        </p:nvSpPr>
-        <p:spPr>
-          <a:xfrm>
-            <a:off x="5440680" y="2286000"/>
-            <a:ext cx="1600200" cy="713232"/>
-          </a:xfrm>
-          <a:prstGeom prst="rect">
-            <a:avLst/>
-          </a:prstGeom>
-          <a:noFill/>
-          <a:ln/>
-        </p:spPr>
-        <p:txBody>
-          <a:bodyPr wrap="square" lIns="0" tIns="0" rIns="0" bIns="0" rtlCol="0" anchor="ctr"/>
-          <a:lstStyle/>
-          <a:p>
-            <a:pPr indent="0" marL="0">
-              <a:buNone/>
-            </a:pPr>
-            <a:r>
-              <a:rPr lang="en-US" sz="2000" b="1" dirty="0">
-                <a:solidFill>
-                  <a:srgbClr val="F2EEE8"/>
-                </a:solidFill>
-                <a:latin typeface="Cambria" pitchFamily="34" charset="0"/>
-                <a:ea typeface="Cambria" pitchFamily="34" charset="-122"/>
-                <a:cs typeface="Cambria" pitchFamily="34" charset="-120"/>
-              </a:rPr>
-              <a:t>≈ 9 h</a:t>
-            </a:r>
-            <a:endParaRPr lang="en-US" sz="2000" dirty="0"/>
-          </a:p>
-        </p:txBody>
-      </p:sp>
-      <p:sp>
-        <p:nvSpPr>
-          <p:cNvPr id="14" name="Text 9"/>
-          <p:cNvSpPr txBox="1"/>
-          <p:nvPr/>
-        </p:nvSpPr>
-        <p:spPr>
-          <a:xfrm>
-            <a:off x="7086600" y="2286000"/>
-            <a:ext cx="1554480" cy="713232"/>
-          </a:xfrm>
-          <a:prstGeom prst="rect">
-            <a:avLst/>
-          </a:prstGeom>
-          <a:noFill/>
-          <a:ln/>
-        </p:spPr>
-        <p:txBody>
-          <a:bodyPr wrap="square" lIns="0" tIns="0" rIns="0" bIns="0" rtlCol="0" anchor="ctr"/>
-          <a:lstStyle/>
-          <a:p>
-            <a:pPr indent="0" marL="0">
-              <a:buNone/>
-            </a:pPr>
-            <a:r>
-              <a:rPr lang="en-US" sz="1100" b="1" dirty="0">
-                <a:solidFill>
-                  <a:srgbClr val="F2EEE8"/>
-                </a:solidFill>
-                <a:latin typeface="Calibri" pitchFamily="34" charset="0"/>
-                <a:ea typeface="Calibri" pitchFamily="34" charset="-122"/>
-                <a:cs typeface="Calibri" pitchFamily="34" charset="-120"/>
-              </a:rPr>
-              <a:t>Trabajo activo</a:t>
-            </a:r>
-            <a:endParaRPr lang="en-US" sz="1100" dirty="0"/>
-          </a:p>
-          <a:p>
-            <a:pPr indent="0" marL="0">
-              <a:buNone/>
-            </a:pPr>
-            <a:r>
-              <a:rPr lang="en-US" sz="1100" dirty="0">
-                <a:solidFill>
-                  <a:srgbClr val="A39B90"/>
-                </a:solidFill>
-                <a:latin typeface="Calibri" pitchFamily="34" charset="0"/>
-                <a:ea typeface="Calibri" pitchFamily="34" charset="-122"/>
-                <a:cs typeface="Calibri" pitchFamily="34" charset="-120"/>
-              </a:rPr>
-              <a:t>de Claude, sin renders</a:t>
-            </a:r>
-            <a:endParaRPr lang="en-US" sz="1100" dirty="0"/>
-          </a:p>
-        </p:txBody>
-      </p:sp>
-      <p:sp>
-        <p:nvSpPr>
-          <p:cNvPr id="15" name="Shape 10"/>
-          <p:cNvSpPr/>
-          <p:nvPr/>
-        </p:nvSpPr>
-        <p:spPr>
-          <a:xfrm>
-            <a:off x="4754880" y="3108960"/>
-            <a:ext cx="3931920" cy="713232"/>
-          </a:xfrm>
-          <a:prstGeom prst="rect">
-            <a:avLst/>
-          </a:prstGeom>
-          <a:solidFill>
-            <a:srgbClr val="221F1B"/>
-          </a:solidFill>
-          <a:ln w="12700">
-            <a:solidFill>
-              <a:srgbClr val="221F1B"/>
-            </a:solidFill>
-            <a:prstDash val="solid"/>
-          </a:ln>
-        </p:spPr>
-      </p:sp>
-      <p:sp>
-        <p:nvSpPr>
-          <p:cNvPr id="16" name="Shape 11"/>
-          <p:cNvSpPr/>
-          <p:nvPr/>
-        </p:nvSpPr>
-        <p:spPr>
-          <a:xfrm>
-            <a:off x="4892040" y="3236976"/>
-            <a:ext cx="457200" cy="457200"/>
-          </a:xfrm>
-          <a:prstGeom prst="ellipse">
-            <a:avLst/>
-          </a:prstGeom>
-          <a:solidFill>
-            <a:srgbClr val="4CAF50"/>
-          </a:solidFill>
-          <a:ln w="12700">
-            <a:solidFill>
-              <a:srgbClr val="4CAF50"/>
-            </a:solidFill>
-            <a:prstDash val="solid"/>
-          </a:ln>
-        </p:spPr>
-      </p:sp>
       <p:pic>
         <p:nvPicPr>
-          <p:cNvPr id="17" name="Image 2" descr="preencoded.png">    </p:cNvPr>
+          <p:cNvPr id="6" name="Image 3" descr="/tmp/claude-0/-home-user-other/d8041478-dfcc-5ca6-9236-09cb61fbd919/scratchpad/img/t4.jpg">    </p:cNvPr>
           <p:cNvPicPr>
             <a:picLocks noChangeAspect="1"/>
           </p:cNvPicPr>
@@ -3780,162 +5883,17 @@
         </p:blipFill>
         <p:spPr>
           <a:xfrm>
-            <a:off x="5015484" y="3360420"/>
-            <a:ext cx="210312" cy="210312"/>
+            <a:off x="6629400" y="1188720"/>
+            <a:ext cx="1965960" cy="1105510"/>
           </a:xfrm>
           <a:prstGeom prst="rect">
             <a:avLst/>
           </a:prstGeom>
         </p:spPr>
       </p:pic>
-      <p:sp>
-        <p:nvSpPr>
-          <p:cNvPr id="18" name="Text 12"/>
-          <p:cNvSpPr txBox="1"/>
-          <p:nvPr/>
-        </p:nvSpPr>
-        <p:spPr>
-          <a:xfrm>
-            <a:off x="5440680" y="3108960"/>
-            <a:ext cx="1600200" cy="713232"/>
-          </a:xfrm>
-          <a:prstGeom prst="rect">
-            <a:avLst/>
-          </a:prstGeom>
-          <a:noFill/>
-          <a:ln/>
-        </p:spPr>
-        <p:txBody>
-          <a:bodyPr wrap="square" lIns="0" tIns="0" rIns="0" bIns="0" rtlCol="0" anchor="ctr"/>
-          <a:lstStyle/>
-          <a:p>
-            <a:pPr indent="0" marL="0">
-              <a:buNone/>
-            </a:pPr>
-            <a:r>
-              <a:rPr lang="en-US" sz="2000" b="1" dirty="0">
-                <a:solidFill>
-                  <a:srgbClr val="F2EEE8"/>
-                </a:solidFill>
-                <a:latin typeface="Cambria" pitchFamily="34" charset="0"/>
-                <a:ea typeface="Cambria" pitchFamily="34" charset="-122"/>
-                <a:cs typeface="Cambria" pitchFamily="34" charset="-120"/>
-              </a:rPr>
-              <a:t>≈ 14–15 h</a:t>
-            </a:r>
-            <a:endParaRPr lang="en-US" sz="2000" dirty="0"/>
-          </a:p>
-        </p:txBody>
-      </p:sp>
-      <p:sp>
-        <p:nvSpPr>
-          <p:cNvPr id="19" name="Text 13"/>
-          <p:cNvSpPr txBox="1"/>
-          <p:nvPr/>
-        </p:nvSpPr>
-        <p:spPr>
-          <a:xfrm>
-            <a:off x="7086600" y="3108960"/>
-            <a:ext cx="1554480" cy="713232"/>
-          </a:xfrm>
-          <a:prstGeom prst="rect">
-            <a:avLst/>
-          </a:prstGeom>
-          <a:noFill/>
-          <a:ln/>
-        </p:spPr>
-        <p:txBody>
-          <a:bodyPr wrap="square" lIns="0" tIns="0" rIns="0" bIns="0" rtlCol="0" anchor="ctr"/>
-          <a:lstStyle/>
-          <a:p>
-            <a:pPr indent="0" marL="0">
-              <a:buNone/>
-            </a:pPr>
-            <a:r>
-              <a:rPr lang="en-US" sz="1100" b="1" dirty="0">
-                <a:solidFill>
-                  <a:srgbClr val="F2EEE8"/>
-                </a:solidFill>
-                <a:latin typeface="Calibri" pitchFamily="34" charset="0"/>
-                <a:ea typeface="Calibri" pitchFamily="34" charset="-122"/>
-                <a:cs typeface="Calibri" pitchFamily="34" charset="-120"/>
-              </a:rPr>
-              <a:t>Renders</a:t>
-            </a:r>
-            <a:endParaRPr lang="en-US" sz="1100" dirty="0"/>
-          </a:p>
-          <a:p>
-            <a:pPr indent="0" marL="0">
-              <a:buNone/>
-            </a:pPr>
-            <a:r>
-              <a:rPr lang="en-US" sz="1100" dirty="0">
-                <a:solidFill>
-                  <a:srgbClr val="A39B90"/>
-                </a:solidFill>
-                <a:latin typeface="Calibri" pitchFamily="34" charset="0"/>
-                <a:ea typeface="Calibri" pitchFamily="34" charset="-122"/>
-                <a:cs typeface="Calibri" pitchFamily="34" charset="-120"/>
-              </a:rPr>
-              <a:t>espera de la máquina</a:t>
-            </a:r>
-            <a:endParaRPr lang="en-US" sz="1100" dirty="0"/>
-          </a:p>
-        </p:txBody>
-      </p:sp>
-      <p:sp>
-        <p:nvSpPr>
-          <p:cNvPr id="20" name="Shape 14"/>
-          <p:cNvSpPr/>
-          <p:nvPr/>
-        </p:nvSpPr>
-        <p:spPr>
-          <a:xfrm>
-            <a:off x="4754880" y="3931920"/>
-            <a:ext cx="3931920" cy="713232"/>
-          </a:xfrm>
-          <a:prstGeom prst="rect">
-            <a:avLst/>
-          </a:prstGeom>
-          <a:solidFill>
-            <a:srgbClr val="221F1B"/>
-          </a:solidFill>
-          <a:ln w="12700">
-            <a:solidFill>
-              <a:srgbClr val="221F1B"/>
-            </a:solidFill>
-            <a:prstDash val="solid"/>
-          </a:ln>
-        </p:spPr>
-      </p:sp>
-      <p:sp>
-        <p:nvSpPr>
-          <p:cNvPr id="21" name="Shape 15"/>
-          <p:cNvSpPr/>
-          <p:nvPr/>
-        </p:nvSpPr>
-        <p:spPr>
-          <a:xfrm>
-            <a:off x="4892040" y="4059936"/>
-            <a:ext cx="457200" cy="457200"/>
-          </a:xfrm>
-          <a:prstGeom prst="ellipse">
-            <a:avLst/>
-          </a:prstGeom>
-          <a:solidFill>
-            <a:srgbClr val="E0A84A"/>
-          </a:solidFill>
-          <a:ln w="12700">
-            <a:solidFill>
-              <a:srgbClr val="E0A84A"/>
-            </a:solidFill>
-            <a:prstDash val="solid"/>
-          </a:ln>
-        </p:spPr>
-      </p:sp>
       <p:pic>
         <p:nvPicPr>
-          <p:cNvPr id="22" name="Image 3" descr="preencoded.png">    </p:cNvPr>
+          <p:cNvPr id="7" name="Image 4" descr="/tmp/claude-0/-home-user-other/d8041478-dfcc-5ca6-9236-09cb61fbd919/scratchpad/img/t5.jpg">    </p:cNvPr>
           <p:cNvPicPr>
             <a:picLocks noChangeAspect="1"/>
           </p:cNvPicPr>
@@ -3949,148 +5907,182 @@
         </p:blipFill>
         <p:spPr>
           <a:xfrm>
-            <a:off x="5015484" y="4183380"/>
-            <a:ext cx="210312" cy="210312"/>
+            <a:off x="457200" y="2386584"/>
+            <a:ext cx="1965960" cy="1105510"/>
           </a:xfrm>
           <a:prstGeom prst="rect">
             <a:avLst/>
           </a:prstGeom>
         </p:spPr>
       </p:pic>
-      <p:sp>
-        <p:nvSpPr>
-          <p:cNvPr id="23" name="Text 16"/>
-          <p:cNvSpPr txBox="1"/>
-          <p:nvPr/>
-        </p:nvSpPr>
-        <p:spPr>
-          <a:xfrm>
-            <a:off x="5440680" y="3931920"/>
-            <a:ext cx="1600200" cy="713232"/>
-          </a:xfrm>
-          <a:prstGeom prst="rect">
-            <a:avLst/>
-          </a:prstGeom>
-          <a:noFill/>
-          <a:ln/>
-        </p:spPr>
-        <p:txBody>
-          <a:bodyPr wrap="square" lIns="0" tIns="0" rIns="0" bIns="0" rtlCol="0" anchor="ctr"/>
-          <a:lstStyle/>
-          <a:p>
-            <a:pPr indent="0" marL="0">
-              <a:buNone/>
-            </a:pPr>
-            <a:r>
-              <a:rPr lang="en-US" sz="2000" b="1" dirty="0">
-                <a:solidFill>
-                  <a:srgbClr val="F2EEE8"/>
-                </a:solidFill>
-                <a:latin typeface="Cambria" pitchFamily="34" charset="0"/>
-                <a:ea typeface="Cambria" pitchFamily="34" charset="-122"/>
-                <a:cs typeface="Cambria" pitchFamily="34" charset="-120"/>
-              </a:rPr>
-              <a:t>≈ 24 h</a:t>
-            </a:r>
-            <a:endParaRPr lang="en-US" sz="2000" dirty="0"/>
-          </a:p>
-        </p:txBody>
-      </p:sp>
-      <p:sp>
-        <p:nvSpPr>
-          <p:cNvPr id="24" name="Text 17"/>
-          <p:cNvSpPr txBox="1"/>
-          <p:nvPr/>
-        </p:nvSpPr>
-        <p:spPr>
-          <a:xfrm>
-            <a:off x="7086600" y="3931920"/>
-            <a:ext cx="1554480" cy="713232"/>
-          </a:xfrm>
-          <a:prstGeom prst="rect">
-            <a:avLst/>
-          </a:prstGeom>
-          <a:noFill/>
-          <a:ln/>
-        </p:spPr>
-        <p:txBody>
-          <a:bodyPr wrap="square" lIns="0" tIns="0" rIns="0" bIns="0" rtlCol="0" anchor="ctr"/>
-          <a:lstStyle/>
-          <a:p>
-            <a:pPr indent="0" marL="0">
-              <a:buNone/>
-            </a:pPr>
-            <a:r>
-              <a:rPr lang="en-US" sz="1100" b="1" dirty="0">
-                <a:solidFill>
-                  <a:srgbClr val="F2EEE8"/>
-                </a:solidFill>
-                <a:latin typeface="Calibri" pitchFamily="34" charset="0"/>
-                <a:ea typeface="Calibri" pitchFamily="34" charset="-122"/>
-                <a:cs typeface="Calibri" pitchFamily="34" charset="-120"/>
-              </a:rPr>
-              <a:t>Actividad + renders</a:t>
-            </a:r>
-            <a:endParaRPr lang="en-US" sz="1100" dirty="0"/>
-          </a:p>
-          <a:p>
-            <a:pPr indent="0" marL="0">
-              <a:buNone/>
-            </a:pPr>
-            <a:r>
-              <a:rPr lang="en-US" sz="1100" dirty="0">
-                <a:solidFill>
-                  <a:srgbClr val="A39B90"/>
-                </a:solidFill>
-                <a:latin typeface="Calibri" pitchFamily="34" charset="0"/>
-                <a:ea typeface="Calibri" pitchFamily="34" charset="-122"/>
-                <a:cs typeface="Calibri" pitchFamily="34" charset="-120"/>
-              </a:rPr>
-              <a:t>50 h − 26 h sin actividad</a:t>
-            </a:r>
-            <a:endParaRPr lang="en-US" sz="1100" dirty="0"/>
-          </a:p>
-        </p:txBody>
-      </p:sp>
-      <p:sp>
-        <p:nvSpPr>
-          <p:cNvPr id="25" name="Text 18"/>
-          <p:cNvSpPr txBox="1"/>
-          <p:nvPr/>
-        </p:nvSpPr>
-        <p:spPr>
-          <a:xfrm>
-            <a:off x="457200" y="4526280"/>
-            <a:ext cx="4114800" cy="320040"/>
-          </a:xfrm>
-          <a:prstGeom prst="rect">
-            <a:avLst/>
-          </a:prstGeom>
-          <a:noFill/>
-          <a:ln/>
-        </p:spPr>
-        <p:txBody>
-          <a:bodyPr wrap="square" lIns="0" tIns="0" rIns="0" bIns="0" rtlCol="0" anchor="ctr"/>
-          <a:lstStyle/>
-          <a:p>
-            <a:pPr indent="0" marL="0">
-              <a:buNone/>
-            </a:pPr>
-            <a:r>
-              <a:rPr lang="en-US" sz="1000" dirty="0">
-                <a:solidFill>
-                  <a:srgbClr val="A39B90"/>
-                </a:solidFill>
-                <a:latin typeface="Calibri" pitchFamily="34" charset="0"/>
-                <a:ea typeface="Calibri" pitchFamily="34" charset="-122"/>
-                <a:cs typeface="Calibri" pitchFamily="34" charset="-120"/>
-              </a:rPr>
-              <a:t>El gráfico usa 15 h para los renders (rango medido: 14–15 h).</a:t>
-            </a:r>
-            <a:endParaRPr lang="en-US" sz="1000" dirty="0"/>
-          </a:p>
-        </p:txBody>
-      </p:sp>
+      <p:pic>
+        <p:nvPicPr>
+          <p:cNvPr id="8" name="Image 5" descr="/tmp/claude-0/-home-user-other/d8041478-dfcc-5ca6-9236-09cb61fbd919/scratchpad/img/t6.jpg">    </p:cNvPr>
+          <p:cNvPicPr>
+            <a:picLocks noChangeAspect="1"/>
+          </p:cNvPicPr>
+          <p:nvPr/>
+        </p:nvPicPr>
+        <p:blipFill>
+          <a:blip r:embed="rId6"/>
+          <a:stretch>
+            <a:fillRect/>
+          </a:stretch>
+        </p:blipFill>
+        <p:spPr>
+          <a:xfrm>
+            <a:off x="2514600" y="2386584"/>
+            <a:ext cx="1965960" cy="1105510"/>
+          </a:xfrm>
+          <a:prstGeom prst="rect">
+            <a:avLst/>
+          </a:prstGeom>
+        </p:spPr>
+      </p:pic>
+      <p:pic>
+        <p:nvPicPr>
+          <p:cNvPr id="9" name="Image 6" descr="/tmp/claude-0/-home-user-other/d8041478-dfcc-5ca6-9236-09cb61fbd919/scratchpad/img/t7.jpg">    </p:cNvPr>
+          <p:cNvPicPr>
+            <a:picLocks noChangeAspect="1"/>
+          </p:cNvPicPr>
+          <p:nvPr/>
+        </p:nvPicPr>
+        <p:blipFill>
+          <a:blip r:embed="rId7"/>
+          <a:stretch>
+            <a:fillRect/>
+          </a:stretch>
+        </p:blipFill>
+        <p:spPr>
+          <a:xfrm>
+            <a:off x="4572000" y="2386584"/>
+            <a:ext cx="1965960" cy="1105510"/>
+          </a:xfrm>
+          <a:prstGeom prst="rect">
+            <a:avLst/>
+          </a:prstGeom>
+        </p:spPr>
+      </p:pic>
+      <p:pic>
+        <p:nvPicPr>
+          <p:cNvPr id="10" name="Image 7" descr="/tmp/claude-0/-home-user-other/d8041478-dfcc-5ca6-9236-09cb61fbd919/scratchpad/img/t8.jpg">    </p:cNvPr>
+          <p:cNvPicPr>
+            <a:picLocks noChangeAspect="1"/>
+          </p:cNvPicPr>
+          <p:nvPr/>
+        </p:nvPicPr>
+        <p:blipFill>
+          <a:blip r:embed="rId8"/>
+          <a:stretch>
+            <a:fillRect/>
+          </a:stretch>
+        </p:blipFill>
+        <p:spPr>
+          <a:xfrm>
+            <a:off x="6629400" y="2386584"/>
+            <a:ext cx="1965960" cy="1105510"/>
+          </a:xfrm>
+          <a:prstGeom prst="rect">
+            <a:avLst/>
+          </a:prstGeom>
+        </p:spPr>
+      </p:pic>
+      <p:pic>
+        <p:nvPicPr>
+          <p:cNvPr id="11" name="Image 8" descr="/tmp/claude-0/-home-user-other/d8041478-dfcc-5ca6-9236-09cb61fbd919/scratchpad/img/t9.jpg">    </p:cNvPr>
+          <p:cNvPicPr>
+            <a:picLocks noChangeAspect="1"/>
+          </p:cNvPicPr>
+          <p:nvPr/>
+        </p:nvPicPr>
+        <p:blipFill>
+          <a:blip r:embed="rId9"/>
+          <a:stretch>
+            <a:fillRect/>
+          </a:stretch>
+        </p:blipFill>
+        <p:spPr>
+          <a:xfrm>
+            <a:off x="457200" y="3584448"/>
+            <a:ext cx="1965960" cy="1105510"/>
+          </a:xfrm>
+          <a:prstGeom prst="rect">
+            <a:avLst/>
+          </a:prstGeom>
+        </p:spPr>
+      </p:pic>
+      <p:pic>
+        <p:nvPicPr>
+          <p:cNvPr id="12" name="Image 9" descr="/tmp/claude-0/-home-user-other/d8041478-dfcc-5ca6-9236-09cb61fbd919/scratchpad/img/t10.jpg">    </p:cNvPr>
+          <p:cNvPicPr>
+            <a:picLocks noChangeAspect="1"/>
+          </p:cNvPicPr>
+          <p:nvPr/>
+        </p:nvPicPr>
+        <p:blipFill>
+          <a:blip r:embed="rId10"/>
+          <a:stretch>
+            <a:fillRect/>
+          </a:stretch>
+        </p:blipFill>
+        <p:spPr>
+          <a:xfrm>
+            <a:off x="2514600" y="3584448"/>
+            <a:ext cx="1965960" cy="1105510"/>
+          </a:xfrm>
+          <a:prstGeom prst="rect">
+            <a:avLst/>
+          </a:prstGeom>
+        </p:spPr>
+      </p:pic>
+      <p:pic>
+        <p:nvPicPr>
+          <p:cNvPr id="13" name="Image 10" descr="/tmp/claude-0/-home-user-other/d8041478-dfcc-5ca6-9236-09cb61fbd919/scratchpad/img/t11.jpg">    </p:cNvPr>
+          <p:cNvPicPr>
+            <a:picLocks noChangeAspect="1"/>
+          </p:cNvPicPr>
+          <p:nvPr/>
+        </p:nvPicPr>
+        <p:blipFill>
+          <a:blip r:embed="rId11"/>
+          <a:stretch>
+            <a:fillRect/>
+          </a:stretch>
+        </p:blipFill>
+        <p:spPr>
+          <a:xfrm>
+            <a:off x="4572000" y="3584448"/>
+            <a:ext cx="1965960" cy="1105510"/>
+          </a:xfrm>
+          <a:prstGeom prst="rect">
+            <a:avLst/>
+          </a:prstGeom>
+        </p:spPr>
+      </p:pic>
+      <p:pic>
+        <p:nvPicPr>
+          <p:cNvPr id="14" name="Image 11" descr="/tmp/claude-0/-home-user-other/d8041478-dfcc-5ca6-9236-09cb61fbd919/scratchpad/img/t12.jpg">    </p:cNvPr>
+          <p:cNvPicPr>
+            <a:picLocks noChangeAspect="1"/>
+          </p:cNvPicPr>
+          <p:nvPr/>
+        </p:nvPicPr>
+        <p:blipFill>
+          <a:blip r:embed="rId12"/>
+          <a:stretch>
+            <a:fillRect/>
+          </a:stretch>
+        </p:blipFill>
+        <p:spPr>
+          <a:xfrm>
+            <a:off x="6629400" y="3584448"/>
+            <a:ext cx="1965960" cy="1105510"/>
+          </a:xfrm>
+          <a:prstGeom prst="rect">
+            <a:avLst/>
+          </a:prstGeom>
+        </p:spPr>
+      </p:pic>
     </p:spTree>
   </p:cSld>
   <p:clrMapOvr>
@@ -4156,7 +6148,7 @@
                 <a:ea typeface="Cambria" pitchFamily="34" charset="-122"/>
                 <a:cs typeface="Cambria" pitchFamily="34" charset="-120"/>
               </a:rPr>
-              <a:t>Límites de uso</a:t>
+              <a:t>Del PRD a la entrega</a:t>
             </a:r>
             <a:endParaRPr lang="en-US" sz="3400" dirty="0"/>
           </a:p>
@@ -4195,7 +6187,7 @@
                 <a:ea typeface="Calibri" pitchFamily="34" charset="-122"/>
                 <a:cs typeface="Calibri" pitchFamily="34" charset="-120"/>
               </a:rPr>
-              <a:t>Consumo de la cuenta durante el proyecto</a:t>
+              <a:t>10 fases; cada una cierra con una auditoría automática antes de avanzar</a:t>
             </a:r>
             <a:endParaRPr lang="en-US" sz="1600" dirty="0"/>
           </a:p>
@@ -4210,7 +6202,7 @@
         <p:spPr>
           <a:xfrm>
             <a:off x="457200" y="1508760"/>
-            <a:ext cx="2560320" cy="3017520"/>
+            <a:ext cx="1499616" cy="1188720"/>
           </a:xfrm>
           <a:prstGeom prst="rect">
             <a:avLst/>
@@ -4228,133 +6220,16 @@
       </p:sp>
       <p:sp>
         <p:nvSpPr>
-          <p:cNvPr id="5" name="Text 3"/>
-          <p:cNvSpPr txBox="1"/>
-          <p:nvPr/>
-        </p:nvSpPr>
-        <p:spPr>
-          <a:xfrm>
-            <a:off x="685800" y="1645920"/>
-            <a:ext cx="2103120" cy="411480"/>
-          </a:xfrm>
-          <a:prstGeom prst="rect">
-            <a:avLst/>
-          </a:prstGeom>
-          <a:noFill/>
-          <a:ln/>
-        </p:spPr>
-        <p:txBody>
-          <a:bodyPr wrap="square" lIns="0" tIns="0" rIns="0" bIns="0" rtlCol="0" anchor="t"/>
-          <a:lstStyle/>
-          <a:p>
-            <a:pPr indent="0" marL="0">
-              <a:buNone/>
-            </a:pPr>
-            <a:r>
-              <a:rPr lang="en-US" sz="1100" b="1" spc="100" kern="0" dirty="0">
-                <a:solidFill>
-                  <a:srgbClr val="A39B90"/>
-                </a:solidFill>
-                <a:latin typeface="Calibri" pitchFamily="34" charset="0"/>
-                <a:ea typeface="Calibri" pitchFamily="34" charset="-122"/>
-                <a:cs typeface="Calibri" pitchFamily="34" charset="-120"/>
-              </a:rPr>
-              <a:t>LÍMITE DE 5 HORAS</a:t>
-            </a:r>
-            <a:endParaRPr lang="en-US" sz="1100" dirty="0"/>
-          </a:p>
-        </p:txBody>
-      </p:sp>
-      <p:sp>
-        <p:nvSpPr>
-          <p:cNvPr id="6" name="Text 4"/>
-          <p:cNvSpPr txBox="1"/>
-          <p:nvPr/>
-        </p:nvSpPr>
-        <p:spPr>
-          <a:xfrm>
-            <a:off x="685800" y="2103120"/>
-            <a:ext cx="2103120" cy="640080"/>
-          </a:xfrm>
-          <a:prstGeom prst="rect">
-            <a:avLst/>
-          </a:prstGeom>
-          <a:noFill/>
-          <a:ln/>
-        </p:spPr>
-        <p:txBody>
-          <a:bodyPr wrap="square" lIns="0" tIns="0" rIns="0" bIns="0" rtlCol="0" anchor="ctr"/>
-          <a:lstStyle/>
-          <a:p>
-            <a:pPr indent="0" marL="0">
-              <a:buNone/>
-            </a:pPr>
-            <a:r>
-              <a:rPr lang="en-US" sz="4000" b="1" dirty="0">
-                <a:solidFill>
-                  <a:srgbClr val="F2EEE8"/>
-                </a:solidFill>
-                <a:latin typeface="Cambria" pitchFamily="34" charset="0"/>
-                <a:ea typeface="Cambria" pitchFamily="34" charset="-122"/>
-                <a:cs typeface="Cambria" pitchFamily="34" charset="-120"/>
-              </a:rPr>
-              <a:t>10 %</a:t>
-            </a:r>
-            <a:pPr indent="0" marL="0">
-              <a:buNone/>
-            </a:pPr>
-            <a:r>
-              <a:rPr lang="en-US" sz="1400" dirty="0">
-                <a:solidFill>
-                  <a:srgbClr val="A39B90"/>
-                </a:solidFill>
-                <a:latin typeface="Cambria" pitchFamily="34" charset="0"/>
-                <a:ea typeface="Cambria" pitchFamily="34" charset="-122"/>
-                <a:cs typeface="Cambria" pitchFamily="34" charset="-120"/>
-              </a:rPr>
-              <a:t>  usado</a:t>
-            </a:r>
-            <a:endParaRPr lang="en-US" sz="4000" dirty="0"/>
-          </a:p>
-        </p:txBody>
-      </p:sp>
-      <p:sp>
-        <p:nvSpPr>
-          <p:cNvPr id="7" name="Shape 5"/>
+          <p:cNvPr id="5" name="Shape 3"/>
           <p:cNvSpPr/>
           <p:nvPr/>
         </p:nvSpPr>
         <p:spPr>
           <a:xfrm>
-            <a:off x="685800" y="2834640"/>
-            <a:ext cx="2103120" cy="128016"/>
-          </a:xfrm>
-          <a:prstGeom prst="rect">
-            <a:avLst/>
-          </a:prstGeom>
-          <a:solidFill>
-            <a:srgbClr val="3A362F"/>
-          </a:solidFill>
-          <a:ln w="12700">
-            <a:solidFill>
-              <a:srgbClr val="3A362F"/>
-            </a:solidFill>
-            <a:prstDash val="solid"/>
-          </a:ln>
-        </p:spPr>
-      </p:sp>
-      <p:sp>
-        <p:nvSpPr>
-          <p:cNvPr id="8" name="Shape 6"/>
-          <p:cNvSpPr/>
-          <p:nvPr/>
-        </p:nvSpPr>
-        <p:spPr>
-          <a:xfrm>
-            <a:off x="685800" y="2834640"/>
-            <a:ext cx="210312" cy="128016"/>
-          </a:xfrm>
-          <a:prstGeom prst="rect">
+            <a:off x="621792" y="1673352"/>
+            <a:ext cx="457200" cy="457200"/>
+          </a:xfrm>
+          <a:prstGeom prst="ellipse">
             <a:avLst/>
           </a:prstGeom>
           <a:solidFill>
@@ -4370,14 +6245,53 @@
       </p:sp>
       <p:sp>
         <p:nvSpPr>
-          <p:cNvPr id="9" name="Text 7"/>
-          <p:cNvSpPr txBox="1"/>
-          <p:nvPr/>
-        </p:nvSpPr>
-        <p:spPr>
-          <a:xfrm>
-            <a:off x="685800" y="3108960"/>
-            <a:ext cx="2103120" cy="1280160"/>
+          <p:cNvPr id="6" name="Text 4"/>
+          <p:cNvSpPr txBox="1"/>
+          <p:nvPr/>
+        </p:nvSpPr>
+        <p:spPr>
+          <a:xfrm>
+            <a:off x="621792" y="1673352"/>
+            <a:ext cx="457200" cy="457200"/>
+          </a:xfrm>
+          <a:prstGeom prst="rect">
+            <a:avLst/>
+          </a:prstGeom>
+          <a:noFill/>
+          <a:ln/>
+        </p:spPr>
+        <p:txBody>
+          <a:bodyPr wrap="square" lIns="0" tIns="0" rIns="0" bIns="0" rtlCol="0" anchor="ctr"/>
+          <a:lstStyle/>
+          <a:p>
+            <a:pPr algn="ctr" indent="0" marL="0">
+              <a:buNone/>
+            </a:pPr>
+            <a:r>
+              <a:rPr lang="en-US" sz="1800" b="1" dirty="0">
+                <a:solidFill>
+                  <a:srgbClr val="12100E"/>
+                </a:solidFill>
+                <a:latin typeface="Cambria" pitchFamily="34" charset="0"/>
+                <a:ea typeface="Cambria" pitchFamily="34" charset="-122"/>
+                <a:cs typeface="Cambria" pitchFamily="34" charset="-120"/>
+              </a:rPr>
+              <a:t>0</a:t>
+            </a:r>
+            <a:endParaRPr lang="en-US" sz="1800" dirty="0"/>
+          </a:p>
+        </p:txBody>
+      </p:sp>
+      <p:sp>
+        <p:nvSpPr>
+          <p:cNvPr id="7" name="Text 5"/>
+          <p:cNvSpPr txBox="1"/>
+          <p:nvPr/>
+        </p:nvSpPr>
+        <p:spPr>
+          <a:xfrm>
+            <a:off x="621792" y="2203704"/>
+            <a:ext cx="1234440" cy="411480"/>
           </a:xfrm>
           <a:prstGeom prst="rect">
             <a:avLst/>
@@ -4390,13 +6304,10 @@
           <a:lstStyle/>
           <a:p>
             <a:pPr indent="0" marL="0">
-              <a:spcAft>
-                <a:spcPts val="400"/>
-              </a:spcAft>
-              <a:buNone/>
-            </a:pPr>
-            <a:r>
-              <a:rPr lang="en-US" sz="1200" b="1" dirty="0">
+              <a:buNone/>
+            </a:pPr>
+            <a:r>
+              <a:rPr lang="en-US" sz="1300" b="1" dirty="0">
                 <a:solidFill>
                   <a:srgbClr val="F2EEE8"/>
                 </a:solidFill>
@@ -4404,39 +6315,22 @@
                 <a:ea typeface="Calibri" pitchFamily="34" charset="-122"/>
                 <a:cs typeface="Calibri" pitchFamily="34" charset="-120"/>
               </a:rPr>
-              <a:t>Se reinicia en 1 h 43 min.</a:t>
-            </a:r>
-            <a:endParaRPr lang="en-US" sz="1200" dirty="0"/>
-          </a:p>
-          <a:p>
-            <a:pPr indent="0" marL="0">
-              <a:buNone/>
-            </a:pPr>
-            <a:r>
-              <a:rPr lang="en-US" sz="1200" dirty="0">
-                <a:solidFill>
-                  <a:srgbClr val="A39B90"/>
-                </a:solidFill>
-                <a:latin typeface="Calibri" pitchFamily="34" charset="0"/>
-                <a:ea typeface="Calibri" pitchFamily="34" charset="-122"/>
-                <a:cs typeface="Calibri" pitchFamily="34" charset="-120"/>
-              </a:rPr>
-              <a:t>Hoy se alcanzó una vez.</a:t>
-            </a:r>
-            <a:endParaRPr lang="en-US" sz="1200" dirty="0"/>
-          </a:p>
-        </p:txBody>
-      </p:sp>
-      <p:sp>
-        <p:nvSpPr>
-          <p:cNvPr id="10" name="Shape 8"/>
+              <a:t>Preparación</a:t>
+            </a:r>
+            <a:endParaRPr lang="en-US" sz="1300" dirty="0"/>
+          </a:p>
+        </p:txBody>
+      </p:sp>
+      <p:sp>
+        <p:nvSpPr>
+          <p:cNvPr id="8" name="Shape 6"/>
           <p:cNvSpPr/>
           <p:nvPr/>
         </p:nvSpPr>
         <p:spPr>
           <a:xfrm>
-            <a:off x="3291840" y="1508760"/>
-            <a:ext cx="2560320" cy="3017520"/>
+            <a:off x="2139696" y="1508760"/>
+            <a:ext cx="1499616" cy="1188720"/>
           </a:xfrm>
           <a:prstGeom prst="rect">
             <a:avLst/>
@@ -4454,14 +6348,78 @@
       </p:sp>
       <p:sp>
         <p:nvSpPr>
+          <p:cNvPr id="9" name="Shape 7"/>
+          <p:cNvSpPr/>
+          <p:nvPr/>
+        </p:nvSpPr>
+        <p:spPr>
+          <a:xfrm>
+            <a:off x="2304288" y="1673352"/>
+            <a:ext cx="457200" cy="457200"/>
+          </a:xfrm>
+          <a:prstGeom prst="ellipse">
+            <a:avLst/>
+          </a:prstGeom>
+          <a:solidFill>
+            <a:srgbClr val="5B9BFF"/>
+          </a:solidFill>
+          <a:ln w="12700">
+            <a:solidFill>
+              <a:srgbClr val="5B9BFF"/>
+            </a:solidFill>
+            <a:prstDash val="solid"/>
+          </a:ln>
+        </p:spPr>
+      </p:sp>
+      <p:sp>
+        <p:nvSpPr>
+          <p:cNvPr id="10" name="Text 8"/>
+          <p:cNvSpPr txBox="1"/>
+          <p:nvPr/>
+        </p:nvSpPr>
+        <p:spPr>
+          <a:xfrm>
+            <a:off x="2304288" y="1673352"/>
+            <a:ext cx="457200" cy="457200"/>
+          </a:xfrm>
+          <a:prstGeom prst="rect">
+            <a:avLst/>
+          </a:prstGeom>
+          <a:noFill/>
+          <a:ln/>
+        </p:spPr>
+        <p:txBody>
+          <a:bodyPr wrap="square" lIns="0" tIns="0" rIns="0" bIns="0" rtlCol="0" anchor="ctr"/>
+          <a:lstStyle/>
+          <a:p>
+            <a:pPr algn="ctr" indent="0" marL="0">
+              <a:buNone/>
+            </a:pPr>
+            <a:r>
+              <a:rPr lang="en-US" sz="1800" b="1" dirty="0">
+                <a:solidFill>
+                  <a:srgbClr val="12100E"/>
+                </a:solidFill>
+                <a:latin typeface="Cambria" pitchFamily="34" charset="0"/>
+                <a:ea typeface="Cambria" pitchFamily="34" charset="-122"/>
+                <a:cs typeface="Cambria" pitchFamily="34" charset="-120"/>
+              </a:rPr>
+              <a:t>1</a:t>
+            </a:r>
+            <a:endParaRPr lang="en-US" sz="1800" dirty="0"/>
+          </a:p>
+        </p:txBody>
+      </p:sp>
+      <p:sp>
+        <p:nvSpPr>
           <p:cNvPr id="11" name="Text 9"/>
           <p:cNvSpPr txBox="1"/>
           <p:nvPr/>
         </p:nvSpPr>
         <p:spPr>
           <a:xfrm>
-            <a:off x="3520440" y="1645920"/>
-            <a:ext cx="2103120" cy="411480"/>
+            <a:off x="2304288" y="2203704"/>
+            <a:ext cx="1234440" cy="411480"/>
           </a:xfrm>
           <a:prstGeom prst="rect">
             <a:avLst/>
@@ -4477,30 +6435,80 @@
               <a:buNone/>
             </a:pPr>
             <a:r>
-              <a:rPr lang="en-US" sz="1100" b="1" spc="100" kern="0" dirty="0">
-                <a:solidFill>
-                  <a:srgbClr val="A39B90"/>
+              <a:rPr lang="en-US" sz="1300" b="1" dirty="0">
+                <a:solidFill>
+                  <a:srgbClr val="F2EEE8"/>
                 </a:solidFill>
                 <a:latin typeface="Calibri" pitchFamily="34" charset="0"/>
                 <a:ea typeface="Calibri" pitchFamily="34" charset="-122"/>
                 <a:cs typeface="Calibri" pitchFamily="34" charset="-120"/>
               </a:rPr>
-              <a:t>LÍMITE SEMANAL · TODOS LOS MODELOS</a:t>
-            </a:r>
-            <a:endParaRPr lang="en-US" sz="1100" dirty="0"/>
-          </a:p>
-        </p:txBody>
-      </p:sp>
-      <p:sp>
-        <p:nvSpPr>
-          <p:cNvPr id="12" name="Text 10"/>
-          <p:cNvSpPr txBox="1"/>
-          <p:nvPr/>
-        </p:nvSpPr>
-        <p:spPr>
-          <a:xfrm>
-            <a:off x="3520440" y="2103120"/>
-            <a:ext cx="2103120" cy="640080"/>
+              <a:t>Blockout</a:t>
+            </a:r>
+            <a:endParaRPr lang="en-US" sz="1300" dirty="0"/>
+          </a:p>
+        </p:txBody>
+      </p:sp>
+      <p:sp>
+        <p:nvSpPr>
+          <p:cNvPr id="12" name="Shape 10"/>
+          <p:cNvSpPr/>
+          <p:nvPr/>
+        </p:nvSpPr>
+        <p:spPr>
+          <a:xfrm>
+            <a:off x="3822192" y="1508760"/>
+            <a:ext cx="1499616" cy="1188720"/>
+          </a:xfrm>
+          <a:prstGeom prst="rect">
+            <a:avLst/>
+          </a:prstGeom>
+          <a:solidFill>
+            <a:srgbClr val="221F1B"/>
+          </a:solidFill>
+          <a:ln w="12700">
+            <a:solidFill>
+              <a:srgbClr val="221F1B"/>
+            </a:solidFill>
+            <a:prstDash val="solid"/>
+          </a:ln>
+        </p:spPr>
+      </p:sp>
+      <p:sp>
+        <p:nvSpPr>
+          <p:cNvPr id="13" name="Shape 11"/>
+          <p:cNvSpPr/>
+          <p:nvPr/>
+        </p:nvSpPr>
+        <p:spPr>
+          <a:xfrm>
+            <a:off x="3986784" y="1673352"/>
+            <a:ext cx="457200" cy="457200"/>
+          </a:xfrm>
+          <a:prstGeom prst="ellipse">
+            <a:avLst/>
+          </a:prstGeom>
+          <a:solidFill>
+            <a:srgbClr val="5B9BFF"/>
+          </a:solidFill>
+          <a:ln w="12700">
+            <a:solidFill>
+              <a:srgbClr val="5B9BFF"/>
+            </a:solidFill>
+            <a:prstDash val="solid"/>
+          </a:ln>
+        </p:spPr>
+      </p:sp>
+      <p:sp>
+        <p:nvSpPr>
+          <p:cNvPr id="14" name="Text 12"/>
+          <p:cNvSpPr txBox="1"/>
+          <p:nvPr/>
+        </p:nvSpPr>
+        <p:spPr>
+          <a:xfrm>
+            <a:off x="3986784" y="1673352"/>
+            <a:ext cx="457200" cy="457200"/>
           </a:xfrm>
           <a:prstGeom prst="rect">
             <a:avLst/>
@@ -4512,58 +6520,211 @@
           <a:bodyPr wrap="square" lIns="0" tIns="0" rIns="0" bIns="0" rtlCol="0" anchor="ctr"/>
           <a:lstStyle/>
           <a:p>
-            <a:pPr indent="0" marL="0">
-              <a:buNone/>
-            </a:pPr>
-            <a:r>
-              <a:rPr lang="en-US" sz="4000" b="1" dirty="0">
-                <a:solidFill>
-                  <a:srgbClr val="F2EEE8"/>
+            <a:pPr algn="ctr" indent="0" marL="0">
+              <a:buNone/>
+            </a:pPr>
+            <a:r>
+              <a:rPr lang="en-US" sz="1800" b="1" dirty="0">
+                <a:solidFill>
+                  <a:srgbClr val="12100E"/>
                 </a:solidFill>
                 <a:latin typeface="Cambria" pitchFamily="34" charset="0"/>
                 <a:ea typeface="Cambria" pitchFamily="34" charset="-122"/>
                 <a:cs typeface="Cambria" pitchFamily="34" charset="-120"/>
               </a:rPr>
-              <a:t>40 %</a:t>
-            </a:r>
-            <a:pPr indent="0" marL="0">
-              <a:buNone/>
-            </a:pPr>
-            <a:r>
-              <a:rPr lang="en-US" sz="1400" dirty="0">
-                <a:solidFill>
-                  <a:srgbClr val="A39B90"/>
+              <a:t>2</a:t>
+            </a:r>
+            <a:endParaRPr lang="en-US" sz="1800" dirty="0"/>
+          </a:p>
+        </p:txBody>
+      </p:sp>
+      <p:sp>
+        <p:nvSpPr>
+          <p:cNvPr id="15" name="Text 13"/>
+          <p:cNvSpPr txBox="1"/>
+          <p:nvPr/>
+        </p:nvSpPr>
+        <p:spPr>
+          <a:xfrm>
+            <a:off x="3986784" y="2203704"/>
+            <a:ext cx="1234440" cy="411480"/>
+          </a:xfrm>
+          <a:prstGeom prst="rect">
+            <a:avLst/>
+          </a:prstGeom>
+          <a:noFill/>
+          <a:ln/>
+        </p:spPr>
+        <p:txBody>
+          <a:bodyPr wrap="square" lIns="0" tIns="0" rIns="0" bIns="0" rtlCol="0" anchor="t"/>
+          <a:lstStyle/>
+          <a:p>
+            <a:pPr indent="0" marL="0">
+              <a:buNone/>
+            </a:pPr>
+            <a:r>
+              <a:rPr lang="en-US" sz="1300" b="1" dirty="0">
+                <a:solidFill>
+                  <a:srgbClr val="F2EEE8"/>
+                </a:solidFill>
+                <a:latin typeface="Calibri" pitchFamily="34" charset="0"/>
+                <a:ea typeface="Calibri" pitchFamily="34" charset="-122"/>
+                <a:cs typeface="Calibri" pitchFamily="34" charset="-120"/>
+              </a:rPr>
+              <a:t>Envolvente</a:t>
+            </a:r>
+            <a:endParaRPr lang="en-US" sz="1300" dirty="0"/>
+          </a:p>
+        </p:txBody>
+      </p:sp>
+      <p:sp>
+        <p:nvSpPr>
+          <p:cNvPr id="16" name="Shape 14"/>
+          <p:cNvSpPr/>
+          <p:nvPr/>
+        </p:nvSpPr>
+        <p:spPr>
+          <a:xfrm>
+            <a:off x="5504688" y="1508760"/>
+            <a:ext cx="1499616" cy="1188720"/>
+          </a:xfrm>
+          <a:prstGeom prst="rect">
+            <a:avLst/>
+          </a:prstGeom>
+          <a:solidFill>
+            <a:srgbClr val="221F1B"/>
+          </a:solidFill>
+          <a:ln w="12700">
+            <a:solidFill>
+              <a:srgbClr val="221F1B"/>
+            </a:solidFill>
+            <a:prstDash val="solid"/>
+          </a:ln>
+        </p:spPr>
+      </p:sp>
+      <p:sp>
+        <p:nvSpPr>
+          <p:cNvPr id="17" name="Shape 15"/>
+          <p:cNvSpPr/>
+          <p:nvPr/>
+        </p:nvSpPr>
+        <p:spPr>
+          <a:xfrm>
+            <a:off x="5669280" y="1673352"/>
+            <a:ext cx="457200" cy="457200"/>
+          </a:xfrm>
+          <a:prstGeom prst="ellipse">
+            <a:avLst/>
+          </a:prstGeom>
+          <a:solidFill>
+            <a:srgbClr val="5B9BFF"/>
+          </a:solidFill>
+          <a:ln w="12700">
+            <a:solidFill>
+              <a:srgbClr val="5B9BFF"/>
+            </a:solidFill>
+            <a:prstDash val="solid"/>
+          </a:ln>
+        </p:spPr>
+      </p:sp>
+      <p:sp>
+        <p:nvSpPr>
+          <p:cNvPr id="18" name="Text 16"/>
+          <p:cNvSpPr txBox="1"/>
+          <p:nvPr/>
+        </p:nvSpPr>
+        <p:spPr>
+          <a:xfrm>
+            <a:off x="5669280" y="1673352"/>
+            <a:ext cx="457200" cy="457200"/>
+          </a:xfrm>
+          <a:prstGeom prst="rect">
+            <a:avLst/>
+          </a:prstGeom>
+          <a:noFill/>
+          <a:ln/>
+        </p:spPr>
+        <p:txBody>
+          <a:bodyPr wrap="square" lIns="0" tIns="0" rIns="0" bIns="0" rtlCol="0" anchor="ctr"/>
+          <a:lstStyle/>
+          <a:p>
+            <a:pPr algn="ctr" indent="0" marL="0">
+              <a:buNone/>
+            </a:pPr>
+            <a:r>
+              <a:rPr lang="en-US" sz="1800" b="1" dirty="0">
+                <a:solidFill>
+                  <a:srgbClr val="12100E"/>
                 </a:solidFill>
                 <a:latin typeface="Cambria" pitchFamily="34" charset="0"/>
                 <a:ea typeface="Cambria" pitchFamily="34" charset="-122"/>
                 <a:cs typeface="Cambria" pitchFamily="34" charset="-120"/>
               </a:rPr>
-              <a:t>  usado</a:t>
-            </a:r>
-            <a:endParaRPr lang="en-US" sz="4000" dirty="0"/>
-          </a:p>
-        </p:txBody>
-      </p:sp>
-      <p:sp>
-        <p:nvSpPr>
-          <p:cNvPr id="13" name="Shape 11"/>
+              <a:t>3</a:t>
+            </a:r>
+            <a:endParaRPr lang="en-US" sz="1800" dirty="0"/>
+          </a:p>
+        </p:txBody>
+      </p:sp>
+      <p:sp>
+        <p:nvSpPr>
+          <p:cNvPr id="19" name="Text 17"/>
+          <p:cNvSpPr txBox="1"/>
+          <p:nvPr/>
+        </p:nvSpPr>
+        <p:spPr>
+          <a:xfrm>
+            <a:off x="5669280" y="2203704"/>
+            <a:ext cx="1234440" cy="411480"/>
+          </a:xfrm>
+          <a:prstGeom prst="rect">
+            <a:avLst/>
+          </a:prstGeom>
+          <a:noFill/>
+          <a:ln/>
+        </p:spPr>
+        <p:txBody>
+          <a:bodyPr wrap="square" lIns="0" tIns="0" rIns="0" bIns="0" rtlCol="0" anchor="t"/>
+          <a:lstStyle/>
+          <a:p>
+            <a:pPr indent="0" marL="0">
+              <a:buNone/>
+            </a:pPr>
+            <a:r>
+              <a:rPr lang="en-US" sz="1300" b="1" dirty="0">
+                <a:solidFill>
+                  <a:srgbClr val="F2EEE8"/>
+                </a:solidFill>
+                <a:latin typeface="Calibri" pitchFamily="34" charset="0"/>
+                <a:ea typeface="Calibri" pitchFamily="34" charset="-122"/>
+                <a:cs typeface="Calibri" pitchFamily="34" charset="-120"/>
+              </a:rPr>
+              <a:t>Escenografía</a:t>
+            </a:r>
+            <a:endParaRPr lang="en-US" sz="1300" dirty="0"/>
+          </a:p>
+        </p:txBody>
+      </p:sp>
+      <p:sp>
+        <p:nvSpPr>
+          <p:cNvPr id="20" name="Shape 18"/>
           <p:cNvSpPr/>
           <p:nvPr/>
         </p:nvSpPr>
         <p:spPr>
           <a:xfrm>
-            <a:off x="3520440" y="2834640"/>
-            <a:ext cx="2103120" cy="128016"/>
+            <a:off x="7187184" y="1508760"/>
+            <a:ext cx="1499616" cy="1188720"/>
           </a:xfrm>
           <a:prstGeom prst="rect">
             <a:avLst/>
           </a:prstGeom>
           <a:solidFill>
-            <a:srgbClr val="3A362F"/>
+            <a:srgbClr val="221F1B"/>
           </a:solidFill>
           <a:ln w="12700">
             <a:solidFill>
-              <a:srgbClr val="3A362F"/>
+              <a:srgbClr val="221F1B"/>
             </a:solidFill>
             <a:prstDash val="solid"/>
           </a:ln>
@@ -4571,16 +6732,656 @@
       </p:sp>
       <p:sp>
         <p:nvSpPr>
-          <p:cNvPr id="14" name="Shape 12"/>
+          <p:cNvPr id="21" name="Shape 19"/>
           <p:cNvSpPr/>
           <p:nvPr/>
         </p:nvSpPr>
         <p:spPr>
           <a:xfrm>
-            <a:off x="3520440" y="2834640"/>
-            <a:ext cx="841248" cy="128016"/>
-          </a:xfrm>
-          <a:prstGeom prst="rect">
+            <a:off x="7351776" y="1673352"/>
+            <a:ext cx="457200" cy="457200"/>
+          </a:xfrm>
+          <a:prstGeom prst="ellipse">
+            <a:avLst/>
+          </a:prstGeom>
+          <a:solidFill>
+            <a:srgbClr val="5B9BFF"/>
+          </a:solidFill>
+          <a:ln w="12700">
+            <a:solidFill>
+              <a:srgbClr val="5B9BFF"/>
+            </a:solidFill>
+            <a:prstDash val="solid"/>
+          </a:ln>
+        </p:spPr>
+      </p:sp>
+      <p:sp>
+        <p:nvSpPr>
+          <p:cNvPr id="22" name="Text 20"/>
+          <p:cNvSpPr txBox="1"/>
+          <p:nvPr/>
+        </p:nvSpPr>
+        <p:spPr>
+          <a:xfrm>
+            <a:off x="7351776" y="1673352"/>
+            <a:ext cx="457200" cy="457200"/>
+          </a:xfrm>
+          <a:prstGeom prst="rect">
+            <a:avLst/>
+          </a:prstGeom>
+          <a:noFill/>
+          <a:ln/>
+        </p:spPr>
+        <p:txBody>
+          <a:bodyPr wrap="square" lIns="0" tIns="0" rIns="0" bIns="0" rtlCol="0" anchor="ctr"/>
+          <a:lstStyle/>
+          <a:p>
+            <a:pPr algn="ctr" indent="0" marL="0">
+              <a:buNone/>
+            </a:pPr>
+            <a:r>
+              <a:rPr lang="en-US" sz="1800" b="1" dirty="0">
+                <a:solidFill>
+                  <a:srgbClr val="12100E"/>
+                </a:solidFill>
+                <a:latin typeface="Cambria" pitchFamily="34" charset="0"/>
+                <a:ea typeface="Cambria" pitchFamily="34" charset="-122"/>
+                <a:cs typeface="Cambria" pitchFamily="34" charset="-120"/>
+              </a:rPr>
+              <a:t>4</a:t>
+            </a:r>
+            <a:endParaRPr lang="en-US" sz="1800" dirty="0"/>
+          </a:p>
+        </p:txBody>
+      </p:sp>
+      <p:sp>
+        <p:nvSpPr>
+          <p:cNvPr id="23" name="Text 21"/>
+          <p:cNvSpPr txBox="1"/>
+          <p:nvPr/>
+        </p:nvSpPr>
+        <p:spPr>
+          <a:xfrm>
+            <a:off x="7351776" y="2203704"/>
+            <a:ext cx="1234440" cy="411480"/>
+          </a:xfrm>
+          <a:prstGeom prst="rect">
+            <a:avLst/>
+          </a:prstGeom>
+          <a:noFill/>
+          <a:ln/>
+        </p:spPr>
+        <p:txBody>
+          <a:bodyPr wrap="square" lIns="0" tIns="0" rIns="0" bIns="0" rtlCol="0" anchor="t"/>
+          <a:lstStyle/>
+          <a:p>
+            <a:pPr indent="0" marL="0">
+              <a:buNone/>
+            </a:pPr>
+            <a:r>
+              <a:rPr lang="en-US" sz="1300" b="1" dirty="0">
+                <a:solidFill>
+                  <a:srgbClr val="F2EEE8"/>
+                </a:solidFill>
+                <a:latin typeface="Calibri" pitchFamily="34" charset="0"/>
+                <a:ea typeface="Calibri" pitchFamily="34" charset="-122"/>
+                <a:cs typeface="Calibri" pitchFamily="34" charset="-120"/>
+              </a:rPr>
+              <a:t>Props</a:t>
+            </a:r>
+            <a:endParaRPr lang="en-US" sz="1300" dirty="0"/>
+          </a:p>
+        </p:txBody>
+      </p:sp>
+      <p:sp>
+        <p:nvSpPr>
+          <p:cNvPr id="24" name="Shape 22"/>
+          <p:cNvSpPr/>
+          <p:nvPr/>
+        </p:nvSpPr>
+        <p:spPr>
+          <a:xfrm>
+            <a:off x="457200" y="2880360"/>
+            <a:ext cx="1499616" cy="1188720"/>
+          </a:xfrm>
+          <a:prstGeom prst="rect">
+            <a:avLst/>
+          </a:prstGeom>
+          <a:solidFill>
+            <a:srgbClr val="221F1B"/>
+          </a:solidFill>
+          <a:ln w="12700">
+            <a:solidFill>
+              <a:srgbClr val="221F1B"/>
+            </a:solidFill>
+            <a:prstDash val="solid"/>
+          </a:ln>
+        </p:spPr>
+      </p:sp>
+      <p:sp>
+        <p:nvSpPr>
+          <p:cNvPr id="25" name="Shape 23"/>
+          <p:cNvSpPr/>
+          <p:nvPr/>
+        </p:nvSpPr>
+        <p:spPr>
+          <a:xfrm>
+            <a:off x="621792" y="3044952"/>
+            <a:ext cx="457200" cy="457200"/>
+          </a:xfrm>
+          <a:prstGeom prst="ellipse">
+            <a:avLst/>
+          </a:prstGeom>
+          <a:solidFill>
+            <a:srgbClr val="5B9BFF"/>
+          </a:solidFill>
+          <a:ln w="12700">
+            <a:solidFill>
+              <a:srgbClr val="5B9BFF"/>
+            </a:solidFill>
+            <a:prstDash val="solid"/>
+          </a:ln>
+        </p:spPr>
+      </p:sp>
+      <p:sp>
+        <p:nvSpPr>
+          <p:cNvPr id="26" name="Text 24"/>
+          <p:cNvSpPr txBox="1"/>
+          <p:nvPr/>
+        </p:nvSpPr>
+        <p:spPr>
+          <a:xfrm>
+            <a:off x="621792" y="3044952"/>
+            <a:ext cx="457200" cy="457200"/>
+          </a:xfrm>
+          <a:prstGeom prst="rect">
+            <a:avLst/>
+          </a:prstGeom>
+          <a:noFill/>
+          <a:ln/>
+        </p:spPr>
+        <p:txBody>
+          <a:bodyPr wrap="square" lIns="0" tIns="0" rIns="0" bIns="0" rtlCol="0" anchor="ctr"/>
+          <a:lstStyle/>
+          <a:p>
+            <a:pPr algn="ctr" indent="0" marL="0">
+              <a:buNone/>
+            </a:pPr>
+            <a:r>
+              <a:rPr lang="en-US" sz="1800" b="1" dirty="0">
+                <a:solidFill>
+                  <a:srgbClr val="12100E"/>
+                </a:solidFill>
+                <a:latin typeface="Cambria" pitchFamily="34" charset="0"/>
+                <a:ea typeface="Cambria" pitchFamily="34" charset="-122"/>
+                <a:cs typeface="Cambria" pitchFamily="34" charset="-120"/>
+              </a:rPr>
+              <a:t>5</a:t>
+            </a:r>
+            <a:endParaRPr lang="en-US" sz="1800" dirty="0"/>
+          </a:p>
+        </p:txBody>
+      </p:sp>
+      <p:sp>
+        <p:nvSpPr>
+          <p:cNvPr id="27" name="Text 25"/>
+          <p:cNvSpPr txBox="1"/>
+          <p:nvPr/>
+        </p:nvSpPr>
+        <p:spPr>
+          <a:xfrm>
+            <a:off x="621792" y="3575304"/>
+            <a:ext cx="1234440" cy="411480"/>
+          </a:xfrm>
+          <a:prstGeom prst="rect">
+            <a:avLst/>
+          </a:prstGeom>
+          <a:noFill/>
+          <a:ln/>
+        </p:spPr>
+        <p:txBody>
+          <a:bodyPr wrap="square" lIns="0" tIns="0" rIns="0" bIns="0" rtlCol="0" anchor="t"/>
+          <a:lstStyle/>
+          <a:p>
+            <a:pPr indent="0" marL="0">
+              <a:buNone/>
+            </a:pPr>
+            <a:r>
+              <a:rPr lang="en-US" sz="1300" b="1" dirty="0">
+                <a:solidFill>
+                  <a:srgbClr val="F2EEE8"/>
+                </a:solidFill>
+                <a:latin typeface="Calibri" pitchFamily="34" charset="0"/>
+                <a:ea typeface="Calibri" pitchFamily="34" charset="-122"/>
+                <a:cs typeface="Calibri" pitchFamily="34" charset="-120"/>
+              </a:rPr>
+              <a:t>Materiales</a:t>
+            </a:r>
+            <a:endParaRPr lang="en-US" sz="1300" dirty="0"/>
+          </a:p>
+        </p:txBody>
+      </p:sp>
+      <p:sp>
+        <p:nvSpPr>
+          <p:cNvPr id="28" name="Shape 26"/>
+          <p:cNvSpPr/>
+          <p:nvPr/>
+        </p:nvSpPr>
+        <p:spPr>
+          <a:xfrm>
+            <a:off x="2139696" y="2880360"/>
+            <a:ext cx="1499616" cy="1188720"/>
+          </a:xfrm>
+          <a:prstGeom prst="rect">
+            <a:avLst/>
+          </a:prstGeom>
+          <a:solidFill>
+            <a:srgbClr val="221F1B"/>
+          </a:solidFill>
+          <a:ln w="12700">
+            <a:solidFill>
+              <a:srgbClr val="221F1B"/>
+            </a:solidFill>
+            <a:prstDash val="solid"/>
+          </a:ln>
+        </p:spPr>
+      </p:sp>
+      <p:sp>
+        <p:nvSpPr>
+          <p:cNvPr id="29" name="Shape 27"/>
+          <p:cNvSpPr/>
+          <p:nvPr/>
+        </p:nvSpPr>
+        <p:spPr>
+          <a:xfrm>
+            <a:off x="2304288" y="3044952"/>
+            <a:ext cx="457200" cy="457200"/>
+          </a:xfrm>
+          <a:prstGeom prst="ellipse">
+            <a:avLst/>
+          </a:prstGeom>
+          <a:solidFill>
+            <a:srgbClr val="5B9BFF"/>
+          </a:solidFill>
+          <a:ln w="12700">
+            <a:solidFill>
+              <a:srgbClr val="5B9BFF"/>
+            </a:solidFill>
+            <a:prstDash val="solid"/>
+          </a:ln>
+        </p:spPr>
+      </p:sp>
+      <p:sp>
+        <p:nvSpPr>
+          <p:cNvPr id="30" name="Text 28"/>
+          <p:cNvSpPr txBox="1"/>
+          <p:nvPr/>
+        </p:nvSpPr>
+        <p:spPr>
+          <a:xfrm>
+            <a:off x="2304288" y="3044952"/>
+            <a:ext cx="457200" cy="457200"/>
+          </a:xfrm>
+          <a:prstGeom prst="rect">
+            <a:avLst/>
+          </a:prstGeom>
+          <a:noFill/>
+          <a:ln/>
+        </p:spPr>
+        <p:txBody>
+          <a:bodyPr wrap="square" lIns="0" tIns="0" rIns="0" bIns="0" rtlCol="0" anchor="ctr"/>
+          <a:lstStyle/>
+          <a:p>
+            <a:pPr algn="ctr" indent="0" marL="0">
+              <a:buNone/>
+            </a:pPr>
+            <a:r>
+              <a:rPr lang="en-US" sz="1800" b="1" dirty="0">
+                <a:solidFill>
+                  <a:srgbClr val="12100E"/>
+                </a:solidFill>
+                <a:latin typeface="Cambria" pitchFamily="34" charset="0"/>
+                <a:ea typeface="Cambria" pitchFamily="34" charset="-122"/>
+                <a:cs typeface="Cambria" pitchFamily="34" charset="-120"/>
+              </a:rPr>
+              <a:t>6</a:t>
+            </a:r>
+            <a:endParaRPr lang="en-US" sz="1800" dirty="0"/>
+          </a:p>
+        </p:txBody>
+      </p:sp>
+      <p:sp>
+        <p:nvSpPr>
+          <p:cNvPr id="31" name="Text 29"/>
+          <p:cNvSpPr txBox="1"/>
+          <p:nvPr/>
+        </p:nvSpPr>
+        <p:spPr>
+          <a:xfrm>
+            <a:off x="2304288" y="3575304"/>
+            <a:ext cx="1234440" cy="411480"/>
+          </a:xfrm>
+          <a:prstGeom prst="rect">
+            <a:avLst/>
+          </a:prstGeom>
+          <a:noFill/>
+          <a:ln/>
+        </p:spPr>
+        <p:txBody>
+          <a:bodyPr wrap="square" lIns="0" tIns="0" rIns="0" bIns="0" rtlCol="0" anchor="t"/>
+          <a:lstStyle/>
+          <a:p>
+            <a:pPr indent="0" marL="0">
+              <a:buNone/>
+            </a:pPr>
+            <a:r>
+              <a:rPr lang="en-US" sz="1300" b="1" dirty="0">
+                <a:solidFill>
+                  <a:srgbClr val="F2EEE8"/>
+                </a:solidFill>
+                <a:latin typeface="Calibri" pitchFamily="34" charset="0"/>
+                <a:ea typeface="Calibri" pitchFamily="34" charset="-122"/>
+                <a:cs typeface="Calibri" pitchFamily="34" charset="-120"/>
+              </a:rPr>
+              <a:t>Iluminación</a:t>
+            </a:r>
+            <a:endParaRPr lang="en-US" sz="1300" dirty="0"/>
+          </a:p>
+        </p:txBody>
+      </p:sp>
+      <p:sp>
+        <p:nvSpPr>
+          <p:cNvPr id="32" name="Shape 30"/>
+          <p:cNvSpPr/>
+          <p:nvPr/>
+        </p:nvSpPr>
+        <p:spPr>
+          <a:xfrm>
+            <a:off x="3822192" y="2880360"/>
+            <a:ext cx="1499616" cy="1188720"/>
+          </a:xfrm>
+          <a:prstGeom prst="rect">
+            <a:avLst/>
+          </a:prstGeom>
+          <a:solidFill>
+            <a:srgbClr val="221F1B"/>
+          </a:solidFill>
+          <a:ln w="12700">
+            <a:solidFill>
+              <a:srgbClr val="221F1B"/>
+            </a:solidFill>
+            <a:prstDash val="solid"/>
+          </a:ln>
+        </p:spPr>
+      </p:sp>
+      <p:sp>
+        <p:nvSpPr>
+          <p:cNvPr id="33" name="Shape 31"/>
+          <p:cNvSpPr/>
+          <p:nvPr/>
+        </p:nvSpPr>
+        <p:spPr>
+          <a:xfrm>
+            <a:off x="3986784" y="3044952"/>
+            <a:ext cx="457200" cy="457200"/>
+          </a:xfrm>
+          <a:prstGeom prst="ellipse">
+            <a:avLst/>
+          </a:prstGeom>
+          <a:solidFill>
+            <a:srgbClr val="5B9BFF"/>
+          </a:solidFill>
+          <a:ln w="12700">
+            <a:solidFill>
+              <a:srgbClr val="5B9BFF"/>
+            </a:solidFill>
+            <a:prstDash val="solid"/>
+          </a:ln>
+        </p:spPr>
+      </p:sp>
+      <p:sp>
+        <p:nvSpPr>
+          <p:cNvPr id="34" name="Text 32"/>
+          <p:cNvSpPr txBox="1"/>
+          <p:nvPr/>
+        </p:nvSpPr>
+        <p:spPr>
+          <a:xfrm>
+            <a:off x="3986784" y="3044952"/>
+            <a:ext cx="457200" cy="457200"/>
+          </a:xfrm>
+          <a:prstGeom prst="rect">
+            <a:avLst/>
+          </a:prstGeom>
+          <a:noFill/>
+          <a:ln/>
+        </p:spPr>
+        <p:txBody>
+          <a:bodyPr wrap="square" lIns="0" tIns="0" rIns="0" bIns="0" rtlCol="0" anchor="ctr"/>
+          <a:lstStyle/>
+          <a:p>
+            <a:pPr algn="ctr" indent="0" marL="0">
+              <a:buNone/>
+            </a:pPr>
+            <a:r>
+              <a:rPr lang="en-US" sz="1800" b="1" dirty="0">
+                <a:solidFill>
+                  <a:srgbClr val="12100E"/>
+                </a:solidFill>
+                <a:latin typeface="Cambria" pitchFamily="34" charset="0"/>
+                <a:ea typeface="Cambria" pitchFamily="34" charset="-122"/>
+                <a:cs typeface="Cambria" pitchFamily="34" charset="-120"/>
+              </a:rPr>
+              <a:t>7</a:t>
+            </a:r>
+            <a:endParaRPr lang="en-US" sz="1800" dirty="0"/>
+          </a:p>
+        </p:txBody>
+      </p:sp>
+      <p:sp>
+        <p:nvSpPr>
+          <p:cNvPr id="35" name="Text 33"/>
+          <p:cNvSpPr txBox="1"/>
+          <p:nvPr/>
+        </p:nvSpPr>
+        <p:spPr>
+          <a:xfrm>
+            <a:off x="3986784" y="3575304"/>
+            <a:ext cx="1234440" cy="411480"/>
+          </a:xfrm>
+          <a:prstGeom prst="rect">
+            <a:avLst/>
+          </a:prstGeom>
+          <a:noFill/>
+          <a:ln/>
+        </p:spPr>
+        <p:txBody>
+          <a:bodyPr wrap="square" lIns="0" tIns="0" rIns="0" bIns="0" rtlCol="0" anchor="t"/>
+          <a:lstStyle/>
+          <a:p>
+            <a:pPr indent="0" marL="0">
+              <a:buNone/>
+            </a:pPr>
+            <a:r>
+              <a:rPr lang="en-US" sz="1300" b="1" dirty="0">
+                <a:solidFill>
+                  <a:srgbClr val="F2EEE8"/>
+                </a:solidFill>
+                <a:latin typeface="Calibri" pitchFamily="34" charset="0"/>
+                <a:ea typeface="Calibri" pitchFamily="34" charset="-122"/>
+                <a:cs typeface="Calibri" pitchFamily="34" charset="-120"/>
+              </a:rPr>
+              <a:t>Cámaras y recorrido</a:t>
+            </a:r>
+            <a:endParaRPr lang="en-US" sz="1300" dirty="0"/>
+          </a:p>
+        </p:txBody>
+      </p:sp>
+      <p:sp>
+        <p:nvSpPr>
+          <p:cNvPr id="36" name="Shape 34"/>
+          <p:cNvSpPr/>
+          <p:nvPr/>
+        </p:nvSpPr>
+        <p:spPr>
+          <a:xfrm>
+            <a:off x="5504688" y="2880360"/>
+            <a:ext cx="1499616" cy="1188720"/>
+          </a:xfrm>
+          <a:prstGeom prst="rect">
+            <a:avLst/>
+          </a:prstGeom>
+          <a:solidFill>
+            <a:srgbClr val="221F1B"/>
+          </a:solidFill>
+          <a:ln w="12700">
+            <a:solidFill>
+              <a:srgbClr val="221F1B"/>
+            </a:solidFill>
+            <a:prstDash val="solid"/>
+          </a:ln>
+        </p:spPr>
+      </p:sp>
+      <p:sp>
+        <p:nvSpPr>
+          <p:cNvPr id="37" name="Shape 35"/>
+          <p:cNvSpPr/>
+          <p:nvPr/>
+        </p:nvSpPr>
+        <p:spPr>
+          <a:xfrm>
+            <a:off x="5669280" y="3044952"/>
+            <a:ext cx="457200" cy="457200"/>
+          </a:xfrm>
+          <a:prstGeom prst="ellipse">
+            <a:avLst/>
+          </a:prstGeom>
+          <a:solidFill>
+            <a:srgbClr val="5B9BFF"/>
+          </a:solidFill>
+          <a:ln w="12700">
+            <a:solidFill>
+              <a:srgbClr val="5B9BFF"/>
+            </a:solidFill>
+            <a:prstDash val="solid"/>
+          </a:ln>
+        </p:spPr>
+      </p:sp>
+      <p:sp>
+        <p:nvSpPr>
+          <p:cNvPr id="38" name="Text 36"/>
+          <p:cNvSpPr txBox="1"/>
+          <p:nvPr/>
+        </p:nvSpPr>
+        <p:spPr>
+          <a:xfrm>
+            <a:off x="5669280" y="3044952"/>
+            <a:ext cx="457200" cy="457200"/>
+          </a:xfrm>
+          <a:prstGeom prst="rect">
+            <a:avLst/>
+          </a:prstGeom>
+          <a:noFill/>
+          <a:ln/>
+        </p:spPr>
+        <p:txBody>
+          <a:bodyPr wrap="square" lIns="0" tIns="0" rIns="0" bIns="0" rtlCol="0" anchor="ctr"/>
+          <a:lstStyle/>
+          <a:p>
+            <a:pPr algn="ctr" indent="0" marL="0">
+              <a:buNone/>
+            </a:pPr>
+            <a:r>
+              <a:rPr lang="en-US" sz="1800" b="1" dirty="0">
+                <a:solidFill>
+                  <a:srgbClr val="12100E"/>
+                </a:solidFill>
+                <a:latin typeface="Cambria" pitchFamily="34" charset="0"/>
+                <a:ea typeface="Cambria" pitchFamily="34" charset="-122"/>
+                <a:cs typeface="Cambria" pitchFamily="34" charset="-120"/>
+              </a:rPr>
+              <a:t>8</a:t>
+            </a:r>
+            <a:endParaRPr lang="en-US" sz="1800" dirty="0"/>
+          </a:p>
+        </p:txBody>
+      </p:sp>
+      <p:sp>
+        <p:nvSpPr>
+          <p:cNvPr id="39" name="Text 37"/>
+          <p:cNvSpPr txBox="1"/>
+          <p:nvPr/>
+        </p:nvSpPr>
+        <p:spPr>
+          <a:xfrm>
+            <a:off x="5669280" y="3575304"/>
+            <a:ext cx="1234440" cy="411480"/>
+          </a:xfrm>
+          <a:prstGeom prst="rect">
+            <a:avLst/>
+          </a:prstGeom>
+          <a:noFill/>
+          <a:ln/>
+        </p:spPr>
+        <p:txBody>
+          <a:bodyPr wrap="square" lIns="0" tIns="0" rIns="0" bIns="0" rtlCol="0" anchor="t"/>
+          <a:lstStyle/>
+          <a:p>
+            <a:pPr indent="0" marL="0">
+              <a:buNone/>
+            </a:pPr>
+            <a:r>
+              <a:rPr lang="en-US" sz="1300" b="1" dirty="0">
+                <a:solidFill>
+                  <a:srgbClr val="F2EEE8"/>
+                </a:solidFill>
+                <a:latin typeface="Calibri" pitchFamily="34" charset="0"/>
+                <a:ea typeface="Calibri" pitchFamily="34" charset="-122"/>
+                <a:cs typeface="Calibri" pitchFamily="34" charset="-120"/>
+              </a:rPr>
+              <a:t>Render final</a:t>
+            </a:r>
+            <a:endParaRPr lang="en-US" sz="1300" dirty="0"/>
+          </a:p>
+        </p:txBody>
+      </p:sp>
+      <p:sp>
+        <p:nvSpPr>
+          <p:cNvPr id="40" name="Shape 38"/>
+          <p:cNvSpPr/>
+          <p:nvPr/>
+        </p:nvSpPr>
+        <p:spPr>
+          <a:xfrm>
+            <a:off x="7187184" y="2880360"/>
+            <a:ext cx="1499616" cy="1188720"/>
+          </a:xfrm>
+          <a:prstGeom prst="rect">
+            <a:avLst/>
+          </a:prstGeom>
+          <a:solidFill>
+            <a:srgbClr val="221F1B"/>
+          </a:solidFill>
+          <a:ln w="12700">
+            <a:solidFill>
+              <a:srgbClr val="221F1B"/>
+            </a:solidFill>
+            <a:prstDash val="solid"/>
+          </a:ln>
+        </p:spPr>
+      </p:sp>
+      <p:sp>
+        <p:nvSpPr>
+          <p:cNvPr id="41" name="Shape 39"/>
+          <p:cNvSpPr/>
+          <p:nvPr/>
+        </p:nvSpPr>
+        <p:spPr>
+          <a:xfrm>
+            <a:off x="7351776" y="3044952"/>
+            <a:ext cx="457200" cy="457200"/>
+          </a:xfrm>
+          <a:prstGeom prst="ellipse">
             <a:avLst/>
           </a:prstGeom>
           <a:solidFill>
@@ -4596,14 +7397,53 @@
       </p:sp>
       <p:sp>
         <p:nvSpPr>
-          <p:cNvPr id="15" name="Text 13"/>
-          <p:cNvSpPr txBox="1"/>
-          <p:nvPr/>
-        </p:nvSpPr>
-        <p:spPr>
-          <a:xfrm>
-            <a:off x="3520440" y="3108960"/>
-            <a:ext cx="2103120" cy="1280160"/>
+          <p:cNvPr id="42" name="Text 40"/>
+          <p:cNvSpPr txBox="1"/>
+          <p:nvPr/>
+        </p:nvSpPr>
+        <p:spPr>
+          <a:xfrm>
+            <a:off x="7351776" y="3044952"/>
+            <a:ext cx="457200" cy="457200"/>
+          </a:xfrm>
+          <a:prstGeom prst="rect">
+            <a:avLst/>
+          </a:prstGeom>
+          <a:noFill/>
+          <a:ln/>
+        </p:spPr>
+        <p:txBody>
+          <a:bodyPr wrap="square" lIns="0" tIns="0" rIns="0" bIns="0" rtlCol="0" anchor="ctr"/>
+          <a:lstStyle/>
+          <a:p>
+            <a:pPr algn="ctr" indent="0" marL="0">
+              <a:buNone/>
+            </a:pPr>
+            <a:r>
+              <a:rPr lang="en-US" sz="1800" b="1" dirty="0">
+                <a:solidFill>
+                  <a:srgbClr val="12100E"/>
+                </a:solidFill>
+                <a:latin typeface="Cambria" pitchFamily="34" charset="0"/>
+                <a:ea typeface="Cambria" pitchFamily="34" charset="-122"/>
+                <a:cs typeface="Cambria" pitchFamily="34" charset="-120"/>
+              </a:rPr>
+              <a:t>9</a:t>
+            </a:r>
+            <a:endParaRPr lang="en-US" sz="1800" dirty="0"/>
+          </a:p>
+        </p:txBody>
+      </p:sp>
+      <p:sp>
+        <p:nvSpPr>
+          <p:cNvPr id="43" name="Text 41"/>
+          <p:cNvSpPr txBox="1"/>
+          <p:nvPr/>
+        </p:nvSpPr>
+        <p:spPr>
+          <a:xfrm>
+            <a:off x="7351776" y="3575304"/>
+            <a:ext cx="1234440" cy="411480"/>
           </a:xfrm>
           <a:prstGeom prst="rect">
             <a:avLst/>
@@ -4616,13 +7456,10 @@
           <a:lstStyle/>
           <a:p>
             <a:pPr indent="0" marL="0">
-              <a:spcAft>
-                <a:spcPts val="400"/>
-              </a:spcAft>
-              <a:buNone/>
-            </a:pPr>
-            <a:r>
-              <a:rPr lang="en-US" sz="1200" b="1" dirty="0">
+              <a:buNone/>
+            </a:pPr>
+            <a:r>
+              <a:rPr lang="en-US" sz="1300" b="1" dirty="0">
                 <a:solidFill>
                   <a:srgbClr val="F2EEE8"/>
                 </a:solidFill>
@@ -4630,16 +7467,38 @@
                 <a:ea typeface="Calibri" pitchFamily="34" charset="-122"/>
                 <a:cs typeface="Calibri" pitchFamily="34" charset="-120"/>
               </a:rPr>
-              <a:t>Se reinicia el 03/10.</a:t>
-            </a:r>
-            <a:endParaRPr lang="en-US" sz="1200" dirty="0"/>
-          </a:p>
-          <a:p>
-            <a:pPr indent="0" marL="0">
-              <a:buNone/>
-            </a:pPr>
-            <a:r>
-              <a:rPr lang="en-US" sz="1200" dirty="0">
+              <a:t>Entrega</a:t>
+            </a:r>
+            <a:endParaRPr lang="en-US" sz="1300" dirty="0"/>
+          </a:p>
+        </p:txBody>
+      </p:sp>
+      <p:sp>
+        <p:nvSpPr>
+          <p:cNvPr id="44" name="Text 42"/>
+          <p:cNvSpPr txBox="1"/>
+          <p:nvPr/>
+        </p:nvSpPr>
+        <p:spPr>
+          <a:xfrm>
+            <a:off x="457200" y="4297680"/>
+            <a:ext cx="8229600" cy="320040"/>
+          </a:xfrm>
+          <a:prstGeom prst="rect">
+            <a:avLst/>
+          </a:prstGeom>
+          <a:noFill/>
+          <a:ln/>
+        </p:spPr>
+        <p:txBody>
+          <a:bodyPr wrap="square" lIns="0" tIns="0" rIns="0" bIns="0" rtlCol="0" anchor="ctr"/>
+          <a:lstStyle/>
+          <a:p>
+            <a:pPr indent="0" marL="0">
+              <a:buNone/>
+            </a:pPr>
+            <a:r>
+              <a:rPr lang="en-US" sz="1400" dirty="0">
                 <a:solidFill>
                   <a:srgbClr val="A39B90"/>
                 </a:solidFill>
@@ -4647,210 +7506,9 @@
                 <a:ea typeface="Calibri" pitchFamily="34" charset="-122"/>
                 <a:cs typeface="Calibri" pitchFamily="34" charset="-120"/>
               </a:rPr>
-              <a:t>No se puede aislar la parte de este proyecto; como empezó el 28/09, probablemente es la mayor parte.</a:t>
-            </a:r>
-            <a:endParaRPr lang="en-US" sz="1200" dirty="0"/>
-          </a:p>
-        </p:txBody>
-      </p:sp>
-      <p:sp>
-        <p:nvSpPr>
-          <p:cNvPr id="16" name="Shape 14"/>
-          <p:cNvSpPr/>
-          <p:nvPr/>
-        </p:nvSpPr>
-        <p:spPr>
-          <a:xfrm>
-            <a:off x="6126480" y="1508760"/>
-            <a:ext cx="2560320" cy="3017520"/>
-          </a:xfrm>
-          <a:prstGeom prst="rect">
-            <a:avLst/>
-          </a:prstGeom>
-          <a:solidFill>
-            <a:srgbClr val="221F1B"/>
-          </a:solidFill>
-          <a:ln w="12700">
-            <a:solidFill>
-              <a:srgbClr val="221F1B"/>
-            </a:solidFill>
-            <a:prstDash val="solid"/>
-          </a:ln>
-        </p:spPr>
-      </p:sp>
-      <p:sp>
-        <p:nvSpPr>
-          <p:cNvPr id="17" name="Text 15"/>
-          <p:cNvSpPr txBox="1"/>
-          <p:nvPr/>
-        </p:nvSpPr>
-        <p:spPr>
-          <a:xfrm>
-            <a:off x="6355080" y="1645920"/>
-            <a:ext cx="2103120" cy="411480"/>
-          </a:xfrm>
-          <a:prstGeom prst="rect">
-            <a:avLst/>
-          </a:prstGeom>
-          <a:noFill/>
-          <a:ln/>
-        </p:spPr>
-        <p:txBody>
-          <a:bodyPr wrap="square" lIns="0" tIns="0" rIns="0" bIns="0" rtlCol="0" anchor="t"/>
-          <a:lstStyle/>
-          <a:p>
-            <a:pPr indent="0" marL="0">
-              <a:buNone/>
-            </a:pPr>
-            <a:r>
-              <a:rPr lang="en-US" sz="1100" b="1" spc="100" kern="0" dirty="0">
-                <a:solidFill>
-                  <a:srgbClr val="A39B90"/>
-                </a:solidFill>
-                <a:latin typeface="Calibri" pitchFamily="34" charset="0"/>
-                <a:ea typeface="Calibri" pitchFamily="34" charset="-122"/>
-                <a:cs typeface="Calibri" pitchFamily="34" charset="-120"/>
-              </a:rPr>
-              <a:t>USO EXTRA</a:t>
-            </a:r>
-            <a:endParaRPr lang="en-US" sz="1100" dirty="0"/>
-          </a:p>
-        </p:txBody>
-      </p:sp>
-      <p:sp>
-        <p:nvSpPr>
-          <p:cNvPr id="18" name="Text 16"/>
-          <p:cNvSpPr txBox="1"/>
-          <p:nvPr/>
-        </p:nvSpPr>
-        <p:spPr>
-          <a:xfrm>
-            <a:off x="6355080" y="2103120"/>
-            <a:ext cx="2103120" cy="640080"/>
-          </a:xfrm>
-          <a:prstGeom prst="rect">
-            <a:avLst/>
-          </a:prstGeom>
-          <a:noFill/>
-          <a:ln/>
-        </p:spPr>
-        <p:txBody>
-          <a:bodyPr wrap="square" lIns="0" tIns="0" rIns="0" bIns="0" rtlCol="0" anchor="ctr"/>
-          <a:lstStyle/>
-          <a:p>
-            <a:pPr indent="0" marL="0">
-              <a:buNone/>
-            </a:pPr>
-            <a:r>
-              <a:rPr lang="en-US" sz="2200" b="1" dirty="0">
-                <a:solidFill>
-                  <a:srgbClr val="F2EEE8"/>
-                </a:solidFill>
-                <a:latin typeface="Cambria" pitchFamily="34" charset="0"/>
-                <a:ea typeface="Cambria" pitchFamily="34" charset="-122"/>
-                <a:cs typeface="Cambria" pitchFamily="34" charset="-120"/>
-              </a:rPr>
-              <a:t>Desactivado</a:t>
-            </a:r>
-            <a:endParaRPr lang="en-US" sz="2200" dirty="0"/>
-          </a:p>
-        </p:txBody>
-      </p:sp>
-      <p:sp>
-        <p:nvSpPr>
-          <p:cNvPr id="19" name="Text 17"/>
-          <p:cNvSpPr txBox="1"/>
-          <p:nvPr/>
-        </p:nvSpPr>
-        <p:spPr>
-          <a:xfrm>
-            <a:off x="6355080" y="2788920"/>
-            <a:ext cx="2103120" cy="365760"/>
-          </a:xfrm>
-          <a:prstGeom prst="rect">
-            <a:avLst/>
-          </a:prstGeom>
-          <a:noFill/>
-          <a:ln/>
-        </p:spPr>
-        <p:txBody>
-          <a:bodyPr wrap="square" lIns="0" tIns="0" rIns="0" bIns="0" rtlCol="0" anchor="ctr"/>
-          <a:lstStyle/>
-          <a:p>
-            <a:pPr indent="0" marL="0">
-              <a:buNone/>
-            </a:pPr>
-            <a:r>
-              <a:rPr lang="en-US" sz="2000" b="1" dirty="0">
-                <a:solidFill>
-                  <a:srgbClr val="E0A84A"/>
-                </a:solidFill>
-                <a:latin typeface="Cambria" pitchFamily="34" charset="0"/>
-                <a:ea typeface="Cambria" pitchFamily="34" charset="-122"/>
-                <a:cs typeface="Cambria" pitchFamily="34" charset="-120"/>
-              </a:rPr>
-              <a:t>43,47 USD</a:t>
-            </a:r>
-            <a:endParaRPr lang="en-US" sz="2000" dirty="0"/>
-          </a:p>
-        </p:txBody>
-      </p:sp>
-      <p:sp>
-        <p:nvSpPr>
-          <p:cNvPr id="20" name="Text 18"/>
-          <p:cNvSpPr txBox="1"/>
-          <p:nvPr/>
-        </p:nvSpPr>
-        <p:spPr>
-          <a:xfrm>
-            <a:off x="6355080" y="3200400"/>
-            <a:ext cx="2103120" cy="1234440"/>
-          </a:xfrm>
-          <a:prstGeom prst="rect">
-            <a:avLst/>
-          </a:prstGeom>
-          <a:noFill/>
-          <a:ln/>
-        </p:spPr>
-        <p:txBody>
-          <a:bodyPr wrap="square" lIns="0" tIns="0" rIns="0" bIns="0" rtlCol="0" anchor="t"/>
-          <a:lstStyle/>
-          <a:p>
-            <a:pPr indent="0" marL="0">
-              <a:spcAft>
-                <a:spcPts val="400"/>
-              </a:spcAft>
-              <a:buNone/>
-            </a:pPr>
-            <a:r>
-              <a:rPr lang="en-US" sz="1200" dirty="0">
-                <a:solidFill>
-                  <a:srgbClr val="F2EEE8"/>
-                </a:solidFill>
-                <a:latin typeface="Calibri" pitchFamily="34" charset="0"/>
-                <a:ea typeface="Calibri" pitchFamily="34" charset="-122"/>
-                <a:cs typeface="Calibri" pitchFamily="34" charset="-120"/>
-              </a:rPr>
-              <a:t>en el contador de la cuenta, con límite mensual de 10 USD.</a:t>
-            </a:r>
-            <a:endParaRPr lang="en-US" sz="1200" dirty="0"/>
-          </a:p>
-          <a:p>
-            <a:pPr indent="0" marL="0">
-              <a:buNone/>
-            </a:pPr>
-            <a:r>
-              <a:rPr lang="en-US" sz="1200" dirty="0">
-                <a:solidFill>
-                  <a:srgbClr val="A39B90"/>
-                </a:solidFill>
-                <a:latin typeface="Calibri" pitchFamily="34" charset="0"/>
-                <a:ea typeface="Calibri" pitchFamily="34" charset="-122"/>
-                <a:cs typeface="Calibri" pitchFamily="34" charset="-120"/>
-              </a:rPr>
-              <a:t>Es un dato de la cuenta; no se sabe a qué sesión corresponde.</a:t>
-            </a:r>
-            <a:endParaRPr lang="en-US" sz="1200" dirty="0"/>
+              <a:t>Ningún paso escribe geometría sin un script versionado y repetible.</a:t>
+            </a:r>
+            <a:endParaRPr lang="en-US" sz="1400" dirty="0"/>
           </a:p>
         </p:txBody>
       </p:sp>
@@ -4919,7 +7577,7 @@
                 <a:ea typeface="Cambria" pitchFamily="34" charset="-122"/>
                 <a:cs typeface="Cambria" pitchFamily="34" charset="-120"/>
               </a:rPr>
-              <a:t>Tokens de la sesión</a:t>
+              <a:t>Hecho desde cero y liviano</a:t>
             </a:r>
             <a:endParaRPr lang="en-US" sz="3400" dirty="0"/>
           </a:p>
@@ -4933,8 +7591,8 @@
         </p:nvSpPr>
         <p:spPr>
           <a:xfrm>
-            <a:off x="457200" y="960120"/>
-            <a:ext cx="8229600" cy="365760"/>
+            <a:off x="457200" y="1097280"/>
+            <a:ext cx="3657600" cy="274320"/>
           </a:xfrm>
           <a:prstGeom prst="rect">
             <a:avLst/>
@@ -4950,17 +7608,17 @@
               <a:buNone/>
             </a:pPr>
             <a:r>
-              <a:rPr lang="en-US" sz="1600" dirty="0">
-                <a:solidFill>
-                  <a:srgbClr val="A39B90"/>
+              <a:rPr lang="en-US" sz="1200" b="1" spc="200" kern="0" dirty="0">
+                <a:solidFill>
+                  <a:srgbClr val="5B9BFF"/>
                 </a:solidFill>
                 <a:latin typeface="Calibri" pitchFamily="34" charset="0"/>
                 <a:ea typeface="Calibri" pitchFamily="34" charset="-122"/>
                 <a:cs typeface="Calibri" pitchFamily="34" charset="-120"/>
               </a:rPr>
-              <a:t>Contados desde la transcripción</a:t>
-            </a:r>
-            <a:endParaRPr lang="en-US" sz="1600" dirty="0"/>
+              <a:t>DESDE CERO</a:t>
+            </a:r>
+            <a:endParaRPr lang="en-US" sz="1200" dirty="0"/>
           </a:p>
         </p:txBody>
       </p:sp>
@@ -4972,8 +7630,8 @@
         </p:nvSpPr>
         <p:spPr>
           <a:xfrm>
-            <a:off x="457200" y="1508760"/>
-            <a:ext cx="3108960" cy="1417320"/>
+            <a:off x="457200" y="1463040"/>
+            <a:ext cx="1920240" cy="1325880"/>
           </a:xfrm>
           <a:prstGeom prst="rect">
             <a:avLst/>
@@ -4991,63 +7649,14 @@
       </p:sp>
       <p:sp>
         <p:nvSpPr>
-          <p:cNvPr id="5" name="Shape 3"/>
-          <p:cNvSpPr/>
-          <p:nvPr/>
-        </p:nvSpPr>
-        <p:spPr>
-          <a:xfrm>
-            <a:off x="685800" y="1737360"/>
-            <a:ext cx="502920" cy="502920"/>
-          </a:xfrm>
-          <a:prstGeom prst="ellipse">
-            <a:avLst/>
-          </a:prstGeom>
-          <a:solidFill>
-            <a:srgbClr val="5B9BFF"/>
-          </a:solidFill>
-          <a:ln w="12700">
-            <a:solidFill>
-              <a:srgbClr val="5B9BFF"/>
-            </a:solidFill>
-            <a:prstDash val="solid"/>
-          </a:ln>
-        </p:spPr>
-      </p:sp>
-      <p:pic>
-        <p:nvPicPr>
-          <p:cNvPr id="6" name="Image 0" descr="preencoded.png">    </p:cNvPr>
-          <p:cNvPicPr>
-            <a:picLocks noChangeAspect="1"/>
-          </p:cNvPicPr>
-          <p:nvPr/>
-        </p:nvPicPr>
-        <p:blipFill>
-          <a:blip r:embed="rId1"/>
-          <a:stretch>
-            <a:fillRect/>
-          </a:stretch>
-        </p:blipFill>
-        <p:spPr>
-          <a:xfrm>
-            <a:off x="821588" y="1873148"/>
-            <a:ext cx="231343" cy="231343"/>
-          </a:xfrm>
-          <a:prstGeom prst="rect">
-            <a:avLst/>
-          </a:prstGeom>
-        </p:spPr>
-      </p:pic>
-      <p:sp>
-        <p:nvSpPr>
-          <p:cNvPr id="7" name="Text 4"/>
-          <p:cNvSpPr txBox="1"/>
-          <p:nvPr/>
-        </p:nvSpPr>
-        <p:spPr>
-          <a:xfrm>
-            <a:off x="685800" y="2286000"/>
-            <a:ext cx="2743200" cy="457200"/>
+          <p:cNvPr id="5" name="Text 3"/>
+          <p:cNvSpPr txBox="1"/>
+          <p:nvPr/>
+        </p:nvSpPr>
+        <p:spPr>
+          <a:xfrm>
+            <a:off x="640080" y="1554480"/>
+            <a:ext cx="1600200" cy="548640"/>
           </a:xfrm>
           <a:prstGeom prst="rect">
             <a:avLst/>
@@ -5063,7 +7672,7 @@
               <a:buNone/>
             </a:pPr>
             <a:r>
-              <a:rPr lang="en-US" sz="3000" b="1" dirty="0">
+              <a:rPr lang="en-US" sz="2800" b="1" dirty="0">
                 <a:solidFill>
                   <a:srgbClr val="F2EEE8"/>
                 </a:solidFill>
@@ -5071,38 +7680,38 @@
                 <a:ea typeface="Cambria" pitchFamily="34" charset="-122"/>
                 <a:cs typeface="Cambria" pitchFamily="34" charset="-120"/>
               </a:rPr>
-              <a:t>≈ 1,3 M</a:t>
-            </a:r>
-            <a:endParaRPr lang="en-US" sz="3000" dirty="0"/>
-          </a:p>
-        </p:txBody>
-      </p:sp>
-      <p:sp>
-        <p:nvSpPr>
-          <p:cNvPr id="8" name="Text 5"/>
-          <p:cNvSpPr txBox="1"/>
-          <p:nvPr/>
-        </p:nvSpPr>
-        <p:spPr>
-          <a:xfrm>
-            <a:off x="1325880" y="1783080"/>
-            <a:ext cx="2103120" cy="411480"/>
-          </a:xfrm>
-          <a:prstGeom prst="rect">
-            <a:avLst/>
-          </a:prstGeom>
-          <a:noFill/>
-          <a:ln/>
-        </p:spPr>
-        <p:txBody>
-          <a:bodyPr wrap="square" lIns="0" tIns="0" rIns="0" bIns="0" rtlCol="0" anchor="ctr"/>
-          <a:lstStyle/>
-          <a:p>
-            <a:pPr indent="0" marL="0">
-              <a:buNone/>
-            </a:pPr>
-            <a:r>
-              <a:rPr lang="en-US" sz="1400" dirty="0">
+              <a:t>0</a:t>
+            </a:r>
+            <a:endParaRPr lang="en-US" sz="2800" dirty="0"/>
+          </a:p>
+        </p:txBody>
+      </p:sp>
+      <p:sp>
+        <p:nvSpPr>
+          <p:cNvPr id="6" name="Text 4"/>
+          <p:cNvSpPr txBox="1"/>
+          <p:nvPr/>
+        </p:nvSpPr>
+        <p:spPr>
+          <a:xfrm>
+            <a:off x="640080" y="2103120"/>
+            <a:ext cx="1600200" cy="621792"/>
+          </a:xfrm>
+          <a:prstGeom prst="rect">
+            <a:avLst/>
+          </a:prstGeom>
+          <a:noFill/>
+          <a:ln/>
+        </p:spPr>
+        <p:txBody>
+          <a:bodyPr wrap="square" lIns="0" tIns="0" rIns="0" bIns="0" rtlCol="0" anchor="t"/>
+          <a:lstStyle/>
+          <a:p>
+            <a:pPr indent="0" marL="0">
+              <a:buNone/>
+            </a:pPr>
+            <a:r>
+              <a:rPr lang="en-US" sz="1200" dirty="0">
                 <a:solidFill>
                   <a:srgbClr val="A39B90"/>
                 </a:solidFill>
@@ -5110,22 +7719,22 @@
                 <a:ea typeface="Calibri" pitchFamily="34" charset="-122"/>
                 <a:cs typeface="Calibri" pitchFamily="34" charset="-120"/>
               </a:rPr>
-              <a:t>Tokens generados</a:t>
-            </a:r>
-            <a:endParaRPr lang="en-US" sz="1400" dirty="0"/>
-          </a:p>
-        </p:txBody>
-      </p:sp>
-      <p:sp>
-        <p:nvSpPr>
-          <p:cNvPr id="9" name="Shape 6"/>
+              <a:t>recursos descargados o importados</a:t>
+            </a:r>
+            <a:endParaRPr lang="en-US" sz="1200" dirty="0"/>
+          </a:p>
+        </p:txBody>
+      </p:sp>
+      <p:sp>
+        <p:nvSpPr>
+          <p:cNvPr id="7" name="Shape 5"/>
           <p:cNvSpPr/>
           <p:nvPr/>
         </p:nvSpPr>
         <p:spPr>
           <a:xfrm>
-            <a:off x="457200" y="3108960"/>
-            <a:ext cx="3108960" cy="1417320"/>
+            <a:off x="2560320" y="1463040"/>
+            <a:ext cx="1920240" cy="1325880"/>
           </a:xfrm>
           <a:prstGeom prst="rect">
             <a:avLst/>
@@ -5143,63 +7752,117 @@
       </p:sp>
       <p:sp>
         <p:nvSpPr>
-          <p:cNvPr id="10" name="Shape 7"/>
+          <p:cNvPr id="8" name="Text 6"/>
+          <p:cNvSpPr txBox="1"/>
+          <p:nvPr/>
+        </p:nvSpPr>
+        <p:spPr>
+          <a:xfrm>
+            <a:off x="2743200" y="1554480"/>
+            <a:ext cx="1600200" cy="548640"/>
+          </a:xfrm>
+          <a:prstGeom prst="rect">
+            <a:avLst/>
+          </a:prstGeom>
+          <a:noFill/>
+          <a:ln/>
+        </p:spPr>
+        <p:txBody>
+          <a:bodyPr wrap="square" lIns="0" tIns="0" rIns="0" bIns="0" rtlCol="0" anchor="ctr"/>
+          <a:lstStyle/>
+          <a:p>
+            <a:pPr indent="0" marL="0">
+              <a:buNone/>
+            </a:pPr>
+            <a:r>
+              <a:rPr lang="en-US" sz="2800" b="1" dirty="0">
+                <a:solidFill>
+                  <a:srgbClr val="F2EEE8"/>
+                </a:solidFill>
+                <a:latin typeface="Cambria" pitchFamily="34" charset="0"/>
+                <a:ea typeface="Cambria" pitchFamily="34" charset="-122"/>
+                <a:cs typeface="Cambria" pitchFamily="34" charset="-120"/>
+              </a:rPr>
+              <a:t>70</a:t>
+            </a:r>
+            <a:endParaRPr lang="en-US" sz="2800" dirty="0"/>
+          </a:p>
+        </p:txBody>
+      </p:sp>
+      <p:sp>
+        <p:nvSpPr>
+          <p:cNvPr id="9" name="Text 7"/>
+          <p:cNvSpPr txBox="1"/>
+          <p:nvPr/>
+        </p:nvSpPr>
+        <p:spPr>
+          <a:xfrm>
+            <a:off x="2743200" y="2103120"/>
+            <a:ext cx="1600200" cy="621792"/>
+          </a:xfrm>
+          <a:prstGeom prst="rect">
+            <a:avLst/>
+          </a:prstGeom>
+          <a:noFill/>
+          <a:ln/>
+        </p:spPr>
+        <p:txBody>
+          <a:bodyPr wrap="square" lIns="0" tIns="0" rIns="0" bIns="0" rtlCol="0" anchor="t"/>
+          <a:lstStyle/>
+          <a:p>
+            <a:pPr indent="0" marL="0">
+              <a:buNone/>
+            </a:pPr>
+            <a:r>
+              <a:rPr lang="en-US" sz="1200" dirty="0">
+                <a:solidFill>
+                  <a:srgbClr val="A39B90"/>
+                </a:solidFill>
+                <a:latin typeface="Calibri" pitchFamily="34" charset="0"/>
+                <a:ea typeface="Calibri" pitchFamily="34" charset="-122"/>
+                <a:cs typeface="Calibri" pitchFamily="34" charset="-120"/>
+              </a:rPr>
+              <a:t>scripts de Python (8 074 líneas)</a:t>
+            </a:r>
+            <a:endParaRPr lang="en-US" sz="1200" dirty="0"/>
+          </a:p>
+        </p:txBody>
+      </p:sp>
+      <p:sp>
+        <p:nvSpPr>
+          <p:cNvPr id="10" name="Shape 8"/>
           <p:cNvSpPr/>
           <p:nvPr/>
         </p:nvSpPr>
         <p:spPr>
           <a:xfrm>
-            <a:off x="685800" y="3337560"/>
-            <a:ext cx="502920" cy="502920"/>
-          </a:xfrm>
-          <a:prstGeom prst="ellipse">
+            <a:off x="4663440" y="1463040"/>
+            <a:ext cx="1920240" cy="1325880"/>
+          </a:xfrm>
+          <a:prstGeom prst="rect">
             <a:avLst/>
           </a:prstGeom>
           <a:solidFill>
-            <a:srgbClr val="4CAF50"/>
+            <a:srgbClr val="221F1B"/>
           </a:solidFill>
           <a:ln w="12700">
             <a:solidFill>
-              <a:srgbClr val="4CAF50"/>
+              <a:srgbClr val="221F1B"/>
             </a:solidFill>
             <a:prstDash val="solid"/>
           </a:ln>
         </p:spPr>
       </p:sp>
-      <p:pic>
-        <p:nvPicPr>
-          <p:cNvPr id="11" name="Image 1" descr="preencoded.png">    </p:cNvPr>
-          <p:cNvPicPr>
-            <a:picLocks noChangeAspect="1"/>
-          </p:cNvPicPr>
-          <p:nvPr/>
-        </p:nvPicPr>
-        <p:blipFill>
-          <a:blip r:embed="rId2"/>
-          <a:stretch>
-            <a:fillRect/>
-          </a:stretch>
-        </p:blipFill>
-        <p:spPr>
-          <a:xfrm>
-            <a:off x="821588" y="3473348"/>
-            <a:ext cx="231343" cy="231343"/>
-          </a:xfrm>
-          <a:prstGeom prst="rect">
-            <a:avLst/>
-          </a:prstGeom>
-        </p:spPr>
-      </p:pic>
-      <p:sp>
-        <p:nvSpPr>
-          <p:cNvPr id="12" name="Text 8"/>
-          <p:cNvSpPr txBox="1"/>
-          <p:nvPr/>
-        </p:nvSpPr>
-        <p:spPr>
-          <a:xfrm>
-            <a:off x="685800" y="3886200"/>
-            <a:ext cx="2743200" cy="457200"/>
+      <p:sp>
+        <p:nvSpPr>
+          <p:cNvPr id="11" name="Text 9"/>
+          <p:cNvSpPr txBox="1"/>
+          <p:nvPr/>
+        </p:nvSpPr>
+        <p:spPr>
+          <a:xfrm>
+            <a:off x="4846320" y="1554480"/>
+            <a:ext cx="1600200" cy="548640"/>
           </a:xfrm>
           <a:prstGeom prst="rect">
             <a:avLst/>
@@ -5215,7 +7878,7 @@
               <a:buNone/>
             </a:pPr>
             <a:r>
-              <a:rPr lang="en-US" sz="3000" b="1" dirty="0">
+              <a:rPr lang="en-US" sz="2800" b="1" dirty="0">
                 <a:solidFill>
                   <a:srgbClr val="F2EEE8"/>
                 </a:solidFill>
@@ -5223,38 +7886,38 @@
                 <a:ea typeface="Cambria" pitchFamily="34" charset="-122"/>
                 <a:cs typeface="Cambria" pitchFamily="34" charset="-120"/>
               </a:rPr>
-              <a:t>2,7 M</a:t>
-            </a:r>
-            <a:endParaRPr lang="en-US" sz="3000" dirty="0"/>
-          </a:p>
-        </p:txBody>
-      </p:sp>
-      <p:sp>
-        <p:nvSpPr>
-          <p:cNvPr id="13" name="Text 9"/>
-          <p:cNvSpPr txBox="1"/>
-          <p:nvPr/>
-        </p:nvSpPr>
-        <p:spPr>
-          <a:xfrm>
-            <a:off x="1325880" y="3383280"/>
-            <a:ext cx="2103120" cy="411480"/>
-          </a:xfrm>
-          <a:prstGeom prst="rect">
-            <a:avLst/>
-          </a:prstGeom>
-          <a:noFill/>
-          <a:ln/>
-        </p:spPr>
-        <p:txBody>
-          <a:bodyPr wrap="square" lIns="0" tIns="0" rIns="0" bIns="0" rtlCol="0" anchor="ctr"/>
-          <a:lstStyle/>
-          <a:p>
-            <a:pPr indent="0" marL="0">
-              <a:buNone/>
-            </a:pPr>
-            <a:r>
-              <a:rPr lang="en-US" sz="1400" dirty="0">
+              <a:t>62</a:t>
+            </a:r>
+            <a:endParaRPr lang="en-US" sz="2800" dirty="0"/>
+          </a:p>
+        </p:txBody>
+      </p:sp>
+      <p:sp>
+        <p:nvSpPr>
+          <p:cNvPr id="12" name="Text 10"/>
+          <p:cNvSpPr txBox="1"/>
+          <p:nvPr/>
+        </p:nvSpPr>
+        <p:spPr>
+          <a:xfrm>
+            <a:off x="4846320" y="2103120"/>
+            <a:ext cx="1600200" cy="621792"/>
+          </a:xfrm>
+          <a:prstGeom prst="rect">
+            <a:avLst/>
+          </a:prstGeom>
+          <a:noFill/>
+          <a:ln/>
+        </p:spPr>
+        <p:txBody>
+          <a:bodyPr wrap="square" lIns="0" tIns="0" rIns="0" bIns="0" rtlCol="0" anchor="t"/>
+          <a:lstStyle/>
+          <a:p>
+            <a:pPr indent="0" marL="0">
+              <a:buNone/>
+            </a:pPr>
+            <a:r>
+              <a:rPr lang="en-US" sz="1200" dirty="0">
                 <a:solidFill>
                   <a:srgbClr val="A39B90"/>
                 </a:solidFill>
@@ -5262,32 +7925,32 @@
                 <a:ea typeface="Calibri" pitchFamily="34" charset="-122"/>
                 <a:cs typeface="Calibri" pitchFamily="34" charset="-120"/>
               </a:rPr>
-              <a:t>Tokens escritos a la caché</a:t>
-            </a:r>
-            <a:endParaRPr lang="en-US" sz="1400" dirty="0"/>
-          </a:p>
-        </p:txBody>
-      </p:sp>
-      <p:sp>
-        <p:nvSpPr>
-          <p:cNvPr id="14" name="Shape 10"/>
+              <a:t>materiales procedurales, sin texturas</a:t>
+            </a:r>
+            <a:endParaRPr lang="en-US" sz="1200" dirty="0"/>
+          </a:p>
+        </p:txBody>
+      </p:sp>
+      <p:sp>
+        <p:nvSpPr>
+          <p:cNvPr id="13" name="Shape 11"/>
           <p:cNvSpPr/>
           <p:nvPr/>
         </p:nvSpPr>
         <p:spPr>
           <a:xfrm>
-            <a:off x="3794760" y="1508760"/>
-            <a:ext cx="4892040" cy="3017520"/>
+            <a:off x="6766560" y="1463040"/>
+            <a:ext cx="1920240" cy="1325880"/>
           </a:xfrm>
           <a:prstGeom prst="rect">
             <a:avLst/>
           </a:prstGeom>
           <a:solidFill>
-            <a:srgbClr val="16263F"/>
+            <a:srgbClr val="221F1B"/>
           </a:solidFill>
           <a:ln w="12700">
             <a:solidFill>
-              <a:srgbClr val="16263F"/>
+              <a:srgbClr val="221F1B"/>
             </a:solidFill>
             <a:prstDash val="solid"/>
           </a:ln>
@@ -5295,63 +7958,156 @@
       </p:sp>
       <p:sp>
         <p:nvSpPr>
-          <p:cNvPr id="15" name="Shape 11"/>
+          <p:cNvPr id="14" name="Text 12"/>
+          <p:cNvSpPr txBox="1"/>
+          <p:nvPr/>
+        </p:nvSpPr>
+        <p:spPr>
+          <a:xfrm>
+            <a:off x="6949440" y="1554480"/>
+            <a:ext cx="1600200" cy="548640"/>
+          </a:xfrm>
+          <a:prstGeom prst="rect">
+            <a:avLst/>
+          </a:prstGeom>
+          <a:noFill/>
+          <a:ln/>
+        </p:spPr>
+        <p:txBody>
+          <a:bodyPr wrap="square" lIns="0" tIns="0" rIns="0" bIns="0" rtlCol="0" anchor="ctr"/>
+          <a:lstStyle/>
+          <a:p>
+            <a:pPr indent="0" marL="0">
+              <a:buNone/>
+            </a:pPr>
+            <a:r>
+              <a:rPr lang="en-US" sz="2800" b="1" dirty="0">
+                <a:solidFill>
+                  <a:srgbClr val="F2EEE8"/>
+                </a:solidFill>
+                <a:latin typeface="Cambria" pitchFamily="34" charset="0"/>
+                <a:ea typeface="Cambria" pitchFamily="34" charset="-122"/>
+                <a:cs typeface="Cambria" pitchFamily="34" charset="-120"/>
+              </a:rPr>
+              <a:t>159</a:t>
+            </a:r>
+            <a:endParaRPr lang="en-US" sz="2800" dirty="0"/>
+          </a:p>
+        </p:txBody>
+      </p:sp>
+      <p:sp>
+        <p:nvSpPr>
+          <p:cNvPr id="15" name="Text 13"/>
+          <p:cNvSpPr txBox="1"/>
+          <p:nvPr/>
+        </p:nvSpPr>
+        <p:spPr>
+          <a:xfrm>
+            <a:off x="6949440" y="2103120"/>
+            <a:ext cx="1600200" cy="621792"/>
+          </a:xfrm>
+          <a:prstGeom prst="rect">
+            <a:avLst/>
+          </a:prstGeom>
+          <a:noFill/>
+          <a:ln/>
+        </p:spPr>
+        <p:txBody>
+          <a:bodyPr wrap="square" lIns="0" tIns="0" rIns="0" bIns="0" rtlCol="0" anchor="t"/>
+          <a:lstStyle/>
+          <a:p>
+            <a:pPr indent="0" marL="0">
+              <a:buNone/>
+            </a:pPr>
+            <a:r>
+              <a:rPr lang="en-US" sz="1200" dirty="0">
+                <a:solidFill>
+                  <a:srgbClr val="A39B90"/>
+                </a:solidFill>
+                <a:latin typeface="Calibri" pitchFamily="34" charset="0"/>
+                <a:ea typeface="Calibri" pitchFamily="34" charset="-122"/>
+                <a:cs typeface="Calibri" pitchFamily="34" charset="-120"/>
+              </a:rPr>
+              <a:t>luces, cada una con su luminaria</a:t>
+            </a:r>
+            <a:endParaRPr lang="en-US" sz="1200" dirty="0"/>
+          </a:p>
+        </p:txBody>
+      </p:sp>
+      <p:sp>
+        <p:nvSpPr>
+          <p:cNvPr id="16" name="Text 14"/>
+          <p:cNvSpPr txBox="1"/>
+          <p:nvPr/>
+        </p:nvSpPr>
+        <p:spPr>
+          <a:xfrm>
+            <a:off x="457200" y="2926080"/>
+            <a:ext cx="3657600" cy="274320"/>
+          </a:xfrm>
+          <a:prstGeom prst="rect">
+            <a:avLst/>
+          </a:prstGeom>
+          <a:noFill/>
+          <a:ln/>
+        </p:spPr>
+        <p:txBody>
+          <a:bodyPr wrap="square" lIns="0" tIns="0" rIns="0" bIns="0" rtlCol="0" anchor="ctr"/>
+          <a:lstStyle/>
+          <a:p>
+            <a:pPr indent="0" marL="0">
+              <a:buNone/>
+            </a:pPr>
+            <a:r>
+              <a:rPr lang="en-US" sz="1200" b="1" spc="200" kern="0" dirty="0">
+                <a:solidFill>
+                  <a:srgbClr val="4CAF50"/>
+                </a:solidFill>
+                <a:latin typeface="Calibri" pitchFamily="34" charset="0"/>
+                <a:ea typeface="Calibri" pitchFamily="34" charset="-122"/>
+                <a:cs typeface="Calibri" pitchFamily="34" charset="-120"/>
+              </a:rPr>
+              <a:t>LIVIANO</a:t>
+            </a:r>
+            <a:endParaRPr lang="en-US" sz="1200" dirty="0"/>
+          </a:p>
+        </p:txBody>
+      </p:sp>
+      <p:sp>
+        <p:nvSpPr>
+          <p:cNvPr id="17" name="Shape 15"/>
           <p:cNvSpPr/>
           <p:nvPr/>
         </p:nvSpPr>
         <p:spPr>
           <a:xfrm>
-            <a:off x="4114800" y="1783080"/>
-            <a:ext cx="640080" cy="640080"/>
-          </a:xfrm>
-          <a:prstGeom prst="ellipse">
+            <a:off x="457200" y="3291840"/>
+            <a:ext cx="1920240" cy="1325880"/>
+          </a:xfrm>
+          <a:prstGeom prst="rect">
             <a:avLst/>
           </a:prstGeom>
           <a:solidFill>
-            <a:srgbClr val="5B9BFF"/>
+            <a:srgbClr val="221F1B"/>
           </a:solidFill>
           <a:ln w="12700">
             <a:solidFill>
-              <a:srgbClr val="5B9BFF"/>
+              <a:srgbClr val="221F1B"/>
             </a:solidFill>
             <a:prstDash val="solid"/>
           </a:ln>
         </p:spPr>
       </p:sp>
-      <p:pic>
-        <p:nvPicPr>
-          <p:cNvPr id="16" name="Image 2" descr="preencoded.png">    </p:cNvPr>
-          <p:cNvPicPr>
-            <a:picLocks noChangeAspect="1"/>
-          </p:cNvPicPr>
-          <p:nvPr/>
-        </p:nvPicPr>
-        <p:blipFill>
-          <a:blip r:embed="rId3"/>
-          <a:stretch>
-            <a:fillRect/>
-          </a:stretch>
-        </p:blipFill>
-        <p:spPr>
-          <a:xfrm>
-            <a:off x="4287622" y="1955902"/>
-            <a:ext cx="294437" cy="294437"/>
-          </a:xfrm>
-          <a:prstGeom prst="rect">
-            <a:avLst/>
-          </a:prstGeom>
-        </p:spPr>
-      </p:pic>
-      <p:sp>
-        <p:nvSpPr>
-          <p:cNvPr id="17" name="Text 12"/>
-          <p:cNvSpPr txBox="1"/>
-          <p:nvPr/>
-        </p:nvSpPr>
-        <p:spPr>
-          <a:xfrm>
-            <a:off x="4114800" y="2606040"/>
-            <a:ext cx="4297680" cy="914400"/>
+      <p:sp>
+        <p:nvSpPr>
+          <p:cNvPr id="18" name="Text 16"/>
+          <p:cNvSpPr txBox="1"/>
+          <p:nvPr/>
+        </p:nvSpPr>
+        <p:spPr>
+          <a:xfrm>
+            <a:off x="640080" y="3383280"/>
+            <a:ext cx="1600200" cy="548640"/>
           </a:xfrm>
           <a:prstGeom prst="rect">
             <a:avLst/>
@@ -5367,7 +8123,7 @@
               <a:buNone/>
             </a:pPr>
             <a:r>
-              <a:rPr lang="en-US" sz="6000" b="1" dirty="0">
+              <a:rPr lang="en-US" sz="2800" b="1" dirty="0">
                 <a:solidFill>
                   <a:srgbClr val="F2EEE8"/>
                 </a:solidFill>
@@ -5375,61 +8131,125 @@
                 <a:ea typeface="Cambria" pitchFamily="34" charset="-122"/>
                 <a:cs typeface="Cambria" pitchFamily="34" charset="-120"/>
               </a:rPr>
-              <a:t>≈ 335 M</a:t>
-            </a:r>
-            <a:endParaRPr lang="en-US" sz="6000" dirty="0"/>
-          </a:p>
-        </p:txBody>
-      </p:sp>
-      <p:sp>
-        <p:nvSpPr>
-          <p:cNvPr id="18" name="Text 13"/>
-          <p:cNvSpPr txBox="1"/>
-          <p:nvPr/>
-        </p:nvSpPr>
-        <p:spPr>
-          <a:xfrm>
-            <a:off x="4114800" y="3520440"/>
-            <a:ext cx="4297680" cy="365760"/>
-          </a:xfrm>
-          <a:prstGeom prst="rect">
-            <a:avLst/>
-          </a:prstGeom>
-          <a:noFill/>
-          <a:ln/>
-        </p:spPr>
-        <p:txBody>
-          <a:bodyPr wrap="square" lIns="0" tIns="0" rIns="0" bIns="0" rtlCol="0" anchor="ctr"/>
-          <a:lstStyle/>
-          <a:p>
-            <a:pPr indent="0" marL="0">
-              <a:buNone/>
-            </a:pPr>
-            <a:r>
-              <a:rPr lang="en-US" sz="1800" b="1" dirty="0">
-                <a:solidFill>
-                  <a:srgbClr val="5B9BFF"/>
+              <a:t>6,3 MB</a:t>
+            </a:r>
+            <a:endParaRPr lang="en-US" sz="2800" dirty="0"/>
+          </a:p>
+        </p:txBody>
+      </p:sp>
+      <p:sp>
+        <p:nvSpPr>
+          <p:cNvPr id="19" name="Text 17"/>
+          <p:cNvSpPr txBox="1"/>
+          <p:nvPr/>
+        </p:nvSpPr>
+        <p:spPr>
+          <a:xfrm>
+            <a:off x="640080" y="3931920"/>
+            <a:ext cx="1600200" cy="621792"/>
+          </a:xfrm>
+          <a:prstGeom prst="rect">
+            <a:avLst/>
+          </a:prstGeom>
+          <a:noFill/>
+          <a:ln/>
+        </p:spPr>
+        <p:txBody>
+          <a:bodyPr wrap="square" lIns="0" tIns="0" rIns="0" bIns="0" rtlCol="0" anchor="t"/>
+          <a:lstStyle/>
+          <a:p>
+            <a:pPr indent="0" marL="0">
+              <a:buNone/>
+            </a:pPr>
+            <a:r>
+              <a:rPr lang="en-US" sz="1200" dirty="0">
+                <a:solidFill>
+                  <a:srgbClr val="A39B90"/>
                 </a:solidFill>
                 <a:latin typeface="Calibri" pitchFamily="34" charset="0"/>
                 <a:ea typeface="Calibri" pitchFamily="34" charset="-122"/>
                 <a:cs typeface="Calibri" pitchFamily="34" charset="-120"/>
               </a:rPr>
-              <a:t>tokens leídos de la caché</a:t>
-            </a:r>
-            <a:endParaRPr lang="en-US" sz="1800" dirty="0"/>
-          </a:p>
-        </p:txBody>
-      </p:sp>
-      <p:sp>
-        <p:nvSpPr>
-          <p:cNvPr id="19" name="Text 14"/>
-          <p:cNvSpPr txBox="1"/>
-          <p:nvPr/>
-        </p:nvSpPr>
-        <p:spPr>
-          <a:xfrm>
-            <a:off x="4114800" y="3886200"/>
-            <a:ext cx="4297680" cy="548640"/>
+              <a:t>el .blend completo, empaquetado</a:t>
+            </a:r>
+            <a:endParaRPr lang="en-US" sz="1200" dirty="0"/>
+          </a:p>
+        </p:txBody>
+      </p:sp>
+      <p:sp>
+        <p:nvSpPr>
+          <p:cNvPr id="20" name="Shape 18"/>
+          <p:cNvSpPr/>
+          <p:nvPr/>
+        </p:nvSpPr>
+        <p:spPr>
+          <a:xfrm>
+            <a:off x="2560320" y="3291840"/>
+            <a:ext cx="1920240" cy="1325880"/>
+          </a:xfrm>
+          <a:prstGeom prst="rect">
+            <a:avLst/>
+          </a:prstGeom>
+          <a:solidFill>
+            <a:srgbClr val="221F1B"/>
+          </a:solidFill>
+          <a:ln w="12700">
+            <a:solidFill>
+              <a:srgbClr val="221F1B"/>
+            </a:solidFill>
+            <a:prstDash val="solid"/>
+          </a:ln>
+        </p:spPr>
+      </p:sp>
+      <p:sp>
+        <p:nvSpPr>
+          <p:cNvPr id="21" name="Text 19"/>
+          <p:cNvSpPr txBox="1"/>
+          <p:nvPr/>
+        </p:nvSpPr>
+        <p:spPr>
+          <a:xfrm>
+            <a:off x="2743200" y="3383280"/>
+            <a:ext cx="1600200" cy="548640"/>
+          </a:xfrm>
+          <a:prstGeom prst="rect">
+            <a:avLst/>
+          </a:prstGeom>
+          <a:noFill/>
+          <a:ln/>
+        </p:spPr>
+        <p:txBody>
+          <a:bodyPr wrap="square" lIns="0" tIns="0" rIns="0" bIns="0" rtlCol="0" anchor="ctr"/>
+          <a:lstStyle/>
+          <a:p>
+            <a:pPr indent="0" marL="0">
+              <a:buNone/>
+            </a:pPr>
+            <a:r>
+              <a:rPr lang="en-US" sz="2800" b="1" dirty="0">
+                <a:solidFill>
+                  <a:srgbClr val="F2EEE8"/>
+                </a:solidFill>
+                <a:latin typeface="Cambria" pitchFamily="34" charset="0"/>
+                <a:ea typeface="Cambria" pitchFamily="34" charset="-122"/>
+                <a:cs typeface="Cambria" pitchFamily="34" charset="-120"/>
+              </a:rPr>
+              <a:t>2 468</a:t>
+            </a:r>
+            <a:endParaRPr lang="en-US" sz="2800" dirty="0"/>
+          </a:p>
+        </p:txBody>
+      </p:sp>
+      <p:sp>
+        <p:nvSpPr>
+          <p:cNvPr id="22" name="Text 20"/>
+          <p:cNvSpPr txBox="1"/>
+          <p:nvPr/>
+        </p:nvSpPr>
+        <p:spPr>
+          <a:xfrm>
+            <a:off x="2743200" y="3931920"/>
+            <a:ext cx="1600200" cy="621792"/>
           </a:xfrm>
           <a:prstGeom prst="rect">
             <a:avLst/>
@@ -5445,17 +8265,223 @@
               <a:buNone/>
             </a:pPr>
             <a:r>
-              <a:rPr lang="en-US" sz="1400" dirty="0">
-                <a:solidFill>
-                  <a:srgbClr val="C9D6EA"/>
+              <a:rPr lang="en-US" sz="1200" dirty="0">
+                <a:solidFill>
+                  <a:srgbClr val="A39B90"/>
                 </a:solidFill>
                 <a:latin typeface="Calibri" pitchFamily="34" charset="0"/>
                 <a:ea typeface="Calibri" pitchFamily="34" charset="-122"/>
                 <a:cs typeface="Calibri" pitchFamily="34" charset="-120"/>
               </a:rPr>
-              <a:t>Son ≈ 99 % de los tokens contados y se cobran mucho más barato.</a:t>
-            </a:r>
-            <a:endParaRPr lang="en-US" sz="1400" dirty="0"/>
+              <a:t>objetos en 8 salas</a:t>
+            </a:r>
+            <a:endParaRPr lang="en-US" sz="1200" dirty="0"/>
+          </a:p>
+        </p:txBody>
+      </p:sp>
+      <p:sp>
+        <p:nvSpPr>
+          <p:cNvPr id="23" name="Shape 21"/>
+          <p:cNvSpPr/>
+          <p:nvPr/>
+        </p:nvSpPr>
+        <p:spPr>
+          <a:xfrm>
+            <a:off x="4663440" y="3291840"/>
+            <a:ext cx="1920240" cy="1325880"/>
+          </a:xfrm>
+          <a:prstGeom prst="rect">
+            <a:avLst/>
+          </a:prstGeom>
+          <a:solidFill>
+            <a:srgbClr val="221F1B"/>
+          </a:solidFill>
+          <a:ln w="12700">
+            <a:solidFill>
+              <a:srgbClr val="221F1B"/>
+            </a:solidFill>
+            <a:prstDash val="solid"/>
+          </a:ln>
+        </p:spPr>
+      </p:sp>
+      <p:sp>
+        <p:nvSpPr>
+          <p:cNvPr id="24" name="Text 22"/>
+          <p:cNvSpPr txBox="1"/>
+          <p:nvPr/>
+        </p:nvSpPr>
+        <p:spPr>
+          <a:xfrm>
+            <a:off x="4846320" y="3383280"/>
+            <a:ext cx="1600200" cy="548640"/>
+          </a:xfrm>
+          <a:prstGeom prst="rect">
+            <a:avLst/>
+          </a:prstGeom>
+          <a:noFill/>
+          <a:ln/>
+        </p:spPr>
+        <p:txBody>
+          <a:bodyPr wrap="square" lIns="0" tIns="0" rIns="0" bIns="0" rtlCol="0" anchor="ctr"/>
+          <a:lstStyle/>
+          <a:p>
+            <a:pPr indent="0" marL="0">
+              <a:buNone/>
+            </a:pPr>
+            <a:r>
+              <a:rPr lang="en-US" sz="2800" b="1" dirty="0">
+                <a:solidFill>
+                  <a:srgbClr val="F2EEE8"/>
+                </a:solidFill>
+                <a:latin typeface="Cambria" pitchFamily="34" charset="0"/>
+                <a:ea typeface="Cambria" pitchFamily="34" charset="-122"/>
+                <a:cs typeface="Cambria" pitchFamily="34" charset="-120"/>
+              </a:rPr>
+              <a:t>453 mil</a:t>
+            </a:r>
+            <a:endParaRPr lang="en-US" sz="2800" dirty="0"/>
+          </a:p>
+        </p:txBody>
+      </p:sp>
+      <p:sp>
+        <p:nvSpPr>
+          <p:cNvPr id="25" name="Text 23"/>
+          <p:cNvSpPr txBox="1"/>
+          <p:nvPr/>
+        </p:nvSpPr>
+        <p:spPr>
+          <a:xfrm>
+            <a:off x="4846320" y="3931920"/>
+            <a:ext cx="1600200" cy="621792"/>
+          </a:xfrm>
+          <a:prstGeom prst="rect">
+            <a:avLst/>
+          </a:prstGeom>
+          <a:noFill/>
+          <a:ln/>
+        </p:spPr>
+        <p:txBody>
+          <a:bodyPr wrap="square" lIns="0" tIns="0" rIns="0" bIns="0" rtlCol="0" anchor="t"/>
+          <a:lstStyle/>
+          <a:p>
+            <a:pPr indent="0" marL="0">
+              <a:buNone/>
+            </a:pPr>
+            <a:r>
+              <a:rPr lang="en-US" sz="1200" dirty="0">
+                <a:solidFill>
+                  <a:srgbClr val="A39B90"/>
+                </a:solidFill>
+                <a:latin typeface="Calibri" pitchFamily="34" charset="0"/>
+                <a:ea typeface="Calibri" pitchFamily="34" charset="-122"/>
+                <a:cs typeface="Calibri" pitchFamily="34" charset="-120"/>
+              </a:rPr>
+              <a:t>polígonos aprox., sin n-gons</a:t>
+            </a:r>
+            <a:endParaRPr lang="en-US" sz="1200" dirty="0"/>
+          </a:p>
+        </p:txBody>
+      </p:sp>
+      <p:sp>
+        <p:nvSpPr>
+          <p:cNvPr id="26" name="Shape 24"/>
+          <p:cNvSpPr/>
+          <p:nvPr/>
+        </p:nvSpPr>
+        <p:spPr>
+          <a:xfrm>
+            <a:off x="6766560" y="3291840"/>
+            <a:ext cx="1920240" cy="1325880"/>
+          </a:xfrm>
+          <a:prstGeom prst="rect">
+            <a:avLst/>
+          </a:prstGeom>
+          <a:solidFill>
+            <a:srgbClr val="221F1B"/>
+          </a:solidFill>
+          <a:ln w="12700">
+            <a:solidFill>
+              <a:srgbClr val="221F1B"/>
+            </a:solidFill>
+            <a:prstDash val="solid"/>
+          </a:ln>
+        </p:spPr>
+      </p:sp>
+      <p:sp>
+        <p:nvSpPr>
+          <p:cNvPr id="27" name="Text 25"/>
+          <p:cNvSpPr txBox="1"/>
+          <p:nvPr/>
+        </p:nvSpPr>
+        <p:spPr>
+          <a:xfrm>
+            <a:off x="6949440" y="3383280"/>
+            <a:ext cx="1600200" cy="548640"/>
+          </a:xfrm>
+          <a:prstGeom prst="rect">
+            <a:avLst/>
+          </a:prstGeom>
+          <a:noFill/>
+          <a:ln/>
+        </p:spPr>
+        <p:txBody>
+          <a:bodyPr wrap="square" lIns="0" tIns="0" rIns="0" bIns="0" rtlCol="0" anchor="ctr"/>
+          <a:lstStyle/>
+          <a:p>
+            <a:pPr indent="0" marL="0">
+              <a:buNone/>
+            </a:pPr>
+            <a:r>
+              <a:rPr lang="en-US" sz="2800" b="1" dirty="0">
+                <a:solidFill>
+                  <a:srgbClr val="F2EEE8"/>
+                </a:solidFill>
+                <a:latin typeface="Cambria" pitchFamily="34" charset="0"/>
+                <a:ea typeface="Cambria" pitchFamily="34" charset="-122"/>
+                <a:cs typeface="Cambria" pitchFamily="34" charset="-120"/>
+              </a:rPr>
+              <a:t>13 %</a:t>
+            </a:r>
+            <a:endParaRPr lang="en-US" sz="2800" dirty="0"/>
+          </a:p>
+        </p:txBody>
+      </p:sp>
+      <p:sp>
+        <p:nvSpPr>
+          <p:cNvPr id="28" name="Text 26"/>
+          <p:cNvSpPr txBox="1"/>
+          <p:nvPr/>
+        </p:nvSpPr>
+        <p:spPr>
+          <a:xfrm>
+            <a:off x="6949440" y="3931920"/>
+            <a:ext cx="1600200" cy="621792"/>
+          </a:xfrm>
+          <a:prstGeom prst="rect">
+            <a:avLst/>
+          </a:prstGeom>
+          <a:noFill/>
+          <a:ln/>
+        </p:spPr>
+        <p:txBody>
+          <a:bodyPr wrap="square" lIns="0" tIns="0" rIns="0" bIns="0" rtlCol="0" anchor="t"/>
+          <a:lstStyle/>
+          <a:p>
+            <a:pPr indent="0" marL="0">
+              <a:buNone/>
+            </a:pPr>
+            <a:r>
+              <a:rPr lang="en-US" sz="1200" dirty="0">
+                <a:solidFill>
+                  <a:srgbClr val="A39B90"/>
+                </a:solidFill>
+                <a:latin typeface="Calibri" pitchFamily="34" charset="0"/>
+                <a:ea typeface="Calibri" pitchFamily="34" charset="-122"/>
+                <a:cs typeface="Calibri" pitchFamily="34" charset="-120"/>
+              </a:rPr>
+              <a:t>del presupuesto de triángulos (1,9 M de 15 M)</a:t>
+            </a:r>
+            <a:endParaRPr lang="en-US" sz="1200" dirty="0"/>
           </a:p>
         </p:txBody>
       </p:sp>
@@ -5491,40 +8517,16 @@
           <a:chExt cx="0" cy="0"/>
         </a:xfrm>
       </p:grpSpPr>
-      <p:pic>
-        <p:nvPicPr>
-          <p:cNvPr id="2" name="Image 0" descr="/tmp/claude-0/-home-user-other/d8041478-dfcc-5ca6-9236-09cb61fbd919/scratchpad/img/bg1.jpg">    </p:cNvPr>
-          <p:cNvPicPr>
-            <a:picLocks noChangeAspect="1"/>
-          </p:cNvPicPr>
-          <p:nvPr/>
-        </p:nvPicPr>
-        <p:blipFill>
-          <a:blip r:embed="rId1"/>
-          <a:stretch>
-            <a:fillRect/>
-          </a:stretch>
-        </p:blipFill>
-        <p:spPr>
-          <a:xfrm>
-            <a:off x="0" y="0"/>
-            <a:ext cx="9144000" cy="5143500"/>
-          </a:xfrm>
-          <a:prstGeom prst="rect">
-            <a:avLst/>
-          </a:prstGeom>
-        </p:spPr>
-      </p:pic>
-      <p:sp>
-        <p:nvSpPr>
-          <p:cNvPr id="3" name="Text 0"/>
-          <p:cNvSpPr txBox="1"/>
-          <p:nvPr/>
-        </p:nvSpPr>
-        <p:spPr>
-          <a:xfrm>
-            <a:off x="548640" y="457200"/>
-            <a:ext cx="5486400" cy="731520"/>
+      <p:sp>
+        <p:nvSpPr>
+          <p:cNvPr id="2" name="Text 0"/>
+          <p:cNvSpPr txBox="1"/>
+          <p:nvPr/>
+        </p:nvSpPr>
+        <p:spPr>
+          <a:xfrm>
+            <a:off x="457200" y="320040"/>
+            <a:ext cx="8229600" cy="640080"/>
           </a:xfrm>
           <a:prstGeom prst="rect">
             <a:avLst/>
@@ -5540,7 +8542,7 @@
               <a:buNone/>
             </a:pPr>
             <a:r>
-              <a:rPr lang="en-US" sz="3800" b="1" dirty="0">
+              <a:rPr lang="en-US" sz="3400" b="1" dirty="0">
                 <a:solidFill>
                   <a:srgbClr val="F2EEE8"/>
                 </a:solidFill>
@@ -5548,22 +8550,86 @@
                 <a:ea typeface="Cambria" pitchFamily="34" charset="-122"/>
                 <a:cs typeface="Cambria" pitchFamily="34" charset="-120"/>
               </a:rPr>
-              <a:t>En resumen</a:t>
-            </a:r>
-            <a:endParaRPr lang="en-US" sz="3800" dirty="0"/>
-          </a:p>
-        </p:txBody>
-      </p:sp>
-      <p:sp>
-        <p:nvSpPr>
-          <p:cNvPr id="4" name="Shape 1"/>
+              <a:t>Render y entregables</a:t>
+            </a:r>
+            <a:endParaRPr lang="en-US" sz="3400" dirty="0"/>
+          </a:p>
+        </p:txBody>
+      </p:sp>
+      <p:sp>
+        <p:nvSpPr>
+          <p:cNvPr id="3" name="Text 1"/>
+          <p:cNvSpPr txBox="1"/>
+          <p:nvPr/>
+        </p:nvSpPr>
+        <p:spPr>
+          <a:xfrm>
+            <a:off x="457200" y="960120"/>
+            <a:ext cx="8229600" cy="365760"/>
+          </a:xfrm>
+          <a:prstGeom prst="rect">
+            <a:avLst/>
+          </a:prstGeom>
+          <a:noFill/>
+          <a:ln/>
+        </p:spPr>
+        <p:txBody>
+          <a:bodyPr wrap="square" lIns="0" tIns="0" rIns="0" bIns="0" rtlCol="0" anchor="ctr"/>
+          <a:lstStyle/>
+          <a:p>
+            <a:pPr indent="0" marL="0">
+              <a:buNone/>
+            </a:pPr>
+            <a:r>
+              <a:rPr lang="en-US" sz="1600" dirty="0">
+                <a:solidFill>
+                  <a:srgbClr val="A39B90"/>
+                </a:solidFill>
+                <a:latin typeface="Calibri" pitchFamily="34" charset="0"/>
+                <a:ea typeface="Calibri" pitchFamily="34" charset="-122"/>
+                <a:cs typeface="Calibri" pitchFamily="34" charset="-120"/>
+              </a:rPr>
+              <a:t>8 tandas de render; las imágenes finales son 100 % Cycles</a:t>
+            </a:r>
+            <a:endParaRPr lang="en-US" sz="1600" dirty="0"/>
+          </a:p>
+        </p:txBody>
+      </p:sp>
+      <p:sp>
+        <p:nvSpPr>
+          <p:cNvPr id="4" name="Shape 2"/>
           <p:cNvSpPr/>
           <p:nvPr/>
         </p:nvSpPr>
         <p:spPr>
           <a:xfrm>
-            <a:off x="548640" y="1554480"/>
-            <a:ext cx="594360" cy="594360"/>
+            <a:off x="457200" y="1508760"/>
+            <a:ext cx="2560320" cy="1965960"/>
+          </a:xfrm>
+          <a:prstGeom prst="rect">
+            <a:avLst/>
+          </a:prstGeom>
+          <a:solidFill>
+            <a:srgbClr val="221F1B"/>
+          </a:solidFill>
+          <a:ln w="12700">
+            <a:solidFill>
+              <a:srgbClr val="221F1B"/>
+            </a:solidFill>
+            <a:prstDash val="solid"/>
+          </a:ln>
+        </p:spPr>
+      </p:sp>
+      <p:sp>
+        <p:nvSpPr>
+          <p:cNvPr id="5" name="Shape 3"/>
+          <p:cNvSpPr/>
+          <p:nvPr/>
+        </p:nvSpPr>
+        <p:spPr>
+          <a:xfrm>
+            <a:off x="685800" y="1691640"/>
+            <a:ext cx="502920" cy="502920"/>
           </a:xfrm>
           <a:prstGeom prst="ellipse">
             <a:avLst/>
@@ -5581,22 +8647,22 @@
       </p:sp>
       <p:pic>
         <p:nvPicPr>
-          <p:cNvPr id="5" name="Image 1" descr="preencoded.png">    </p:cNvPr>
+          <p:cNvPr id="6" name="Image 0" descr="preencoded.png">    </p:cNvPr>
           <p:cNvPicPr>
             <a:picLocks noChangeAspect="1"/>
           </p:cNvPicPr>
           <p:nvPr/>
         </p:nvPicPr>
         <p:blipFill>
-          <a:blip r:embed="rId2"/>
+          <a:blip r:embed="rId1"/>
           <a:stretch>
             <a:fillRect/>
           </a:stretch>
         </p:blipFill>
         <p:spPr>
           <a:xfrm>
-            <a:off x="709117" y="1714957"/>
-            <a:ext cx="273406" cy="273406"/>
+            <a:off x="821588" y="1827428"/>
+            <a:ext cx="231343" cy="231343"/>
           </a:xfrm>
           <a:prstGeom prst="rect">
             <a:avLst/>
@@ -5605,14 +8671,53 @@
       </p:pic>
       <p:sp>
         <p:nvSpPr>
-          <p:cNvPr id="6" name="Text 2"/>
-          <p:cNvSpPr txBox="1"/>
-          <p:nvPr/>
-        </p:nvSpPr>
-        <p:spPr>
-          <a:xfrm>
-            <a:off x="1371600" y="1508760"/>
-            <a:ext cx="4389120" cy="365760"/>
+          <p:cNvPr id="7" name="Text 4"/>
+          <p:cNvSpPr txBox="1"/>
+          <p:nvPr/>
+        </p:nvSpPr>
+        <p:spPr>
+          <a:xfrm>
+            <a:off x="1325880" y="1645920"/>
+            <a:ext cx="1554480" cy="594360"/>
+          </a:xfrm>
+          <a:prstGeom prst="rect">
+            <a:avLst/>
+          </a:prstGeom>
+          <a:noFill/>
+          <a:ln/>
+        </p:spPr>
+        <p:txBody>
+          <a:bodyPr wrap="square" lIns="0" tIns="0" rIns="0" bIns="0" rtlCol="0" anchor="ctr"/>
+          <a:lstStyle/>
+          <a:p>
+            <a:pPr indent="0" marL="0">
+              <a:buNone/>
+            </a:pPr>
+            <a:r>
+              <a:rPr lang="en-US" sz="3800" b="1" dirty="0">
+                <a:solidFill>
+                  <a:srgbClr val="F2EEE8"/>
+                </a:solidFill>
+                <a:latin typeface="Cambria" pitchFamily="34" charset="0"/>
+                <a:ea typeface="Cambria" pitchFamily="34" charset="-122"/>
+                <a:cs typeface="Cambria" pitchFamily="34" charset="-120"/>
+              </a:rPr>
+              <a:t>12</a:t>
+            </a:r>
+            <a:endParaRPr lang="en-US" sz="3800" dirty="0"/>
+          </a:p>
+        </p:txBody>
+      </p:sp>
+      <p:sp>
+        <p:nvSpPr>
+          <p:cNvPr id="8" name="Text 5"/>
+          <p:cNvSpPr txBox="1"/>
+          <p:nvPr/>
+        </p:nvSpPr>
+        <p:spPr>
+          <a:xfrm>
+            <a:off x="685800" y="2377440"/>
+            <a:ext cx="2103120" cy="320040"/>
           </a:xfrm>
           <a:prstGeom prst="rect">
             <a:avLst/>
@@ -5628,7 +8733,7 @@
               <a:buNone/>
             </a:pPr>
             <a:r>
-              <a:rPr lang="en-US" sz="1700" b="1" dirty="0">
+              <a:rPr lang="en-US" sz="1500" b="1" dirty="0">
                 <a:solidFill>
                   <a:srgbClr val="F2EEE8"/>
                 </a:solidFill>
@@ -5636,22 +8741,22 @@
                 <a:ea typeface="Calibri" pitchFamily="34" charset="-122"/>
                 <a:cs typeface="Calibri" pitchFamily="34" charset="-120"/>
               </a:rPr>
-              <a:t>Set completo en ≈ 9 h activas</a:t>
-            </a:r>
-            <a:endParaRPr lang="en-US" sz="1700" dirty="0"/>
-          </a:p>
-        </p:txBody>
-      </p:sp>
-      <p:sp>
-        <p:nvSpPr>
-          <p:cNvPr id="7" name="Text 3"/>
-          <p:cNvSpPr txBox="1"/>
-          <p:nvPr/>
-        </p:nvSpPr>
-        <p:spPr>
-          <a:xfrm>
-            <a:off x="1371600" y="1874520"/>
-            <a:ext cx="4389120" cy="548640"/>
+              <a:t>planos 4K</a:t>
+            </a:r>
+            <a:endParaRPr lang="en-US" sz="1500" dirty="0"/>
+          </a:p>
+        </p:txBody>
+      </p:sp>
+      <p:sp>
+        <p:nvSpPr>
+          <p:cNvPr id="9" name="Text 6"/>
+          <p:cNvSpPr txBox="1"/>
+          <p:nvPr/>
+        </p:nvSpPr>
+        <p:spPr>
+          <a:xfrm>
+            <a:off x="685800" y="2743200"/>
+            <a:ext cx="2103120" cy="822960"/>
           </a:xfrm>
           <a:prstGeom prst="rect">
             <a:avLst/>
@@ -5667,30 +8772,55 @@
               <a:buNone/>
             </a:pPr>
             <a:r>
-              <a:rPr lang="en-US" sz="1300" dirty="0">
-                <a:solidFill>
-                  <a:srgbClr val="D9D4CC"/>
+              <a:rPr lang="en-US" sz="1200" dirty="0">
+                <a:solidFill>
+                  <a:srgbClr val="A39B90"/>
                 </a:solidFill>
                 <a:latin typeface="Calibri" pitchFamily="34" charset="0"/>
                 <a:ea typeface="Calibri" pitchFamily="34" charset="-122"/>
                 <a:cs typeface="Calibri" pitchFamily="34" charset="-120"/>
               </a:rPr>
-              <a:t>Plató, sala de control, redacción, servidores y zonas de descanso.</a:t>
-            </a:r>
-            <a:endParaRPr lang="en-US" sz="1300" dirty="0"/>
-          </a:p>
-        </p:txBody>
-      </p:sp>
-      <p:sp>
-        <p:nvSpPr>
-          <p:cNvPr id="8" name="Shape 4"/>
+              <a:t>3840 × 2160 en Cycles · 1 h 42 min</a:t>
+            </a:r>
+            <a:endParaRPr lang="en-US" sz="1200" dirty="0"/>
+          </a:p>
+        </p:txBody>
+      </p:sp>
+      <p:sp>
+        <p:nvSpPr>
+          <p:cNvPr id="10" name="Shape 7"/>
           <p:cNvSpPr/>
           <p:nvPr/>
         </p:nvSpPr>
         <p:spPr>
           <a:xfrm>
-            <a:off x="548640" y="2606040"/>
-            <a:ext cx="594360" cy="594360"/>
+            <a:off x="3291840" y="1508760"/>
+            <a:ext cx="2560320" cy="1965960"/>
+          </a:xfrm>
+          <a:prstGeom prst="rect">
+            <a:avLst/>
+          </a:prstGeom>
+          <a:solidFill>
+            <a:srgbClr val="221F1B"/>
+          </a:solidFill>
+          <a:ln w="12700">
+            <a:solidFill>
+              <a:srgbClr val="221F1B"/>
+            </a:solidFill>
+            <a:prstDash val="solid"/>
+          </a:ln>
+        </p:spPr>
+      </p:sp>
+      <p:sp>
+        <p:nvSpPr>
+          <p:cNvPr id="11" name="Shape 8"/>
+          <p:cNvSpPr/>
+          <p:nvPr/>
+        </p:nvSpPr>
+        <p:spPr>
+          <a:xfrm>
+            <a:off x="3520440" y="1691640"/>
+            <a:ext cx="502920" cy="502920"/>
           </a:xfrm>
           <a:prstGeom prst="ellipse">
             <a:avLst/>
@@ -5708,22 +8838,22 @@
       </p:sp>
       <p:pic>
         <p:nvPicPr>
-          <p:cNvPr id="9" name="Image 2" descr="preencoded.png">    </p:cNvPr>
+          <p:cNvPr id="12" name="Image 1" descr="preencoded.png">    </p:cNvPr>
           <p:cNvPicPr>
             <a:picLocks noChangeAspect="1"/>
           </p:cNvPicPr>
           <p:nvPr/>
         </p:nvPicPr>
         <p:blipFill>
-          <a:blip r:embed="rId3"/>
+          <a:blip r:embed="rId2"/>
           <a:stretch>
             <a:fillRect/>
           </a:stretch>
         </p:blipFill>
         <p:spPr>
           <a:xfrm>
-            <a:off x="709117" y="2766517"/>
-            <a:ext cx="273406" cy="273406"/>
+            <a:off x="3656228" y="1827428"/>
+            <a:ext cx="231343" cy="231343"/>
           </a:xfrm>
           <a:prstGeom prst="rect">
             <a:avLst/>
@@ -5732,14 +8862,53 @@
       </p:pic>
       <p:sp>
         <p:nvSpPr>
-          <p:cNvPr id="10" name="Text 5"/>
-          <p:cNvSpPr txBox="1"/>
-          <p:nvPr/>
-        </p:nvSpPr>
-        <p:spPr>
-          <a:xfrm>
-            <a:off x="1371600" y="2560320"/>
-            <a:ext cx="4389120" cy="365760"/>
+          <p:cNvPr id="13" name="Text 9"/>
+          <p:cNvSpPr txBox="1"/>
+          <p:nvPr/>
+        </p:nvSpPr>
+        <p:spPr>
+          <a:xfrm>
+            <a:off x="4160520" y="1645920"/>
+            <a:ext cx="1554480" cy="594360"/>
+          </a:xfrm>
+          <a:prstGeom prst="rect">
+            <a:avLst/>
+          </a:prstGeom>
+          <a:noFill/>
+          <a:ln/>
+        </p:spPr>
+        <p:txBody>
+          <a:bodyPr wrap="square" lIns="0" tIns="0" rIns="0" bIns="0" rtlCol="0" anchor="ctr"/>
+          <a:lstStyle/>
+          <a:p>
+            <a:pPr indent="0" marL="0">
+              <a:buNone/>
+            </a:pPr>
+            <a:r>
+              <a:rPr lang="en-US" sz="3800" b="1" dirty="0">
+                <a:solidFill>
+                  <a:srgbClr val="F2EEE8"/>
+                </a:solidFill>
+                <a:latin typeface="Cambria" pitchFamily="34" charset="0"/>
+                <a:ea typeface="Cambria" pitchFamily="34" charset="-122"/>
+                <a:cs typeface="Cambria" pitchFamily="34" charset="-120"/>
+              </a:rPr>
+              <a:t>90 s</a:t>
+            </a:r>
+            <a:endParaRPr lang="en-US" sz="3800" dirty="0"/>
+          </a:p>
+        </p:txBody>
+      </p:sp>
+      <p:sp>
+        <p:nvSpPr>
+          <p:cNvPr id="14" name="Text 10"/>
+          <p:cNvSpPr txBox="1"/>
+          <p:nvPr/>
+        </p:nvSpPr>
+        <p:spPr>
+          <a:xfrm>
+            <a:off x="3520440" y="2377440"/>
+            <a:ext cx="2103120" cy="320040"/>
           </a:xfrm>
           <a:prstGeom prst="rect">
             <a:avLst/>
@@ -5755,7 +8924,7 @@
               <a:buNone/>
             </a:pPr>
             <a:r>
-              <a:rPr lang="en-US" sz="1700" b="1" dirty="0">
+              <a:rPr lang="en-US" sz="1500" b="1" dirty="0">
                 <a:solidFill>
                   <a:srgbClr val="F2EEE8"/>
                 </a:solidFill>
@@ -5763,22 +8932,22 @@
                 <a:ea typeface="Calibri" pitchFamily="34" charset="-122"/>
                 <a:cs typeface="Calibri" pitchFamily="34" charset="-120"/>
               </a:rPr>
-              <a:t>Los renders pesaron más</a:t>
-            </a:r>
-            <a:endParaRPr lang="en-US" sz="1700" dirty="0"/>
-          </a:p>
-        </p:txBody>
-      </p:sp>
-      <p:sp>
-        <p:nvSpPr>
-          <p:cNvPr id="11" name="Text 6"/>
-          <p:cNvSpPr txBox="1"/>
-          <p:nvPr/>
-        </p:nvSpPr>
-        <p:spPr>
-          <a:xfrm>
-            <a:off x="1371600" y="2926080"/>
-            <a:ext cx="4389120" cy="548640"/>
+              <a:t>recorrido en vídeo</a:t>
+            </a:r>
+            <a:endParaRPr lang="en-US" sz="1500" dirty="0"/>
+          </a:p>
+        </p:txBody>
+      </p:sp>
+      <p:sp>
+        <p:nvSpPr>
+          <p:cNvPr id="15" name="Text 11"/>
+          <p:cNvSpPr txBox="1"/>
+          <p:nvPr/>
+        </p:nvSpPr>
+        <p:spPr>
+          <a:xfrm>
+            <a:off x="3520440" y="2743200"/>
+            <a:ext cx="2103120" cy="822960"/>
           </a:xfrm>
           <a:prstGeom prst="rect">
             <a:avLst/>
@@ -5794,30 +8963,55 @@
               <a:buNone/>
             </a:pPr>
             <a:r>
-              <a:rPr lang="en-US" sz="1300" dirty="0">
-                <a:solidFill>
-                  <a:srgbClr val="D9D4CC"/>
+              <a:rPr lang="en-US" sz="1200" dirty="0">
+                <a:solidFill>
+                  <a:srgbClr val="A39B90"/>
                 </a:solidFill>
                 <a:latin typeface="Calibri" pitchFamily="34" charset="0"/>
                 <a:ea typeface="Calibri" pitchFamily="34" charset="-122"/>
                 <a:cs typeface="Calibri" pitchFamily="34" charset="-120"/>
               </a:rPr>
-              <a:t>≈ 14–15 h de render, frente a ≈ 9 h de trabajo activo, dentro de 50 h de reloj.</a:t>
-            </a:r>
-            <a:endParaRPr lang="en-US" sz="1300" dirty="0"/>
-          </a:p>
-        </p:txBody>
-      </p:sp>
-      <p:sp>
-        <p:nvSpPr>
-          <p:cNvPr id="12" name="Shape 7"/>
+              <a:t>MP4 a 1080p · 5 h 9 min</a:t>
+            </a:r>
+            <a:endParaRPr lang="en-US" sz="1200" dirty="0"/>
+          </a:p>
+        </p:txBody>
+      </p:sp>
+      <p:sp>
+        <p:nvSpPr>
+          <p:cNvPr id="16" name="Shape 12"/>
           <p:cNvSpPr/>
           <p:nvPr/>
         </p:nvSpPr>
         <p:spPr>
           <a:xfrm>
-            <a:off x="548640" y="3657600"/>
-            <a:ext cx="594360" cy="594360"/>
+            <a:off x="6126480" y="1508760"/>
+            <a:ext cx="2560320" cy="1965960"/>
+          </a:xfrm>
+          <a:prstGeom prst="rect">
+            <a:avLst/>
+          </a:prstGeom>
+          <a:solidFill>
+            <a:srgbClr val="221F1B"/>
+          </a:solidFill>
+          <a:ln w="12700">
+            <a:solidFill>
+              <a:srgbClr val="221F1B"/>
+            </a:solidFill>
+            <a:prstDash val="solid"/>
+          </a:ln>
+        </p:spPr>
+      </p:sp>
+      <p:sp>
+        <p:nvSpPr>
+          <p:cNvPr id="17" name="Shape 13"/>
+          <p:cNvSpPr/>
+          <p:nvPr/>
+        </p:nvSpPr>
+        <p:spPr>
+          <a:xfrm>
+            <a:off x="6355080" y="1691640"/>
+            <a:ext cx="502920" cy="502920"/>
           </a:xfrm>
           <a:prstGeom prst="ellipse">
             <a:avLst/>
@@ -5835,7 +9029,198 @@
       </p:sp>
       <p:pic>
         <p:nvPicPr>
-          <p:cNvPr id="13" name="Image 3" descr="preencoded.png">    </p:cNvPr>
+          <p:cNvPr id="18" name="Image 2" descr="preencoded.png">    </p:cNvPr>
+          <p:cNvPicPr>
+            <a:picLocks noChangeAspect="1"/>
+          </p:cNvPicPr>
+          <p:nvPr/>
+        </p:nvPicPr>
+        <p:blipFill>
+          <a:blip r:embed="rId3"/>
+          <a:stretch>
+            <a:fillRect/>
+          </a:stretch>
+        </p:blipFill>
+        <p:spPr>
+          <a:xfrm>
+            <a:off x="6490868" y="1827428"/>
+            <a:ext cx="231343" cy="231343"/>
+          </a:xfrm>
+          <a:prstGeom prst="rect">
+            <a:avLst/>
+          </a:prstGeom>
+        </p:spPr>
+      </p:pic>
+      <p:sp>
+        <p:nvSpPr>
+          <p:cNvPr id="19" name="Text 14"/>
+          <p:cNvSpPr txBox="1"/>
+          <p:nvPr/>
+        </p:nvSpPr>
+        <p:spPr>
+          <a:xfrm>
+            <a:off x="6995160" y="1645920"/>
+            <a:ext cx="1554480" cy="594360"/>
+          </a:xfrm>
+          <a:prstGeom prst="rect">
+            <a:avLst/>
+          </a:prstGeom>
+          <a:noFill/>
+          <a:ln/>
+        </p:spPr>
+        <p:txBody>
+          <a:bodyPr wrap="square" lIns="0" tIns="0" rIns="0" bIns="0" rtlCol="0" anchor="ctr"/>
+          <a:lstStyle/>
+          <a:p>
+            <a:pPr indent="0" marL="0">
+              <a:buNone/>
+            </a:pPr>
+            <a:r>
+              <a:rPr lang="en-US" sz="3800" b="1" dirty="0">
+                <a:solidFill>
+                  <a:srgbClr val="F2EEE8"/>
+                </a:solidFill>
+                <a:latin typeface="Cambria" pitchFamily="34" charset="0"/>
+                <a:ea typeface="Cambria" pitchFamily="34" charset="-122"/>
+                <a:cs typeface="Cambria" pitchFamily="34" charset="-120"/>
+              </a:rPr>
+              <a:t>8</a:t>
+            </a:r>
+            <a:endParaRPr lang="en-US" sz="3800" dirty="0"/>
+          </a:p>
+        </p:txBody>
+      </p:sp>
+      <p:sp>
+        <p:nvSpPr>
+          <p:cNvPr id="20" name="Text 15"/>
+          <p:cNvSpPr txBox="1"/>
+          <p:nvPr/>
+        </p:nvSpPr>
+        <p:spPr>
+          <a:xfrm>
+            <a:off x="6355080" y="2377440"/>
+            <a:ext cx="2103120" cy="320040"/>
+          </a:xfrm>
+          <a:prstGeom prst="rect">
+            <a:avLst/>
+          </a:prstGeom>
+          <a:noFill/>
+          <a:ln/>
+        </p:spPr>
+        <p:txBody>
+          <a:bodyPr wrap="square" lIns="0" tIns="0" rIns="0" bIns="0" rtlCol="0" anchor="t"/>
+          <a:lstStyle/>
+          <a:p>
+            <a:pPr indent="0" marL="0">
+              <a:buNone/>
+            </a:pPr>
+            <a:r>
+              <a:rPr lang="en-US" sz="1500" b="1" dirty="0">
+                <a:solidFill>
+                  <a:srgbClr val="F2EEE8"/>
+                </a:solidFill>
+                <a:latin typeface="Calibri" pitchFamily="34" charset="0"/>
+                <a:ea typeface="Calibri" pitchFamily="34" charset="-122"/>
+                <a:cs typeface="Calibri" pitchFamily="34" charset="-120"/>
+              </a:rPr>
+              <a:t>tandas de render</a:t>
+            </a:r>
+            <a:endParaRPr lang="en-US" sz="1500" dirty="0"/>
+          </a:p>
+        </p:txBody>
+      </p:sp>
+      <p:sp>
+        <p:nvSpPr>
+          <p:cNvPr id="21" name="Text 16"/>
+          <p:cNvSpPr txBox="1"/>
+          <p:nvPr/>
+        </p:nvSpPr>
+        <p:spPr>
+          <a:xfrm>
+            <a:off x="6355080" y="2743200"/>
+            <a:ext cx="2103120" cy="822960"/>
+          </a:xfrm>
+          <a:prstGeom prst="rect">
+            <a:avLst/>
+          </a:prstGeom>
+          <a:noFill/>
+          <a:ln/>
+        </p:spPr>
+        <p:txBody>
+          <a:bodyPr wrap="square" lIns="0" tIns="0" rIns="0" bIns="0" rtlCol="0" anchor="t"/>
+          <a:lstStyle/>
+          <a:p>
+            <a:pPr indent="0" marL="0">
+              <a:buNone/>
+            </a:pPr>
+            <a:r>
+              <a:rPr lang="en-US" sz="1200" dirty="0">
+                <a:solidFill>
+                  <a:srgbClr val="A39B90"/>
+                </a:solidFill>
+                <a:latin typeface="Calibri" pitchFamily="34" charset="0"/>
+                <a:ea typeface="Calibri" pitchFamily="34" charset="-122"/>
+                <a:cs typeface="Calibri" pitchFamily="34" charset="-120"/>
+              </a:rPr>
+              <a:t>≈ 340 renders de control; EEVEE solo en borradores</a:t>
+            </a:r>
+            <a:endParaRPr lang="en-US" sz="1200" dirty="0"/>
+          </a:p>
+        </p:txBody>
+      </p:sp>
+      <p:sp>
+        <p:nvSpPr>
+          <p:cNvPr id="22" name="Shape 17"/>
+          <p:cNvSpPr/>
+          <p:nvPr/>
+        </p:nvSpPr>
+        <p:spPr>
+          <a:xfrm>
+            <a:off x="457200" y="3703320"/>
+            <a:ext cx="8229600" cy="777240"/>
+          </a:xfrm>
+          <a:prstGeom prst="rect">
+            <a:avLst/>
+          </a:prstGeom>
+          <a:solidFill>
+            <a:srgbClr val="221F1B"/>
+          </a:solidFill>
+          <a:ln w="12700">
+            <a:solidFill>
+              <a:srgbClr val="221F1B"/>
+            </a:solidFill>
+            <a:prstDash val="solid"/>
+          </a:ln>
+        </p:spPr>
+      </p:sp>
+      <p:sp>
+        <p:nvSpPr>
+          <p:cNvPr id="23" name="Shape 18"/>
+          <p:cNvSpPr/>
+          <p:nvPr/>
+        </p:nvSpPr>
+        <p:spPr>
+          <a:xfrm>
+            <a:off x="640080" y="3863340"/>
+            <a:ext cx="457200" cy="457200"/>
+          </a:xfrm>
+          <a:prstGeom prst="ellipse">
+            <a:avLst/>
+          </a:prstGeom>
+          <a:solidFill>
+            <a:srgbClr val="E0A84A"/>
+          </a:solidFill>
+          <a:ln w="12700">
+            <a:solidFill>
+              <a:srgbClr val="E0A84A"/>
+            </a:solidFill>
+            <a:prstDash val="solid"/>
+          </a:ln>
+        </p:spPr>
+      </p:sp>
+      <p:pic>
+        <p:nvPicPr>
+          <p:cNvPr id="24" name="Image 3" descr="preencoded.png">    </p:cNvPr>
           <p:cNvPicPr>
             <a:picLocks noChangeAspect="1"/>
           </p:cNvPicPr>
@@ -5849,8 +9234,8 @@
         </p:blipFill>
         <p:spPr>
           <a:xfrm>
-            <a:off x="709117" y="3818077"/>
-            <a:ext cx="273406" cy="273406"/>
+            <a:off x="763524" y="3986784"/>
+            <a:ext cx="210312" cy="210312"/>
           </a:xfrm>
           <a:prstGeom prst="rect">
             <a:avLst/>
@@ -5859,79 +9244,895 @@
       </p:pic>
       <p:sp>
         <p:nvSpPr>
-          <p:cNvPr id="14" name="Text 8"/>
-          <p:cNvSpPr txBox="1"/>
-          <p:nvPr/>
-        </p:nvSpPr>
-        <p:spPr>
-          <a:xfrm>
-            <a:off x="1371600" y="3611880"/>
-            <a:ext cx="4389120" cy="365760"/>
-          </a:xfrm>
-          <a:prstGeom prst="rect">
-            <a:avLst/>
-          </a:prstGeom>
-          <a:noFill/>
-          <a:ln/>
-        </p:spPr>
-        <p:txBody>
-          <a:bodyPr wrap="square" lIns="0" tIns="0" rIns="0" bIns="0" rtlCol="0" anchor="t"/>
-          <a:lstStyle/>
-          <a:p>
-            <a:pPr indent="0" marL="0">
-              <a:buNone/>
-            </a:pPr>
-            <a:r>
-              <a:rPr lang="en-US" sz="1700" b="1" dirty="0">
-                <a:solidFill>
-                  <a:srgbClr val="F2EEE8"/>
+          <p:cNvPr id="25" name="Text 19"/>
+          <p:cNvSpPr txBox="1"/>
+          <p:nvPr/>
+        </p:nvSpPr>
+        <p:spPr>
+          <a:xfrm>
+            <a:off x="1280160" y="3703320"/>
+            <a:ext cx="7223760" cy="777240"/>
+          </a:xfrm>
+          <a:prstGeom prst="rect">
+            <a:avLst/>
+          </a:prstGeom>
+          <a:noFill/>
+          <a:ln/>
+        </p:spPr>
+        <p:txBody>
+          <a:bodyPr wrap="square" lIns="0" tIns="0" rIns="0" bIns="0" rtlCol="0" anchor="ctr"/>
+          <a:lstStyle/>
+          <a:p>
+            <a:pPr indent="0" marL="0">
+              <a:buNone/>
+            </a:pPr>
+            <a:r>
+              <a:rPr lang="en-US" sz="1300" b="1" dirty="0">
+                <a:solidFill>
+                  <a:srgbClr val="E0A84A"/>
                 </a:solidFill>
                 <a:latin typeface="Calibri" pitchFamily="34" charset="0"/>
                 <a:ea typeface="Calibri" pitchFamily="34" charset="-122"/>
                 <a:cs typeface="Calibri" pitchFamily="34" charset="-120"/>
               </a:rPr>
-              <a:t>La caché domina el consumo</a:t>
-            </a:r>
-            <a:endParaRPr lang="en-US" sz="1700" dirty="0"/>
-          </a:p>
-        </p:txBody>
-      </p:sp>
-      <p:sp>
-        <p:nvSpPr>
-          <p:cNvPr id="15" name="Text 9"/>
-          <p:cNvSpPr txBox="1"/>
-          <p:nvPr/>
-        </p:nvSpPr>
-        <p:spPr>
-          <a:xfrm>
-            <a:off x="1371600" y="3977640"/>
-            <a:ext cx="4389120" cy="548640"/>
-          </a:xfrm>
-          <a:prstGeom prst="rect">
-            <a:avLst/>
-          </a:prstGeom>
-          <a:noFill/>
-          <a:ln/>
-        </p:spPr>
-        <p:txBody>
-          <a:bodyPr wrap="square" lIns="0" tIns="0" rIns="0" bIns="0" rtlCol="0" anchor="t"/>
-          <a:lstStyle/>
-          <a:p>
+              <a:t>Lo que no se hizo: </a:t>
+            </a:r>
             <a:pPr indent="0" marL="0">
               <a:buNone/>
             </a:pPr>
             <a:r>
               <a:rPr lang="en-US" sz="1300" dirty="0">
                 <a:solidFill>
-                  <a:srgbClr val="D9D4CC"/>
+                  <a:srgbClr val="F2EEE8"/>
                 </a:solidFill>
                 <a:latin typeface="Calibri" pitchFamily="34" charset="0"/>
                 <a:ea typeface="Calibri" pitchFamily="34" charset="-122"/>
                 <a:cs typeface="Calibri" pitchFamily="34" charset="-120"/>
               </a:rPr>
-              <a:t>≈ 335 M de tokens leídos de caché, que se cobran mucho más barato.</a:t>
+              <a:t>vídeo en 4K con 1024 muestras, que el PRD pedía (≈ 190 h en este equipo). Se entregó a 1080p con 96 muestras.</a:t>
             </a:r>
             <a:endParaRPr lang="en-US" sz="1300" dirty="0"/>
+          </a:p>
+        </p:txBody>
+      </p:sp>
+    </p:spTree>
+  </p:cSld>
+  <p:clrMapOvr>
+    <a:masterClrMapping/>
+  </p:clrMapOvr>
+</p:sld>
+</file>
+
+<file path=ppt/slides/slide9.xml><?xml version="1.0" encoding="utf-8"?>
+<p:sld xmlns:a="http://schemas.openxmlformats.org/drawingml/2006/main" xmlns:r="http://schemas.openxmlformats.org/officeDocument/2006/relationships" xmlns:p="http://schemas.openxmlformats.org/presentationml/2006/main">
+  <p:cSld name="Slide 9">
+    <p:bg>
+      <p:bgPr>
+        <a:solidFill>
+          <a:srgbClr val="12100E"/>
+        </a:solidFill>
+      </p:bgPr>
+    </p:bg>
+    <p:spTree>
+      <p:nvGrpSpPr>
+        <p:cNvPr id="1" name=""/>
+        <p:cNvGrpSpPr/>
+        <p:nvPr/>
+      </p:nvGrpSpPr>
+      <p:grpSpPr>
+        <a:xfrm>
+          <a:off x="0" y="0"/>
+          <a:ext cx="0" cy="0"/>
+          <a:chOff x="0" y="0"/>
+          <a:chExt cx="0" cy="0"/>
+        </a:xfrm>
+      </p:grpSpPr>
+      <p:sp>
+        <p:nvSpPr>
+          <p:cNvPr id="2" name="Text 0"/>
+          <p:cNvSpPr txBox="1"/>
+          <p:nvPr/>
+        </p:nvSpPr>
+        <p:spPr>
+          <a:xfrm>
+            <a:off x="457200" y="320040"/>
+            <a:ext cx="8229600" cy="640080"/>
+          </a:xfrm>
+          <a:prstGeom prst="rect">
+            <a:avLst/>
+          </a:prstGeom>
+          <a:noFill/>
+          <a:ln/>
+        </p:spPr>
+        <p:txBody>
+          <a:bodyPr wrap="square" lIns="0" tIns="0" rIns="0" bIns="0" rtlCol="0" anchor="ctr"/>
+          <a:lstStyle/>
+          <a:p>
+            <a:pPr indent="0" marL="0">
+              <a:buNone/>
+            </a:pPr>
+            <a:r>
+              <a:rPr lang="en-US" sz="3400" b="1" dirty="0">
+                <a:solidFill>
+                  <a:srgbClr val="F2EEE8"/>
+                </a:solidFill>
+                <a:latin typeface="Cambria" pitchFamily="34" charset="0"/>
+                <a:ea typeface="Cambria" pitchFamily="34" charset="-122"/>
+                <a:cs typeface="Cambria" pitchFamily="34" charset="-120"/>
+              </a:rPr>
+              <a:t>Tiempo invertido</a:t>
+            </a:r>
+            <a:endParaRPr lang="en-US" sz="3400" dirty="0"/>
+          </a:p>
+        </p:txBody>
+      </p:sp>
+      <p:sp>
+        <p:nvSpPr>
+          <p:cNvPr id="3" name="Text 1"/>
+          <p:cNvSpPr txBox="1"/>
+          <p:nvPr/>
+        </p:nvSpPr>
+        <p:spPr>
+          <a:xfrm>
+            <a:off x="457200" y="960120"/>
+            <a:ext cx="8229600" cy="365760"/>
+          </a:xfrm>
+          <a:prstGeom prst="rect">
+            <a:avLst/>
+          </a:prstGeom>
+          <a:noFill/>
+          <a:ln/>
+        </p:spPr>
+        <p:txBody>
+          <a:bodyPr wrap="square" lIns="0" tIns="0" rIns="0" bIns="0" rtlCol="0" anchor="ctr"/>
+          <a:lstStyle/>
+          <a:p>
+            <a:pPr indent="0" marL="0">
+              <a:buNone/>
+            </a:pPr>
+            <a:r>
+              <a:rPr lang="en-US" sz="1600" dirty="0">
+                <a:solidFill>
+                  <a:srgbClr val="A39B90"/>
+                </a:solidFill>
+                <a:latin typeface="Calibri" pitchFamily="34" charset="0"/>
+                <a:ea typeface="Calibri" pitchFamily="34" charset="-122"/>
+                <a:cs typeface="Calibri" pitchFamily="34" charset="-120"/>
+              </a:rPr>
+              <a:t>50 h de reloj, pero solo ≈ 24 h de actividad y renders</a:t>
+            </a:r>
+            <a:endParaRPr lang="en-US" sz="1600" dirty="0"/>
+          </a:p>
+        </p:txBody>
+      </p:sp>
+      <p:graphicFrame>
+        <p:nvGraphicFramePr>
+          <p:cNvPr id="4" name="Chart 0" descr=""/>
+          <p:cNvGraphicFramePr/>
+          <p:nvPr/>
+        </p:nvGraphicFramePr>
+        <p:xfrm>
+          <a:off x="274320" y="1417320"/>
+          <a:ext cx="4206240" cy="3063240"/>
+        </p:xfrm>
+        <a:graphic xmlns:a="http://schemas.openxmlformats.org/drawingml/2006/main">
+          <a:graphicData uri="http://schemas.openxmlformats.org/drawingml/2006/chart">
+            <c:chart xmlns:c="http://schemas.openxmlformats.org/drawingml/2006/chart" r:id="rId1"/>
+          </a:graphicData>
+        </a:graphic>
+      </p:graphicFrame>
+      <p:sp>
+        <p:nvSpPr>
+          <p:cNvPr id="5" name="Shape 2"/>
+          <p:cNvSpPr/>
+          <p:nvPr/>
+        </p:nvSpPr>
+        <p:spPr>
+          <a:xfrm>
+            <a:off x="4754880" y="1463040"/>
+            <a:ext cx="3931920" cy="713232"/>
+          </a:xfrm>
+          <a:prstGeom prst="rect">
+            <a:avLst/>
+          </a:prstGeom>
+          <a:solidFill>
+            <a:srgbClr val="221F1B"/>
+          </a:solidFill>
+          <a:ln w="12700">
+            <a:solidFill>
+              <a:srgbClr val="221F1B"/>
+            </a:solidFill>
+            <a:prstDash val="solid"/>
+          </a:ln>
+        </p:spPr>
+      </p:sp>
+      <p:sp>
+        <p:nvSpPr>
+          <p:cNvPr id="6" name="Shape 3"/>
+          <p:cNvSpPr/>
+          <p:nvPr/>
+        </p:nvSpPr>
+        <p:spPr>
+          <a:xfrm>
+            <a:off x="4892040" y="1591056"/>
+            <a:ext cx="457200" cy="457200"/>
+          </a:xfrm>
+          <a:prstGeom prst="ellipse">
+            <a:avLst/>
+          </a:prstGeom>
+          <a:solidFill>
+            <a:srgbClr val="FFFFFF"/>
+          </a:solidFill>
+          <a:ln w="12700">
+            <a:solidFill>
+              <a:srgbClr val="FFFFFF"/>
+            </a:solidFill>
+            <a:prstDash val="solid"/>
+          </a:ln>
+        </p:spPr>
+      </p:sp>
+      <p:pic>
+        <p:nvPicPr>
+          <p:cNvPr id="7" name="Image 0" descr="preencoded.png">    </p:cNvPr>
+          <p:cNvPicPr>
+            <a:picLocks noChangeAspect="1"/>
+          </p:cNvPicPr>
+          <p:nvPr/>
+        </p:nvPicPr>
+        <p:blipFill>
+          <a:blip r:embed="rId2"/>
+          <a:stretch>
+            <a:fillRect/>
+          </a:stretch>
+        </p:blipFill>
+        <p:spPr>
+          <a:xfrm>
+            <a:off x="5015484" y="1714500"/>
+            <a:ext cx="210312" cy="210312"/>
+          </a:xfrm>
+          <a:prstGeom prst="rect">
+            <a:avLst/>
+          </a:prstGeom>
+        </p:spPr>
+      </p:pic>
+      <p:sp>
+        <p:nvSpPr>
+          <p:cNvPr id="8" name="Text 4"/>
+          <p:cNvSpPr txBox="1"/>
+          <p:nvPr/>
+        </p:nvSpPr>
+        <p:spPr>
+          <a:xfrm>
+            <a:off x="5440680" y="1463040"/>
+            <a:ext cx="1600200" cy="713232"/>
+          </a:xfrm>
+          <a:prstGeom prst="rect">
+            <a:avLst/>
+          </a:prstGeom>
+          <a:noFill/>
+          <a:ln/>
+        </p:spPr>
+        <p:txBody>
+          <a:bodyPr wrap="square" lIns="0" tIns="0" rIns="0" bIns="0" rtlCol="0" anchor="ctr"/>
+          <a:lstStyle/>
+          <a:p>
+            <a:pPr indent="0" marL="0">
+              <a:buNone/>
+            </a:pPr>
+            <a:r>
+              <a:rPr lang="en-US" sz="2000" b="1" dirty="0">
+                <a:solidFill>
+                  <a:srgbClr val="F2EEE8"/>
+                </a:solidFill>
+                <a:latin typeface="Cambria" pitchFamily="34" charset="0"/>
+                <a:ea typeface="Cambria" pitchFamily="34" charset="-122"/>
+                <a:cs typeface="Cambria" pitchFamily="34" charset="-120"/>
+              </a:rPr>
+              <a:t>50 h</a:t>
+            </a:r>
+            <a:endParaRPr lang="en-US" sz="2000" dirty="0"/>
+          </a:p>
+        </p:txBody>
+      </p:sp>
+      <p:sp>
+        <p:nvSpPr>
+          <p:cNvPr id="9" name="Text 5"/>
+          <p:cNvSpPr txBox="1"/>
+          <p:nvPr/>
+        </p:nvSpPr>
+        <p:spPr>
+          <a:xfrm>
+            <a:off x="7086600" y="1463040"/>
+            <a:ext cx="1554480" cy="713232"/>
+          </a:xfrm>
+          <a:prstGeom prst="rect">
+            <a:avLst/>
+          </a:prstGeom>
+          <a:noFill/>
+          <a:ln/>
+        </p:spPr>
+        <p:txBody>
+          <a:bodyPr wrap="square" lIns="0" tIns="0" rIns="0" bIns="0" rtlCol="0" anchor="ctr"/>
+          <a:lstStyle/>
+          <a:p>
+            <a:pPr indent="0" marL="0">
+              <a:buNone/>
+            </a:pPr>
+            <a:r>
+              <a:rPr lang="en-US" sz="1100" b="1" dirty="0">
+                <a:solidFill>
+                  <a:srgbClr val="F2EEE8"/>
+                </a:solidFill>
+                <a:latin typeface="Calibri" pitchFamily="34" charset="0"/>
+                <a:ea typeface="Calibri" pitchFamily="34" charset="-122"/>
+                <a:cs typeface="Calibri" pitchFamily="34" charset="-120"/>
+              </a:rPr>
+              <a:t>Reloj total</a:t>
+            </a:r>
+            <a:endParaRPr lang="en-US" sz="1100" dirty="0"/>
+          </a:p>
+          <a:p>
+            <a:pPr indent="0" marL="0">
+              <a:buNone/>
+            </a:pPr>
+            <a:r>
+              <a:rPr lang="en-US" sz="1100" dirty="0">
+                <a:solidFill>
+                  <a:srgbClr val="A39B90"/>
+                </a:solidFill>
+                <a:latin typeface="Calibri" pitchFamily="34" charset="0"/>
+                <a:ea typeface="Calibri" pitchFamily="34" charset="-122"/>
+                <a:cs typeface="Calibri" pitchFamily="34" charset="-120"/>
+              </a:rPr>
+              <a:t>28/09 16:16 → 30/09 18:26</a:t>
+            </a:r>
+            <a:endParaRPr lang="en-US" sz="1100" dirty="0"/>
+          </a:p>
+        </p:txBody>
+      </p:sp>
+      <p:sp>
+        <p:nvSpPr>
+          <p:cNvPr id="10" name="Shape 6"/>
+          <p:cNvSpPr/>
+          <p:nvPr/>
+        </p:nvSpPr>
+        <p:spPr>
+          <a:xfrm>
+            <a:off x="4754880" y="2286000"/>
+            <a:ext cx="3931920" cy="713232"/>
+          </a:xfrm>
+          <a:prstGeom prst="rect">
+            <a:avLst/>
+          </a:prstGeom>
+          <a:solidFill>
+            <a:srgbClr val="221F1B"/>
+          </a:solidFill>
+          <a:ln w="12700">
+            <a:solidFill>
+              <a:srgbClr val="221F1B"/>
+            </a:solidFill>
+            <a:prstDash val="solid"/>
+          </a:ln>
+        </p:spPr>
+      </p:sp>
+      <p:sp>
+        <p:nvSpPr>
+          <p:cNvPr id="11" name="Shape 7"/>
+          <p:cNvSpPr/>
+          <p:nvPr/>
+        </p:nvSpPr>
+        <p:spPr>
+          <a:xfrm>
+            <a:off x="4892040" y="2414016"/>
+            <a:ext cx="457200" cy="457200"/>
+          </a:xfrm>
+          <a:prstGeom prst="ellipse">
+            <a:avLst/>
+          </a:prstGeom>
+          <a:solidFill>
+            <a:srgbClr val="5B9BFF"/>
+          </a:solidFill>
+          <a:ln w="12700">
+            <a:solidFill>
+              <a:srgbClr val="5B9BFF"/>
+            </a:solidFill>
+            <a:prstDash val="solid"/>
+          </a:ln>
+        </p:spPr>
+      </p:sp>
+      <p:pic>
+        <p:nvPicPr>
+          <p:cNvPr id="12" name="Image 1" descr="preencoded.png">    </p:cNvPr>
+          <p:cNvPicPr>
+            <a:picLocks noChangeAspect="1"/>
+          </p:cNvPicPr>
+          <p:nvPr/>
+        </p:nvPicPr>
+        <p:blipFill>
+          <a:blip r:embed="rId3"/>
+          <a:stretch>
+            <a:fillRect/>
+          </a:stretch>
+        </p:blipFill>
+        <p:spPr>
+          <a:xfrm>
+            <a:off x="5015484" y="2537460"/>
+            <a:ext cx="210312" cy="210312"/>
+          </a:xfrm>
+          <a:prstGeom prst="rect">
+            <a:avLst/>
+          </a:prstGeom>
+        </p:spPr>
+      </p:pic>
+      <p:sp>
+        <p:nvSpPr>
+          <p:cNvPr id="13" name="Text 8"/>
+          <p:cNvSpPr txBox="1"/>
+          <p:nvPr/>
+        </p:nvSpPr>
+        <p:spPr>
+          <a:xfrm>
+            <a:off x="5440680" y="2286000"/>
+            <a:ext cx="1600200" cy="713232"/>
+          </a:xfrm>
+          <a:prstGeom prst="rect">
+            <a:avLst/>
+          </a:prstGeom>
+          <a:noFill/>
+          <a:ln/>
+        </p:spPr>
+        <p:txBody>
+          <a:bodyPr wrap="square" lIns="0" tIns="0" rIns="0" bIns="0" rtlCol="0" anchor="ctr"/>
+          <a:lstStyle/>
+          <a:p>
+            <a:pPr indent="0" marL="0">
+              <a:buNone/>
+            </a:pPr>
+            <a:r>
+              <a:rPr lang="en-US" sz="2000" b="1" dirty="0">
+                <a:solidFill>
+                  <a:srgbClr val="F2EEE8"/>
+                </a:solidFill>
+                <a:latin typeface="Cambria" pitchFamily="34" charset="0"/>
+                <a:ea typeface="Cambria" pitchFamily="34" charset="-122"/>
+                <a:cs typeface="Cambria" pitchFamily="34" charset="-120"/>
+              </a:rPr>
+              <a:t>≈ 9 h</a:t>
+            </a:r>
+            <a:endParaRPr lang="en-US" sz="2000" dirty="0"/>
+          </a:p>
+        </p:txBody>
+      </p:sp>
+      <p:sp>
+        <p:nvSpPr>
+          <p:cNvPr id="14" name="Text 9"/>
+          <p:cNvSpPr txBox="1"/>
+          <p:nvPr/>
+        </p:nvSpPr>
+        <p:spPr>
+          <a:xfrm>
+            <a:off x="7086600" y="2286000"/>
+            <a:ext cx="1554480" cy="713232"/>
+          </a:xfrm>
+          <a:prstGeom prst="rect">
+            <a:avLst/>
+          </a:prstGeom>
+          <a:noFill/>
+          <a:ln/>
+        </p:spPr>
+        <p:txBody>
+          <a:bodyPr wrap="square" lIns="0" tIns="0" rIns="0" bIns="0" rtlCol="0" anchor="ctr"/>
+          <a:lstStyle/>
+          <a:p>
+            <a:pPr indent="0" marL="0">
+              <a:buNone/>
+            </a:pPr>
+            <a:r>
+              <a:rPr lang="en-US" sz="1100" b="1" dirty="0">
+                <a:solidFill>
+                  <a:srgbClr val="F2EEE8"/>
+                </a:solidFill>
+                <a:latin typeface="Calibri" pitchFamily="34" charset="0"/>
+                <a:ea typeface="Calibri" pitchFamily="34" charset="-122"/>
+                <a:cs typeface="Calibri" pitchFamily="34" charset="-120"/>
+              </a:rPr>
+              <a:t>Trabajo activo</a:t>
+            </a:r>
+            <a:endParaRPr lang="en-US" sz="1100" dirty="0"/>
+          </a:p>
+          <a:p>
+            <a:pPr indent="0" marL="0">
+              <a:buNone/>
+            </a:pPr>
+            <a:r>
+              <a:rPr lang="en-US" sz="1100" dirty="0">
+                <a:solidFill>
+                  <a:srgbClr val="A39B90"/>
+                </a:solidFill>
+                <a:latin typeface="Calibri" pitchFamily="34" charset="0"/>
+                <a:ea typeface="Calibri" pitchFamily="34" charset="-122"/>
+                <a:cs typeface="Calibri" pitchFamily="34" charset="-120"/>
+              </a:rPr>
+              <a:t>de Claude, sin renders</a:t>
+            </a:r>
+            <a:endParaRPr lang="en-US" sz="1100" dirty="0"/>
+          </a:p>
+        </p:txBody>
+      </p:sp>
+      <p:sp>
+        <p:nvSpPr>
+          <p:cNvPr id="15" name="Shape 10"/>
+          <p:cNvSpPr/>
+          <p:nvPr/>
+        </p:nvSpPr>
+        <p:spPr>
+          <a:xfrm>
+            <a:off x="4754880" y="3108960"/>
+            <a:ext cx="3931920" cy="713232"/>
+          </a:xfrm>
+          <a:prstGeom prst="rect">
+            <a:avLst/>
+          </a:prstGeom>
+          <a:solidFill>
+            <a:srgbClr val="221F1B"/>
+          </a:solidFill>
+          <a:ln w="12700">
+            <a:solidFill>
+              <a:srgbClr val="221F1B"/>
+            </a:solidFill>
+            <a:prstDash val="solid"/>
+          </a:ln>
+        </p:spPr>
+      </p:sp>
+      <p:sp>
+        <p:nvSpPr>
+          <p:cNvPr id="16" name="Shape 11"/>
+          <p:cNvSpPr/>
+          <p:nvPr/>
+        </p:nvSpPr>
+        <p:spPr>
+          <a:xfrm>
+            <a:off x="4892040" y="3236976"/>
+            <a:ext cx="457200" cy="457200"/>
+          </a:xfrm>
+          <a:prstGeom prst="ellipse">
+            <a:avLst/>
+          </a:prstGeom>
+          <a:solidFill>
+            <a:srgbClr val="4CAF50"/>
+          </a:solidFill>
+          <a:ln w="12700">
+            <a:solidFill>
+              <a:srgbClr val="4CAF50"/>
+            </a:solidFill>
+            <a:prstDash val="solid"/>
+          </a:ln>
+        </p:spPr>
+      </p:sp>
+      <p:pic>
+        <p:nvPicPr>
+          <p:cNvPr id="17" name="Image 2" descr="preencoded.png">    </p:cNvPr>
+          <p:cNvPicPr>
+            <a:picLocks noChangeAspect="1"/>
+          </p:cNvPicPr>
+          <p:nvPr/>
+        </p:nvPicPr>
+        <p:blipFill>
+          <a:blip r:embed="rId4"/>
+          <a:stretch>
+            <a:fillRect/>
+          </a:stretch>
+        </p:blipFill>
+        <p:spPr>
+          <a:xfrm>
+            <a:off x="5015484" y="3360420"/>
+            <a:ext cx="210312" cy="210312"/>
+          </a:xfrm>
+          <a:prstGeom prst="rect">
+            <a:avLst/>
+          </a:prstGeom>
+        </p:spPr>
+      </p:pic>
+      <p:sp>
+        <p:nvSpPr>
+          <p:cNvPr id="18" name="Text 12"/>
+          <p:cNvSpPr txBox="1"/>
+          <p:nvPr/>
+        </p:nvSpPr>
+        <p:spPr>
+          <a:xfrm>
+            <a:off x="5440680" y="3108960"/>
+            <a:ext cx="1600200" cy="713232"/>
+          </a:xfrm>
+          <a:prstGeom prst="rect">
+            <a:avLst/>
+          </a:prstGeom>
+          <a:noFill/>
+          <a:ln/>
+        </p:spPr>
+        <p:txBody>
+          <a:bodyPr wrap="square" lIns="0" tIns="0" rIns="0" bIns="0" rtlCol="0" anchor="ctr"/>
+          <a:lstStyle/>
+          <a:p>
+            <a:pPr indent="0" marL="0">
+              <a:buNone/>
+            </a:pPr>
+            <a:r>
+              <a:rPr lang="en-US" sz="2000" b="1" dirty="0">
+                <a:solidFill>
+                  <a:srgbClr val="F2EEE8"/>
+                </a:solidFill>
+                <a:latin typeface="Cambria" pitchFamily="34" charset="0"/>
+                <a:ea typeface="Cambria" pitchFamily="34" charset="-122"/>
+                <a:cs typeface="Cambria" pitchFamily="34" charset="-120"/>
+              </a:rPr>
+              <a:t>≈ 14–15 h</a:t>
+            </a:r>
+            <a:endParaRPr lang="en-US" sz="2000" dirty="0"/>
+          </a:p>
+        </p:txBody>
+      </p:sp>
+      <p:sp>
+        <p:nvSpPr>
+          <p:cNvPr id="19" name="Text 13"/>
+          <p:cNvSpPr txBox="1"/>
+          <p:nvPr/>
+        </p:nvSpPr>
+        <p:spPr>
+          <a:xfrm>
+            <a:off x="7086600" y="3108960"/>
+            <a:ext cx="1554480" cy="713232"/>
+          </a:xfrm>
+          <a:prstGeom prst="rect">
+            <a:avLst/>
+          </a:prstGeom>
+          <a:noFill/>
+          <a:ln/>
+        </p:spPr>
+        <p:txBody>
+          <a:bodyPr wrap="square" lIns="0" tIns="0" rIns="0" bIns="0" rtlCol="0" anchor="ctr"/>
+          <a:lstStyle/>
+          <a:p>
+            <a:pPr indent="0" marL="0">
+              <a:buNone/>
+            </a:pPr>
+            <a:r>
+              <a:rPr lang="en-US" sz="1100" b="1" dirty="0">
+                <a:solidFill>
+                  <a:srgbClr val="F2EEE8"/>
+                </a:solidFill>
+                <a:latin typeface="Calibri" pitchFamily="34" charset="0"/>
+                <a:ea typeface="Calibri" pitchFamily="34" charset="-122"/>
+                <a:cs typeface="Calibri" pitchFamily="34" charset="-120"/>
+              </a:rPr>
+              <a:t>Renders</a:t>
+            </a:r>
+            <a:endParaRPr lang="en-US" sz="1100" dirty="0"/>
+          </a:p>
+          <a:p>
+            <a:pPr indent="0" marL="0">
+              <a:buNone/>
+            </a:pPr>
+            <a:r>
+              <a:rPr lang="en-US" sz="1100" dirty="0">
+                <a:solidFill>
+                  <a:srgbClr val="A39B90"/>
+                </a:solidFill>
+                <a:latin typeface="Calibri" pitchFamily="34" charset="0"/>
+                <a:ea typeface="Calibri" pitchFamily="34" charset="-122"/>
+                <a:cs typeface="Calibri" pitchFamily="34" charset="-120"/>
+              </a:rPr>
+              <a:t>espera de la máquina</a:t>
+            </a:r>
+            <a:endParaRPr lang="en-US" sz="1100" dirty="0"/>
+          </a:p>
+        </p:txBody>
+      </p:sp>
+      <p:sp>
+        <p:nvSpPr>
+          <p:cNvPr id="20" name="Shape 14"/>
+          <p:cNvSpPr/>
+          <p:nvPr/>
+        </p:nvSpPr>
+        <p:spPr>
+          <a:xfrm>
+            <a:off x="4754880" y="3931920"/>
+            <a:ext cx="3931920" cy="713232"/>
+          </a:xfrm>
+          <a:prstGeom prst="rect">
+            <a:avLst/>
+          </a:prstGeom>
+          <a:solidFill>
+            <a:srgbClr val="221F1B"/>
+          </a:solidFill>
+          <a:ln w="12700">
+            <a:solidFill>
+              <a:srgbClr val="221F1B"/>
+            </a:solidFill>
+            <a:prstDash val="solid"/>
+          </a:ln>
+        </p:spPr>
+      </p:sp>
+      <p:sp>
+        <p:nvSpPr>
+          <p:cNvPr id="21" name="Shape 15"/>
+          <p:cNvSpPr/>
+          <p:nvPr/>
+        </p:nvSpPr>
+        <p:spPr>
+          <a:xfrm>
+            <a:off x="4892040" y="4059936"/>
+            <a:ext cx="457200" cy="457200"/>
+          </a:xfrm>
+          <a:prstGeom prst="ellipse">
+            <a:avLst/>
+          </a:prstGeom>
+          <a:solidFill>
+            <a:srgbClr val="E0A84A"/>
+          </a:solidFill>
+          <a:ln w="12700">
+            <a:solidFill>
+              <a:srgbClr val="E0A84A"/>
+            </a:solidFill>
+            <a:prstDash val="solid"/>
+          </a:ln>
+        </p:spPr>
+      </p:sp>
+      <p:pic>
+        <p:nvPicPr>
+          <p:cNvPr id="22" name="Image 3" descr="preencoded.png">    </p:cNvPr>
+          <p:cNvPicPr>
+            <a:picLocks noChangeAspect="1"/>
+          </p:cNvPicPr>
+          <p:nvPr/>
+        </p:nvPicPr>
+        <p:blipFill>
+          <a:blip r:embed="rId5"/>
+          <a:stretch>
+            <a:fillRect/>
+          </a:stretch>
+        </p:blipFill>
+        <p:spPr>
+          <a:xfrm>
+            <a:off x="5015484" y="4183380"/>
+            <a:ext cx="210312" cy="210312"/>
+          </a:xfrm>
+          <a:prstGeom prst="rect">
+            <a:avLst/>
+          </a:prstGeom>
+        </p:spPr>
+      </p:pic>
+      <p:sp>
+        <p:nvSpPr>
+          <p:cNvPr id="23" name="Text 16"/>
+          <p:cNvSpPr txBox="1"/>
+          <p:nvPr/>
+        </p:nvSpPr>
+        <p:spPr>
+          <a:xfrm>
+            <a:off x="5440680" y="3931920"/>
+            <a:ext cx="1600200" cy="713232"/>
+          </a:xfrm>
+          <a:prstGeom prst="rect">
+            <a:avLst/>
+          </a:prstGeom>
+          <a:noFill/>
+          <a:ln/>
+        </p:spPr>
+        <p:txBody>
+          <a:bodyPr wrap="square" lIns="0" tIns="0" rIns="0" bIns="0" rtlCol="0" anchor="ctr"/>
+          <a:lstStyle/>
+          <a:p>
+            <a:pPr indent="0" marL="0">
+              <a:buNone/>
+            </a:pPr>
+            <a:r>
+              <a:rPr lang="en-US" sz="2000" b="1" dirty="0">
+                <a:solidFill>
+                  <a:srgbClr val="F2EEE8"/>
+                </a:solidFill>
+                <a:latin typeface="Cambria" pitchFamily="34" charset="0"/>
+                <a:ea typeface="Cambria" pitchFamily="34" charset="-122"/>
+                <a:cs typeface="Cambria" pitchFamily="34" charset="-120"/>
+              </a:rPr>
+              <a:t>≈ 24 h</a:t>
+            </a:r>
+            <a:endParaRPr lang="en-US" sz="2000" dirty="0"/>
+          </a:p>
+        </p:txBody>
+      </p:sp>
+      <p:sp>
+        <p:nvSpPr>
+          <p:cNvPr id="24" name="Text 17"/>
+          <p:cNvSpPr txBox="1"/>
+          <p:nvPr/>
+        </p:nvSpPr>
+        <p:spPr>
+          <a:xfrm>
+            <a:off x="7086600" y="3931920"/>
+            <a:ext cx="1554480" cy="713232"/>
+          </a:xfrm>
+          <a:prstGeom prst="rect">
+            <a:avLst/>
+          </a:prstGeom>
+          <a:noFill/>
+          <a:ln/>
+        </p:spPr>
+        <p:txBody>
+          <a:bodyPr wrap="square" lIns="0" tIns="0" rIns="0" bIns="0" rtlCol="0" anchor="ctr"/>
+          <a:lstStyle/>
+          <a:p>
+            <a:pPr indent="0" marL="0">
+              <a:buNone/>
+            </a:pPr>
+            <a:r>
+              <a:rPr lang="en-US" sz="1100" b="1" dirty="0">
+                <a:solidFill>
+                  <a:srgbClr val="F2EEE8"/>
+                </a:solidFill>
+                <a:latin typeface="Calibri" pitchFamily="34" charset="0"/>
+                <a:ea typeface="Calibri" pitchFamily="34" charset="-122"/>
+                <a:cs typeface="Calibri" pitchFamily="34" charset="-120"/>
+              </a:rPr>
+              <a:t>Actividad + renders</a:t>
+            </a:r>
+            <a:endParaRPr lang="en-US" sz="1100" dirty="0"/>
+          </a:p>
+          <a:p>
+            <a:pPr indent="0" marL="0">
+              <a:buNone/>
+            </a:pPr>
+            <a:r>
+              <a:rPr lang="en-US" sz="1100" dirty="0">
+                <a:solidFill>
+                  <a:srgbClr val="A39B90"/>
+                </a:solidFill>
+                <a:latin typeface="Calibri" pitchFamily="34" charset="0"/>
+                <a:ea typeface="Calibri" pitchFamily="34" charset="-122"/>
+                <a:cs typeface="Calibri" pitchFamily="34" charset="-120"/>
+              </a:rPr>
+              <a:t>50 h − 26 h sin actividad</a:t>
+            </a:r>
+            <a:endParaRPr lang="en-US" sz="1100" dirty="0"/>
+          </a:p>
+        </p:txBody>
+      </p:sp>
+      <p:sp>
+        <p:nvSpPr>
+          <p:cNvPr id="25" name="Text 18"/>
+          <p:cNvSpPr txBox="1"/>
+          <p:nvPr/>
+        </p:nvSpPr>
+        <p:spPr>
+          <a:xfrm>
+            <a:off x="457200" y="4526280"/>
+            <a:ext cx="4114800" cy="320040"/>
+          </a:xfrm>
+          <a:prstGeom prst="rect">
+            <a:avLst/>
+          </a:prstGeom>
+          <a:noFill/>
+          <a:ln/>
+        </p:spPr>
+        <p:txBody>
+          <a:bodyPr wrap="square" lIns="0" tIns="0" rIns="0" bIns="0" rtlCol="0" anchor="ctr"/>
+          <a:lstStyle/>
+          <a:p>
+            <a:pPr indent="0" marL="0">
+              <a:buNone/>
+            </a:pPr>
+            <a:r>
+              <a:rPr lang="en-US" sz="1000" dirty="0">
+                <a:solidFill>
+                  <a:srgbClr val="A39B90"/>
+                </a:solidFill>
+                <a:latin typeface="Calibri" pitchFamily="34" charset="0"/>
+                <a:ea typeface="Calibri" pitchFamily="34" charset="-122"/>
+                <a:cs typeface="Calibri" pitchFamily="34" charset="-120"/>
+              </a:rPr>
+              <a:t>El gráfico usa 15 h para los renders (rango medido: 14–15 h).</a:t>
+            </a:r>
+            <a:endParaRPr lang="en-US" sz="1000" dirty="0"/>
           </a:p>
         </p:txBody>
       </p:sp>
